--- a/에너지경제학/자원에너지경제학_Chapter_3 (가스).pptx
+++ b/에너지경제학/자원에너지경제학_Chapter_3 (가스).pptx
@@ -229,7 +229,7 @@
           <a:p>
             <a:fld id="{4A5E00EF-AEA4-43E2-9451-8F9C59A39471}" type="datetimeFigureOut">
               <a:rPr lang="ko-KR" altLang="en-US" smtClean="0"/>
-              <a:t>2026-05-22</a:t>
+              <a:t>2026-05-28</a:t>
             </a:fld>
             <a:endParaRPr lang="ko-KR" altLang="en-US"/>
           </a:p>
@@ -651,7 +651,7 @@
           <a:p>
             <a:fld id="{CD32C56F-BD27-4999-9E6D-D4EACE3DA9F4}" type="datetime1">
               <a:rPr lang="ko-KR" altLang="en-US" smtClean="0"/>
-              <a:t>2026-05-22</a:t>
+              <a:t>2026-05-28</a:t>
             </a:fld>
             <a:endParaRPr lang="ko-KR" altLang="en-US"/>
           </a:p>
@@ -865,7 +865,7 @@
           <a:p>
             <a:fld id="{8EF4A19C-72C8-45CA-8E3F-68A7FA345D6C}" type="datetime1">
               <a:rPr lang="ko-KR" altLang="en-US" smtClean="0"/>
-              <a:t>2026-05-22</a:t>
+              <a:t>2026-05-28</a:t>
             </a:fld>
             <a:endParaRPr lang="ko-KR" altLang="en-US"/>
           </a:p>
@@ -1089,7 +1089,7 @@
           <a:p>
             <a:fld id="{56A175B2-010B-4341-954C-5F8F5C70B124}" type="datetime1">
               <a:rPr lang="ko-KR" altLang="en-US" smtClean="0"/>
-              <a:t>2026-05-22</a:t>
+              <a:t>2026-05-28</a:t>
             </a:fld>
             <a:endParaRPr lang="ko-KR" altLang="en-US"/>
           </a:p>
@@ -1303,7 +1303,7 @@
           <a:p>
             <a:fld id="{16B83F9E-22C9-45CA-9E85-070F1D3EF530}" type="datetime1">
               <a:rPr lang="ko-KR" altLang="en-US" smtClean="0"/>
-              <a:t>2026-05-22</a:t>
+              <a:t>2026-05-28</a:t>
             </a:fld>
             <a:endParaRPr lang="ko-KR" altLang="en-US"/>
           </a:p>
@@ -1594,7 +1594,7 @@
           <a:p>
             <a:fld id="{03278F45-FB3C-4C4D-B89A-7BC3F5F229F6}" type="datetime1">
               <a:rPr lang="ko-KR" altLang="en-US" smtClean="0"/>
-              <a:t>2026-05-22</a:t>
+              <a:t>2026-05-28</a:t>
             </a:fld>
             <a:endParaRPr lang="ko-KR" altLang="en-US"/>
           </a:p>
@@ -1987,7 +1987,7 @@
           <a:p>
             <a:fld id="{38FDAC3C-35A6-415C-9F03-738A6AC328B1}" type="datetime1">
               <a:rPr lang="ko-KR" altLang="en-US" smtClean="0"/>
-              <a:t>2026-05-22</a:t>
+              <a:t>2026-05-28</a:t>
             </a:fld>
             <a:endParaRPr lang="ko-KR" altLang="en-US"/>
           </a:p>
@@ -3581,7 +3581,7 @@
           <a:p>
             <a:fld id="{507A0DF1-AEE6-4B0D-89D2-351E7B3EF65C}" type="datetime1">
               <a:rPr lang="ko-KR" altLang="en-US" smtClean="0"/>
-              <a:t>2026-05-22</a:t>
+              <a:t>2026-05-28</a:t>
             </a:fld>
             <a:endParaRPr lang="ko-KR" altLang="en-US"/>
           </a:p>
@@ -4009,7 +4009,7 @@
           <a:p>
             <a:fld id="{CA93B8C9-630F-4D57-944D-04FD37CECCD3}" type="datetime1">
               <a:rPr lang="ko-KR" altLang="en-US" smtClean="0"/>
-              <a:t>2026-05-22</a:t>
+              <a:t>2026-05-28</a:t>
             </a:fld>
             <a:endParaRPr lang="ko-KR" altLang="en-US"/>
           </a:p>
@@ -4166,7 +4166,7 @@
           <a:p>
             <a:fld id="{E986165A-AC43-4902-9541-874ECD310BA3}" type="datetime1">
               <a:rPr lang="ko-KR" altLang="en-US" smtClean="0"/>
-              <a:t>2026-05-22</a:t>
+              <a:t>2026-05-28</a:t>
             </a:fld>
             <a:endParaRPr lang="ko-KR" altLang="en-US"/>
           </a:p>
@@ -4493,7 +4493,7 @@
           <a:p>
             <a:fld id="{47E6EE6D-2B0E-43A9-87A2-7354CDB998F4}" type="datetime1">
               <a:rPr lang="ko-KR" altLang="en-US" smtClean="0"/>
-              <a:t>2026-05-22</a:t>
+              <a:t>2026-05-28</a:t>
             </a:fld>
             <a:endParaRPr lang="ko-KR" altLang="en-US"/>
           </a:p>
@@ -4797,7 +4797,7 @@
           <a:p>
             <a:fld id="{5CC5944E-0BC8-4FAA-9F94-6B4B05834E10}" type="datetime1">
               <a:rPr lang="ko-KR" altLang="en-US" smtClean="0"/>
-              <a:t>2026-05-22</a:t>
+              <a:t>2026-05-28</a:t>
             </a:fld>
             <a:endParaRPr lang="ko-KR" altLang="en-US"/>
           </a:p>
@@ -7326,7 +7326,7 @@
         <p:spPr>
           <a:xfrm>
             <a:off x="288790" y="958844"/>
-            <a:ext cx="11118453" cy="1152688"/>
+            <a:ext cx="11118453" cy="2999347"/>
           </a:xfrm>
           <a:prstGeom prst="rect">
             <a:avLst/>
@@ -7408,8 +7408,141 @@
               <a:t>환경적 특성과 활용 방식을 결정짓는 중요한 기준으로 작용한다</a:t>
             </a:r>
             <a:r>
-              <a:rPr lang="en-US" altLang="ko-KR" sz="1600"/>
+              <a:rPr lang="en-US" altLang="ko-KR" sz="1600" dirty="0"/>
               <a:t>.</a:t>
+            </a:r>
+          </a:p>
+          <a:p>
+            <a:pPr marL="377825" indent="-285750">
+              <a:lnSpc>
+                <a:spcPct val="150000"/>
+              </a:lnSpc>
+              <a:buFont typeface="Arial" panose="020B0604020202020204" pitchFamily="34" charset="0"/>
+              <a:buChar char="•"/>
+            </a:pPr>
+            <a:r>
+              <a:rPr lang="ko-KR" altLang="en-US" sz="1600"/>
+              <a:t>일반적인 </a:t>
+            </a:r>
+            <a:r>
+              <a:rPr lang="ko-KR" altLang="en-US" sz="1600" dirty="0"/>
+              <a:t>분류는 메탄의 순도와 고급 탄화수소 성분의 포함 여부에 따른 드라이</a:t>
+            </a:r>
+            <a:r>
+              <a:rPr lang="en-US" altLang="ko-KR" sz="1600" dirty="0"/>
+              <a:t>(dry)</a:t>
+            </a:r>
+            <a:r>
+              <a:rPr lang="ko-KR" altLang="en-US" sz="1600" dirty="0"/>
+              <a:t> 가스</a:t>
+            </a:r>
+            <a:r>
+              <a:rPr lang="en-US" altLang="ko-KR" sz="1600" dirty="0"/>
+              <a:t>, </a:t>
+            </a:r>
+            <a:r>
+              <a:rPr lang="ko-KR" altLang="en-US" sz="1600" dirty="0" err="1"/>
+              <a:t>웻</a:t>
+            </a:r>
+            <a:r>
+              <a:rPr lang="en-US" altLang="ko-KR" sz="1600" dirty="0"/>
+              <a:t>(wet)</a:t>
+            </a:r>
+            <a:r>
+              <a:rPr lang="ko-KR" altLang="en-US" sz="1600" dirty="0"/>
+              <a:t> 가스 의 구분이다</a:t>
+            </a:r>
+            <a:r>
+              <a:rPr lang="en-US" altLang="ko-KR" sz="1600" dirty="0"/>
+              <a:t>.</a:t>
+            </a:r>
+          </a:p>
+          <a:p>
+            <a:pPr marL="835025" lvl="1" indent="-285750">
+              <a:lnSpc>
+                <a:spcPct val="150000"/>
+              </a:lnSpc>
+              <a:buFont typeface="Wingdings" panose="05000000000000000000" pitchFamily="2" charset="2"/>
+              <a:buChar char="ü"/>
+            </a:pPr>
+            <a:r>
+              <a:rPr lang="ko-KR" altLang="en-US" sz="1600" dirty="0"/>
+              <a:t>드라이 가스는 메탄 비중이 약 </a:t>
+            </a:r>
+            <a:r>
+              <a:rPr lang="en-US" altLang="ko-KR" sz="1600" dirty="0"/>
+              <a:t>90% </a:t>
+            </a:r>
+            <a:r>
+              <a:rPr lang="ko-KR" altLang="en-US" sz="1600" dirty="0"/>
+              <a:t>이상으로</a:t>
+            </a:r>
+            <a:r>
+              <a:rPr lang="en-US" altLang="ko-KR" sz="1600" dirty="0"/>
+              <a:t>, </a:t>
+            </a:r>
+            <a:r>
+              <a:rPr lang="ko-KR" altLang="en-US" sz="1600" dirty="0"/>
+              <a:t>기타 탄화수소 성분이 거의 포함되어 있지 않아 정제가 단순하고</a:t>
+            </a:r>
+            <a:r>
+              <a:rPr lang="en-US" altLang="ko-KR" sz="1600" dirty="0"/>
+              <a:t>, </a:t>
+            </a:r>
+            <a:r>
+              <a:rPr lang="ko-KR" altLang="en-US" sz="1600" dirty="0"/>
+              <a:t>연료용으로 바로 사용하기에 적합하다</a:t>
+            </a:r>
+            <a:endParaRPr lang="en-US" altLang="ko-KR" sz="1600" dirty="0"/>
+          </a:p>
+          <a:p>
+            <a:pPr marL="1292225" lvl="2" indent="-285750">
+              <a:lnSpc>
+                <a:spcPct val="150000"/>
+              </a:lnSpc>
+              <a:buFont typeface="Wingdings" panose="05000000000000000000" pitchFamily="2" charset="2"/>
+              <a:buChar char="Ø"/>
+            </a:pPr>
+            <a:r>
+              <a:rPr lang="ko-KR" altLang="en-US" sz="1600" dirty="0"/>
+              <a:t>도시가스</a:t>
+            </a:r>
+            <a:r>
+              <a:rPr lang="en-US" altLang="ko-KR" sz="1600" dirty="0"/>
+              <a:t>, </a:t>
+            </a:r>
+            <a:r>
+              <a:rPr lang="ko-KR" altLang="en-US" sz="1600" dirty="0"/>
+              <a:t>발전용 연료 등 직접 연소형 시장에 적합하고</a:t>
+            </a:r>
+            <a:r>
+              <a:rPr lang="en-US" altLang="ko-KR" sz="1600" dirty="0"/>
+              <a:t>, </a:t>
+            </a:r>
+            <a:r>
+              <a:rPr lang="ko-KR" altLang="en-US" sz="1600" dirty="0"/>
+              <a:t>파이프라인을 통한 장거리 수송에도 효율적이다</a:t>
+            </a:r>
+            <a:r>
+              <a:rPr lang="en-US" altLang="ko-KR" sz="1600" dirty="0"/>
+              <a:t>.</a:t>
+            </a:r>
+          </a:p>
+          <a:p>
+            <a:pPr marL="835025" lvl="1" indent="-285750">
+              <a:lnSpc>
+                <a:spcPct val="150000"/>
+              </a:lnSpc>
+              <a:buFont typeface="Wingdings" panose="05000000000000000000" pitchFamily="2" charset="2"/>
+              <a:buChar char="ü"/>
+            </a:pPr>
+            <a:r>
+              <a:rPr lang="ko-KR" altLang="en-US" sz="1600" dirty="0" err="1"/>
+              <a:t>웻</a:t>
+            </a:r>
+            <a:r>
+              <a:rPr lang="ko-KR" altLang="en-US" sz="1600" dirty="0"/>
+              <a:t> 가스는 </a:t>
             </a:r>
             <a:endParaRPr lang="en-US" altLang="ko-KR" sz="1600" dirty="0"/>
           </a:p>

--- a/에너지경제학/자원에너지경제학_Chapter_3 (가스).pptx
+++ b/에너지경제학/자원에너지경제학_Chapter_3 (가스).pptx
@@ -5,7 +5,7 @@
     <p:sldMasterId id="2147483648" r:id="rId1"/>
   </p:sldMasterIdLst>
   <p:notesMasterIdLst>
-    <p:notesMasterId r:id="rId13"/>
+    <p:notesMasterId r:id="rId15"/>
   </p:notesMasterIdLst>
   <p:sldIdLst>
     <p:sldId id="375" r:id="rId2"/>
@@ -18,7 +18,9 @@
     <p:sldId id="640" r:id="rId9"/>
     <p:sldId id="641" r:id="rId10"/>
     <p:sldId id="642" r:id="rId11"/>
-    <p:sldId id="598" r:id="rId12"/>
+    <p:sldId id="643" r:id="rId12"/>
+    <p:sldId id="644" r:id="rId13"/>
+    <p:sldId id="598" r:id="rId14"/>
   </p:sldIdLst>
   <p:sldSz cx="12192000" cy="6858000"/>
   <p:notesSz cx="6858000" cy="9144000"/>
@@ -7326,7 +7328,7 @@
         <p:spPr>
           <a:xfrm>
             <a:off x="288790" y="958844"/>
-            <a:ext cx="11118453" cy="2999347"/>
+            <a:ext cx="11118453" cy="4476675"/>
           </a:xfrm>
           <a:prstGeom prst="rect">
             <a:avLst/>
@@ -7413,6 +7415,16 @@
             </a:r>
           </a:p>
           <a:p>
+            <a:pPr marL="835025" lvl="1" indent="-285750">
+              <a:lnSpc>
+                <a:spcPct val="150000"/>
+              </a:lnSpc>
+              <a:buFont typeface="Wingdings" panose="05000000000000000000" pitchFamily="2" charset="2"/>
+              <a:buChar char="ü"/>
+            </a:pPr>
+            <a:endParaRPr lang="en-US" altLang="ko-KR" sz="1600" dirty="0"/>
+          </a:p>
+          <a:p>
             <a:pPr marL="377825" indent="-285750">
               <a:lnSpc>
                 <a:spcPct val="150000"/>
@@ -7421,12 +7433,8 @@
               <a:buChar char="•"/>
             </a:pPr>
             <a:r>
-              <a:rPr lang="ko-KR" altLang="en-US" sz="1600"/>
-              <a:t>일반적인 </a:t>
-            </a:r>
-            <a:r>
-              <a:rPr lang="ko-KR" altLang="en-US" sz="1600" dirty="0"/>
-              <a:t>분류는 메탄의 순도와 고급 탄화수소 성분의 포함 여부에 따른 드라이</a:t>
+              <a:rPr lang="ko-KR" altLang="en-US" sz="1600" dirty="0"/>
+              <a:t>일반적인 분류는 메탄의 순도와 고급 탄화수소 성분의 포함 여부에 따른 드라이</a:t>
             </a:r>
             <a:r>
               <a:rPr lang="en-US" altLang="ko-KR" sz="1600" dirty="0"/>
@@ -7542,9 +7550,101 @@
             </a:r>
             <a:r>
               <a:rPr lang="ko-KR" altLang="en-US" sz="1600" dirty="0"/>
-              <a:t> 가스는 </a:t>
-            </a:r>
-            <a:endParaRPr lang="en-US" altLang="ko-KR" sz="1600" dirty="0"/>
+              <a:t> 가스는 에탄</a:t>
+            </a:r>
+            <a:r>
+              <a:rPr lang="en-US" altLang="ko-KR" sz="1600" dirty="0"/>
+              <a:t>, </a:t>
+            </a:r>
+            <a:r>
+              <a:rPr lang="ko-KR" altLang="en-US" sz="1600" dirty="0"/>
+              <a:t>프로판</a:t>
+            </a:r>
+            <a:r>
+              <a:rPr lang="en-US" altLang="ko-KR" sz="1600" dirty="0"/>
+              <a:t>, </a:t>
+            </a:r>
+            <a:r>
+              <a:rPr lang="ko-KR" altLang="en-US" sz="1600" dirty="0"/>
+              <a:t>부탄 등 중간 탄화수소가 다량 포함되어 있으며</a:t>
+            </a:r>
+            <a:r>
+              <a:rPr lang="en-US" altLang="ko-KR" sz="1600" dirty="0"/>
+              <a:t>, </a:t>
+            </a:r>
+            <a:r>
+              <a:rPr lang="ko-KR" altLang="en-US" sz="1600" dirty="0"/>
+              <a:t>이 성분들을 추출하여 부가가치가 높은 액화석유가스</a:t>
+            </a:r>
+            <a:r>
+              <a:rPr lang="en-US" altLang="ko-KR" sz="1600" dirty="0"/>
+              <a:t>(LPG)</a:t>
+            </a:r>
+            <a:r>
+              <a:rPr lang="ko-KR" altLang="en-US" sz="1600" dirty="0"/>
+              <a:t>나 석유화학 연료</a:t>
+            </a:r>
+            <a:r>
+              <a:rPr lang="en-US" altLang="ko-KR" sz="1600" dirty="0"/>
+              <a:t>(NGLs)</a:t>
+            </a:r>
+            <a:r>
+              <a:rPr lang="ko-KR" altLang="en-US" sz="1600" dirty="0"/>
+              <a:t>로 활용할 수 있다</a:t>
+            </a:r>
+            <a:r>
+              <a:rPr lang="en-US" altLang="ko-KR" sz="1600" dirty="0"/>
+              <a:t>.</a:t>
+            </a:r>
+          </a:p>
+          <a:p>
+            <a:pPr marL="1292225" lvl="2" indent="-285750">
+              <a:lnSpc>
+                <a:spcPct val="150000"/>
+              </a:lnSpc>
+              <a:buFont typeface="Wingdings" panose="05000000000000000000" pitchFamily="2" charset="2"/>
+              <a:buChar char="Ø"/>
+            </a:pPr>
+            <a:r>
+              <a:rPr lang="ko-KR" altLang="en-US" sz="1600" dirty="0"/>
+              <a:t>가스 처리 공정을 거쳐야 하고</a:t>
+            </a:r>
+            <a:r>
+              <a:rPr lang="en-US" altLang="ko-KR" sz="1600" dirty="0"/>
+              <a:t>, </a:t>
+            </a:r>
+            <a:r>
+              <a:rPr lang="ko-KR" altLang="en-US" sz="1600" dirty="0"/>
+              <a:t>냉각</a:t>
+            </a:r>
+            <a:r>
+              <a:rPr lang="en-US" altLang="ko-KR" sz="1600" dirty="0"/>
+              <a:t>·</a:t>
+            </a:r>
+            <a:r>
+              <a:rPr lang="ko-KR" altLang="en-US" sz="1600" dirty="0"/>
+              <a:t>압축</a:t>
+            </a:r>
+            <a:r>
+              <a:rPr lang="en-US" altLang="ko-KR" sz="1600" dirty="0"/>
+              <a:t>·</a:t>
+            </a:r>
+            <a:r>
+              <a:rPr lang="ko-KR" altLang="en-US" sz="1600" dirty="0"/>
+              <a:t>탈탄소화 설비 등 고가의 인프라를 요구하므로</a:t>
+            </a:r>
+            <a:r>
+              <a:rPr lang="en-US" altLang="ko-KR" sz="1600" dirty="0"/>
+              <a:t>, </a:t>
+            </a:r>
+            <a:r>
+              <a:rPr lang="ko-KR" altLang="en-US" sz="1600" dirty="0"/>
+              <a:t>초기 투자비용과 운송비용이 상대적으로 크다</a:t>
+            </a:r>
+            <a:r>
+              <a:rPr lang="en-US" altLang="ko-KR" sz="1600" dirty="0"/>
+              <a:t>.</a:t>
+            </a:r>
           </a:p>
         </p:txBody>
       </p:sp>
@@ -7562,6 +7662,709 @@
 </file>
 
 <file path=ppt/slides/slide11.xml><?xml version="1.0" encoding="utf-8"?>
+<p:sld xmlns:a="http://schemas.openxmlformats.org/drawingml/2006/main" xmlns:r="http://schemas.openxmlformats.org/officeDocument/2006/relationships" xmlns:p="http://schemas.openxmlformats.org/presentationml/2006/main">
+  <p:cSld>
+    <p:spTree>
+      <p:nvGrpSpPr>
+        <p:cNvPr id="1" name="">
+          <a:extLst>
+            <a:ext uri="{FF2B5EF4-FFF2-40B4-BE49-F238E27FC236}">
+              <a16:creationId xmlns:a16="http://schemas.microsoft.com/office/drawing/2014/main" id="{5F69A752-6556-46F6-857F-6E9C1A58BF2C}"/>
+            </a:ext>
+          </a:extLst>
+        </p:cNvPr>
+        <p:cNvGrpSpPr/>
+        <p:nvPr/>
+      </p:nvGrpSpPr>
+      <p:grpSpPr>
+        <a:xfrm>
+          <a:off x="0" y="0"/>
+          <a:ext cx="0" cy="0"/>
+          <a:chOff x="0" y="0"/>
+          <a:chExt cx="0" cy="0"/>
+        </a:xfrm>
+      </p:grpSpPr>
+      <p:sp>
+        <p:nvSpPr>
+          <p:cNvPr id="2" name="제목 1">
+            <a:extLst>
+              <a:ext uri="{FF2B5EF4-FFF2-40B4-BE49-F238E27FC236}">
+                <a16:creationId xmlns:a16="http://schemas.microsoft.com/office/drawing/2014/main" id="{8A1A3A0D-6D0E-4F71-91C8-2D344C3FFDD3}"/>
+              </a:ext>
+            </a:extLst>
+          </p:cNvPr>
+          <p:cNvSpPr>
+            <a:spLocks noGrp="1"/>
+          </p:cNvSpPr>
+          <p:nvPr>
+            <p:ph type="title"/>
+          </p:nvPr>
+        </p:nvSpPr>
+        <p:spPr/>
+        <p:txBody>
+          <a:bodyPr/>
+          <a:lstStyle/>
+          <a:p>
+            <a:r>
+              <a:rPr lang="ko-KR" altLang="en-US" dirty="0"/>
+              <a:t>천연가스의 분류</a:t>
+            </a:r>
+          </a:p>
+        </p:txBody>
+      </p:sp>
+      <p:sp>
+        <p:nvSpPr>
+          <p:cNvPr id="4" name="슬라이드 번호 개체 틀 3">
+            <a:extLst>
+              <a:ext uri="{FF2B5EF4-FFF2-40B4-BE49-F238E27FC236}">
+                <a16:creationId xmlns:a16="http://schemas.microsoft.com/office/drawing/2014/main" id="{14082F75-9B24-846E-DED3-F6DBD15DF9FE}"/>
+              </a:ext>
+            </a:extLst>
+          </p:cNvPr>
+          <p:cNvSpPr>
+            <a:spLocks noGrp="1"/>
+          </p:cNvSpPr>
+          <p:nvPr>
+            <p:ph type="sldNum" sz="quarter" idx="12"/>
+          </p:nvPr>
+        </p:nvSpPr>
+        <p:spPr/>
+        <p:txBody>
+          <a:bodyPr/>
+          <a:lstStyle/>
+          <a:p>
+            <a:fld id="{109C872D-39A9-4065-8BF3-6A613116E2A1}" type="slidenum">
+              <a:rPr lang="ko-KR" altLang="en-US" smtClean="0"/>
+              <a:t>11</a:t>
+            </a:fld>
+            <a:endParaRPr lang="ko-KR" altLang="en-US"/>
+          </a:p>
+        </p:txBody>
+      </p:sp>
+      <p:sp>
+        <p:nvSpPr>
+          <p:cNvPr id="3" name="TextBox 2">
+            <a:extLst>
+              <a:ext uri="{FF2B5EF4-FFF2-40B4-BE49-F238E27FC236}">
+                <a16:creationId xmlns:a16="http://schemas.microsoft.com/office/drawing/2014/main" id="{7F5F7D64-8C6C-6880-87B4-1AD3A56E4675}"/>
+              </a:ext>
+            </a:extLst>
+          </p:cNvPr>
+          <p:cNvSpPr txBox="1"/>
+          <p:nvPr/>
+        </p:nvSpPr>
+        <p:spPr>
+          <a:xfrm>
+            <a:off x="288790" y="958844"/>
+            <a:ext cx="11118453" cy="3738011"/>
+          </a:xfrm>
+          <a:prstGeom prst="rect">
+            <a:avLst/>
+          </a:prstGeom>
+          <a:noFill/>
+        </p:spPr>
+        <p:txBody>
+          <a:bodyPr wrap="square" rtlCol="0" anchor="t">
+            <a:spAutoFit/>
+          </a:bodyPr>
+          <a:lstStyle/>
+          <a:p>
+            <a:pPr marL="377825" indent="-285750">
+              <a:lnSpc>
+                <a:spcPct val="150000"/>
+              </a:lnSpc>
+              <a:buFont typeface="Arial" panose="020B0604020202020204" pitchFamily="34" charset="0"/>
+              <a:buChar char="•"/>
+            </a:pPr>
+            <a:r>
+              <a:rPr lang="ko-KR" altLang="en-US" sz="1600" dirty="0"/>
+              <a:t>또 다른 분류 방식은 천연가스 내에 포함된 불순물의 함량에 기반한 분류다</a:t>
+            </a:r>
+            <a:r>
+              <a:rPr lang="en-US" altLang="ko-KR" sz="1600" dirty="0"/>
+              <a:t>.</a:t>
+            </a:r>
+          </a:p>
+          <a:p>
+            <a:pPr marL="835025" lvl="1" indent="-285750">
+              <a:lnSpc>
+                <a:spcPct val="150000"/>
+              </a:lnSpc>
+              <a:buFont typeface="Wingdings" panose="05000000000000000000" pitchFamily="2" charset="2"/>
+              <a:buChar char="ü"/>
+            </a:pPr>
+            <a:r>
+              <a:rPr lang="ko-KR" altLang="en-US" sz="1600" dirty="0" err="1"/>
+              <a:t>사워</a:t>
+            </a:r>
+            <a:r>
+              <a:rPr lang="ko-KR" altLang="en-US" sz="1600" dirty="0"/>
+              <a:t> 가스</a:t>
+            </a:r>
+            <a:r>
+              <a:rPr lang="en-US" altLang="ko-KR" sz="1600" dirty="0"/>
+              <a:t>(sour gas)</a:t>
+            </a:r>
+            <a:r>
+              <a:rPr lang="ko-KR" altLang="en-US" sz="1600" dirty="0"/>
+              <a:t>는 황화수소 또는 이산화탄소와 같은 산성 가스를 상당량 포함하고 있다</a:t>
+            </a:r>
+            <a:r>
+              <a:rPr lang="en-US" altLang="ko-KR" sz="1600" dirty="0"/>
+              <a:t>.</a:t>
+            </a:r>
+          </a:p>
+          <a:p>
+            <a:pPr marL="1292225" lvl="2" indent="-285750">
+              <a:lnSpc>
+                <a:spcPct val="150000"/>
+              </a:lnSpc>
+              <a:buFont typeface="Wingdings" panose="05000000000000000000" pitchFamily="2" charset="2"/>
+              <a:buChar char="Ø"/>
+            </a:pPr>
+            <a:r>
+              <a:rPr lang="ko-KR" altLang="en-US" sz="1600" dirty="0"/>
+              <a:t>인체에 유해하고</a:t>
+            </a:r>
+            <a:r>
+              <a:rPr lang="en-US" altLang="ko-KR" sz="1600" dirty="0"/>
+              <a:t>, </a:t>
+            </a:r>
+            <a:r>
+              <a:rPr lang="ko-KR" altLang="en-US" sz="1600" dirty="0"/>
+              <a:t>공정 설비의 부식을 유발하며</a:t>
+            </a:r>
+            <a:r>
+              <a:rPr lang="en-US" altLang="ko-KR" sz="1600" dirty="0"/>
+              <a:t>, </a:t>
+            </a:r>
+            <a:r>
+              <a:rPr lang="ko-KR" altLang="en-US" sz="1600" dirty="0"/>
+              <a:t>운송과 저장 시 높은 위험성을 수반하므로 </a:t>
+            </a:r>
+            <a:r>
+              <a:rPr lang="ko-KR" altLang="en-US" sz="1600" dirty="0" err="1"/>
+              <a:t>스위트닝</a:t>
+            </a:r>
+            <a:r>
+              <a:rPr lang="en-US" altLang="ko-KR" sz="1600" dirty="0"/>
+              <a:t>(sweetening) </a:t>
+            </a:r>
+            <a:r>
+              <a:rPr lang="ko-KR" altLang="en-US" sz="1600" dirty="0"/>
+              <a:t>공정을 필요로 한다</a:t>
+            </a:r>
+            <a:r>
+              <a:rPr lang="en-US" altLang="ko-KR" sz="1600" dirty="0"/>
+              <a:t>.</a:t>
+            </a:r>
+          </a:p>
+          <a:p>
+            <a:pPr marL="1292225" lvl="2" indent="-285750">
+              <a:lnSpc>
+                <a:spcPct val="150000"/>
+              </a:lnSpc>
+              <a:buFont typeface="Wingdings" panose="05000000000000000000" pitchFamily="2" charset="2"/>
+              <a:buChar char="Ø"/>
+            </a:pPr>
+            <a:r>
+              <a:rPr lang="ko-KR" altLang="en-US" sz="1600" dirty="0"/>
+              <a:t>대표적으로 아민 </a:t>
+            </a:r>
+            <a:r>
+              <a:rPr lang="ko-KR" altLang="en-US" sz="1600" dirty="0" err="1"/>
+              <a:t>흡수탑</a:t>
+            </a:r>
+            <a:r>
+              <a:rPr lang="en-US" altLang="ko-KR" sz="1600" dirty="0"/>
+              <a:t>, </a:t>
+            </a:r>
+            <a:r>
+              <a:rPr lang="ko-KR" altLang="en-US" sz="1600" dirty="0"/>
+              <a:t>막 분리 기술</a:t>
+            </a:r>
+            <a:r>
+              <a:rPr lang="en-US" altLang="ko-KR" sz="1600" dirty="0"/>
+              <a:t>, </a:t>
+            </a:r>
+            <a:r>
+              <a:rPr lang="ko-KR" altLang="en-US" sz="1600" dirty="0" err="1"/>
+              <a:t>크라이오제닉</a:t>
+            </a:r>
+            <a:r>
+              <a:rPr lang="ko-KR" altLang="en-US" sz="1600" dirty="0"/>
+              <a:t> 냉각 등의 정제 기술이 사용되고</a:t>
+            </a:r>
+            <a:r>
+              <a:rPr lang="en-US" altLang="ko-KR" sz="1600" dirty="0"/>
+              <a:t>, </a:t>
+            </a:r>
+            <a:r>
+              <a:rPr lang="ko-KR" altLang="en-US" sz="1600" dirty="0"/>
+              <a:t>이로 인한 처리비용의 상승이 전체 프로젝트의 수익성으로 직결된다</a:t>
+            </a:r>
+            <a:r>
+              <a:rPr lang="en-US" altLang="ko-KR" sz="1600" dirty="0"/>
+              <a:t>.</a:t>
+            </a:r>
+          </a:p>
+          <a:p>
+            <a:pPr marL="835025" lvl="1" indent="-285750">
+              <a:lnSpc>
+                <a:spcPct val="150000"/>
+              </a:lnSpc>
+              <a:buFont typeface="Wingdings" panose="05000000000000000000" pitchFamily="2" charset="2"/>
+              <a:buChar char="ü"/>
+            </a:pPr>
+            <a:endParaRPr lang="en-US" altLang="ko-KR" sz="1600" dirty="0"/>
+          </a:p>
+          <a:p>
+            <a:pPr marL="835025" lvl="1" indent="-285750">
+              <a:lnSpc>
+                <a:spcPct val="150000"/>
+              </a:lnSpc>
+              <a:buFont typeface="Wingdings" panose="05000000000000000000" pitchFamily="2" charset="2"/>
+              <a:buChar char="ü"/>
+            </a:pPr>
+            <a:r>
+              <a:rPr lang="ko-KR" altLang="en-US" sz="1600" dirty="0"/>
+              <a:t>스위트 가스</a:t>
+            </a:r>
+            <a:r>
+              <a:rPr lang="en-US" altLang="ko-KR" sz="1600" dirty="0"/>
+              <a:t>(sweet gas)</a:t>
+            </a:r>
+            <a:r>
+              <a:rPr lang="ko-KR" altLang="en-US" sz="1600" dirty="0"/>
+              <a:t>는 황화수소 또는 이산화탄소와 같은 산성 가스를 거의 포함하고 있지 않다</a:t>
+            </a:r>
+            <a:r>
+              <a:rPr lang="en-US" altLang="ko-KR" sz="1600" dirty="0"/>
+              <a:t>.</a:t>
+            </a:r>
+          </a:p>
+          <a:p>
+            <a:pPr marL="1292225" lvl="2" indent="-285750">
+              <a:lnSpc>
+                <a:spcPct val="150000"/>
+              </a:lnSpc>
+              <a:buFont typeface="Wingdings" panose="05000000000000000000" pitchFamily="2" charset="2"/>
+              <a:buChar char="Ø"/>
+            </a:pPr>
+            <a:r>
+              <a:rPr lang="ko-KR" altLang="en-US" sz="1600" dirty="0" err="1"/>
+              <a:t>사워</a:t>
+            </a:r>
+            <a:r>
+              <a:rPr lang="ko-KR" altLang="en-US" sz="1600" dirty="0"/>
+              <a:t> 가스 대비 상대적으로</a:t>
+            </a:r>
+            <a:r>
+              <a:rPr lang="en-US" altLang="ko-KR" sz="1600" dirty="0"/>
+              <a:t>, </a:t>
+            </a:r>
+            <a:r>
+              <a:rPr lang="ko-KR" altLang="en-US" sz="1600" dirty="0"/>
+              <a:t>냄새가 적고 안전하여</a:t>
+            </a:r>
+            <a:r>
+              <a:rPr lang="en-US" altLang="ko-KR" sz="1600" dirty="0"/>
+              <a:t>, </a:t>
+            </a:r>
+            <a:r>
+              <a:rPr lang="ko-KR" altLang="en-US" sz="1600" dirty="0"/>
+              <a:t>처리공정이 간단하다</a:t>
+            </a:r>
+            <a:r>
+              <a:rPr lang="en-US" altLang="ko-KR" sz="1600" dirty="0"/>
+              <a:t>.</a:t>
+            </a:r>
+          </a:p>
+          <a:p>
+            <a:pPr marL="1292225" lvl="2" indent="-285750">
+              <a:lnSpc>
+                <a:spcPct val="150000"/>
+              </a:lnSpc>
+              <a:buFont typeface="Wingdings" panose="05000000000000000000" pitchFamily="2" charset="2"/>
+              <a:buChar char="Ø"/>
+            </a:pPr>
+            <a:r>
+              <a:rPr lang="ko-KR" altLang="en-US" sz="1600" dirty="0"/>
+              <a:t>상대적으로 정제 비용이 적고</a:t>
+            </a:r>
+            <a:r>
+              <a:rPr lang="en-US" altLang="ko-KR" sz="1600" dirty="0"/>
+              <a:t>, </a:t>
+            </a:r>
+            <a:r>
+              <a:rPr lang="ko-KR" altLang="en-US" sz="1600" dirty="0"/>
+              <a:t>탄소배출 측면에서도 유리하여 정책적</a:t>
+            </a:r>
+            <a:r>
+              <a:rPr lang="en-US" altLang="ko-KR" sz="1600" dirty="0"/>
+              <a:t>·</a:t>
+            </a:r>
+            <a:r>
+              <a:rPr lang="ko-KR" altLang="en-US" sz="1600" dirty="0"/>
+              <a:t>환경적 선호도가 높다</a:t>
+            </a:r>
+            <a:r>
+              <a:rPr lang="en-US" altLang="ko-KR" sz="1600" dirty="0"/>
+              <a:t>.</a:t>
+            </a:r>
+          </a:p>
+        </p:txBody>
+      </p:sp>
+    </p:spTree>
+    <p:extLst>
+      <p:ext uri="{BB962C8B-B14F-4D97-AF65-F5344CB8AC3E}">
+        <p14:creationId xmlns:p14="http://schemas.microsoft.com/office/powerpoint/2010/main" val="3293645843"/>
+      </p:ext>
+    </p:extLst>
+  </p:cSld>
+  <p:clrMapOvr>
+    <a:masterClrMapping/>
+  </p:clrMapOvr>
+</p:sld>
+</file>
+
+<file path=ppt/slides/slide12.xml><?xml version="1.0" encoding="utf-8"?>
+<p:sld xmlns:a="http://schemas.openxmlformats.org/drawingml/2006/main" xmlns:r="http://schemas.openxmlformats.org/officeDocument/2006/relationships" xmlns:p="http://schemas.openxmlformats.org/presentationml/2006/main">
+  <p:cSld>
+    <p:spTree>
+      <p:nvGrpSpPr>
+        <p:cNvPr id="1" name="">
+          <a:extLst>
+            <a:ext uri="{FF2B5EF4-FFF2-40B4-BE49-F238E27FC236}">
+              <a16:creationId xmlns:a16="http://schemas.microsoft.com/office/drawing/2014/main" id="{278A20D6-836A-4370-E46C-301BB69EAD4D}"/>
+            </a:ext>
+          </a:extLst>
+        </p:cNvPr>
+        <p:cNvGrpSpPr/>
+        <p:nvPr/>
+      </p:nvGrpSpPr>
+      <p:grpSpPr>
+        <a:xfrm>
+          <a:off x="0" y="0"/>
+          <a:ext cx="0" cy="0"/>
+          <a:chOff x="0" y="0"/>
+          <a:chExt cx="0" cy="0"/>
+        </a:xfrm>
+      </p:grpSpPr>
+      <p:sp>
+        <p:nvSpPr>
+          <p:cNvPr id="2" name="제목 1">
+            <a:extLst>
+              <a:ext uri="{FF2B5EF4-FFF2-40B4-BE49-F238E27FC236}">
+                <a16:creationId xmlns:a16="http://schemas.microsoft.com/office/drawing/2014/main" id="{8290E1D9-42CC-00CB-BE17-A748399F8A53}"/>
+              </a:ext>
+            </a:extLst>
+          </p:cNvPr>
+          <p:cNvSpPr>
+            <a:spLocks noGrp="1"/>
+          </p:cNvSpPr>
+          <p:nvPr>
+            <p:ph type="title"/>
+          </p:nvPr>
+        </p:nvSpPr>
+        <p:spPr/>
+        <p:txBody>
+          <a:bodyPr/>
+          <a:lstStyle/>
+          <a:p>
+            <a:r>
+              <a:rPr lang="ko-KR" altLang="en-US" dirty="0"/>
+              <a:t>천연가스의 분류</a:t>
+            </a:r>
+          </a:p>
+        </p:txBody>
+      </p:sp>
+      <p:sp>
+        <p:nvSpPr>
+          <p:cNvPr id="4" name="슬라이드 번호 개체 틀 3">
+            <a:extLst>
+              <a:ext uri="{FF2B5EF4-FFF2-40B4-BE49-F238E27FC236}">
+                <a16:creationId xmlns:a16="http://schemas.microsoft.com/office/drawing/2014/main" id="{1823E626-40F4-8266-86B5-8907BC52E4AF}"/>
+              </a:ext>
+            </a:extLst>
+          </p:cNvPr>
+          <p:cNvSpPr>
+            <a:spLocks noGrp="1"/>
+          </p:cNvSpPr>
+          <p:nvPr>
+            <p:ph type="sldNum" sz="quarter" idx="12"/>
+          </p:nvPr>
+        </p:nvSpPr>
+        <p:spPr/>
+        <p:txBody>
+          <a:bodyPr/>
+          <a:lstStyle/>
+          <a:p>
+            <a:fld id="{109C872D-39A9-4065-8BF3-6A613116E2A1}" type="slidenum">
+              <a:rPr lang="ko-KR" altLang="en-US" smtClean="0"/>
+              <a:t>12</a:t>
+            </a:fld>
+            <a:endParaRPr lang="ko-KR" altLang="en-US"/>
+          </a:p>
+        </p:txBody>
+      </p:sp>
+      <p:sp>
+        <p:nvSpPr>
+          <p:cNvPr id="3" name="TextBox 2">
+            <a:extLst>
+              <a:ext uri="{FF2B5EF4-FFF2-40B4-BE49-F238E27FC236}">
+                <a16:creationId xmlns:a16="http://schemas.microsoft.com/office/drawing/2014/main" id="{5C99AD25-10EC-E4FD-80B6-78DED0C0C440}"/>
+              </a:ext>
+            </a:extLst>
+          </p:cNvPr>
+          <p:cNvSpPr txBox="1"/>
+          <p:nvPr/>
+        </p:nvSpPr>
+        <p:spPr>
+          <a:xfrm>
+            <a:off x="288790" y="958844"/>
+            <a:ext cx="11118453" cy="3368679"/>
+          </a:xfrm>
+          <a:prstGeom prst="rect">
+            <a:avLst/>
+          </a:prstGeom>
+          <a:noFill/>
+        </p:spPr>
+        <p:txBody>
+          <a:bodyPr wrap="square" rtlCol="0" anchor="t">
+            <a:spAutoFit/>
+          </a:bodyPr>
+          <a:lstStyle/>
+          <a:p>
+            <a:pPr marL="377825" indent="-285750">
+              <a:lnSpc>
+                <a:spcPct val="150000"/>
+              </a:lnSpc>
+              <a:buFont typeface="Arial" panose="020B0604020202020204" pitchFamily="34" charset="0"/>
+              <a:buChar char="•"/>
+            </a:pPr>
+            <a:r>
+              <a:rPr lang="ko-KR" altLang="en-US" sz="1600" dirty="0"/>
+              <a:t>매장 형태에 따른 분류도 천연가스의 특성과 상업적 전략을 이해하는데 중요하다</a:t>
+            </a:r>
+            <a:r>
+              <a:rPr lang="en-US" altLang="ko-KR" sz="1600" dirty="0"/>
+              <a:t>.</a:t>
+            </a:r>
+          </a:p>
+          <a:p>
+            <a:pPr marL="835025" lvl="1" indent="-285750">
+              <a:lnSpc>
+                <a:spcPct val="150000"/>
+              </a:lnSpc>
+              <a:buFont typeface="Wingdings" panose="05000000000000000000" pitchFamily="2" charset="2"/>
+              <a:buChar char="ü"/>
+            </a:pPr>
+            <a:r>
+              <a:rPr lang="ko-KR" altLang="en-US" sz="1600" dirty="0" err="1"/>
+              <a:t>어소시에이티드</a:t>
+            </a:r>
+            <a:r>
+              <a:rPr lang="ko-KR" altLang="en-US" sz="1600" dirty="0"/>
+              <a:t> 가스</a:t>
+            </a:r>
+            <a:r>
+              <a:rPr lang="en-US" altLang="ko-KR" sz="1600" dirty="0"/>
+              <a:t>(associated gas)</a:t>
+            </a:r>
+            <a:r>
+              <a:rPr lang="ko-KR" altLang="en-US" sz="1600" dirty="0"/>
+              <a:t>는 석유와 함께 동일한 지층에 공존하며</a:t>
+            </a:r>
+            <a:r>
+              <a:rPr lang="en-US" altLang="ko-KR" sz="1600" dirty="0"/>
+              <a:t>, </a:t>
+            </a:r>
+            <a:r>
+              <a:rPr lang="ko-KR" altLang="en-US" sz="1600" dirty="0"/>
+              <a:t>원유 생산 과정에서 부산물로 발생하는 가스를 의미한다</a:t>
+            </a:r>
+            <a:r>
+              <a:rPr lang="en-US" altLang="ko-KR" sz="1600" dirty="0"/>
+              <a:t>.</a:t>
+            </a:r>
+          </a:p>
+          <a:p>
+            <a:pPr marL="1292225" lvl="2" indent="-285750">
+              <a:lnSpc>
+                <a:spcPct val="150000"/>
+              </a:lnSpc>
+              <a:buFont typeface="Wingdings" panose="05000000000000000000" pitchFamily="2" charset="2"/>
+              <a:buChar char="Ø"/>
+            </a:pPr>
+            <a:r>
+              <a:rPr lang="ko-KR" altLang="en-US" sz="1600" dirty="0"/>
+              <a:t>과거에는 기술부족</a:t>
+            </a:r>
+            <a:r>
+              <a:rPr lang="en-US" altLang="ko-KR" sz="1600" dirty="0"/>
+              <a:t>, </a:t>
+            </a:r>
+            <a:r>
+              <a:rPr lang="ko-KR" altLang="en-US" sz="1600" dirty="0"/>
+              <a:t>경제성 미비</a:t>
+            </a:r>
+            <a:r>
+              <a:rPr lang="en-US" altLang="ko-KR" sz="1600" dirty="0"/>
+              <a:t>, </a:t>
+            </a:r>
+            <a:r>
+              <a:rPr lang="ko-KR" altLang="en-US" sz="1600" dirty="0" err="1"/>
+              <a:t>수요처</a:t>
+            </a:r>
+            <a:r>
+              <a:rPr lang="ko-KR" altLang="en-US" sz="1600" dirty="0"/>
+              <a:t> 부재 등의 이유로 대부분 연소</a:t>
+            </a:r>
+            <a:r>
+              <a:rPr lang="en-US" altLang="ko-KR" sz="1600" dirty="0"/>
+              <a:t>(</a:t>
+            </a:r>
+            <a:r>
+              <a:rPr lang="ko-KR" altLang="en-US" sz="1600" dirty="0" err="1"/>
+              <a:t>플레어링</a:t>
+            </a:r>
+            <a:r>
+              <a:rPr lang="en-US" altLang="ko-KR" sz="1600" dirty="0"/>
+              <a:t>)</a:t>
+            </a:r>
+            <a:r>
+              <a:rPr lang="ko-KR" altLang="en-US" sz="1600" dirty="0"/>
+              <a:t>되거나 지하에 </a:t>
+            </a:r>
+            <a:r>
+              <a:rPr lang="ko-KR" altLang="en-US" sz="1600" dirty="0" err="1"/>
+              <a:t>재주입되었으나</a:t>
+            </a:r>
+            <a:r>
+              <a:rPr lang="en-US" altLang="ko-KR" sz="1600" dirty="0"/>
+              <a:t>, </a:t>
+            </a:r>
+            <a:r>
+              <a:rPr lang="ko-KR" altLang="en-US" sz="1600" dirty="0"/>
+              <a:t>최근에는 </a:t>
+            </a:r>
+            <a:r>
+              <a:rPr lang="ko-KR" altLang="en-US" sz="1600" dirty="0" err="1"/>
+              <a:t>플레어링</a:t>
+            </a:r>
+            <a:r>
+              <a:rPr lang="ko-KR" altLang="en-US" sz="1600" dirty="0"/>
+              <a:t> 금지 정책과 자원 효율성 강화에 따라 회수 및 이용이 증가하고 있다</a:t>
+            </a:r>
+            <a:r>
+              <a:rPr lang="en-US" altLang="ko-KR" sz="1600" dirty="0"/>
+              <a:t>.</a:t>
+            </a:r>
+          </a:p>
+          <a:p>
+            <a:pPr marL="835025" lvl="1" indent="-285750">
+              <a:lnSpc>
+                <a:spcPct val="150000"/>
+              </a:lnSpc>
+              <a:buFont typeface="Wingdings" panose="05000000000000000000" pitchFamily="2" charset="2"/>
+              <a:buChar char="ü"/>
+            </a:pPr>
+            <a:r>
+              <a:rPr lang="ko-KR" altLang="en-US" sz="1600" dirty="0" err="1"/>
+              <a:t>넌어소시에이티드</a:t>
+            </a:r>
+            <a:r>
+              <a:rPr lang="ko-KR" altLang="en-US" sz="1600" dirty="0"/>
+              <a:t> 가스</a:t>
+            </a:r>
+            <a:r>
+              <a:rPr lang="en-US" altLang="ko-KR" sz="1600" dirty="0"/>
+              <a:t>(non-</a:t>
+            </a:r>
+            <a:r>
+              <a:rPr lang="en-US" altLang="ko-KR" sz="1600" dirty="0" err="1"/>
+              <a:t>associaged</a:t>
+            </a:r>
+            <a:r>
+              <a:rPr lang="en-US" altLang="ko-KR" sz="1600" dirty="0"/>
+              <a:t> gas)</a:t>
+            </a:r>
+            <a:r>
+              <a:rPr lang="ko-KR" altLang="en-US" sz="1600" dirty="0"/>
+              <a:t>는 독립적인 가스전에서 생산되며</a:t>
+            </a:r>
+            <a:r>
+              <a:rPr lang="en-US" altLang="ko-KR" sz="1600" dirty="0"/>
+              <a:t>, </a:t>
+            </a:r>
+            <a:r>
+              <a:rPr lang="ko-KR" altLang="en-US" sz="1600" dirty="0"/>
+              <a:t>가스를 주요 자원으로 상정한 개발 프로젝트에서 생산된 가스를 의미한다</a:t>
+            </a:r>
+            <a:r>
+              <a:rPr lang="en-US" altLang="ko-KR" sz="1600" dirty="0"/>
+              <a:t>.</a:t>
+            </a:r>
+          </a:p>
+          <a:p>
+            <a:pPr marL="1292225" lvl="2" indent="-285750">
+              <a:lnSpc>
+                <a:spcPct val="150000"/>
+              </a:lnSpc>
+              <a:buFont typeface="Wingdings" panose="05000000000000000000" pitchFamily="2" charset="2"/>
+              <a:buChar char="Ø"/>
+            </a:pPr>
+            <a:r>
+              <a:rPr lang="ko-KR" altLang="en-US" sz="1600" dirty="0"/>
+              <a:t>상대적으로 품질이 균일하고</a:t>
+            </a:r>
+            <a:r>
+              <a:rPr lang="en-US" altLang="ko-KR" sz="1600" dirty="0"/>
+              <a:t>, </a:t>
+            </a:r>
+            <a:r>
+              <a:rPr lang="ko-KR" altLang="en-US" sz="1600" dirty="0"/>
+              <a:t>생산 계획 및 가격 책정이 독립적으로 가능하기 때문에 </a:t>
+            </a:r>
+            <a:r>
+              <a:rPr lang="en-US" altLang="ko-KR" sz="1600" dirty="0"/>
+              <a:t>LNG </a:t>
+            </a:r>
+            <a:r>
+              <a:rPr lang="ko-KR" altLang="en-US" sz="1600" dirty="0"/>
+              <a:t>수출</a:t>
+            </a:r>
+            <a:r>
+              <a:rPr lang="en-US" altLang="ko-KR" sz="1600" dirty="0"/>
+              <a:t>, </a:t>
+            </a:r>
+            <a:r>
+              <a:rPr lang="ko-KR" altLang="en-US" sz="1600" dirty="0"/>
+              <a:t>도시가스 공급 등 고부가가치 시장을 겨냥한 전략적 활용에 용이하다</a:t>
+            </a:r>
+            <a:r>
+              <a:rPr lang="en-US" altLang="ko-KR" sz="1600"/>
+              <a:t>.</a:t>
+            </a:r>
+            <a:endParaRPr lang="en-US" altLang="ko-KR" sz="1600" dirty="0"/>
+          </a:p>
+        </p:txBody>
+      </p:sp>
+    </p:spTree>
+    <p:extLst>
+      <p:ext uri="{BB962C8B-B14F-4D97-AF65-F5344CB8AC3E}">
+        <p14:creationId xmlns:p14="http://schemas.microsoft.com/office/powerpoint/2010/main" val="3371323880"/>
+      </p:ext>
+    </p:extLst>
+  </p:cSld>
+  <p:clrMapOvr>
+    <a:masterClrMapping/>
+  </p:clrMapOvr>
+</p:sld>
+</file>
+
+<file path=ppt/slides/slide13.xml><?xml version="1.0" encoding="utf-8"?>
 <p:sld xmlns:a="http://schemas.openxmlformats.org/drawingml/2006/main" xmlns:r="http://schemas.openxmlformats.org/officeDocument/2006/relationships" xmlns:p="http://schemas.openxmlformats.org/presentationml/2006/main">
   <p:cSld>
     <p:spTree>
@@ -7689,7 +8492,7 @@
           <a:p>
             <a:fld id="{109C872D-39A9-4065-8BF3-6A613116E2A1}" type="slidenum">
               <a:rPr lang="ko-KR" altLang="en-US" smtClean="0"/>
-              <a:t>11</a:t>
+              <a:t>13</a:t>
             </a:fld>
             <a:endParaRPr lang="ko-KR" altLang="en-US"/>
           </a:p>

--- a/에너지경제학/자원에너지경제학_Chapter_3 (가스).pptx
+++ b/에너지경제학/자원에너지경제학_Chapter_3 (가스).pptx
@@ -5,7 +5,7 @@
     <p:sldMasterId id="2147483648" r:id="rId1"/>
   </p:sldMasterIdLst>
   <p:notesMasterIdLst>
-    <p:notesMasterId r:id="rId27"/>
+    <p:notesMasterId r:id="rId37"/>
   </p:notesMasterIdLst>
   <p:sldIdLst>
     <p:sldId id="375" r:id="rId2"/>
@@ -32,7 +32,17 @@
     <p:sldId id="652" r:id="rId23"/>
     <p:sldId id="655" r:id="rId24"/>
     <p:sldId id="656" r:id="rId25"/>
-    <p:sldId id="598" r:id="rId26"/>
+    <p:sldId id="657" r:id="rId26"/>
+    <p:sldId id="658" r:id="rId27"/>
+    <p:sldId id="659" r:id="rId28"/>
+    <p:sldId id="660" r:id="rId29"/>
+    <p:sldId id="661" r:id="rId30"/>
+    <p:sldId id="662" r:id="rId31"/>
+    <p:sldId id="663" r:id="rId32"/>
+    <p:sldId id="664" r:id="rId33"/>
+    <p:sldId id="665" r:id="rId34"/>
+    <p:sldId id="666" r:id="rId35"/>
+    <p:sldId id="598" r:id="rId36"/>
   </p:sldIdLst>
   <p:sldSz cx="12192000" cy="6858000"/>
   <p:notesSz cx="6858000" cy="9144000"/>
@@ -243,7 +253,7 @@
           <a:p>
             <a:fld id="{4A5E00EF-AEA4-43E2-9451-8F9C59A39471}" type="datetimeFigureOut">
               <a:rPr lang="ko-KR" altLang="en-US" smtClean="0"/>
-              <a:t>2026-05-29</a:t>
+              <a:t>2026-05-31</a:t>
             </a:fld>
             <a:endParaRPr lang="ko-KR" altLang="en-US"/>
           </a:p>
@@ -665,7 +675,7 @@
           <a:p>
             <a:fld id="{CD32C56F-BD27-4999-9E6D-D4EACE3DA9F4}" type="datetime1">
               <a:rPr lang="ko-KR" altLang="en-US" smtClean="0"/>
-              <a:t>2026-05-29</a:t>
+              <a:t>2026-05-31</a:t>
             </a:fld>
             <a:endParaRPr lang="ko-KR" altLang="en-US"/>
           </a:p>
@@ -879,7 +889,7 @@
           <a:p>
             <a:fld id="{8EF4A19C-72C8-45CA-8E3F-68A7FA345D6C}" type="datetime1">
               <a:rPr lang="ko-KR" altLang="en-US" smtClean="0"/>
-              <a:t>2026-05-29</a:t>
+              <a:t>2026-05-31</a:t>
             </a:fld>
             <a:endParaRPr lang="ko-KR" altLang="en-US"/>
           </a:p>
@@ -1103,7 +1113,7 @@
           <a:p>
             <a:fld id="{56A175B2-010B-4341-954C-5F8F5C70B124}" type="datetime1">
               <a:rPr lang="ko-KR" altLang="en-US" smtClean="0"/>
-              <a:t>2026-05-29</a:t>
+              <a:t>2026-05-31</a:t>
             </a:fld>
             <a:endParaRPr lang="ko-KR" altLang="en-US"/>
           </a:p>
@@ -1317,7 +1327,7 @@
           <a:p>
             <a:fld id="{16B83F9E-22C9-45CA-9E85-070F1D3EF530}" type="datetime1">
               <a:rPr lang="ko-KR" altLang="en-US" smtClean="0"/>
-              <a:t>2026-05-29</a:t>
+              <a:t>2026-05-31</a:t>
             </a:fld>
             <a:endParaRPr lang="ko-KR" altLang="en-US"/>
           </a:p>
@@ -1608,7 +1618,7 @@
           <a:p>
             <a:fld id="{03278F45-FB3C-4C4D-B89A-7BC3F5F229F6}" type="datetime1">
               <a:rPr lang="ko-KR" altLang="en-US" smtClean="0"/>
-              <a:t>2026-05-29</a:t>
+              <a:t>2026-05-31</a:t>
             </a:fld>
             <a:endParaRPr lang="ko-KR" altLang="en-US"/>
           </a:p>
@@ -2001,7 +2011,7 @@
           <a:p>
             <a:fld id="{38FDAC3C-35A6-415C-9F03-738A6AC328B1}" type="datetime1">
               <a:rPr lang="ko-KR" altLang="en-US" smtClean="0"/>
-              <a:t>2026-05-29</a:t>
+              <a:t>2026-05-31</a:t>
             </a:fld>
             <a:endParaRPr lang="ko-KR" altLang="en-US"/>
           </a:p>
@@ -3595,7 +3605,7 @@
           <a:p>
             <a:fld id="{507A0DF1-AEE6-4B0D-89D2-351E7B3EF65C}" type="datetime1">
               <a:rPr lang="ko-KR" altLang="en-US" smtClean="0"/>
-              <a:t>2026-05-29</a:t>
+              <a:t>2026-05-31</a:t>
             </a:fld>
             <a:endParaRPr lang="ko-KR" altLang="en-US"/>
           </a:p>
@@ -4023,7 +4033,7 @@
           <a:p>
             <a:fld id="{CA93B8C9-630F-4D57-944D-04FD37CECCD3}" type="datetime1">
               <a:rPr lang="ko-KR" altLang="en-US" smtClean="0"/>
-              <a:t>2026-05-29</a:t>
+              <a:t>2026-05-31</a:t>
             </a:fld>
             <a:endParaRPr lang="ko-KR" altLang="en-US"/>
           </a:p>
@@ -4180,7 +4190,7 @@
           <a:p>
             <a:fld id="{E986165A-AC43-4902-9541-874ECD310BA3}" type="datetime1">
               <a:rPr lang="ko-KR" altLang="en-US" smtClean="0"/>
-              <a:t>2026-05-29</a:t>
+              <a:t>2026-05-31</a:t>
             </a:fld>
             <a:endParaRPr lang="ko-KR" altLang="en-US"/>
           </a:p>
@@ -4507,7 +4517,7 @@
           <a:p>
             <a:fld id="{47E6EE6D-2B0E-43A9-87A2-7354CDB998F4}" type="datetime1">
               <a:rPr lang="ko-KR" altLang="en-US" smtClean="0"/>
-              <a:t>2026-05-29</a:t>
+              <a:t>2026-05-31</a:t>
             </a:fld>
             <a:endParaRPr lang="ko-KR" altLang="en-US"/>
           </a:p>
@@ -4811,7 +4821,7 @@
           <a:p>
             <a:fld id="{5CC5944E-0BC8-4FAA-9F94-6B4B05834E10}" type="datetime1">
               <a:rPr lang="ko-KR" altLang="en-US" smtClean="0"/>
-              <a:t>2026-05-29</a:t>
+              <a:t>2026-05-31</a:t>
             </a:fld>
             <a:endParaRPr lang="ko-KR" altLang="en-US"/>
           </a:p>
@@ -21644,10 +21654,13 @@
               <a:buChar char="ü"/>
             </a:pPr>
             <a:r>
-              <a:rPr lang="ko-KR" altLang="en-US" sz="1600"/>
-              <a:t>자세한 설명은 다음 슬라이드</a:t>
-            </a:r>
-            <a:endParaRPr lang="en-US" altLang="ko-KR" sz="1600" dirty="0"/>
+              <a:rPr lang="ko-KR" altLang="en-US" sz="1600" dirty="0"/>
+              <a:t>자세한 설명은 다음 슬라이드를 참고</a:t>
+            </a:r>
+            <a:r>
+              <a:rPr lang="en-US" altLang="ko-KR" sz="1600" dirty="0"/>
+              <a:t>.</a:t>
+            </a:r>
           </a:p>
         </p:txBody>
       </p:sp>
@@ -22824,7 +22837,7 @@
         <p:spPr>
           <a:xfrm>
             <a:off x="288790" y="958844"/>
-            <a:ext cx="11118453" cy="414024"/>
+            <a:ext cx="11118453" cy="783356"/>
           </a:xfrm>
           <a:prstGeom prst="rect">
             <a:avLst/>
@@ -22846,13 +22859,29 @@
             </a:pPr>
             <a:r>
               <a:rPr lang="ko-KR" altLang="en-US" sz="1600" dirty="0"/>
-              <a:t>글로벌 </a:t>
-            </a:r>
-            <a:r>
-              <a:rPr lang="ko-KR" altLang="en-US" sz="1600" dirty="0" err="1"/>
-              <a:t>ㄴㄴㄴ</a:t>
-            </a:r>
-            <a:endParaRPr lang="en-US" altLang="ko-KR" sz="1600" dirty="0"/>
+              <a:t>전세계 지역별 천연가스 소비량은 다음과 같다</a:t>
+            </a:r>
+            <a:r>
+              <a:rPr lang="en-US" altLang="ko-KR" sz="1600" dirty="0"/>
+              <a:t>.</a:t>
+            </a:r>
+          </a:p>
+          <a:p>
+            <a:pPr marL="835025" lvl="1" indent="-285750">
+              <a:lnSpc>
+                <a:spcPct val="150000"/>
+              </a:lnSpc>
+              <a:buFont typeface="Wingdings" panose="05000000000000000000" pitchFamily="2" charset="2"/>
+              <a:buChar char="ü"/>
+            </a:pPr>
+            <a:r>
+              <a:rPr lang="ko-KR" altLang="en-US" sz="1600" dirty="0"/>
+              <a:t>자세한 설명은 다음 슬라이드</a:t>
+            </a:r>
+            <a:r>
+              <a:rPr lang="en-US" altLang="ko-KR" sz="1600" dirty="0"/>
+              <a:t>.</a:t>
+            </a:r>
           </a:p>
         </p:txBody>
       </p:sp>
@@ -28733,6 +28762,63 @@
           </a:p>
         </p:txBody>
       </p:sp>
+      <p:sp>
+        <p:nvSpPr>
+          <p:cNvPr id="8" name="TextBox 7">
+            <a:extLst>
+              <a:ext uri="{FF2B5EF4-FFF2-40B4-BE49-F238E27FC236}">
+                <a16:creationId xmlns:a16="http://schemas.microsoft.com/office/drawing/2014/main" id="{F2FDDE0E-F2F2-AA6F-41E0-D505C63829BC}"/>
+              </a:ext>
+            </a:extLst>
+          </p:cNvPr>
+          <p:cNvSpPr txBox="1"/>
+          <p:nvPr/>
+        </p:nvSpPr>
+        <p:spPr>
+          <a:xfrm>
+            <a:off x="2489530" y="2905659"/>
+            <a:ext cx="2610799" cy="253916"/>
+          </a:xfrm>
+          <a:prstGeom prst="rect">
+            <a:avLst/>
+          </a:prstGeom>
+          <a:noFill/>
+        </p:spPr>
+        <p:txBody>
+          <a:bodyPr wrap="square">
+            <a:spAutoFit/>
+          </a:bodyPr>
+          <a:lstStyle/>
+          <a:p>
+            <a:pPr algn="ctr"/>
+            <a:r>
+              <a:rPr lang="en-US" altLang="ko-KR" sz="1050" spc="-50" dirty="0"/>
+              <a:t>&lt; </a:t>
+            </a:r>
+            <a:r>
+              <a:rPr lang="ko-KR" altLang="en-US" sz="1050" spc="-50" dirty="0"/>
+              <a:t>지역별 천연가스 소비 </a:t>
+            </a:r>
+            <a:r>
+              <a:rPr lang="en-US" altLang="ko-KR" sz="1050" spc="-50" dirty="0"/>
+              <a:t>(10</a:t>
+            </a:r>
+            <a:r>
+              <a:rPr lang="ko-KR" altLang="en-US" sz="1050" spc="-50" dirty="0"/>
+              <a:t>억 </a:t>
+            </a:r>
+            <a:r>
+              <a:rPr lang="ko-KR" altLang="en-US" sz="1050" spc="-50" dirty="0" err="1"/>
+              <a:t>입방미터</a:t>
+            </a:r>
+            <a:r>
+              <a:rPr lang="en-US" altLang="ko-KR" sz="1050" spc="-50" dirty="0"/>
+              <a:t>) &gt;</a:t>
+            </a:r>
+            <a:endParaRPr lang="ko-KR" altLang="en-US" sz="1050" dirty="0"/>
+          </a:p>
+        </p:txBody>
+      </p:sp>
     </p:spTree>
     <p:extLst>
       <p:ext uri="{BB962C8B-B14F-4D97-AF65-F5344CB8AC3E}">
@@ -28754,7 +28840,7 @@
         <p:cNvPr id="1" name="">
           <a:extLst>
             <a:ext uri="{FF2B5EF4-FFF2-40B4-BE49-F238E27FC236}">
-              <a16:creationId xmlns:a16="http://schemas.microsoft.com/office/drawing/2014/main" id="{2221EDDE-B308-8FA7-8116-DAD482D863C8}"/>
+              <a16:creationId xmlns:a16="http://schemas.microsoft.com/office/drawing/2014/main" id="{BE07A0E8-E7A5-3314-B9C8-607A82B19A7D}"/>
             </a:ext>
           </a:extLst>
         </p:cNvPr>
@@ -28769,49 +28855,12 @@
           <a:chExt cx="0" cy="0"/>
         </a:xfrm>
       </p:grpSpPr>
-      <p:pic>
-        <p:nvPicPr>
-          <p:cNvPr id="3" name="그림 2" descr="텍스트, 로고, 원, 폰트이(가) 표시된 사진&#10;&#10;AI 생성 콘텐츠는 정확하지 않을 수 있습니다.">
-            <a:extLst>
-              <a:ext uri="{FF2B5EF4-FFF2-40B4-BE49-F238E27FC236}">
-                <a16:creationId xmlns:a16="http://schemas.microsoft.com/office/drawing/2014/main" id="{396FF0BD-25A1-7840-4B63-B2ECDF7CFA54}"/>
-              </a:ext>
-            </a:extLst>
-          </p:cNvPr>
-          <p:cNvPicPr>
-            <a:picLocks noChangeAspect="1"/>
-          </p:cNvPicPr>
-          <p:nvPr/>
-        </p:nvPicPr>
-        <p:blipFill>
-          <a:blip r:embed="rId2">
-            <a:alphaModFix amt="20000"/>
-            <a:extLst>
-              <a:ext uri="{28A0092B-C50C-407E-A947-70E740481C1C}">
-                <a14:useLocalDpi xmlns:a14="http://schemas.microsoft.com/office/drawing/2010/main" val="0"/>
-              </a:ext>
-            </a:extLst>
-          </a:blip>
-          <a:stretch>
-            <a:fillRect/>
-          </a:stretch>
-        </p:blipFill>
-        <p:spPr>
-          <a:xfrm>
-            <a:off x="4012070" y="1673061"/>
-            <a:ext cx="4167861" cy="4167861"/>
-          </a:xfrm>
-          <a:prstGeom prst="rect">
-            <a:avLst/>
-          </a:prstGeom>
-        </p:spPr>
-      </p:pic>
       <p:sp>
         <p:nvSpPr>
           <p:cNvPr id="2" name="제목 1">
             <a:extLst>
               <a:ext uri="{FF2B5EF4-FFF2-40B4-BE49-F238E27FC236}">
-                <a16:creationId xmlns:a16="http://schemas.microsoft.com/office/drawing/2014/main" id="{CA03F291-495C-4A31-DF0A-8F9CC97672B8}"/>
+                <a16:creationId xmlns:a16="http://schemas.microsoft.com/office/drawing/2014/main" id="{D225CFA1-4E05-CAE3-2C03-29702A7E1241}"/>
               </a:ext>
             </a:extLst>
           </p:cNvPr>
@@ -28822,32 +28871,15 @@
             <p:ph type="title"/>
           </p:nvPr>
         </p:nvSpPr>
-        <p:spPr>
-          <a:xfrm>
-            <a:off x="831850" y="1709739"/>
-            <a:ext cx="10515600" cy="2134292"/>
-          </a:xfrm>
-          <a:effectLst>
-            <a:reflection blurRad="50800" stA="45000" endPos="44000" dir="5400000" sy="-100000" algn="bl" rotWithShape="0"/>
-          </a:effectLst>
-        </p:spPr>
+        <p:spPr/>
         <p:txBody>
           <a:bodyPr/>
           <a:lstStyle/>
           <a:p>
             <a:r>
-              <a:rPr lang="en-US" altLang="ko-KR" b="1" i="0" spc="150">
-                <a:solidFill>
-                  <a:schemeClr val="accent2"/>
-                </a:solidFill>
-              </a:rPr>
-              <a:t>T</a:t>
-            </a:r>
-            <a:r>
-              <a:rPr lang="en-US" altLang="ko-KR" sz="5400" i="0" spc="100"/>
-              <a:t>hank you</a:t>
-            </a:r>
-            <a:endParaRPr lang="ko-KR" altLang="en-US" sz="5400" i="0" spc="100"/>
+              <a:rPr lang="ko-KR" altLang="en-US" dirty="0"/>
+              <a:t>천연가스 생산과 공급</a:t>
+            </a:r>
           </a:p>
         </p:txBody>
       </p:sp>
@@ -28856,7 +28888,7 @@
           <p:cNvPr id="4" name="슬라이드 번호 개체 틀 3">
             <a:extLst>
               <a:ext uri="{FF2B5EF4-FFF2-40B4-BE49-F238E27FC236}">
-                <a16:creationId xmlns:a16="http://schemas.microsoft.com/office/drawing/2014/main" id="{6EFC0B50-C677-27B7-56F6-14F7BF9A70A9}"/>
+                <a16:creationId xmlns:a16="http://schemas.microsoft.com/office/drawing/2014/main" id="{2E795313-750D-CD91-97FE-83D26228FFBA}"/>
               </a:ext>
             </a:extLst>
           </p:cNvPr>
@@ -28880,10 +28912,2236 @@
           </a:p>
         </p:txBody>
       </p:sp>
+      <p:sp>
+        <p:nvSpPr>
+          <p:cNvPr id="3" name="TextBox 2">
+            <a:extLst>
+              <a:ext uri="{FF2B5EF4-FFF2-40B4-BE49-F238E27FC236}">
+                <a16:creationId xmlns:a16="http://schemas.microsoft.com/office/drawing/2014/main" id="{C6D7E24E-418F-8903-D73E-01934DA43B34}"/>
+              </a:ext>
+            </a:extLst>
+          </p:cNvPr>
+          <p:cNvSpPr txBox="1"/>
+          <p:nvPr/>
+        </p:nvSpPr>
+        <p:spPr>
+          <a:xfrm>
+            <a:off x="288790" y="958844"/>
+            <a:ext cx="11118453" cy="4107343"/>
+          </a:xfrm>
+          <a:prstGeom prst="rect">
+            <a:avLst/>
+          </a:prstGeom>
+          <a:noFill/>
+        </p:spPr>
+        <p:txBody>
+          <a:bodyPr wrap="square" rtlCol="0" anchor="t">
+            <a:spAutoFit/>
+          </a:bodyPr>
+          <a:lstStyle/>
+          <a:p>
+            <a:pPr marL="377825" indent="-285750">
+              <a:lnSpc>
+                <a:spcPct val="150000"/>
+              </a:lnSpc>
+              <a:buFont typeface="Arial" panose="020B0604020202020204" pitchFamily="34" charset="0"/>
+              <a:buChar char="•"/>
+            </a:pPr>
+            <a:r>
+              <a:rPr lang="en-US" altLang="ko-KR" sz="1600" dirty="0"/>
+              <a:t>(</a:t>
+            </a:r>
+            <a:r>
+              <a:rPr lang="ko-KR" altLang="en-US" sz="1600" dirty="0"/>
+              <a:t>전 슬라이드 천연가스 소비량 참고</a:t>
+            </a:r>
+            <a:r>
+              <a:rPr lang="en-US" altLang="ko-KR" sz="1600" dirty="0"/>
+              <a:t>)</a:t>
+            </a:r>
+          </a:p>
+          <a:p>
+            <a:pPr marL="377825" indent="-285750">
+              <a:lnSpc>
+                <a:spcPct val="150000"/>
+              </a:lnSpc>
+              <a:buFont typeface="Arial" panose="020B0604020202020204" pitchFamily="34" charset="0"/>
+              <a:buChar char="•"/>
+            </a:pPr>
+            <a:r>
+              <a:rPr lang="ko-KR" altLang="en-US" sz="1600" dirty="0"/>
+              <a:t>천연가스 소비는 북미 지역과 아시아태평양 지역을 중심으로 </a:t>
+            </a:r>
+            <a:r>
+              <a:rPr lang="en-US" altLang="ko-KR" sz="1600" dirty="0"/>
+              <a:t>2013~2023</a:t>
+            </a:r>
+            <a:r>
+              <a:rPr lang="ko-KR" altLang="en-US" sz="1600" dirty="0"/>
+              <a:t>년 기간에 증가하는 추세를 보이고 있다</a:t>
+            </a:r>
+            <a:r>
+              <a:rPr lang="en-US" altLang="ko-KR" sz="1600" dirty="0"/>
+              <a:t>.</a:t>
+            </a:r>
+          </a:p>
+          <a:p>
+            <a:pPr marL="377825" indent="-285750">
+              <a:lnSpc>
+                <a:spcPct val="150000"/>
+              </a:lnSpc>
+              <a:buFont typeface="Arial" panose="020B0604020202020204" pitchFamily="34" charset="0"/>
+              <a:buChar char="•"/>
+            </a:pPr>
+            <a:r>
+              <a:rPr lang="ko-KR" altLang="en-US" sz="1600" dirty="0"/>
+              <a:t>중동의 소비도 지속적으로 증가하고 있으며 유럽과 </a:t>
+            </a:r>
+            <a:r>
+              <a:rPr lang="en-US" altLang="ko-KR" sz="1600" dirty="0"/>
+              <a:t>CIS</a:t>
+            </a:r>
+            <a:r>
+              <a:rPr lang="ko-KR" altLang="en-US" sz="1600" dirty="0"/>
+              <a:t> 국가들을 포함한 다른 지역도 같은 기간 비슷한 수준이다</a:t>
+            </a:r>
+            <a:r>
+              <a:rPr lang="en-US" altLang="ko-KR" sz="1600" dirty="0"/>
+              <a:t>.</a:t>
+            </a:r>
+          </a:p>
+          <a:p>
+            <a:pPr marL="377825" indent="-285750">
+              <a:lnSpc>
+                <a:spcPct val="150000"/>
+              </a:lnSpc>
+              <a:buFont typeface="Arial" panose="020B0604020202020204" pitchFamily="34" charset="0"/>
+              <a:buChar char="•"/>
+            </a:pPr>
+            <a:endParaRPr lang="en-US" altLang="ko-KR" sz="1600" dirty="0"/>
+          </a:p>
+          <a:p>
+            <a:pPr marL="377825" indent="-285750">
+              <a:lnSpc>
+                <a:spcPct val="150000"/>
+              </a:lnSpc>
+              <a:buFont typeface="Arial" panose="020B0604020202020204" pitchFamily="34" charset="0"/>
+              <a:buChar char="•"/>
+            </a:pPr>
+            <a:r>
+              <a:rPr lang="en-US" altLang="ko-KR" sz="1600" dirty="0"/>
+              <a:t>2023</a:t>
+            </a:r>
+            <a:r>
+              <a:rPr lang="ko-KR" altLang="en-US" sz="1600" dirty="0"/>
+              <a:t>년 전 세계 천연가스 소비는 </a:t>
+            </a:r>
+            <a:r>
+              <a:rPr lang="en-US" altLang="ko-KR" sz="1600" dirty="0"/>
+              <a:t>4,010.2 (10</a:t>
+            </a:r>
+            <a:r>
+              <a:rPr lang="ko-KR" altLang="en-US" sz="1600" dirty="0"/>
+              <a:t>억 </a:t>
+            </a:r>
+            <a:r>
+              <a:rPr lang="ko-KR" altLang="en-US" sz="1600" dirty="0" err="1"/>
+              <a:t>입방미터</a:t>
+            </a:r>
+            <a:r>
+              <a:rPr lang="en-US" altLang="ko-KR" sz="1600" dirty="0"/>
+              <a:t>) </a:t>
+            </a:r>
+            <a:r>
+              <a:rPr lang="ko-KR" altLang="en-US" sz="1600" dirty="0"/>
+              <a:t>였으며</a:t>
+            </a:r>
+            <a:r>
+              <a:rPr lang="en-US" altLang="ko-KR" sz="1600" dirty="0"/>
+              <a:t>, 2013~2023</a:t>
+            </a:r>
+            <a:r>
+              <a:rPr lang="ko-KR" altLang="en-US" sz="1600" dirty="0"/>
+              <a:t>년 기간 동안 </a:t>
+            </a:r>
+            <a:r>
+              <a:rPr lang="en-US" altLang="ko-KR" sz="1600" dirty="0"/>
+              <a:t>1.7%</a:t>
+            </a:r>
+            <a:r>
+              <a:rPr lang="ko-KR" altLang="en-US" sz="1600" dirty="0"/>
+              <a:t>의 성장률을 보였다</a:t>
+            </a:r>
+            <a:r>
+              <a:rPr lang="en-US" altLang="ko-KR" sz="1600" dirty="0"/>
+              <a:t>.</a:t>
+            </a:r>
+          </a:p>
+          <a:p>
+            <a:pPr marL="835025" lvl="1" indent="-285750">
+              <a:lnSpc>
+                <a:spcPct val="150000"/>
+              </a:lnSpc>
+              <a:buFont typeface="Wingdings" panose="05000000000000000000" pitchFamily="2" charset="2"/>
+              <a:buChar char="ü"/>
+            </a:pPr>
+            <a:r>
+              <a:rPr lang="ko-KR" altLang="en-US" sz="1600" dirty="0"/>
+              <a:t>지역별 소비 비중은 북미</a:t>
+            </a:r>
+            <a:r>
+              <a:rPr lang="en-US" altLang="ko-KR" sz="1600" dirty="0"/>
+              <a:t>(27.5%), </a:t>
+            </a:r>
+            <a:r>
+              <a:rPr lang="ko-KR" altLang="en-US" sz="1600" dirty="0"/>
+              <a:t>아시아태평양</a:t>
+            </a:r>
+            <a:r>
+              <a:rPr lang="en-US" altLang="ko-KR" sz="1600" dirty="0"/>
+              <a:t>(23.3%), CIS</a:t>
+            </a:r>
+            <a:r>
+              <a:rPr lang="ko-KR" altLang="en-US" sz="1600" dirty="0"/>
+              <a:t>국가들</a:t>
+            </a:r>
+            <a:r>
+              <a:rPr lang="en-US" altLang="ko-KR" sz="1600" dirty="0"/>
+              <a:t>(14.9%), </a:t>
+            </a:r>
+            <a:r>
+              <a:rPr lang="ko-KR" altLang="en-US" sz="1600" dirty="0"/>
+              <a:t>중동</a:t>
+            </a:r>
+            <a:r>
+              <a:rPr lang="en-US" altLang="ko-KR" sz="1600" dirty="0"/>
+              <a:t>(14.4%) </a:t>
+            </a:r>
+            <a:r>
+              <a:rPr lang="ko-KR" altLang="en-US" sz="1600" dirty="0"/>
+              <a:t>순으로 나타난다</a:t>
+            </a:r>
+            <a:r>
+              <a:rPr lang="en-US" altLang="ko-KR" sz="1600" dirty="0"/>
+              <a:t>.</a:t>
+            </a:r>
+          </a:p>
+          <a:p>
+            <a:pPr marL="835025" lvl="1" indent="-285750">
+              <a:lnSpc>
+                <a:spcPct val="150000"/>
+              </a:lnSpc>
+              <a:buFont typeface="Wingdings" panose="05000000000000000000" pitchFamily="2" charset="2"/>
+              <a:buChar char="ü"/>
+            </a:pPr>
+            <a:r>
+              <a:rPr lang="ko-KR" altLang="en-US" sz="1600" dirty="0"/>
+              <a:t>아시아</a:t>
+            </a:r>
+            <a:r>
+              <a:rPr lang="en-US" altLang="ko-KR" sz="1600" dirty="0"/>
+              <a:t>, </a:t>
+            </a:r>
+            <a:r>
+              <a:rPr lang="ko-KR" altLang="en-US" sz="1600" dirty="0"/>
+              <a:t>아프리카</a:t>
+            </a:r>
+            <a:r>
+              <a:rPr lang="en-US" altLang="ko-KR" sz="1600" dirty="0"/>
+              <a:t>, </a:t>
+            </a:r>
+            <a:r>
+              <a:rPr lang="ko-KR" altLang="en-US" sz="1600" dirty="0"/>
+              <a:t>중동</a:t>
+            </a:r>
+            <a:r>
+              <a:rPr lang="en-US" altLang="ko-KR" sz="1600" dirty="0"/>
+              <a:t>,</a:t>
+            </a:r>
+            <a:r>
+              <a:rPr lang="ko-KR" altLang="en-US" sz="1600" dirty="0"/>
+              <a:t> 북미 지역은 빠른 소비증가율을 보인 반면</a:t>
+            </a:r>
+            <a:r>
+              <a:rPr lang="en-US" altLang="ko-KR" sz="1600" dirty="0"/>
+              <a:t>, </a:t>
+            </a:r>
+            <a:r>
+              <a:rPr lang="ko-KR" altLang="en-US" sz="1600" dirty="0"/>
+              <a:t>유럽과 중</a:t>
+            </a:r>
+            <a:r>
+              <a:rPr lang="en-US" altLang="ko-KR" sz="1600" dirty="0"/>
+              <a:t>·</a:t>
+            </a:r>
+            <a:r>
+              <a:rPr lang="ko-KR" altLang="en-US" sz="1600" dirty="0"/>
+              <a:t>남미는 성장률이 감소하였다</a:t>
+            </a:r>
+            <a:r>
+              <a:rPr lang="en-US" altLang="ko-KR" sz="1600" dirty="0"/>
+              <a:t>.</a:t>
+            </a:r>
+          </a:p>
+          <a:p>
+            <a:pPr marL="377825" indent="-285750">
+              <a:lnSpc>
+                <a:spcPct val="150000"/>
+              </a:lnSpc>
+              <a:buFont typeface="Arial" panose="020B0604020202020204" pitchFamily="34" charset="0"/>
+              <a:buChar char="•"/>
+            </a:pPr>
+            <a:endParaRPr lang="en-US" altLang="ko-KR" sz="1600" dirty="0"/>
+          </a:p>
+          <a:p>
+            <a:pPr marL="377825" indent="-285750">
+              <a:lnSpc>
+                <a:spcPct val="150000"/>
+              </a:lnSpc>
+              <a:buFont typeface="Arial" panose="020B0604020202020204" pitchFamily="34" charset="0"/>
+              <a:buChar char="•"/>
+            </a:pPr>
+            <a:r>
+              <a:rPr lang="ko-KR" altLang="en-US" sz="1600" dirty="0"/>
+              <a:t>국가별 소비로는 미국</a:t>
+            </a:r>
+            <a:r>
+              <a:rPr lang="en-US" altLang="ko-KR" sz="1600" dirty="0"/>
+              <a:t>(22.1%), </a:t>
+            </a:r>
+            <a:r>
+              <a:rPr lang="ko-KR" altLang="en-US" sz="1600" dirty="0"/>
+              <a:t>러시아</a:t>
+            </a:r>
+            <a:r>
+              <a:rPr lang="en-US" altLang="ko-KR" sz="1600" dirty="0"/>
+              <a:t>(11.3%),</a:t>
+            </a:r>
+            <a:r>
+              <a:rPr lang="ko-KR" altLang="en-US" sz="1600" dirty="0"/>
+              <a:t> 중국</a:t>
+            </a:r>
+            <a:r>
+              <a:rPr lang="en-US" altLang="ko-KR" sz="1600" dirty="0"/>
+              <a:t>(10.1%), </a:t>
+            </a:r>
+            <a:r>
+              <a:rPr lang="ko-KR" altLang="en-US" sz="1600" dirty="0"/>
+              <a:t>이란</a:t>
+            </a:r>
+            <a:r>
+              <a:rPr lang="en-US" altLang="ko-KR" sz="1600" dirty="0"/>
+              <a:t>(6.1%) </a:t>
+            </a:r>
+            <a:r>
+              <a:rPr lang="ko-KR" altLang="en-US" sz="1600" dirty="0"/>
+              <a:t>순으로 전세계에서 차지하는 비중이 높았다</a:t>
+            </a:r>
+            <a:r>
+              <a:rPr lang="en-US" altLang="ko-KR" sz="1600" dirty="0"/>
+              <a:t>.</a:t>
+            </a:r>
+          </a:p>
+          <a:p>
+            <a:pPr marL="835025" lvl="1" indent="-285750">
+              <a:lnSpc>
+                <a:spcPct val="150000"/>
+              </a:lnSpc>
+              <a:buFont typeface="Wingdings" panose="05000000000000000000" pitchFamily="2" charset="2"/>
+              <a:buChar char="ü"/>
+            </a:pPr>
+            <a:r>
+              <a:rPr lang="ko-KR" altLang="en-US" sz="1600" dirty="0"/>
+              <a:t>한국의 소비 비중은 </a:t>
+            </a:r>
+            <a:r>
+              <a:rPr lang="en-US" altLang="ko-KR" sz="1600" dirty="0"/>
+              <a:t>1.5%</a:t>
+            </a:r>
+            <a:r>
+              <a:rPr lang="ko-KR" altLang="en-US" sz="1600" dirty="0"/>
+              <a:t>으로 나타났다</a:t>
+            </a:r>
+            <a:r>
+              <a:rPr lang="en-US" altLang="ko-KR" sz="1600" dirty="0"/>
+              <a:t>.</a:t>
+            </a:r>
+          </a:p>
+          <a:p>
+            <a:pPr marL="835025" lvl="1" indent="-285750">
+              <a:lnSpc>
+                <a:spcPct val="150000"/>
+              </a:lnSpc>
+              <a:buFont typeface="Wingdings" panose="05000000000000000000" pitchFamily="2" charset="2"/>
+              <a:buChar char="ü"/>
+            </a:pPr>
+            <a:r>
+              <a:rPr lang="en-US" altLang="ko-KR" sz="1600" dirty="0"/>
+              <a:t>OECD</a:t>
+            </a:r>
+            <a:r>
+              <a:rPr lang="ko-KR" altLang="en-US" sz="1600" dirty="0"/>
+              <a:t> 국가들의 비중은 </a:t>
+            </a:r>
+            <a:r>
+              <a:rPr lang="en-US" altLang="ko-KR" sz="1600" dirty="0"/>
+              <a:t>43.8%</a:t>
+            </a:r>
+            <a:r>
+              <a:rPr lang="ko-KR" altLang="en-US" sz="1600" dirty="0"/>
+              <a:t>를 나타내었으며 비</a:t>
+            </a:r>
+            <a:r>
+              <a:rPr lang="en-US" altLang="ko-KR" sz="1600" dirty="0"/>
+              <a:t>OECD</a:t>
+            </a:r>
+            <a:r>
+              <a:rPr lang="ko-KR" altLang="en-US" sz="1600" dirty="0"/>
+              <a:t>국가들의 비중은 </a:t>
+            </a:r>
+            <a:r>
+              <a:rPr lang="en-US" altLang="ko-KR" sz="1600" dirty="0"/>
+              <a:t>56.2%</a:t>
+            </a:r>
+            <a:r>
+              <a:rPr lang="ko-KR" altLang="en-US" sz="1600" dirty="0"/>
+              <a:t>를 나타내었다</a:t>
+            </a:r>
+            <a:r>
+              <a:rPr lang="en-US" altLang="ko-KR" sz="1600" dirty="0"/>
+              <a:t>.</a:t>
+            </a:r>
+          </a:p>
+        </p:txBody>
+      </p:sp>
     </p:spTree>
     <p:extLst>
       <p:ext uri="{BB962C8B-B14F-4D97-AF65-F5344CB8AC3E}">
-        <p14:creationId xmlns:p14="http://schemas.microsoft.com/office/powerpoint/2010/main" val="103939182"/>
+        <p14:creationId xmlns:p14="http://schemas.microsoft.com/office/powerpoint/2010/main" val="3423313291"/>
+      </p:ext>
+    </p:extLst>
+  </p:cSld>
+  <p:clrMapOvr>
+    <a:masterClrMapping/>
+  </p:clrMapOvr>
+</p:sld>
+</file>
+
+<file path=ppt/slides/slide26.xml><?xml version="1.0" encoding="utf-8"?>
+<p:sld xmlns:a="http://schemas.openxmlformats.org/drawingml/2006/main" xmlns:r="http://schemas.openxmlformats.org/officeDocument/2006/relationships" xmlns:p="http://schemas.openxmlformats.org/presentationml/2006/main">
+  <p:cSld>
+    <p:spTree>
+      <p:nvGrpSpPr>
+        <p:cNvPr id="1" name="">
+          <a:extLst>
+            <a:ext uri="{FF2B5EF4-FFF2-40B4-BE49-F238E27FC236}">
+              <a16:creationId xmlns:a16="http://schemas.microsoft.com/office/drawing/2014/main" id="{FB53CCBB-A096-4F5E-82A0-6FA451650AF3}"/>
+            </a:ext>
+          </a:extLst>
+        </p:cNvPr>
+        <p:cNvGrpSpPr/>
+        <p:nvPr/>
+      </p:nvGrpSpPr>
+      <p:grpSpPr>
+        <a:xfrm>
+          <a:off x="0" y="0"/>
+          <a:ext cx="0" cy="0"/>
+          <a:chOff x="0" y="0"/>
+          <a:chExt cx="0" cy="0"/>
+        </a:xfrm>
+      </p:grpSpPr>
+      <p:sp>
+        <p:nvSpPr>
+          <p:cNvPr id="2" name="제목 1">
+            <a:extLst>
+              <a:ext uri="{FF2B5EF4-FFF2-40B4-BE49-F238E27FC236}">
+                <a16:creationId xmlns:a16="http://schemas.microsoft.com/office/drawing/2014/main" id="{4A390E5F-A4F8-AAD3-CC8B-AB68364297D1}"/>
+              </a:ext>
+            </a:extLst>
+          </p:cNvPr>
+          <p:cNvSpPr>
+            <a:spLocks noGrp="1"/>
+          </p:cNvSpPr>
+          <p:nvPr>
+            <p:ph type="title"/>
+          </p:nvPr>
+        </p:nvSpPr>
+        <p:spPr/>
+        <p:txBody>
+          <a:bodyPr/>
+          <a:lstStyle/>
+          <a:p>
+            <a:r>
+              <a:rPr lang="ko-KR" altLang="en-US" dirty="0"/>
+              <a:t>천연가스 소비</a:t>
+            </a:r>
+          </a:p>
+        </p:txBody>
+      </p:sp>
+      <p:sp>
+        <p:nvSpPr>
+          <p:cNvPr id="4" name="슬라이드 번호 개체 틀 3">
+            <a:extLst>
+              <a:ext uri="{FF2B5EF4-FFF2-40B4-BE49-F238E27FC236}">
+                <a16:creationId xmlns:a16="http://schemas.microsoft.com/office/drawing/2014/main" id="{283DFC10-B1F8-C620-A895-687007ABFB07}"/>
+              </a:ext>
+            </a:extLst>
+          </p:cNvPr>
+          <p:cNvSpPr>
+            <a:spLocks noGrp="1"/>
+          </p:cNvSpPr>
+          <p:nvPr>
+            <p:ph type="sldNum" sz="quarter" idx="12"/>
+          </p:nvPr>
+        </p:nvSpPr>
+        <p:spPr/>
+        <p:txBody>
+          <a:bodyPr/>
+          <a:lstStyle/>
+          <a:p>
+            <a:fld id="{109C872D-39A9-4065-8BF3-6A613116E2A1}" type="slidenum">
+              <a:rPr lang="ko-KR" altLang="en-US" smtClean="0"/>
+              <a:t>26</a:t>
+            </a:fld>
+            <a:endParaRPr lang="ko-KR" altLang="en-US"/>
+          </a:p>
+        </p:txBody>
+      </p:sp>
+      <p:sp>
+        <p:nvSpPr>
+          <p:cNvPr id="3" name="TextBox 2">
+            <a:extLst>
+              <a:ext uri="{FF2B5EF4-FFF2-40B4-BE49-F238E27FC236}">
+                <a16:creationId xmlns:a16="http://schemas.microsoft.com/office/drawing/2014/main" id="{0D9406ED-3EC3-CA2F-B6EB-A9691A7965F6}"/>
+              </a:ext>
+            </a:extLst>
+          </p:cNvPr>
+          <p:cNvSpPr txBox="1"/>
+          <p:nvPr/>
+        </p:nvSpPr>
+        <p:spPr>
+          <a:xfrm>
+            <a:off x="288790" y="958844"/>
+            <a:ext cx="11118453" cy="5215338"/>
+          </a:xfrm>
+          <a:prstGeom prst="rect">
+            <a:avLst/>
+          </a:prstGeom>
+          <a:noFill/>
+        </p:spPr>
+        <p:txBody>
+          <a:bodyPr wrap="square" rtlCol="0" anchor="t">
+            <a:spAutoFit/>
+          </a:bodyPr>
+          <a:lstStyle/>
+          <a:p>
+            <a:pPr marL="377825" indent="-285750">
+              <a:lnSpc>
+                <a:spcPct val="150000"/>
+              </a:lnSpc>
+              <a:buFont typeface="Arial" panose="020B0604020202020204" pitchFamily="34" charset="0"/>
+              <a:buChar char="•"/>
+            </a:pPr>
+            <a:r>
+              <a:rPr lang="ko-KR" altLang="en-US" sz="1600" dirty="0"/>
+              <a:t>글로벌 액화천연가스</a:t>
+            </a:r>
+            <a:r>
+              <a:rPr lang="en-US" altLang="ko-KR" sz="1600" dirty="0"/>
+              <a:t>(LNG) </a:t>
+            </a:r>
+            <a:r>
+              <a:rPr lang="ko-KR" altLang="en-US" sz="1600" dirty="0"/>
+              <a:t>수입은 지난 수십 년간 에너지 시장에서 가장 빠르게 성장한 분야이다</a:t>
+            </a:r>
+            <a:r>
+              <a:rPr lang="en-US" altLang="ko-KR" sz="1600" dirty="0"/>
+              <a:t>.</a:t>
+            </a:r>
+          </a:p>
+          <a:p>
+            <a:pPr marL="835025" lvl="1" indent="-285750">
+              <a:lnSpc>
+                <a:spcPct val="150000"/>
+              </a:lnSpc>
+              <a:buFont typeface="Wingdings" panose="05000000000000000000" pitchFamily="2" charset="2"/>
+              <a:buChar char="ü"/>
+            </a:pPr>
+            <a:r>
+              <a:rPr lang="ko-KR" altLang="en-US" sz="1600" dirty="0"/>
+              <a:t>공급망 유연성 증대와 에너지 안보 강화에 핵심적 역할을 해왔다</a:t>
+            </a:r>
+            <a:r>
+              <a:rPr lang="en-US" altLang="ko-KR" sz="1600" dirty="0"/>
+              <a:t>.</a:t>
+            </a:r>
+          </a:p>
+          <a:p>
+            <a:pPr marL="835025" lvl="1" indent="-285750">
+              <a:lnSpc>
+                <a:spcPct val="150000"/>
+              </a:lnSpc>
+              <a:buFont typeface="Wingdings" panose="05000000000000000000" pitchFamily="2" charset="2"/>
+              <a:buChar char="ü"/>
+            </a:pPr>
+            <a:r>
+              <a:rPr lang="ko-KR" altLang="en-US" sz="1600" dirty="0"/>
+              <a:t>기존 파이프라인 수송 방식에 비해</a:t>
+            </a:r>
+            <a:r>
+              <a:rPr lang="en-US" altLang="ko-KR" sz="1600" dirty="0"/>
+              <a:t>, </a:t>
+            </a:r>
+            <a:r>
+              <a:rPr lang="ko-KR" altLang="en-US" sz="1600" dirty="0"/>
+              <a:t>거리 및 지정학적 제약으로부터 자유롭기 때문에 천연가스 국제무역을 가능하게 하는 핵심 기술이 되었다</a:t>
+            </a:r>
+            <a:r>
+              <a:rPr lang="en-US" altLang="ko-KR" sz="1600" dirty="0"/>
+              <a:t>.</a:t>
+            </a:r>
+          </a:p>
+          <a:p>
+            <a:pPr marL="1292225" lvl="2" indent="-285750">
+              <a:lnSpc>
+                <a:spcPct val="150000"/>
+              </a:lnSpc>
+              <a:buFont typeface="Wingdings" panose="05000000000000000000" pitchFamily="2" charset="2"/>
+              <a:buChar char="Ø"/>
+            </a:pPr>
+            <a:r>
+              <a:rPr lang="ko-KR" altLang="en-US" sz="1600" dirty="0"/>
+              <a:t>천연가스 자원이 풍부한 북미</a:t>
+            </a:r>
+            <a:r>
+              <a:rPr lang="en-US" altLang="ko-KR" sz="1600" dirty="0"/>
+              <a:t>, </a:t>
+            </a:r>
+            <a:r>
+              <a:rPr lang="ko-KR" altLang="en-US" sz="1600" dirty="0"/>
+              <a:t>중동</a:t>
+            </a:r>
+            <a:r>
+              <a:rPr lang="en-US" altLang="ko-KR" sz="1600" dirty="0"/>
+              <a:t>, </a:t>
+            </a:r>
+            <a:r>
+              <a:rPr lang="ko-KR" altLang="en-US" sz="1600" dirty="0"/>
+              <a:t>러시아 등의 지역에서 생산된 가스가</a:t>
+            </a:r>
+            <a:r>
+              <a:rPr lang="en-US" altLang="ko-KR" sz="1600" dirty="0"/>
+              <a:t>, </a:t>
+            </a:r>
+            <a:r>
+              <a:rPr lang="ko-KR" altLang="en-US" sz="1600" dirty="0"/>
+              <a:t>수요가 집중된 동아시아</a:t>
+            </a:r>
+            <a:r>
+              <a:rPr lang="en-US" altLang="ko-KR" sz="1600" dirty="0"/>
+              <a:t>, </a:t>
+            </a:r>
+            <a:r>
+              <a:rPr lang="ko-KR" altLang="en-US" sz="1600" dirty="0"/>
+              <a:t>유럽</a:t>
+            </a:r>
+            <a:r>
+              <a:rPr lang="en-US" altLang="ko-KR" sz="1600" dirty="0"/>
+              <a:t>, </a:t>
+            </a:r>
+            <a:r>
+              <a:rPr lang="ko-KR" altLang="en-US" sz="1600" dirty="0"/>
+              <a:t>남아시아 지역으로 이전됨으로써 천연가스는 석유 시장과 유사한 통합성과 유연성을 갖춘 글로벌 상품으로 진화하고 있다</a:t>
+            </a:r>
+            <a:r>
+              <a:rPr lang="en-US" altLang="ko-KR" sz="1600" dirty="0"/>
+              <a:t>.</a:t>
+            </a:r>
+          </a:p>
+          <a:p>
+            <a:pPr marL="835025" lvl="1" indent="-285750">
+              <a:lnSpc>
+                <a:spcPct val="150000"/>
+              </a:lnSpc>
+              <a:buFont typeface="Wingdings" panose="05000000000000000000" pitchFamily="2" charset="2"/>
+              <a:buChar char="ü"/>
+            </a:pPr>
+            <a:r>
+              <a:rPr lang="ko-KR" altLang="en-US" sz="1600" dirty="0"/>
+              <a:t>수입국 측면에서 아시아는 전세계 </a:t>
+            </a:r>
+            <a:r>
+              <a:rPr lang="en-US" altLang="ko-KR" sz="1600" dirty="0"/>
+              <a:t>LNG </a:t>
+            </a:r>
+            <a:r>
+              <a:rPr lang="ko-KR" altLang="en-US" sz="1600" dirty="0"/>
+              <a:t>수요의 중심지로 부상하였다</a:t>
+            </a:r>
+            <a:r>
+              <a:rPr lang="en-US" altLang="ko-KR" sz="1600" dirty="0"/>
+              <a:t>.</a:t>
+            </a:r>
+          </a:p>
+          <a:p>
+            <a:pPr marL="1292225" lvl="2" indent="-285750">
+              <a:lnSpc>
+                <a:spcPct val="150000"/>
+              </a:lnSpc>
+              <a:buFont typeface="Wingdings" panose="05000000000000000000" pitchFamily="2" charset="2"/>
+              <a:buChar char="Ø"/>
+            </a:pPr>
+            <a:r>
+              <a:rPr lang="ko-KR" altLang="en-US" sz="1600" dirty="0"/>
+              <a:t>일본은 오랜 기간 세계 최대 </a:t>
+            </a:r>
+            <a:r>
+              <a:rPr lang="en-US" altLang="ko-KR" sz="1600" dirty="0"/>
+              <a:t>LNG </a:t>
+            </a:r>
+            <a:r>
+              <a:rPr lang="ko-KR" altLang="en-US" sz="1600" dirty="0"/>
+              <a:t>수입국의 지위를 유지하였고</a:t>
+            </a:r>
+            <a:r>
+              <a:rPr lang="en-US" altLang="ko-KR" sz="1600" dirty="0"/>
+              <a:t>, 2011</a:t>
+            </a:r>
+            <a:r>
+              <a:rPr lang="ko-KR" altLang="en-US" sz="1600" dirty="0"/>
+              <a:t>년 후쿠시마 원전 사고 이후 원전 의존도를 대폭 축소하고</a:t>
+            </a:r>
+            <a:r>
+              <a:rPr lang="en-US" altLang="ko-KR" sz="1600" dirty="0"/>
+              <a:t>, LNG </a:t>
+            </a:r>
+            <a:r>
+              <a:rPr lang="ko-KR" altLang="en-US" sz="1600" dirty="0"/>
+              <a:t>수입을 대체 에너지원으로 급격히 확대하였다</a:t>
+            </a:r>
+            <a:r>
+              <a:rPr lang="en-US" altLang="ko-KR" sz="1600" dirty="0"/>
+              <a:t>.</a:t>
+            </a:r>
+          </a:p>
+          <a:p>
+            <a:pPr marL="1292225" lvl="2" indent="-285750">
+              <a:lnSpc>
+                <a:spcPct val="150000"/>
+              </a:lnSpc>
+              <a:buFont typeface="Wingdings" panose="05000000000000000000" pitchFamily="2" charset="2"/>
+              <a:buChar char="Ø"/>
+            </a:pPr>
+            <a:r>
+              <a:rPr lang="ko-KR" altLang="en-US" sz="1600" dirty="0"/>
+              <a:t>중국은 최근 에너지 수요 급증과 </a:t>
+            </a:r>
+            <a:r>
+              <a:rPr lang="ko-KR" altLang="en-US" sz="1600" dirty="0" err="1"/>
+              <a:t>대기질</a:t>
+            </a:r>
+            <a:r>
+              <a:rPr lang="ko-KR" altLang="en-US" sz="1600" dirty="0"/>
+              <a:t> 개선 목표에 따라 </a:t>
+            </a:r>
+            <a:r>
+              <a:rPr lang="en-US" altLang="ko-KR" sz="1600" dirty="0"/>
+              <a:t>LNG </a:t>
+            </a:r>
+            <a:r>
+              <a:rPr lang="ko-KR" altLang="en-US" sz="1600" dirty="0"/>
+              <a:t>수입을 대폭 늘려</a:t>
+            </a:r>
+            <a:r>
+              <a:rPr lang="en-US" altLang="ko-KR" sz="1600" dirty="0"/>
+              <a:t>, 2021</a:t>
+            </a:r>
+            <a:r>
+              <a:rPr lang="ko-KR" altLang="en-US" sz="1600" dirty="0"/>
+              <a:t>년 처음으로 일본을 제치고 세계 최대 </a:t>
+            </a:r>
+            <a:r>
+              <a:rPr lang="en-US" altLang="ko-KR" sz="1600" dirty="0"/>
+              <a:t>LNG </a:t>
+            </a:r>
+            <a:r>
+              <a:rPr lang="ko-KR" altLang="en-US" sz="1600" dirty="0"/>
+              <a:t>수입국이 되었다</a:t>
+            </a:r>
+            <a:r>
+              <a:rPr lang="en-US" altLang="ko-KR" sz="1600" dirty="0"/>
+              <a:t>.</a:t>
+            </a:r>
+          </a:p>
+          <a:p>
+            <a:pPr marL="1292225" lvl="2" indent="-285750">
+              <a:lnSpc>
+                <a:spcPct val="150000"/>
+              </a:lnSpc>
+              <a:buFont typeface="Wingdings" panose="05000000000000000000" pitchFamily="2" charset="2"/>
+              <a:buChar char="Ø"/>
+            </a:pPr>
+            <a:r>
+              <a:rPr lang="ko-KR" altLang="en-US" sz="1600" dirty="0"/>
+              <a:t>인도와 한국 또한 수입량을 지속적으로 확대하고 있으며</a:t>
+            </a:r>
+            <a:r>
+              <a:rPr lang="en-US" altLang="ko-KR" sz="1600" dirty="0"/>
+              <a:t>, </a:t>
+            </a:r>
+            <a:r>
+              <a:rPr lang="ko-KR" altLang="en-US" sz="1600" dirty="0"/>
+              <a:t>아시아 전체는 현재 글로벌 </a:t>
+            </a:r>
+            <a:r>
+              <a:rPr lang="en-US" altLang="ko-KR" sz="1600" dirty="0"/>
+              <a:t>LNG </a:t>
+            </a:r>
+            <a:r>
+              <a:rPr lang="ko-KR" altLang="en-US" sz="1600" dirty="0"/>
+              <a:t>수입의 약 </a:t>
+            </a:r>
+            <a:r>
+              <a:rPr lang="en-US" altLang="ko-KR" sz="1600" dirty="0"/>
+              <a:t>70%</a:t>
+            </a:r>
+            <a:r>
+              <a:rPr lang="ko-KR" altLang="en-US" sz="1600" dirty="0"/>
+              <a:t>를 차지하고 있다</a:t>
+            </a:r>
+            <a:r>
+              <a:rPr lang="en-US" altLang="ko-KR" sz="1600" dirty="0"/>
+              <a:t>.</a:t>
+            </a:r>
+          </a:p>
+        </p:txBody>
+      </p:sp>
+    </p:spTree>
+    <p:extLst>
+      <p:ext uri="{BB962C8B-B14F-4D97-AF65-F5344CB8AC3E}">
+        <p14:creationId xmlns:p14="http://schemas.microsoft.com/office/powerpoint/2010/main" val="3435324664"/>
+      </p:ext>
+    </p:extLst>
+  </p:cSld>
+  <p:clrMapOvr>
+    <a:masterClrMapping/>
+  </p:clrMapOvr>
+</p:sld>
+</file>
+
+<file path=ppt/slides/slide27.xml><?xml version="1.0" encoding="utf-8"?>
+<p:sld xmlns:a="http://schemas.openxmlformats.org/drawingml/2006/main" xmlns:r="http://schemas.openxmlformats.org/officeDocument/2006/relationships" xmlns:p="http://schemas.openxmlformats.org/presentationml/2006/main">
+  <p:cSld>
+    <p:spTree>
+      <p:nvGrpSpPr>
+        <p:cNvPr id="1" name="">
+          <a:extLst>
+            <a:ext uri="{FF2B5EF4-FFF2-40B4-BE49-F238E27FC236}">
+              <a16:creationId xmlns:a16="http://schemas.microsoft.com/office/drawing/2014/main" id="{5FA8CD1B-9FA0-D50E-9F70-DB9EB64D9260}"/>
+            </a:ext>
+          </a:extLst>
+        </p:cNvPr>
+        <p:cNvGrpSpPr/>
+        <p:nvPr/>
+      </p:nvGrpSpPr>
+      <p:grpSpPr>
+        <a:xfrm>
+          <a:off x="0" y="0"/>
+          <a:ext cx="0" cy="0"/>
+          <a:chOff x="0" y="0"/>
+          <a:chExt cx="0" cy="0"/>
+        </a:xfrm>
+      </p:grpSpPr>
+      <p:sp>
+        <p:nvSpPr>
+          <p:cNvPr id="2" name="제목 1">
+            <a:extLst>
+              <a:ext uri="{FF2B5EF4-FFF2-40B4-BE49-F238E27FC236}">
+                <a16:creationId xmlns:a16="http://schemas.microsoft.com/office/drawing/2014/main" id="{79B34FB3-EDD9-C0E4-685A-3951CEB74506}"/>
+              </a:ext>
+            </a:extLst>
+          </p:cNvPr>
+          <p:cNvSpPr>
+            <a:spLocks noGrp="1"/>
+          </p:cNvSpPr>
+          <p:nvPr>
+            <p:ph type="title"/>
+          </p:nvPr>
+        </p:nvSpPr>
+        <p:spPr/>
+        <p:txBody>
+          <a:bodyPr/>
+          <a:lstStyle/>
+          <a:p>
+            <a:r>
+              <a:rPr lang="ko-KR" altLang="en-US" dirty="0"/>
+              <a:t>천연가스 소비</a:t>
+            </a:r>
+          </a:p>
+        </p:txBody>
+      </p:sp>
+      <p:sp>
+        <p:nvSpPr>
+          <p:cNvPr id="4" name="슬라이드 번호 개체 틀 3">
+            <a:extLst>
+              <a:ext uri="{FF2B5EF4-FFF2-40B4-BE49-F238E27FC236}">
+                <a16:creationId xmlns:a16="http://schemas.microsoft.com/office/drawing/2014/main" id="{248B2577-1AF3-CD0B-486F-C29A2495E75D}"/>
+              </a:ext>
+            </a:extLst>
+          </p:cNvPr>
+          <p:cNvSpPr>
+            <a:spLocks noGrp="1"/>
+          </p:cNvSpPr>
+          <p:nvPr>
+            <p:ph type="sldNum" sz="quarter" idx="12"/>
+          </p:nvPr>
+        </p:nvSpPr>
+        <p:spPr/>
+        <p:txBody>
+          <a:bodyPr/>
+          <a:lstStyle/>
+          <a:p>
+            <a:fld id="{109C872D-39A9-4065-8BF3-6A613116E2A1}" type="slidenum">
+              <a:rPr lang="ko-KR" altLang="en-US" smtClean="0"/>
+              <a:t>27</a:t>
+            </a:fld>
+            <a:endParaRPr lang="ko-KR" altLang="en-US"/>
+          </a:p>
+        </p:txBody>
+      </p:sp>
+      <p:sp>
+        <p:nvSpPr>
+          <p:cNvPr id="3" name="TextBox 2">
+            <a:extLst>
+              <a:ext uri="{FF2B5EF4-FFF2-40B4-BE49-F238E27FC236}">
+                <a16:creationId xmlns:a16="http://schemas.microsoft.com/office/drawing/2014/main" id="{FDD62BF2-D3B7-7B98-DDD0-10A5909F39DB}"/>
+              </a:ext>
+            </a:extLst>
+          </p:cNvPr>
+          <p:cNvSpPr txBox="1"/>
+          <p:nvPr/>
+        </p:nvSpPr>
+        <p:spPr>
+          <a:xfrm>
+            <a:off x="288790" y="958844"/>
+            <a:ext cx="11118453" cy="4846007"/>
+          </a:xfrm>
+          <a:prstGeom prst="rect">
+            <a:avLst/>
+          </a:prstGeom>
+          <a:noFill/>
+        </p:spPr>
+        <p:txBody>
+          <a:bodyPr wrap="square" rtlCol="0" anchor="t">
+            <a:spAutoFit/>
+          </a:bodyPr>
+          <a:lstStyle/>
+          <a:p>
+            <a:pPr marL="835025" lvl="1" indent="-285750">
+              <a:lnSpc>
+                <a:spcPct val="150000"/>
+              </a:lnSpc>
+              <a:buFont typeface="Wingdings" panose="05000000000000000000" pitchFamily="2" charset="2"/>
+              <a:buChar char="ü"/>
+            </a:pPr>
+            <a:r>
+              <a:rPr lang="ko-KR" altLang="en-US" sz="1600" dirty="0"/>
+              <a:t>유럽 역시 </a:t>
+            </a:r>
+            <a:r>
+              <a:rPr lang="en-US" altLang="ko-KR" sz="1600" dirty="0"/>
+              <a:t>LNG </a:t>
+            </a:r>
+            <a:r>
+              <a:rPr lang="ko-KR" altLang="en-US" sz="1600" dirty="0"/>
+              <a:t>수입 시장에서 중요한 변화를 보이고 있다</a:t>
+            </a:r>
+            <a:r>
+              <a:rPr lang="en-US" altLang="ko-KR" sz="1600" dirty="0"/>
+              <a:t>.</a:t>
+            </a:r>
+          </a:p>
+          <a:p>
+            <a:pPr marL="1292225" lvl="2" indent="-285750">
+              <a:lnSpc>
+                <a:spcPct val="150000"/>
+              </a:lnSpc>
+              <a:buFont typeface="Wingdings" panose="05000000000000000000" pitchFamily="2" charset="2"/>
+              <a:buChar char="Ø"/>
+            </a:pPr>
+            <a:r>
+              <a:rPr lang="ko-KR" altLang="en-US" sz="1600" dirty="0"/>
+              <a:t>과거 유럽은 러시아산 파이프라인 가스에 대한 높은 의존도를 보여왔지만</a:t>
+            </a:r>
+            <a:r>
+              <a:rPr lang="en-US" altLang="ko-KR" sz="1600" dirty="0"/>
+              <a:t>, 2022</a:t>
+            </a:r>
+            <a:r>
+              <a:rPr lang="ko-KR" altLang="en-US" sz="1600" dirty="0"/>
+              <a:t>년 </a:t>
+            </a:r>
+            <a:r>
+              <a:rPr lang="ko-KR" altLang="en-US" sz="1600" dirty="0" err="1"/>
+              <a:t>러이사</a:t>
+            </a:r>
+            <a:r>
+              <a:rPr lang="en-US" altLang="ko-KR" sz="1600" dirty="0"/>
+              <a:t>-</a:t>
+            </a:r>
+            <a:r>
+              <a:rPr lang="ko-KR" altLang="en-US" sz="1600" dirty="0"/>
+              <a:t>우크라이나 전쟁 이후 에너지 안보에 대한 우려가 급증하여 </a:t>
+            </a:r>
+            <a:r>
+              <a:rPr lang="en-US" altLang="ko-KR" sz="1600" dirty="0"/>
+              <a:t>LNG</a:t>
+            </a:r>
+            <a:r>
+              <a:rPr lang="ko-KR" altLang="en-US" sz="1600" dirty="0"/>
+              <a:t>수입을 전략적으로 확대하는 방향으로 전환하였다</a:t>
+            </a:r>
+            <a:r>
+              <a:rPr lang="en-US" altLang="ko-KR" sz="1600" dirty="0"/>
+              <a:t>.</a:t>
+            </a:r>
+          </a:p>
+          <a:p>
+            <a:pPr marL="1292225" lvl="2" indent="-285750">
+              <a:lnSpc>
+                <a:spcPct val="150000"/>
+              </a:lnSpc>
+              <a:buFont typeface="Wingdings" panose="05000000000000000000" pitchFamily="2" charset="2"/>
+              <a:buChar char="Ø"/>
+            </a:pPr>
+            <a:r>
+              <a:rPr lang="ko-KR" altLang="en-US" sz="1600" dirty="0"/>
+              <a:t>독일</a:t>
+            </a:r>
+            <a:r>
+              <a:rPr lang="en-US" altLang="ko-KR" sz="1600" dirty="0"/>
+              <a:t>, </a:t>
+            </a:r>
+            <a:r>
+              <a:rPr lang="ko-KR" altLang="en-US" sz="1600" dirty="0"/>
+              <a:t>폴란드</a:t>
+            </a:r>
+            <a:r>
+              <a:rPr lang="en-US" altLang="ko-KR" sz="1600" dirty="0"/>
+              <a:t>, </a:t>
+            </a:r>
+            <a:r>
+              <a:rPr lang="ko-KR" altLang="en-US" sz="1600" dirty="0"/>
+              <a:t>핀란드 등은 기존에 부재하던 </a:t>
+            </a:r>
+            <a:r>
+              <a:rPr lang="en-US" altLang="ko-KR" sz="1600" dirty="0"/>
+              <a:t>LNG </a:t>
+            </a:r>
+            <a:r>
+              <a:rPr lang="ko-KR" altLang="en-US" sz="1600" dirty="0"/>
+              <a:t>터미널을 신속히 구축하거나 기존 시설을 확장하였고</a:t>
+            </a:r>
+            <a:r>
+              <a:rPr lang="en-US" altLang="ko-KR" sz="1600" dirty="0"/>
+              <a:t>, </a:t>
+            </a:r>
+            <a:r>
+              <a:rPr lang="ko-KR" altLang="en-US" sz="1600" dirty="0"/>
+              <a:t>미국 및 카타르 등으로부터 장기 수입계약 체결을 통해 공급선 다변화를 적극 추진하고 있다</a:t>
+            </a:r>
+            <a:r>
+              <a:rPr lang="en-US" altLang="ko-KR" sz="1600" dirty="0"/>
+              <a:t>.</a:t>
+            </a:r>
+          </a:p>
+          <a:p>
+            <a:pPr marL="1292225" lvl="2" indent="-285750">
+              <a:lnSpc>
+                <a:spcPct val="150000"/>
+              </a:lnSpc>
+              <a:buFont typeface="Wingdings" panose="05000000000000000000" pitchFamily="2" charset="2"/>
+              <a:buChar char="Ø"/>
+            </a:pPr>
+            <a:r>
+              <a:rPr lang="ko-KR" altLang="en-US" sz="1600" dirty="0"/>
+              <a:t>그 결과 </a:t>
+            </a:r>
+            <a:r>
+              <a:rPr lang="en-US" altLang="ko-KR" sz="1600" dirty="0"/>
+              <a:t>2022-2023</a:t>
+            </a:r>
+            <a:r>
+              <a:rPr lang="ko-KR" altLang="en-US" sz="1600" dirty="0"/>
+              <a:t>년 사이 유럽의 </a:t>
+            </a:r>
+            <a:r>
+              <a:rPr lang="en-US" altLang="ko-KR" sz="1600" dirty="0"/>
+              <a:t>LNG </a:t>
+            </a:r>
+            <a:r>
+              <a:rPr lang="ko-KR" altLang="en-US" sz="1600" dirty="0"/>
+              <a:t>수입량은 전년 대비 약 </a:t>
+            </a:r>
+            <a:r>
+              <a:rPr lang="en-US" altLang="ko-KR" sz="1600" dirty="0"/>
+              <a:t>60% </a:t>
+            </a:r>
+            <a:r>
+              <a:rPr lang="ko-KR" altLang="en-US" sz="1600" dirty="0"/>
+              <a:t>증가하였으며</a:t>
+            </a:r>
+            <a:r>
+              <a:rPr lang="en-US" altLang="ko-KR" sz="1600" dirty="0"/>
+              <a:t>, </a:t>
+            </a:r>
+            <a:r>
+              <a:rPr lang="ko-KR" altLang="en-US" sz="1600" dirty="0"/>
+              <a:t>이는 글로벌 </a:t>
+            </a:r>
+            <a:r>
+              <a:rPr lang="en-US" altLang="ko-KR" sz="1600" dirty="0"/>
+              <a:t>LNG </a:t>
+            </a:r>
+            <a:r>
+              <a:rPr lang="ko-KR" altLang="en-US" sz="1600" dirty="0"/>
+              <a:t>수급 및 가격에 상당한 파급효과를 미쳤다</a:t>
+            </a:r>
+            <a:r>
+              <a:rPr lang="en-US" altLang="ko-KR" sz="1600" dirty="0"/>
+              <a:t>.</a:t>
+            </a:r>
+          </a:p>
+          <a:p>
+            <a:pPr marL="1292225" lvl="2" indent="-285750">
+              <a:lnSpc>
+                <a:spcPct val="150000"/>
+              </a:lnSpc>
+              <a:buFont typeface="Wingdings" panose="05000000000000000000" pitchFamily="2" charset="2"/>
+              <a:buChar char="Ø"/>
+            </a:pPr>
+            <a:endParaRPr lang="en-US" altLang="ko-KR" sz="1600" dirty="0"/>
+          </a:p>
+          <a:p>
+            <a:pPr marL="377825" indent="-285750">
+              <a:lnSpc>
+                <a:spcPct val="150000"/>
+              </a:lnSpc>
+              <a:buFont typeface="Arial" panose="020B0604020202020204" pitchFamily="34" charset="0"/>
+              <a:buChar char="•"/>
+            </a:pPr>
+            <a:r>
+              <a:rPr lang="ko-KR" altLang="en-US" sz="1600" dirty="0"/>
+              <a:t>글로벌 </a:t>
+            </a:r>
+            <a:r>
+              <a:rPr lang="en-US" altLang="ko-KR" sz="1600" dirty="0"/>
+              <a:t>LNG </a:t>
+            </a:r>
+            <a:r>
+              <a:rPr lang="ko-KR" altLang="en-US" sz="1600" dirty="0"/>
+              <a:t>시장은 계약 구조 측면에서도 중요한 변화를 경험하고 있다</a:t>
+            </a:r>
+            <a:r>
+              <a:rPr lang="en-US" altLang="ko-KR" sz="1600" dirty="0"/>
+              <a:t>.</a:t>
+            </a:r>
+          </a:p>
+          <a:p>
+            <a:pPr marL="835025" lvl="1" indent="-285750">
+              <a:lnSpc>
+                <a:spcPct val="150000"/>
+              </a:lnSpc>
+              <a:buFont typeface="Wingdings" panose="05000000000000000000" pitchFamily="2" charset="2"/>
+              <a:buChar char="ü"/>
+            </a:pPr>
+            <a:r>
+              <a:rPr lang="ko-KR" altLang="en-US" sz="1600" dirty="0"/>
+              <a:t>과거에는 </a:t>
+            </a:r>
+            <a:r>
+              <a:rPr lang="en-US" altLang="ko-KR" sz="1600" dirty="0"/>
+              <a:t>20</a:t>
+            </a:r>
+            <a:r>
+              <a:rPr lang="ko-KR" altLang="en-US" sz="1600" dirty="0"/>
+              <a:t>년 이상의 장기 고정가격 계약이 시장의 표준이었으나</a:t>
+            </a:r>
+            <a:r>
+              <a:rPr lang="en-US" altLang="ko-KR" sz="1600" dirty="0"/>
+              <a:t>, </a:t>
+            </a:r>
+            <a:r>
+              <a:rPr lang="ko-KR" altLang="en-US" sz="1600" dirty="0"/>
+              <a:t>최근에는 현물 시장 및 단기 계약의 비중이 늘고 있다</a:t>
+            </a:r>
+            <a:r>
+              <a:rPr lang="en-US" altLang="ko-KR" sz="1600" dirty="0"/>
+              <a:t>.</a:t>
+            </a:r>
+          </a:p>
+          <a:p>
+            <a:pPr marL="1292225" lvl="2" indent="-285750">
+              <a:lnSpc>
+                <a:spcPct val="150000"/>
+              </a:lnSpc>
+              <a:buFont typeface="Wingdings" panose="05000000000000000000" pitchFamily="2" charset="2"/>
+              <a:buChar char="Ø"/>
+            </a:pPr>
+            <a:r>
+              <a:rPr lang="ko-KR" altLang="en-US" sz="1600" dirty="0"/>
+              <a:t>이는 수요의 변동성 증가</a:t>
+            </a:r>
+            <a:r>
+              <a:rPr lang="en-US" altLang="ko-KR" sz="1600" dirty="0"/>
+              <a:t>, </a:t>
+            </a:r>
+            <a:r>
+              <a:rPr lang="ko-KR" altLang="en-US" sz="1600" dirty="0"/>
+              <a:t>시장 가격에 대한 민감성 강화</a:t>
+            </a:r>
+            <a:r>
+              <a:rPr lang="en-US" altLang="ko-KR" sz="1600" dirty="0"/>
+              <a:t>, </a:t>
+            </a:r>
+            <a:r>
+              <a:rPr lang="ko-KR" altLang="en-US" sz="1600" dirty="0"/>
+              <a:t>공급국 간 경쟁 심화 등과 같은 요인에 기인하며</a:t>
+            </a:r>
+            <a:r>
+              <a:rPr lang="en-US" altLang="ko-KR" sz="1600" dirty="0"/>
+              <a:t>, </a:t>
+            </a:r>
+            <a:r>
+              <a:rPr lang="ko-KR" altLang="en-US" sz="1600" dirty="0"/>
+              <a:t>결과적으로 </a:t>
+            </a:r>
+            <a:r>
+              <a:rPr lang="en-US" altLang="ko-KR" sz="1600" dirty="0"/>
+              <a:t>LNG </a:t>
+            </a:r>
+            <a:r>
+              <a:rPr lang="ko-KR" altLang="en-US" sz="1600" dirty="0"/>
+              <a:t>거래의 유연성과 시장 반응성을 높이는 방향으로 시장이 진화하고 있음을 의미한다</a:t>
+            </a:r>
+            <a:r>
+              <a:rPr lang="en-US" altLang="ko-KR" sz="1600" dirty="0"/>
+              <a:t>.</a:t>
+            </a:r>
+          </a:p>
+        </p:txBody>
+      </p:sp>
+    </p:spTree>
+    <p:extLst>
+      <p:ext uri="{BB962C8B-B14F-4D97-AF65-F5344CB8AC3E}">
+        <p14:creationId xmlns:p14="http://schemas.microsoft.com/office/powerpoint/2010/main" val="3139826916"/>
+      </p:ext>
+    </p:extLst>
+  </p:cSld>
+  <p:clrMapOvr>
+    <a:masterClrMapping/>
+  </p:clrMapOvr>
+</p:sld>
+</file>
+
+<file path=ppt/slides/slide28.xml><?xml version="1.0" encoding="utf-8"?>
+<p:sld xmlns:a="http://schemas.openxmlformats.org/drawingml/2006/main" xmlns:r="http://schemas.openxmlformats.org/officeDocument/2006/relationships" xmlns:p="http://schemas.openxmlformats.org/presentationml/2006/main">
+  <p:cSld>
+    <p:spTree>
+      <p:nvGrpSpPr>
+        <p:cNvPr id="1" name="">
+          <a:extLst>
+            <a:ext uri="{FF2B5EF4-FFF2-40B4-BE49-F238E27FC236}">
+              <a16:creationId xmlns:a16="http://schemas.microsoft.com/office/drawing/2014/main" id="{04C58AE2-422F-6289-068D-E8103D8736E1}"/>
+            </a:ext>
+          </a:extLst>
+        </p:cNvPr>
+        <p:cNvGrpSpPr/>
+        <p:nvPr/>
+      </p:nvGrpSpPr>
+      <p:grpSpPr>
+        <a:xfrm>
+          <a:off x="0" y="0"/>
+          <a:ext cx="0" cy="0"/>
+          <a:chOff x="0" y="0"/>
+          <a:chExt cx="0" cy="0"/>
+        </a:xfrm>
+      </p:grpSpPr>
+      <p:sp>
+        <p:nvSpPr>
+          <p:cNvPr id="2" name="제목 1">
+            <a:extLst>
+              <a:ext uri="{FF2B5EF4-FFF2-40B4-BE49-F238E27FC236}">
+                <a16:creationId xmlns:a16="http://schemas.microsoft.com/office/drawing/2014/main" id="{3124D0AD-4F6D-3A3C-06AC-C3F166CC0A22}"/>
+              </a:ext>
+            </a:extLst>
+          </p:cNvPr>
+          <p:cNvSpPr>
+            <a:spLocks noGrp="1"/>
+          </p:cNvSpPr>
+          <p:nvPr>
+            <p:ph type="title"/>
+          </p:nvPr>
+        </p:nvSpPr>
+        <p:spPr/>
+        <p:txBody>
+          <a:bodyPr/>
+          <a:lstStyle/>
+          <a:p>
+            <a:r>
+              <a:rPr lang="ko-KR" altLang="en-US" dirty="0"/>
+              <a:t>천연가스 소비</a:t>
+            </a:r>
+          </a:p>
+        </p:txBody>
+      </p:sp>
+      <p:sp>
+        <p:nvSpPr>
+          <p:cNvPr id="4" name="슬라이드 번호 개체 틀 3">
+            <a:extLst>
+              <a:ext uri="{FF2B5EF4-FFF2-40B4-BE49-F238E27FC236}">
+                <a16:creationId xmlns:a16="http://schemas.microsoft.com/office/drawing/2014/main" id="{0701E83C-7DFA-2013-71AA-569E4F430E89}"/>
+              </a:ext>
+            </a:extLst>
+          </p:cNvPr>
+          <p:cNvSpPr>
+            <a:spLocks noGrp="1"/>
+          </p:cNvSpPr>
+          <p:nvPr>
+            <p:ph type="sldNum" sz="quarter" idx="12"/>
+          </p:nvPr>
+        </p:nvSpPr>
+        <p:spPr/>
+        <p:txBody>
+          <a:bodyPr/>
+          <a:lstStyle/>
+          <a:p>
+            <a:fld id="{109C872D-39A9-4065-8BF3-6A613116E2A1}" type="slidenum">
+              <a:rPr lang="ko-KR" altLang="en-US" smtClean="0"/>
+              <a:t>28</a:t>
+            </a:fld>
+            <a:endParaRPr lang="ko-KR" altLang="en-US"/>
+          </a:p>
+        </p:txBody>
+      </p:sp>
+      <p:sp>
+        <p:nvSpPr>
+          <p:cNvPr id="3" name="TextBox 2">
+            <a:extLst>
+              <a:ext uri="{FF2B5EF4-FFF2-40B4-BE49-F238E27FC236}">
+                <a16:creationId xmlns:a16="http://schemas.microsoft.com/office/drawing/2014/main" id="{1C3193F3-D9D8-8D01-FFC2-86AF9E53B9A1}"/>
+              </a:ext>
+            </a:extLst>
+          </p:cNvPr>
+          <p:cNvSpPr txBox="1"/>
+          <p:nvPr/>
+        </p:nvSpPr>
+        <p:spPr>
+          <a:xfrm>
+            <a:off x="288790" y="958844"/>
+            <a:ext cx="11118453" cy="2260683"/>
+          </a:xfrm>
+          <a:prstGeom prst="rect">
+            <a:avLst/>
+          </a:prstGeom>
+          <a:noFill/>
+        </p:spPr>
+        <p:txBody>
+          <a:bodyPr wrap="square" rtlCol="0" anchor="t">
+            <a:spAutoFit/>
+          </a:bodyPr>
+          <a:lstStyle/>
+          <a:p>
+            <a:pPr marL="377825" indent="-285750">
+              <a:lnSpc>
+                <a:spcPct val="150000"/>
+              </a:lnSpc>
+              <a:buFont typeface="Arial" panose="020B0604020202020204" pitchFamily="34" charset="0"/>
+              <a:buChar char="•"/>
+            </a:pPr>
+            <a:r>
+              <a:rPr lang="ko-KR" altLang="en-US" sz="1600" dirty="0"/>
+              <a:t>한편</a:t>
+            </a:r>
+            <a:r>
+              <a:rPr lang="en-US" altLang="ko-KR" sz="1600" dirty="0"/>
+              <a:t>, LNG </a:t>
+            </a:r>
+            <a:r>
+              <a:rPr lang="ko-KR" altLang="en-US" sz="1600" dirty="0"/>
+              <a:t>수입 확대는 인프라 구축과 밀접하게 연계되어 있으며</a:t>
+            </a:r>
+            <a:r>
+              <a:rPr lang="en-US" altLang="ko-KR" sz="1600" dirty="0"/>
+              <a:t>, </a:t>
+            </a:r>
+            <a:r>
+              <a:rPr lang="ko-KR" altLang="en-US" sz="1600" dirty="0"/>
+              <a:t>이에 따라 수입국의 정책적 의지</a:t>
+            </a:r>
+            <a:r>
+              <a:rPr lang="en-US" altLang="ko-KR" sz="1600" dirty="0"/>
+              <a:t>, </a:t>
+            </a:r>
+            <a:r>
+              <a:rPr lang="ko-KR" altLang="en-US" sz="1600" dirty="0"/>
+              <a:t>제도적 환경</a:t>
+            </a:r>
+            <a:r>
+              <a:rPr lang="en-US" altLang="ko-KR" sz="1600" dirty="0"/>
+              <a:t>, </a:t>
+            </a:r>
+            <a:r>
+              <a:rPr lang="ko-KR" altLang="en-US" sz="1600" dirty="0"/>
+              <a:t>기술 역량 등에 따라 확대 속도와 범위에 상당한 차이가 나타나고 있다</a:t>
+            </a:r>
+            <a:r>
+              <a:rPr lang="en-US" altLang="ko-KR" sz="1600" dirty="0"/>
+              <a:t>.</a:t>
+            </a:r>
+          </a:p>
+          <a:p>
+            <a:pPr marL="835025" lvl="1" indent="-285750">
+              <a:lnSpc>
+                <a:spcPct val="150000"/>
+              </a:lnSpc>
+              <a:buFont typeface="Wingdings" panose="05000000000000000000" pitchFamily="2" charset="2"/>
+              <a:buChar char="ü"/>
+            </a:pPr>
+            <a:r>
+              <a:rPr lang="ko-KR" altLang="en-US" sz="1600" dirty="0"/>
+              <a:t>아시아 및 유럽의 선진국들은 재기화터미널</a:t>
+            </a:r>
+            <a:r>
+              <a:rPr lang="en-US" altLang="ko-KR" sz="1600" dirty="0"/>
+              <a:t>, </a:t>
+            </a:r>
+            <a:r>
+              <a:rPr lang="ko-KR" altLang="en-US" sz="1600" dirty="0"/>
+              <a:t>저장 설비</a:t>
+            </a:r>
+            <a:r>
+              <a:rPr lang="en-US" altLang="ko-KR" sz="1600" dirty="0"/>
+              <a:t>, </a:t>
+            </a:r>
+            <a:r>
+              <a:rPr lang="ko-KR" altLang="en-US" sz="1600" dirty="0"/>
+              <a:t>전용 운반선 확보 등에서 상대적 우위에 있다</a:t>
+            </a:r>
+            <a:r>
+              <a:rPr lang="en-US" altLang="ko-KR" sz="1600" dirty="0"/>
+              <a:t>.</a:t>
+            </a:r>
+          </a:p>
+          <a:p>
+            <a:pPr marL="835025" lvl="1" indent="-285750">
+              <a:lnSpc>
+                <a:spcPct val="150000"/>
+              </a:lnSpc>
+              <a:buFont typeface="Wingdings" panose="05000000000000000000" pitchFamily="2" charset="2"/>
+              <a:buChar char="ü"/>
+            </a:pPr>
+            <a:r>
+              <a:rPr lang="ko-KR" altLang="en-US" sz="1600" dirty="0"/>
+              <a:t>한편 일부 개발도상국은 재정적</a:t>
+            </a:r>
+            <a:r>
+              <a:rPr lang="en-US" altLang="ko-KR" sz="1600" dirty="0"/>
+              <a:t>·</a:t>
+            </a:r>
+            <a:r>
+              <a:rPr lang="ko-KR" altLang="en-US" sz="1600" dirty="0"/>
+              <a:t>기술적 제약으로 인해 </a:t>
+            </a:r>
+            <a:r>
+              <a:rPr lang="en-US" altLang="ko-KR" sz="1600" dirty="0"/>
+              <a:t>LNG </a:t>
+            </a:r>
+            <a:r>
+              <a:rPr lang="ko-KR" altLang="en-US" sz="1600" dirty="0"/>
+              <a:t>수입 확대에 구조적 어려움을 겪고 있다</a:t>
+            </a:r>
+            <a:r>
+              <a:rPr lang="en-US" altLang="ko-KR" sz="1600" dirty="0"/>
+              <a:t>.</a:t>
+            </a:r>
+          </a:p>
+          <a:p>
+            <a:pPr marL="1292225" lvl="2" indent="-285750">
+              <a:lnSpc>
+                <a:spcPct val="150000"/>
+              </a:lnSpc>
+              <a:buFont typeface="Wingdings" panose="05000000000000000000" pitchFamily="2" charset="2"/>
+              <a:buChar char="Ø"/>
+            </a:pPr>
+            <a:r>
+              <a:rPr lang="ko-KR" altLang="en-US" sz="1600" dirty="0"/>
+              <a:t>이러한 한계를 극복하기 위한 대안이 </a:t>
+            </a:r>
+            <a:r>
+              <a:rPr lang="ko-KR" altLang="en-US" sz="1600" dirty="0" err="1"/>
+              <a:t>부유식</a:t>
+            </a:r>
+            <a:r>
+              <a:rPr lang="ko-KR" altLang="en-US" sz="1600" dirty="0"/>
+              <a:t> 저장 및 재기화 설비 이며</a:t>
+            </a:r>
+            <a:r>
+              <a:rPr lang="en-US" altLang="ko-KR" sz="1600" dirty="0"/>
+              <a:t>, </a:t>
+            </a:r>
+            <a:r>
+              <a:rPr lang="ko-KR" altLang="en-US" sz="1600" dirty="0"/>
+              <a:t>이는 초기 투자비용을 절감하고</a:t>
+            </a:r>
+            <a:r>
+              <a:rPr lang="en-US" altLang="ko-KR" sz="1600" dirty="0"/>
+              <a:t>, </a:t>
+            </a:r>
+            <a:r>
+              <a:rPr lang="ko-KR" altLang="en-US" sz="1600" dirty="0"/>
+              <a:t>신속한 배치가 가능하다는 점에서 신흥국 시장에서 광범위하게 채택되고 있다</a:t>
+            </a:r>
+            <a:r>
+              <a:rPr lang="en-US" altLang="ko-KR" sz="1600" dirty="0"/>
+              <a:t>.</a:t>
+            </a:r>
+          </a:p>
+        </p:txBody>
+      </p:sp>
+      <p:pic>
+        <p:nvPicPr>
+          <p:cNvPr id="5" name="그림 4">
+            <a:extLst>
+              <a:ext uri="{FF2B5EF4-FFF2-40B4-BE49-F238E27FC236}">
+                <a16:creationId xmlns:a16="http://schemas.microsoft.com/office/drawing/2014/main" id="{3736BE1C-4ED8-BE9F-1913-1F5FCA0FA896}"/>
+              </a:ext>
+            </a:extLst>
+          </p:cNvPr>
+          <p:cNvPicPr>
+            <a:picLocks noChangeAspect="1"/>
+          </p:cNvPicPr>
+          <p:nvPr/>
+        </p:nvPicPr>
+        <p:blipFill rotWithShape="1">
+          <a:blip r:embed="rId2"/>
+          <a:srcRect r="5292"/>
+          <a:stretch>
+            <a:fillRect/>
+          </a:stretch>
+        </p:blipFill>
+        <p:spPr>
+          <a:xfrm>
+            <a:off x="6348255" y="3645192"/>
+            <a:ext cx="5554955" cy="2891715"/>
+          </a:xfrm>
+          <a:prstGeom prst="rect">
+            <a:avLst/>
+          </a:prstGeom>
+        </p:spPr>
+      </p:pic>
+      <p:sp>
+        <p:nvSpPr>
+          <p:cNvPr id="6" name="TextBox 5">
+            <a:extLst>
+              <a:ext uri="{FF2B5EF4-FFF2-40B4-BE49-F238E27FC236}">
+                <a16:creationId xmlns:a16="http://schemas.microsoft.com/office/drawing/2014/main" id="{BFBB1B0C-7D04-3FAA-B7B2-C7F3F0B7BD7D}"/>
+              </a:ext>
+            </a:extLst>
+          </p:cNvPr>
+          <p:cNvSpPr txBox="1"/>
+          <p:nvPr/>
+        </p:nvSpPr>
+        <p:spPr>
+          <a:xfrm>
+            <a:off x="7512785" y="3570199"/>
+            <a:ext cx="3225894" cy="253916"/>
+          </a:xfrm>
+          <a:prstGeom prst="rect">
+            <a:avLst/>
+          </a:prstGeom>
+          <a:noFill/>
+        </p:spPr>
+        <p:txBody>
+          <a:bodyPr wrap="square">
+            <a:spAutoFit/>
+          </a:bodyPr>
+          <a:lstStyle/>
+          <a:p>
+            <a:pPr algn="ctr"/>
+            <a:r>
+              <a:rPr lang="en-US" altLang="ko-KR" sz="1050" spc="-50" dirty="0"/>
+              <a:t>&lt; </a:t>
+            </a:r>
+            <a:r>
+              <a:rPr lang="ko-KR" altLang="en-US" sz="1050" spc="-50" dirty="0"/>
+              <a:t>주요 국가의 천연가스 수입량  </a:t>
+            </a:r>
+            <a:r>
+              <a:rPr lang="en-US" altLang="ko-KR" sz="1050" spc="-50" dirty="0"/>
+              <a:t>(10</a:t>
+            </a:r>
+            <a:r>
+              <a:rPr lang="ko-KR" altLang="en-US" sz="1050" spc="-50" dirty="0"/>
+              <a:t>억 </a:t>
+            </a:r>
+            <a:r>
+              <a:rPr lang="ko-KR" altLang="en-US" sz="1050" spc="-50" dirty="0" err="1"/>
+              <a:t>입방미터</a:t>
+            </a:r>
+            <a:r>
+              <a:rPr lang="en-US" altLang="ko-KR" sz="1050" spc="-50" dirty="0"/>
+              <a:t>) &gt;</a:t>
+            </a:r>
+            <a:endParaRPr lang="ko-KR" altLang="en-US" sz="1050" dirty="0"/>
+          </a:p>
+        </p:txBody>
+      </p:sp>
+      <p:sp>
+        <p:nvSpPr>
+          <p:cNvPr id="8" name="TextBox 7">
+            <a:extLst>
+              <a:ext uri="{FF2B5EF4-FFF2-40B4-BE49-F238E27FC236}">
+                <a16:creationId xmlns:a16="http://schemas.microsoft.com/office/drawing/2014/main" id="{F1F33EDC-027D-1970-6B61-0B9CA05B79C2}"/>
+              </a:ext>
+            </a:extLst>
+          </p:cNvPr>
+          <p:cNvSpPr txBox="1"/>
+          <p:nvPr/>
+        </p:nvSpPr>
+        <p:spPr>
+          <a:xfrm>
+            <a:off x="288791" y="3334360"/>
+            <a:ext cx="6165018" cy="2260683"/>
+          </a:xfrm>
+          <a:prstGeom prst="rect">
+            <a:avLst/>
+          </a:prstGeom>
+          <a:noFill/>
+        </p:spPr>
+        <p:txBody>
+          <a:bodyPr wrap="square" rtlCol="0" anchor="t">
+            <a:spAutoFit/>
+          </a:bodyPr>
+          <a:lstStyle/>
+          <a:p>
+            <a:pPr marL="377825" indent="-285750">
+              <a:lnSpc>
+                <a:spcPct val="150000"/>
+              </a:lnSpc>
+              <a:buFont typeface="Arial" panose="020B0604020202020204" pitchFamily="34" charset="0"/>
+              <a:buChar char="•"/>
+            </a:pPr>
+            <a:r>
+              <a:rPr lang="ko-KR" altLang="en-US" sz="1600" dirty="0"/>
+              <a:t>오른쪽 그래프에서 보듯이 </a:t>
+            </a:r>
+            <a:r>
+              <a:rPr lang="en-US" altLang="ko-KR" sz="1600" dirty="0"/>
+              <a:t>LNG</a:t>
+            </a:r>
+            <a:r>
+              <a:rPr lang="ko-KR" altLang="en-US" sz="1600" dirty="0"/>
+              <a:t> 주요 수입국은 중국</a:t>
+            </a:r>
+            <a:r>
+              <a:rPr lang="en-US" altLang="ko-KR" sz="1600" dirty="0"/>
+              <a:t>, </a:t>
+            </a:r>
+            <a:r>
+              <a:rPr lang="ko-KR" altLang="en-US" sz="1600" dirty="0"/>
+              <a:t>인도</a:t>
+            </a:r>
+            <a:r>
+              <a:rPr lang="en-US" altLang="ko-KR" sz="1600" dirty="0"/>
+              <a:t>, </a:t>
+            </a:r>
+            <a:r>
+              <a:rPr lang="ko-KR" altLang="en-US" sz="1600" dirty="0"/>
+              <a:t>일본</a:t>
+            </a:r>
+            <a:r>
+              <a:rPr lang="en-US" altLang="ko-KR" sz="1600" dirty="0"/>
+              <a:t>, </a:t>
+            </a:r>
+            <a:r>
+              <a:rPr lang="ko-KR" altLang="en-US" sz="1600" dirty="0"/>
+              <a:t>한국</a:t>
+            </a:r>
+            <a:r>
+              <a:rPr lang="en-US" altLang="ko-KR" sz="1600" dirty="0"/>
+              <a:t>, </a:t>
+            </a:r>
+            <a:r>
+              <a:rPr lang="ko-KR" altLang="en-US" sz="1600" dirty="0"/>
+              <a:t>프랑스</a:t>
+            </a:r>
+            <a:r>
+              <a:rPr lang="en-US" altLang="ko-KR" sz="1600" dirty="0"/>
+              <a:t>, </a:t>
+            </a:r>
+            <a:r>
+              <a:rPr lang="ko-KR" altLang="en-US" sz="1600" dirty="0"/>
+              <a:t>대만 등이다</a:t>
+            </a:r>
+            <a:r>
+              <a:rPr lang="en-US" altLang="ko-KR" sz="1600" dirty="0"/>
+              <a:t>.</a:t>
+            </a:r>
+          </a:p>
+          <a:p>
+            <a:pPr marL="835025" lvl="1" indent="-285750">
+              <a:lnSpc>
+                <a:spcPct val="150000"/>
+              </a:lnSpc>
+              <a:buFont typeface="Wingdings" panose="05000000000000000000" pitchFamily="2" charset="2"/>
+              <a:buChar char="ü"/>
+            </a:pPr>
+            <a:r>
+              <a:rPr lang="en-US" altLang="ko-KR" sz="1600" dirty="0"/>
+              <a:t>2013-2023</a:t>
+            </a:r>
+            <a:r>
+              <a:rPr lang="ko-KR" altLang="en-US" sz="1600" dirty="0"/>
+              <a:t>년 기간동안 중국</a:t>
+            </a:r>
+            <a:r>
+              <a:rPr lang="en-US" altLang="ko-KR" sz="1600" dirty="0"/>
+              <a:t>, </a:t>
+            </a:r>
+            <a:r>
+              <a:rPr lang="ko-KR" altLang="en-US" sz="1600" dirty="0"/>
+              <a:t>한국</a:t>
+            </a:r>
+            <a:r>
+              <a:rPr lang="en-US" altLang="ko-KR" sz="1600" dirty="0"/>
+              <a:t>, </a:t>
+            </a:r>
+            <a:r>
+              <a:rPr lang="ko-KR" altLang="en-US" sz="1600" dirty="0"/>
+              <a:t>인도를 중심으로 증가하고 있다</a:t>
+            </a:r>
+            <a:r>
+              <a:rPr lang="en-US" altLang="ko-KR" sz="1600" dirty="0"/>
+              <a:t>.</a:t>
+            </a:r>
+          </a:p>
+          <a:p>
+            <a:pPr marL="1349375" lvl="2" indent="-342900">
+              <a:lnSpc>
+                <a:spcPct val="150000"/>
+              </a:lnSpc>
+              <a:buFont typeface="Wingdings" panose="05000000000000000000" pitchFamily="2" charset="2"/>
+              <a:buChar char="Ø"/>
+            </a:pPr>
+            <a:r>
+              <a:rPr lang="ko-KR" altLang="en-US" sz="1600" dirty="0"/>
+              <a:t>특히 중국은 동 기간에 수입량이 </a:t>
+            </a:r>
+            <a:r>
+              <a:rPr lang="en-US" altLang="ko-KR" sz="1600" dirty="0"/>
+              <a:t>25.2</a:t>
+            </a:r>
+            <a:r>
+              <a:rPr lang="ko-KR" altLang="en-US" sz="1600" dirty="0"/>
+              <a:t>에서 </a:t>
+            </a:r>
+            <a:r>
+              <a:rPr lang="en-US" altLang="ko-KR" sz="1600" dirty="0"/>
+              <a:t>97.8</a:t>
+            </a:r>
+            <a:r>
+              <a:rPr lang="ko-KR" altLang="en-US" sz="1600" dirty="0"/>
+              <a:t>로 증가하였으며</a:t>
+            </a:r>
+            <a:r>
+              <a:rPr lang="en-US" altLang="ko-KR" sz="1600" dirty="0"/>
+              <a:t>, </a:t>
+            </a:r>
+            <a:r>
+              <a:rPr lang="ko-KR" altLang="en-US" sz="1600" dirty="0"/>
+              <a:t>연평균 </a:t>
+            </a:r>
+            <a:r>
+              <a:rPr lang="en-US" altLang="ko-KR" sz="1600" dirty="0"/>
+              <a:t>14.6% </a:t>
+            </a:r>
+            <a:r>
+              <a:rPr lang="ko-KR" altLang="en-US" sz="1600" dirty="0"/>
+              <a:t>증가세를 보였다</a:t>
+            </a:r>
+            <a:r>
+              <a:rPr lang="en-US" altLang="ko-KR" sz="1600" dirty="0"/>
+              <a:t>.</a:t>
+            </a:r>
+          </a:p>
+        </p:txBody>
+      </p:sp>
+    </p:spTree>
+    <p:extLst>
+      <p:ext uri="{BB962C8B-B14F-4D97-AF65-F5344CB8AC3E}">
+        <p14:creationId xmlns:p14="http://schemas.microsoft.com/office/powerpoint/2010/main" val="2430887983"/>
+      </p:ext>
+    </p:extLst>
+  </p:cSld>
+  <p:clrMapOvr>
+    <a:masterClrMapping/>
+  </p:clrMapOvr>
+</p:sld>
+</file>
+
+<file path=ppt/slides/slide29.xml><?xml version="1.0" encoding="utf-8"?>
+<p:sld xmlns:a="http://schemas.openxmlformats.org/drawingml/2006/main" xmlns:r="http://schemas.openxmlformats.org/officeDocument/2006/relationships" xmlns:p="http://schemas.openxmlformats.org/presentationml/2006/main">
+  <p:cSld>
+    <p:spTree>
+      <p:nvGrpSpPr>
+        <p:cNvPr id="1" name="">
+          <a:extLst>
+            <a:ext uri="{FF2B5EF4-FFF2-40B4-BE49-F238E27FC236}">
+              <a16:creationId xmlns:a16="http://schemas.microsoft.com/office/drawing/2014/main" id="{69943A93-811A-7438-46BE-889A474EA297}"/>
+            </a:ext>
+          </a:extLst>
+        </p:cNvPr>
+        <p:cNvGrpSpPr/>
+        <p:nvPr/>
+      </p:nvGrpSpPr>
+      <p:grpSpPr>
+        <a:xfrm>
+          <a:off x="0" y="0"/>
+          <a:ext cx="0" cy="0"/>
+          <a:chOff x="0" y="0"/>
+          <a:chExt cx="0" cy="0"/>
+        </a:xfrm>
+      </p:grpSpPr>
+      <p:sp>
+        <p:nvSpPr>
+          <p:cNvPr id="2" name="제목 1">
+            <a:extLst>
+              <a:ext uri="{FF2B5EF4-FFF2-40B4-BE49-F238E27FC236}">
+                <a16:creationId xmlns:a16="http://schemas.microsoft.com/office/drawing/2014/main" id="{EE37FFF7-50F9-EC5D-F629-AAA85F8C74A3}"/>
+              </a:ext>
+            </a:extLst>
+          </p:cNvPr>
+          <p:cNvSpPr>
+            <a:spLocks noGrp="1"/>
+          </p:cNvSpPr>
+          <p:nvPr>
+            <p:ph type="title"/>
+          </p:nvPr>
+        </p:nvSpPr>
+        <p:spPr/>
+        <p:txBody>
+          <a:bodyPr/>
+          <a:lstStyle/>
+          <a:p>
+            <a:r>
+              <a:rPr lang="ko-KR" altLang="en-US" dirty="0"/>
+              <a:t>천연가스 소비</a:t>
+            </a:r>
+          </a:p>
+        </p:txBody>
+      </p:sp>
+      <p:sp>
+        <p:nvSpPr>
+          <p:cNvPr id="4" name="슬라이드 번호 개체 틀 3">
+            <a:extLst>
+              <a:ext uri="{FF2B5EF4-FFF2-40B4-BE49-F238E27FC236}">
+                <a16:creationId xmlns:a16="http://schemas.microsoft.com/office/drawing/2014/main" id="{FB27DCB1-B9DA-147E-0B55-B74914C0954A}"/>
+              </a:ext>
+            </a:extLst>
+          </p:cNvPr>
+          <p:cNvSpPr>
+            <a:spLocks noGrp="1"/>
+          </p:cNvSpPr>
+          <p:nvPr>
+            <p:ph type="sldNum" sz="quarter" idx="12"/>
+          </p:nvPr>
+        </p:nvSpPr>
+        <p:spPr/>
+        <p:txBody>
+          <a:bodyPr/>
+          <a:lstStyle/>
+          <a:p>
+            <a:fld id="{109C872D-39A9-4065-8BF3-6A613116E2A1}" type="slidenum">
+              <a:rPr lang="ko-KR" altLang="en-US" smtClean="0"/>
+              <a:t>29</a:t>
+            </a:fld>
+            <a:endParaRPr lang="ko-KR" altLang="en-US"/>
+          </a:p>
+        </p:txBody>
+      </p:sp>
+      <p:sp>
+        <p:nvSpPr>
+          <p:cNvPr id="3" name="TextBox 2">
+            <a:extLst>
+              <a:ext uri="{FF2B5EF4-FFF2-40B4-BE49-F238E27FC236}">
+                <a16:creationId xmlns:a16="http://schemas.microsoft.com/office/drawing/2014/main" id="{94017E8F-A809-1BFB-9CD5-F388D10C5549}"/>
+              </a:ext>
+            </a:extLst>
+          </p:cNvPr>
+          <p:cNvSpPr txBox="1"/>
+          <p:nvPr/>
+        </p:nvSpPr>
+        <p:spPr>
+          <a:xfrm>
+            <a:off x="288790" y="958844"/>
+            <a:ext cx="11118453" cy="4476675"/>
+          </a:xfrm>
+          <a:prstGeom prst="rect">
+            <a:avLst/>
+          </a:prstGeom>
+          <a:noFill/>
+        </p:spPr>
+        <p:txBody>
+          <a:bodyPr wrap="square" rtlCol="0" anchor="t">
+            <a:spAutoFit/>
+          </a:bodyPr>
+          <a:lstStyle/>
+          <a:p>
+            <a:pPr marL="377825" indent="-285750">
+              <a:lnSpc>
+                <a:spcPct val="150000"/>
+              </a:lnSpc>
+              <a:buFont typeface="Arial" panose="020B0604020202020204" pitchFamily="34" charset="0"/>
+              <a:buChar char="•"/>
+            </a:pPr>
+            <a:r>
+              <a:rPr lang="ko-KR" altLang="en-US" sz="1600" dirty="0"/>
+              <a:t>글로벌 </a:t>
+            </a:r>
+            <a:r>
+              <a:rPr lang="en-US" altLang="ko-KR" sz="1600" dirty="0"/>
+              <a:t>LNG </a:t>
+            </a:r>
+            <a:r>
+              <a:rPr lang="ko-KR" altLang="en-US" sz="1600" dirty="0"/>
+              <a:t>수출 시장은 과거 몇몇 중동 및 동남아시아 국가에 집중되어 있었으나</a:t>
+            </a:r>
+            <a:r>
+              <a:rPr lang="en-US" altLang="ko-KR" sz="1600" dirty="0"/>
+              <a:t>, </a:t>
+            </a:r>
+            <a:r>
+              <a:rPr lang="ko-KR" altLang="en-US" sz="1600" dirty="0"/>
+              <a:t>최근 수십년간 기술 혁신과 투자 확대를 통해 공급국의 지리적 다양성이 확대되고 있다</a:t>
+            </a:r>
+            <a:r>
+              <a:rPr lang="en-US" altLang="ko-KR" sz="1600" dirty="0"/>
+              <a:t>.</a:t>
+            </a:r>
+          </a:p>
+          <a:p>
+            <a:pPr marL="835025" lvl="1" indent="-285750">
+              <a:lnSpc>
+                <a:spcPct val="150000"/>
+              </a:lnSpc>
+              <a:buFont typeface="Wingdings" panose="05000000000000000000" pitchFamily="2" charset="2"/>
+              <a:buChar char="ü"/>
+            </a:pPr>
+            <a:r>
+              <a:rPr lang="ko-KR" altLang="en-US" sz="1600" dirty="0"/>
+              <a:t>전통적으로 카타르</a:t>
+            </a:r>
+            <a:r>
+              <a:rPr lang="en-US" altLang="ko-KR" sz="1600" dirty="0"/>
+              <a:t>, </a:t>
+            </a:r>
+            <a:r>
+              <a:rPr lang="ko-KR" altLang="en-US" sz="1600" dirty="0"/>
+              <a:t>말레이시아</a:t>
+            </a:r>
+            <a:r>
+              <a:rPr lang="en-US" altLang="ko-KR" sz="1600" dirty="0"/>
+              <a:t>, </a:t>
+            </a:r>
+            <a:r>
+              <a:rPr lang="ko-KR" altLang="en-US" sz="1600" dirty="0"/>
+              <a:t>인도네시아 등은 세계 </a:t>
+            </a:r>
+            <a:r>
+              <a:rPr lang="en-US" altLang="ko-KR" sz="1600" dirty="0"/>
+              <a:t>LNG </a:t>
+            </a:r>
+            <a:r>
+              <a:rPr lang="ko-KR" altLang="en-US" sz="1600" dirty="0"/>
+              <a:t>수출량의 대부분을 차지해왔다</a:t>
+            </a:r>
+            <a:r>
+              <a:rPr lang="en-US" altLang="ko-KR" sz="1600" dirty="0"/>
+              <a:t>.</a:t>
+            </a:r>
+          </a:p>
+          <a:p>
+            <a:pPr marL="835025" lvl="1" indent="-285750">
+              <a:lnSpc>
+                <a:spcPct val="150000"/>
+              </a:lnSpc>
+              <a:buFont typeface="Wingdings" panose="05000000000000000000" pitchFamily="2" charset="2"/>
+              <a:buChar char="ü"/>
+            </a:pPr>
+            <a:r>
+              <a:rPr lang="ko-KR" altLang="en-US" sz="1600" dirty="0"/>
+              <a:t>최근에는 미국과 호주가 주요 수출국으로 급부상하면서 글로벌 수출 구조에 큰 변화를 가져왔다</a:t>
+            </a:r>
+            <a:r>
+              <a:rPr lang="en-US" altLang="ko-KR" sz="1600" dirty="0"/>
+              <a:t>.</a:t>
+            </a:r>
+          </a:p>
+          <a:p>
+            <a:pPr marL="1292225" lvl="2" indent="-285750">
+              <a:lnSpc>
+                <a:spcPct val="150000"/>
+              </a:lnSpc>
+              <a:buFont typeface="Wingdings" panose="05000000000000000000" pitchFamily="2" charset="2"/>
+              <a:buChar char="Ø"/>
+            </a:pPr>
+            <a:r>
+              <a:rPr lang="ko-KR" altLang="en-US" sz="1600" dirty="0"/>
+              <a:t>미국은 </a:t>
+            </a:r>
+            <a:r>
+              <a:rPr lang="ko-KR" altLang="en-US" sz="1600" dirty="0" err="1"/>
+              <a:t>셰일가스</a:t>
+            </a:r>
+            <a:r>
+              <a:rPr lang="ko-KR" altLang="en-US" sz="1600" dirty="0"/>
+              <a:t> 생산량의 급증과 함께 사빈패스</a:t>
+            </a:r>
+            <a:r>
+              <a:rPr lang="en-US" altLang="ko-KR" sz="1600" dirty="0"/>
+              <a:t>, </a:t>
+            </a:r>
+            <a:r>
+              <a:rPr lang="ko-KR" altLang="en-US" sz="1600" dirty="0"/>
+              <a:t>캐머런</a:t>
+            </a:r>
+            <a:r>
+              <a:rPr lang="en-US" altLang="ko-KR" sz="1600" dirty="0"/>
+              <a:t>, </a:t>
+            </a:r>
+            <a:r>
+              <a:rPr lang="ko-KR" altLang="en-US" sz="1600" dirty="0" err="1"/>
+              <a:t>프리포트</a:t>
+            </a:r>
+            <a:r>
+              <a:rPr lang="ko-KR" altLang="en-US" sz="1600" dirty="0"/>
+              <a:t> </a:t>
+            </a:r>
+            <a:r>
+              <a:rPr lang="en-US" altLang="ko-KR" sz="1600" dirty="0"/>
+              <a:t>(</a:t>
+            </a:r>
+            <a:r>
+              <a:rPr lang="ko-KR" altLang="en-US" sz="1600" dirty="0"/>
+              <a:t>미국 지명</a:t>
+            </a:r>
+            <a:r>
+              <a:rPr lang="en-US" altLang="ko-KR" sz="1600" dirty="0"/>
+              <a:t>)</a:t>
+            </a:r>
+            <a:r>
+              <a:rPr lang="ko-KR" altLang="en-US" sz="1600" dirty="0"/>
+              <a:t> 등 주요 액화설비에 대한 공격적인 투자를 통해 </a:t>
+            </a:r>
+            <a:r>
+              <a:rPr lang="en-US" altLang="ko-KR" sz="1600" dirty="0"/>
+              <a:t>2016</a:t>
+            </a:r>
+            <a:r>
+              <a:rPr lang="ko-KR" altLang="en-US" sz="1600" dirty="0"/>
+              <a:t>년 이후 본격적인 수출국으로 부상하였고</a:t>
+            </a:r>
+            <a:r>
+              <a:rPr lang="en-US" altLang="ko-KR" sz="1600" dirty="0"/>
+              <a:t>, 2023</a:t>
+            </a:r>
+            <a:r>
+              <a:rPr lang="ko-KR" altLang="en-US" sz="1600" dirty="0"/>
+              <a:t>년에는 세계 최대 </a:t>
+            </a:r>
+            <a:r>
+              <a:rPr lang="en-US" altLang="ko-KR" sz="1600" dirty="0"/>
+              <a:t>LNG</a:t>
+            </a:r>
+            <a:r>
+              <a:rPr lang="ko-KR" altLang="en-US" sz="1600" dirty="0"/>
+              <a:t> 수출국이 되었다</a:t>
+            </a:r>
+            <a:r>
+              <a:rPr lang="en-US" altLang="ko-KR" sz="1600" dirty="0"/>
+              <a:t>.</a:t>
+            </a:r>
+          </a:p>
+          <a:p>
+            <a:pPr marL="1292225" lvl="2" indent="-285750">
+              <a:lnSpc>
+                <a:spcPct val="150000"/>
+              </a:lnSpc>
+              <a:buFont typeface="Wingdings" panose="05000000000000000000" pitchFamily="2" charset="2"/>
+              <a:buChar char="Ø"/>
+            </a:pPr>
+            <a:r>
+              <a:rPr lang="ko-KR" altLang="en-US" sz="1600" dirty="0"/>
+              <a:t>호주는 고르곤</a:t>
+            </a:r>
+            <a:r>
+              <a:rPr lang="en-US" altLang="ko-KR" sz="1600" dirty="0"/>
+              <a:t>, </a:t>
+            </a:r>
+            <a:r>
+              <a:rPr lang="ko-KR" altLang="en-US" sz="1600" dirty="0" err="1"/>
+              <a:t>휘트스톤</a:t>
+            </a:r>
+            <a:r>
+              <a:rPr lang="en-US" altLang="ko-KR" sz="1600" dirty="0"/>
+              <a:t>, </a:t>
+            </a:r>
+            <a:r>
+              <a:rPr lang="ko-KR" altLang="en-US" sz="1600" dirty="0" err="1"/>
+              <a:t>이치시스</a:t>
+            </a:r>
+            <a:r>
+              <a:rPr lang="en-US" altLang="ko-KR" sz="1600" dirty="0"/>
+              <a:t>, </a:t>
+            </a:r>
+            <a:r>
+              <a:rPr lang="ko-KR" altLang="en-US" sz="1600" dirty="0" err="1"/>
+              <a:t>프렐류드</a:t>
+            </a:r>
+            <a:r>
+              <a:rPr lang="ko-KR" altLang="en-US" sz="1600" dirty="0"/>
+              <a:t> </a:t>
+            </a:r>
+            <a:r>
+              <a:rPr lang="en-US" altLang="ko-KR" sz="1600" dirty="0"/>
+              <a:t>(</a:t>
+            </a:r>
+            <a:r>
+              <a:rPr lang="ko-KR" altLang="en-US" sz="1600" dirty="0"/>
+              <a:t>호주 지명</a:t>
+            </a:r>
+            <a:r>
+              <a:rPr lang="en-US" altLang="ko-KR" sz="1600" dirty="0"/>
+              <a:t>) </a:t>
+            </a:r>
+            <a:r>
+              <a:rPr lang="ko-KR" altLang="en-US" sz="1600" dirty="0"/>
+              <a:t>등 대형 프로젝트를 완공하며</a:t>
+            </a:r>
+            <a:r>
+              <a:rPr lang="en-US" altLang="ko-KR" sz="1600" dirty="0"/>
+              <a:t>, </a:t>
+            </a:r>
+            <a:r>
+              <a:rPr lang="ko-KR" altLang="en-US" sz="1600" dirty="0"/>
+              <a:t>카타르와 함께 </a:t>
+            </a:r>
+            <a:r>
+              <a:rPr lang="en-US" altLang="ko-KR" sz="1600" dirty="0"/>
+              <a:t>2020</a:t>
+            </a:r>
+            <a:r>
+              <a:rPr lang="ko-KR" altLang="en-US" sz="1600" dirty="0"/>
+              <a:t>년대 초반까지 세계 </a:t>
+            </a:r>
+            <a:r>
+              <a:rPr lang="en-US" altLang="ko-KR" sz="1600" dirty="0"/>
+              <a:t>1~2</a:t>
+            </a:r>
+            <a:r>
+              <a:rPr lang="ko-KR" altLang="en-US" sz="1600" dirty="0"/>
+              <a:t>위를 다투는 위치까지 올랐다</a:t>
+            </a:r>
+            <a:r>
+              <a:rPr lang="en-US" altLang="ko-KR" sz="1600" dirty="0"/>
+              <a:t>.</a:t>
+            </a:r>
+          </a:p>
+          <a:p>
+            <a:pPr marL="835025" lvl="1" indent="-285750">
+              <a:lnSpc>
+                <a:spcPct val="150000"/>
+              </a:lnSpc>
+              <a:buFont typeface="Wingdings" panose="05000000000000000000" pitchFamily="2" charset="2"/>
+              <a:buChar char="ü"/>
+            </a:pPr>
+            <a:r>
+              <a:rPr lang="ko-KR" altLang="en-US" sz="1600" dirty="0"/>
+              <a:t>이와 같은 수출국 다변화는 천연가스 시장의 지역 편중을 완화시켰다</a:t>
+            </a:r>
+            <a:r>
+              <a:rPr lang="en-US" altLang="ko-KR" sz="1600" dirty="0"/>
+              <a:t>.</a:t>
+            </a:r>
+          </a:p>
+          <a:p>
+            <a:pPr marL="835025" lvl="1" indent="-285750">
+              <a:lnSpc>
+                <a:spcPct val="150000"/>
+              </a:lnSpc>
+              <a:buFont typeface="Wingdings" panose="05000000000000000000" pitchFamily="2" charset="2"/>
+              <a:buChar char="ü"/>
+            </a:pPr>
+            <a:r>
+              <a:rPr lang="ko-KR" altLang="en-US" sz="1600" dirty="0"/>
+              <a:t>특히 미국</a:t>
+            </a:r>
+            <a:r>
+              <a:rPr lang="en-US" altLang="ko-KR" sz="1600" dirty="0"/>
+              <a:t>, </a:t>
+            </a:r>
+            <a:r>
+              <a:rPr lang="ko-KR" altLang="en-US" sz="1600" dirty="0"/>
+              <a:t>호주</a:t>
+            </a:r>
+            <a:r>
+              <a:rPr lang="en-US" altLang="ko-KR" sz="1600" dirty="0"/>
+              <a:t>, </a:t>
+            </a:r>
+            <a:r>
+              <a:rPr lang="ko-KR" altLang="en-US" sz="1600" dirty="0"/>
+              <a:t>카타르 간 경쟁 심화는 </a:t>
+            </a:r>
+            <a:r>
+              <a:rPr lang="en-US" altLang="ko-KR" sz="1600" dirty="0"/>
+              <a:t>LNG </a:t>
+            </a:r>
+            <a:r>
+              <a:rPr lang="ko-KR" altLang="en-US" sz="1600" dirty="0"/>
+              <a:t>시장을 보다 </a:t>
+            </a:r>
+            <a:r>
+              <a:rPr lang="ko-KR" altLang="en-US" sz="1600" dirty="0" err="1"/>
+              <a:t>시장지향적이고</a:t>
+            </a:r>
+            <a:r>
+              <a:rPr lang="en-US" altLang="ko-KR" sz="1600" dirty="0"/>
+              <a:t>, </a:t>
+            </a:r>
+            <a:r>
+              <a:rPr lang="ko-KR" altLang="en-US" sz="1600" dirty="0"/>
+              <a:t>역동적인 구조로 재편하게 했다</a:t>
+            </a:r>
+            <a:r>
+              <a:rPr lang="en-US" altLang="ko-KR" sz="1600" dirty="0"/>
+              <a:t>.</a:t>
+            </a:r>
+          </a:p>
+          <a:p>
+            <a:pPr marL="92075">
+              <a:lnSpc>
+                <a:spcPct val="150000"/>
+              </a:lnSpc>
+            </a:pPr>
+            <a:endParaRPr lang="en-US" altLang="ko-KR" sz="1600" dirty="0"/>
+          </a:p>
+        </p:txBody>
+      </p:sp>
+    </p:spTree>
+    <p:extLst>
+      <p:ext uri="{BB962C8B-B14F-4D97-AF65-F5344CB8AC3E}">
+        <p14:creationId xmlns:p14="http://schemas.microsoft.com/office/powerpoint/2010/main" val="782567626"/>
       </p:ext>
     </p:extLst>
   </p:cSld>
@@ -29027,6 +31285,2120 @@
     <p:extLst>
       <p:ext uri="{BB962C8B-B14F-4D97-AF65-F5344CB8AC3E}">
         <p14:creationId xmlns:p14="http://schemas.microsoft.com/office/powerpoint/2010/main" val="2957073077"/>
+      </p:ext>
+    </p:extLst>
+  </p:cSld>
+  <p:clrMapOvr>
+    <a:masterClrMapping/>
+  </p:clrMapOvr>
+</p:sld>
+</file>
+
+<file path=ppt/slides/slide30.xml><?xml version="1.0" encoding="utf-8"?>
+<p:sld xmlns:a="http://schemas.openxmlformats.org/drawingml/2006/main" xmlns:r="http://schemas.openxmlformats.org/officeDocument/2006/relationships" xmlns:p="http://schemas.openxmlformats.org/presentationml/2006/main">
+  <p:cSld>
+    <p:spTree>
+      <p:nvGrpSpPr>
+        <p:cNvPr id="1" name="">
+          <a:extLst>
+            <a:ext uri="{FF2B5EF4-FFF2-40B4-BE49-F238E27FC236}">
+              <a16:creationId xmlns:a16="http://schemas.microsoft.com/office/drawing/2014/main" id="{B36C9B72-6603-1993-C74B-D1C00E451FD3}"/>
+            </a:ext>
+          </a:extLst>
+        </p:cNvPr>
+        <p:cNvGrpSpPr/>
+        <p:nvPr/>
+      </p:nvGrpSpPr>
+      <p:grpSpPr>
+        <a:xfrm>
+          <a:off x="0" y="0"/>
+          <a:ext cx="0" cy="0"/>
+          <a:chOff x="0" y="0"/>
+          <a:chExt cx="0" cy="0"/>
+        </a:xfrm>
+      </p:grpSpPr>
+      <p:sp>
+        <p:nvSpPr>
+          <p:cNvPr id="2" name="제목 1">
+            <a:extLst>
+              <a:ext uri="{FF2B5EF4-FFF2-40B4-BE49-F238E27FC236}">
+                <a16:creationId xmlns:a16="http://schemas.microsoft.com/office/drawing/2014/main" id="{EB42284E-449D-F2D8-63F7-EDE721F0BE23}"/>
+              </a:ext>
+            </a:extLst>
+          </p:cNvPr>
+          <p:cNvSpPr>
+            <a:spLocks noGrp="1"/>
+          </p:cNvSpPr>
+          <p:nvPr>
+            <p:ph type="title"/>
+          </p:nvPr>
+        </p:nvSpPr>
+        <p:spPr/>
+        <p:txBody>
+          <a:bodyPr/>
+          <a:lstStyle/>
+          <a:p>
+            <a:r>
+              <a:rPr lang="ko-KR" altLang="en-US" dirty="0"/>
+              <a:t>천연가스 소비</a:t>
+            </a:r>
+          </a:p>
+        </p:txBody>
+      </p:sp>
+      <p:sp>
+        <p:nvSpPr>
+          <p:cNvPr id="4" name="슬라이드 번호 개체 틀 3">
+            <a:extLst>
+              <a:ext uri="{FF2B5EF4-FFF2-40B4-BE49-F238E27FC236}">
+                <a16:creationId xmlns:a16="http://schemas.microsoft.com/office/drawing/2014/main" id="{B353D259-DBF7-4337-E793-0145D0B8D1DB}"/>
+              </a:ext>
+            </a:extLst>
+          </p:cNvPr>
+          <p:cNvSpPr>
+            <a:spLocks noGrp="1"/>
+          </p:cNvSpPr>
+          <p:nvPr>
+            <p:ph type="sldNum" sz="quarter" idx="12"/>
+          </p:nvPr>
+        </p:nvSpPr>
+        <p:spPr/>
+        <p:txBody>
+          <a:bodyPr/>
+          <a:lstStyle/>
+          <a:p>
+            <a:fld id="{109C872D-39A9-4065-8BF3-6A613116E2A1}" type="slidenum">
+              <a:rPr lang="ko-KR" altLang="en-US" smtClean="0"/>
+              <a:t>30</a:t>
+            </a:fld>
+            <a:endParaRPr lang="ko-KR" altLang="en-US"/>
+          </a:p>
+        </p:txBody>
+      </p:sp>
+      <p:sp>
+        <p:nvSpPr>
+          <p:cNvPr id="3" name="TextBox 2">
+            <a:extLst>
+              <a:ext uri="{FF2B5EF4-FFF2-40B4-BE49-F238E27FC236}">
+                <a16:creationId xmlns:a16="http://schemas.microsoft.com/office/drawing/2014/main" id="{88282979-EB3E-2F95-DCF9-D7138936A38C}"/>
+              </a:ext>
+            </a:extLst>
+          </p:cNvPr>
+          <p:cNvSpPr txBox="1"/>
+          <p:nvPr/>
+        </p:nvSpPr>
+        <p:spPr>
+          <a:xfrm>
+            <a:off x="288790" y="958844"/>
+            <a:ext cx="11118453" cy="5215338"/>
+          </a:xfrm>
+          <a:prstGeom prst="rect">
+            <a:avLst/>
+          </a:prstGeom>
+          <a:noFill/>
+        </p:spPr>
+        <p:txBody>
+          <a:bodyPr wrap="square" rtlCol="0" anchor="t">
+            <a:spAutoFit/>
+          </a:bodyPr>
+          <a:lstStyle/>
+          <a:p>
+            <a:pPr marL="377825" indent="-285750">
+              <a:lnSpc>
+                <a:spcPct val="150000"/>
+              </a:lnSpc>
+              <a:buFont typeface="Arial" panose="020B0604020202020204" pitchFamily="34" charset="0"/>
+              <a:buChar char="•"/>
+            </a:pPr>
+            <a:r>
+              <a:rPr lang="en-US" altLang="ko-KR" sz="1600" dirty="0"/>
+              <a:t>LNG </a:t>
+            </a:r>
+            <a:r>
+              <a:rPr lang="ko-KR" altLang="en-US" sz="1600" dirty="0"/>
+              <a:t>수출은 계약 구조 및 수출 전략 측면에서 두 가지 상이한 경향을 보인다</a:t>
+            </a:r>
+            <a:r>
+              <a:rPr lang="en-US" altLang="ko-KR" sz="1600" dirty="0"/>
+              <a:t>.</a:t>
+            </a:r>
+          </a:p>
+          <a:p>
+            <a:pPr marL="835025" lvl="1" indent="-285750">
+              <a:lnSpc>
+                <a:spcPct val="150000"/>
+              </a:lnSpc>
+              <a:buFont typeface="Wingdings" panose="05000000000000000000" pitchFamily="2" charset="2"/>
+              <a:buChar char="ü"/>
+            </a:pPr>
+            <a:r>
+              <a:rPr lang="ko-KR" altLang="en-US" sz="1600" dirty="0"/>
+              <a:t>일부 국가는 여전히 장기 고정계약에 의존하고 있으며</a:t>
+            </a:r>
+            <a:r>
+              <a:rPr lang="en-US" altLang="ko-KR" sz="1600" dirty="0"/>
+              <a:t>, </a:t>
+            </a:r>
+            <a:r>
+              <a:rPr lang="ko-KR" altLang="en-US" sz="1600" dirty="0"/>
+              <a:t>이는 수입국의 수요 안정성과 수출국의 수익 예측 가능성을 동시에 보장한다</a:t>
+            </a:r>
+            <a:r>
+              <a:rPr lang="en-US" altLang="ko-KR" sz="1600" dirty="0"/>
+              <a:t>. </a:t>
+            </a:r>
+          </a:p>
+          <a:p>
+            <a:pPr marL="1292225" lvl="2" indent="-285750">
+              <a:lnSpc>
+                <a:spcPct val="150000"/>
+              </a:lnSpc>
+              <a:buFont typeface="Wingdings" panose="05000000000000000000" pitchFamily="2" charset="2"/>
+              <a:buChar char="Ø"/>
+            </a:pPr>
+            <a:r>
+              <a:rPr lang="ko-KR" altLang="en-US" sz="1600" dirty="0"/>
+              <a:t>카타르와 러시아가 대표적인 사례로</a:t>
+            </a:r>
+            <a:r>
+              <a:rPr lang="en-US" altLang="ko-KR" sz="1600" dirty="0"/>
+              <a:t>, </a:t>
+            </a:r>
+            <a:r>
+              <a:rPr lang="ko-KR" altLang="en-US" sz="1600" dirty="0"/>
+              <a:t>이들은 장기 공급계약을 통해 동아시아 및 유럽의 주요 수입국들과 안정적인 무역 관계를 유지하고 있다</a:t>
+            </a:r>
+            <a:r>
+              <a:rPr lang="en-US" altLang="ko-KR" sz="1600" dirty="0"/>
+              <a:t>.</a:t>
+            </a:r>
+          </a:p>
+          <a:p>
+            <a:pPr marL="835025" lvl="1" indent="-285750">
+              <a:lnSpc>
+                <a:spcPct val="150000"/>
+              </a:lnSpc>
+              <a:buFont typeface="Wingdings" panose="05000000000000000000" pitchFamily="2" charset="2"/>
+              <a:buChar char="ü"/>
+            </a:pPr>
+            <a:r>
+              <a:rPr lang="ko-KR" altLang="en-US" sz="1600" dirty="0"/>
+              <a:t>반면</a:t>
+            </a:r>
+            <a:r>
+              <a:rPr lang="en-US" altLang="ko-KR" sz="1600" dirty="0"/>
+              <a:t>, </a:t>
+            </a:r>
+            <a:r>
+              <a:rPr lang="ko-KR" altLang="en-US" sz="1600" dirty="0"/>
+              <a:t>미국은 대부분의 </a:t>
+            </a:r>
+            <a:r>
+              <a:rPr lang="en-US" altLang="ko-KR" sz="1600" dirty="0"/>
+              <a:t>LNG </a:t>
+            </a:r>
+            <a:r>
+              <a:rPr lang="ko-KR" altLang="en-US" sz="1600" dirty="0"/>
+              <a:t>수출을 헨리 허브 가격을 기반으로 하는 유연한 계약구조를 채택하고 있다</a:t>
+            </a:r>
+            <a:r>
+              <a:rPr lang="en-US" altLang="ko-KR" sz="1600" dirty="0"/>
+              <a:t>.</a:t>
+            </a:r>
+          </a:p>
+          <a:p>
+            <a:pPr marL="1292225" lvl="2" indent="-285750">
+              <a:lnSpc>
+                <a:spcPct val="150000"/>
+              </a:lnSpc>
+              <a:buFont typeface="Wingdings" panose="05000000000000000000" pitchFamily="2" charset="2"/>
+              <a:buChar char="Ø"/>
+            </a:pPr>
+            <a:r>
+              <a:rPr lang="ko-KR" altLang="en-US" sz="1600" dirty="0"/>
+              <a:t>수출</a:t>
+            </a:r>
+            <a:r>
+              <a:rPr lang="en-US" altLang="ko-KR" sz="1600" dirty="0"/>
+              <a:t>, </a:t>
+            </a:r>
+            <a:r>
+              <a:rPr lang="ko-KR" altLang="en-US" sz="1600" dirty="0"/>
+              <a:t>수입국 모두 시장 가격 변화에 민감하게 반응하는 구조를 갖게 되었다</a:t>
+            </a:r>
+            <a:r>
+              <a:rPr lang="en-US" altLang="ko-KR" sz="1600" dirty="0"/>
+              <a:t>.</a:t>
+            </a:r>
+          </a:p>
+          <a:p>
+            <a:pPr marL="1292225" lvl="2" indent="-285750">
+              <a:lnSpc>
+                <a:spcPct val="150000"/>
+              </a:lnSpc>
+              <a:buFont typeface="Wingdings" panose="05000000000000000000" pitchFamily="2" charset="2"/>
+              <a:buChar char="Ø"/>
+            </a:pPr>
+            <a:r>
+              <a:rPr lang="ko-KR" altLang="en-US" sz="1600" dirty="0"/>
+              <a:t>이러한 미국식 계약 모델은 글로벌 </a:t>
+            </a:r>
+            <a:r>
+              <a:rPr lang="en-US" altLang="ko-KR" sz="1600" dirty="0"/>
+              <a:t>LNG </a:t>
+            </a:r>
+            <a:r>
+              <a:rPr lang="ko-KR" altLang="en-US" sz="1600" dirty="0"/>
+              <a:t>현물시장</a:t>
+            </a:r>
+            <a:r>
+              <a:rPr lang="en-US" altLang="ko-KR" sz="1600" dirty="0"/>
+              <a:t>(spot market)</a:t>
+            </a:r>
+            <a:r>
+              <a:rPr lang="ko-KR" altLang="en-US" sz="1600" dirty="0"/>
+              <a:t>의 성장과 가격 신호의 국제적 확산에 기여하고 있으며</a:t>
+            </a:r>
+            <a:r>
+              <a:rPr lang="en-US" altLang="ko-KR" sz="1600" dirty="0"/>
+              <a:t>, </a:t>
+            </a:r>
+            <a:r>
+              <a:rPr lang="ko-KR" altLang="en-US" sz="1600" dirty="0"/>
+              <a:t>시장 유연성과 경쟁성을 동시에 제고하는 데 중요한 역할을 하고 있다</a:t>
+            </a:r>
+            <a:r>
+              <a:rPr lang="en-US" altLang="ko-KR" sz="1600" dirty="0"/>
+              <a:t>.</a:t>
+            </a:r>
+          </a:p>
+          <a:p>
+            <a:pPr marL="377825" indent="-285750">
+              <a:lnSpc>
+                <a:spcPct val="150000"/>
+              </a:lnSpc>
+              <a:buFont typeface="Arial" panose="020B0604020202020204" pitchFamily="34" charset="0"/>
+              <a:buChar char="•"/>
+            </a:pPr>
+            <a:r>
+              <a:rPr lang="ko-KR" altLang="en-US" sz="1600" dirty="0"/>
+              <a:t>최근에는 아프리카 및 남미 지역의 신규 </a:t>
+            </a:r>
+            <a:r>
+              <a:rPr lang="en-US" altLang="ko-KR" sz="1600" dirty="0"/>
+              <a:t>LNG </a:t>
+            </a:r>
+            <a:r>
+              <a:rPr lang="ko-KR" altLang="en-US" sz="1600" dirty="0"/>
+              <a:t>수출국들이 주목받고 있다</a:t>
+            </a:r>
+            <a:r>
+              <a:rPr lang="en-US" altLang="ko-KR" sz="1600" dirty="0"/>
+              <a:t>.</a:t>
+            </a:r>
+          </a:p>
+          <a:p>
+            <a:pPr marL="835025" lvl="1" indent="-285750">
+              <a:lnSpc>
+                <a:spcPct val="150000"/>
+              </a:lnSpc>
+              <a:buFont typeface="Wingdings" panose="05000000000000000000" pitchFamily="2" charset="2"/>
+              <a:buChar char="ü"/>
+            </a:pPr>
+            <a:r>
+              <a:rPr lang="ko-KR" altLang="en-US" sz="1600" dirty="0"/>
+              <a:t>모잠비크는 </a:t>
+            </a:r>
+            <a:r>
+              <a:rPr lang="ko-KR" altLang="en-US" sz="1600" dirty="0" err="1"/>
+              <a:t>로부마</a:t>
+            </a:r>
+            <a:r>
+              <a:rPr lang="en-US" altLang="ko-KR" sz="1600" dirty="0"/>
+              <a:t>,</a:t>
+            </a:r>
+            <a:r>
+              <a:rPr lang="ko-KR" altLang="en-US" sz="1600" dirty="0"/>
+              <a:t> </a:t>
+            </a:r>
+            <a:r>
+              <a:rPr lang="ko-KR" altLang="en-US" sz="1600" dirty="0" err="1"/>
+              <a:t>코랄</a:t>
+            </a:r>
+            <a:r>
+              <a:rPr lang="ko-KR" altLang="en-US" sz="1600" dirty="0"/>
+              <a:t> </a:t>
+            </a:r>
+            <a:r>
+              <a:rPr lang="ko-KR" altLang="en-US" sz="1600" dirty="0" err="1"/>
+              <a:t>사우스</a:t>
+            </a:r>
+            <a:r>
+              <a:rPr lang="ko-KR" altLang="en-US" sz="1600" dirty="0"/>
+              <a:t> 프로젝트를 통해</a:t>
+            </a:r>
+            <a:r>
+              <a:rPr lang="en-US" altLang="ko-KR" sz="1600" dirty="0"/>
+              <a:t>, </a:t>
+            </a:r>
+            <a:r>
+              <a:rPr lang="ko-KR" altLang="en-US" sz="1600" dirty="0"/>
+              <a:t>세네갈은 </a:t>
+            </a:r>
+            <a:r>
+              <a:rPr lang="ko-KR" altLang="en-US" sz="1600" dirty="0" err="1"/>
+              <a:t>그레이터</a:t>
+            </a:r>
+            <a:r>
+              <a:rPr lang="ko-KR" altLang="en-US" sz="1600" dirty="0"/>
+              <a:t> </a:t>
+            </a:r>
+            <a:r>
+              <a:rPr lang="ko-KR" altLang="en-US" sz="1600" dirty="0" err="1"/>
+              <a:t>토르투</a:t>
+            </a:r>
+            <a:r>
+              <a:rPr lang="ko-KR" altLang="en-US" sz="1600" dirty="0"/>
+              <a:t> </a:t>
+            </a:r>
+            <a:r>
+              <a:rPr lang="ko-KR" altLang="en-US" sz="1600" dirty="0" err="1"/>
+              <a:t>아메임</a:t>
+            </a:r>
+            <a:r>
+              <a:rPr lang="ko-KR" altLang="en-US" sz="1600" dirty="0"/>
+              <a:t> 프로젝트를 통해</a:t>
+            </a:r>
+            <a:r>
+              <a:rPr lang="en-US" altLang="ko-KR" sz="1600" dirty="0"/>
+              <a:t>, </a:t>
+            </a:r>
+            <a:r>
+              <a:rPr lang="ko-KR" altLang="en-US" sz="1600" dirty="0"/>
+              <a:t>나이지리아는 보니 아일랜드 프로젝트를 통해 수출 기반을 확장하고 있다</a:t>
+            </a:r>
+            <a:r>
+              <a:rPr lang="en-US" altLang="ko-KR" sz="1600" dirty="0"/>
+              <a:t>.</a:t>
+            </a:r>
+          </a:p>
+          <a:p>
+            <a:pPr marL="835025" lvl="1" indent="-285750">
+              <a:lnSpc>
+                <a:spcPct val="150000"/>
+              </a:lnSpc>
+              <a:buFont typeface="Wingdings" panose="05000000000000000000" pitchFamily="2" charset="2"/>
+              <a:buChar char="ü"/>
+            </a:pPr>
+            <a:r>
+              <a:rPr lang="ko-KR" altLang="en-US" sz="1600" dirty="0"/>
+              <a:t>이들 국가는 향후 </a:t>
+            </a:r>
+            <a:r>
+              <a:rPr lang="en-US" altLang="ko-KR" sz="1600" dirty="0"/>
+              <a:t>LNG </a:t>
+            </a:r>
+            <a:r>
+              <a:rPr lang="ko-KR" altLang="en-US" sz="1600" dirty="0"/>
+              <a:t>수출의 지리적 분산과 글로벌 공급 안정성 제고에 크게 기여할 것으로 기대된다</a:t>
+            </a:r>
+            <a:r>
+              <a:rPr lang="en-US" altLang="ko-KR" sz="1600" dirty="0"/>
+              <a:t>.</a:t>
+            </a:r>
+          </a:p>
+          <a:p>
+            <a:pPr marL="835025" lvl="1" indent="-285750">
+              <a:lnSpc>
+                <a:spcPct val="150000"/>
+              </a:lnSpc>
+              <a:buFont typeface="Wingdings" panose="05000000000000000000" pitchFamily="2" charset="2"/>
+              <a:buChar char="ü"/>
+            </a:pPr>
+            <a:r>
+              <a:rPr lang="ko-KR" altLang="en-US" sz="1600" dirty="0"/>
+              <a:t>수출 경쟁 심화와 함께 글로벌 가격 형성에도 복합적인 영향을 미칠 것으로 전망된다</a:t>
+            </a:r>
+            <a:r>
+              <a:rPr lang="en-US" altLang="ko-KR" sz="1600" dirty="0"/>
+              <a:t>.</a:t>
+            </a:r>
+          </a:p>
+        </p:txBody>
+      </p:sp>
+    </p:spTree>
+    <p:extLst>
+      <p:ext uri="{BB962C8B-B14F-4D97-AF65-F5344CB8AC3E}">
+        <p14:creationId xmlns:p14="http://schemas.microsoft.com/office/powerpoint/2010/main" val="224702579"/>
+      </p:ext>
+    </p:extLst>
+  </p:cSld>
+  <p:clrMapOvr>
+    <a:masterClrMapping/>
+  </p:clrMapOvr>
+</p:sld>
+</file>
+
+<file path=ppt/slides/slide31.xml><?xml version="1.0" encoding="utf-8"?>
+<p:sld xmlns:a="http://schemas.openxmlformats.org/drawingml/2006/main" xmlns:r="http://schemas.openxmlformats.org/officeDocument/2006/relationships" xmlns:p="http://schemas.openxmlformats.org/presentationml/2006/main">
+  <p:cSld>
+    <p:spTree>
+      <p:nvGrpSpPr>
+        <p:cNvPr id="1" name="">
+          <a:extLst>
+            <a:ext uri="{FF2B5EF4-FFF2-40B4-BE49-F238E27FC236}">
+              <a16:creationId xmlns:a16="http://schemas.microsoft.com/office/drawing/2014/main" id="{96D3E5A8-2209-68FC-CACA-E292AC7701CA}"/>
+            </a:ext>
+          </a:extLst>
+        </p:cNvPr>
+        <p:cNvGrpSpPr/>
+        <p:nvPr/>
+      </p:nvGrpSpPr>
+      <p:grpSpPr>
+        <a:xfrm>
+          <a:off x="0" y="0"/>
+          <a:ext cx="0" cy="0"/>
+          <a:chOff x="0" y="0"/>
+          <a:chExt cx="0" cy="0"/>
+        </a:xfrm>
+      </p:grpSpPr>
+      <p:sp>
+        <p:nvSpPr>
+          <p:cNvPr id="2" name="제목 1">
+            <a:extLst>
+              <a:ext uri="{FF2B5EF4-FFF2-40B4-BE49-F238E27FC236}">
+                <a16:creationId xmlns:a16="http://schemas.microsoft.com/office/drawing/2014/main" id="{189CE135-7B2C-B91C-A327-7890EE0B2C32}"/>
+              </a:ext>
+            </a:extLst>
+          </p:cNvPr>
+          <p:cNvSpPr>
+            <a:spLocks noGrp="1"/>
+          </p:cNvSpPr>
+          <p:nvPr>
+            <p:ph type="title"/>
+          </p:nvPr>
+        </p:nvSpPr>
+        <p:spPr/>
+        <p:txBody>
+          <a:bodyPr/>
+          <a:lstStyle/>
+          <a:p>
+            <a:r>
+              <a:rPr lang="ko-KR" altLang="en-US" dirty="0"/>
+              <a:t>천연가스 소비</a:t>
+            </a:r>
+          </a:p>
+        </p:txBody>
+      </p:sp>
+      <p:sp>
+        <p:nvSpPr>
+          <p:cNvPr id="4" name="슬라이드 번호 개체 틀 3">
+            <a:extLst>
+              <a:ext uri="{FF2B5EF4-FFF2-40B4-BE49-F238E27FC236}">
+                <a16:creationId xmlns:a16="http://schemas.microsoft.com/office/drawing/2014/main" id="{91A4EA85-C411-CE6C-BAFF-794410289C24}"/>
+              </a:ext>
+            </a:extLst>
+          </p:cNvPr>
+          <p:cNvSpPr>
+            <a:spLocks noGrp="1"/>
+          </p:cNvSpPr>
+          <p:nvPr>
+            <p:ph type="sldNum" sz="quarter" idx="12"/>
+          </p:nvPr>
+        </p:nvSpPr>
+        <p:spPr/>
+        <p:txBody>
+          <a:bodyPr/>
+          <a:lstStyle/>
+          <a:p>
+            <a:fld id="{109C872D-39A9-4065-8BF3-6A613116E2A1}" type="slidenum">
+              <a:rPr lang="ko-KR" altLang="en-US" smtClean="0"/>
+              <a:t>31</a:t>
+            </a:fld>
+            <a:endParaRPr lang="ko-KR" altLang="en-US"/>
+          </a:p>
+        </p:txBody>
+      </p:sp>
+      <p:sp>
+        <p:nvSpPr>
+          <p:cNvPr id="3" name="TextBox 2">
+            <a:extLst>
+              <a:ext uri="{FF2B5EF4-FFF2-40B4-BE49-F238E27FC236}">
+                <a16:creationId xmlns:a16="http://schemas.microsoft.com/office/drawing/2014/main" id="{114BB9E9-7916-F94F-B356-043B07E707B3}"/>
+              </a:ext>
+            </a:extLst>
+          </p:cNvPr>
+          <p:cNvSpPr txBox="1"/>
+          <p:nvPr/>
+        </p:nvSpPr>
+        <p:spPr>
+          <a:xfrm>
+            <a:off x="288790" y="958844"/>
+            <a:ext cx="11118453" cy="1522020"/>
+          </a:xfrm>
+          <a:prstGeom prst="rect">
+            <a:avLst/>
+          </a:prstGeom>
+          <a:noFill/>
+        </p:spPr>
+        <p:txBody>
+          <a:bodyPr wrap="square" rtlCol="0" anchor="t">
+            <a:spAutoFit/>
+          </a:bodyPr>
+          <a:lstStyle/>
+          <a:p>
+            <a:pPr marL="377825" indent="-285750">
+              <a:lnSpc>
+                <a:spcPct val="150000"/>
+              </a:lnSpc>
+              <a:buFont typeface="Arial" panose="020B0604020202020204" pitchFamily="34" charset="0"/>
+              <a:buChar char="•"/>
+            </a:pPr>
+            <a:r>
+              <a:rPr lang="en-US" altLang="ko-KR" sz="1600" dirty="0"/>
+              <a:t>LNG </a:t>
+            </a:r>
+            <a:r>
+              <a:rPr lang="ko-KR" altLang="en-US" sz="1600" dirty="0"/>
+              <a:t>의 또 다른 특징은 액화 인프라의 장기 투자성과 높은 프로젝트 리스크이다</a:t>
+            </a:r>
+            <a:r>
+              <a:rPr lang="en-US" altLang="ko-KR" sz="1600" dirty="0"/>
+              <a:t>.</a:t>
+            </a:r>
+          </a:p>
+          <a:p>
+            <a:pPr marL="835025" lvl="1" indent="-285750">
+              <a:lnSpc>
+                <a:spcPct val="150000"/>
+              </a:lnSpc>
+              <a:buFont typeface="Wingdings" panose="05000000000000000000" pitchFamily="2" charset="2"/>
+              <a:buChar char="ü"/>
+            </a:pPr>
+            <a:r>
+              <a:rPr lang="ko-KR" altLang="en-US" sz="1600" dirty="0"/>
+              <a:t>액화 플랜트 건설에는 수십억 달러 규모의 자본 투자가 소요되고</a:t>
+            </a:r>
+            <a:r>
+              <a:rPr lang="en-US" altLang="ko-KR" sz="1600" dirty="0"/>
+              <a:t>, </a:t>
+            </a:r>
+            <a:r>
+              <a:rPr lang="ko-KR" altLang="en-US" sz="1600" dirty="0"/>
+              <a:t>완공에 수년이 걸리고</a:t>
+            </a:r>
+            <a:r>
+              <a:rPr lang="en-US" altLang="ko-KR" sz="1600" dirty="0"/>
+              <a:t>, </a:t>
+            </a:r>
+            <a:r>
+              <a:rPr lang="ko-KR" altLang="en-US" sz="1600" dirty="0"/>
+              <a:t>프로젝트의 성공 여부는 자원 매장량</a:t>
+            </a:r>
+            <a:r>
+              <a:rPr lang="en-US" altLang="ko-KR" sz="1600" dirty="0"/>
+              <a:t>, </a:t>
+            </a:r>
+            <a:r>
+              <a:rPr lang="ko-KR" altLang="en-US" sz="1600" dirty="0"/>
+              <a:t>정치적 안정성</a:t>
+            </a:r>
+            <a:r>
+              <a:rPr lang="en-US" altLang="ko-KR" sz="1600" dirty="0"/>
+              <a:t>, </a:t>
+            </a:r>
+            <a:r>
+              <a:rPr lang="ko-KR" altLang="en-US" sz="1600" dirty="0"/>
+              <a:t>투자제도</a:t>
+            </a:r>
+            <a:r>
+              <a:rPr lang="en-US" altLang="ko-KR" sz="1600" dirty="0"/>
+              <a:t>, </a:t>
+            </a:r>
+            <a:r>
+              <a:rPr lang="ko-KR" altLang="en-US" sz="1600" dirty="0"/>
+              <a:t>수요 전망 등 다양한 요인에 의해 좌우된다</a:t>
+            </a:r>
+            <a:r>
+              <a:rPr lang="en-US" altLang="ko-KR" sz="1600" dirty="0"/>
+              <a:t>.</a:t>
+            </a:r>
+          </a:p>
+          <a:p>
+            <a:pPr marL="835025" lvl="1" indent="-285750">
+              <a:lnSpc>
+                <a:spcPct val="150000"/>
+              </a:lnSpc>
+              <a:buFont typeface="Wingdings" panose="05000000000000000000" pitchFamily="2" charset="2"/>
+              <a:buChar char="ü"/>
+            </a:pPr>
+            <a:r>
+              <a:rPr lang="ko-KR" altLang="en-US" sz="1600" dirty="0"/>
+              <a:t>단기적 시장 상황보다는 장기적 전략과 정책 일관성에 많은 영향을 받는다</a:t>
+            </a:r>
+            <a:r>
+              <a:rPr lang="en-US" altLang="ko-KR" sz="1600" dirty="0"/>
+              <a:t>.</a:t>
+            </a:r>
+          </a:p>
+        </p:txBody>
+      </p:sp>
+      <p:pic>
+        <p:nvPicPr>
+          <p:cNvPr id="5" name="그림 4">
+            <a:extLst>
+              <a:ext uri="{FF2B5EF4-FFF2-40B4-BE49-F238E27FC236}">
+                <a16:creationId xmlns:a16="http://schemas.microsoft.com/office/drawing/2014/main" id="{8D996BF7-A5A7-7AA3-046B-8F1D07C37B16}"/>
+              </a:ext>
+            </a:extLst>
+          </p:cNvPr>
+          <p:cNvPicPr>
+            <a:picLocks noChangeAspect="1"/>
+          </p:cNvPicPr>
+          <p:nvPr/>
+        </p:nvPicPr>
+        <p:blipFill rotWithShape="1">
+          <a:blip r:embed="rId2"/>
+          <a:srcRect r="5831"/>
+          <a:stretch>
+            <a:fillRect/>
+          </a:stretch>
+        </p:blipFill>
+        <p:spPr>
+          <a:xfrm>
+            <a:off x="6252732" y="3281429"/>
+            <a:ext cx="5613416" cy="2880000"/>
+          </a:xfrm>
+          <a:prstGeom prst="rect">
+            <a:avLst/>
+          </a:prstGeom>
+        </p:spPr>
+      </p:pic>
+      <p:sp>
+        <p:nvSpPr>
+          <p:cNvPr id="6" name="TextBox 5">
+            <a:extLst>
+              <a:ext uri="{FF2B5EF4-FFF2-40B4-BE49-F238E27FC236}">
+                <a16:creationId xmlns:a16="http://schemas.microsoft.com/office/drawing/2014/main" id="{F1EDD8DF-E515-E39E-62D1-F5910218CA72}"/>
+              </a:ext>
+            </a:extLst>
+          </p:cNvPr>
+          <p:cNvSpPr txBox="1"/>
+          <p:nvPr/>
+        </p:nvSpPr>
+        <p:spPr>
+          <a:xfrm>
+            <a:off x="7512785" y="3225643"/>
+            <a:ext cx="3225894" cy="253916"/>
+          </a:xfrm>
+          <a:prstGeom prst="rect">
+            <a:avLst/>
+          </a:prstGeom>
+          <a:noFill/>
+        </p:spPr>
+        <p:txBody>
+          <a:bodyPr wrap="square">
+            <a:spAutoFit/>
+          </a:bodyPr>
+          <a:lstStyle/>
+          <a:p>
+            <a:pPr algn="ctr"/>
+            <a:r>
+              <a:rPr lang="en-US" altLang="ko-KR" sz="1050" spc="-50" dirty="0"/>
+              <a:t>&lt; </a:t>
+            </a:r>
+            <a:r>
+              <a:rPr lang="ko-KR" altLang="en-US" sz="1050" spc="-50" dirty="0"/>
+              <a:t>주요 국가의 천연가스 수출량  </a:t>
+            </a:r>
+            <a:r>
+              <a:rPr lang="en-US" altLang="ko-KR" sz="1050" spc="-50" dirty="0"/>
+              <a:t>(10</a:t>
+            </a:r>
+            <a:r>
+              <a:rPr lang="ko-KR" altLang="en-US" sz="1050" spc="-50" dirty="0"/>
+              <a:t>억 </a:t>
+            </a:r>
+            <a:r>
+              <a:rPr lang="ko-KR" altLang="en-US" sz="1050" spc="-50" dirty="0" err="1"/>
+              <a:t>입방미터</a:t>
+            </a:r>
+            <a:r>
+              <a:rPr lang="en-US" altLang="ko-KR" sz="1050" spc="-50" dirty="0"/>
+              <a:t>) &gt;</a:t>
+            </a:r>
+            <a:endParaRPr lang="ko-KR" altLang="en-US" sz="1050" dirty="0"/>
+          </a:p>
+        </p:txBody>
+      </p:sp>
+      <p:sp>
+        <p:nvSpPr>
+          <p:cNvPr id="7" name="TextBox 6">
+            <a:extLst>
+              <a:ext uri="{FF2B5EF4-FFF2-40B4-BE49-F238E27FC236}">
+                <a16:creationId xmlns:a16="http://schemas.microsoft.com/office/drawing/2014/main" id="{50D538B8-BB32-0384-BBD7-ACF044FF42BB}"/>
+              </a:ext>
+            </a:extLst>
+          </p:cNvPr>
+          <p:cNvSpPr txBox="1"/>
+          <p:nvPr/>
+        </p:nvSpPr>
+        <p:spPr>
+          <a:xfrm>
+            <a:off x="288791" y="2958882"/>
+            <a:ext cx="6165018" cy="2260683"/>
+          </a:xfrm>
+          <a:prstGeom prst="rect">
+            <a:avLst/>
+          </a:prstGeom>
+          <a:noFill/>
+        </p:spPr>
+        <p:txBody>
+          <a:bodyPr wrap="square" rtlCol="0" anchor="t">
+            <a:spAutoFit/>
+          </a:bodyPr>
+          <a:lstStyle/>
+          <a:p>
+            <a:pPr marL="377825" indent="-285750">
+              <a:lnSpc>
+                <a:spcPct val="150000"/>
+              </a:lnSpc>
+              <a:buFont typeface="Arial" panose="020B0604020202020204" pitchFamily="34" charset="0"/>
+              <a:buChar char="•"/>
+            </a:pPr>
+            <a:r>
+              <a:rPr lang="ko-KR" altLang="en-US" sz="1600" dirty="0"/>
+              <a:t>오른쪽 그래프에서 보듯이 미국</a:t>
+            </a:r>
+            <a:r>
+              <a:rPr lang="en-US" altLang="ko-KR" sz="1600" dirty="0"/>
+              <a:t>, </a:t>
+            </a:r>
+            <a:r>
+              <a:rPr lang="ko-KR" altLang="en-US" sz="1600" dirty="0"/>
+              <a:t>카타르</a:t>
+            </a:r>
+            <a:r>
+              <a:rPr lang="en-US" altLang="ko-KR" sz="1600" dirty="0"/>
+              <a:t>, </a:t>
+            </a:r>
+            <a:r>
+              <a:rPr lang="ko-KR" altLang="en-US" sz="1600" dirty="0"/>
+              <a:t>호주</a:t>
+            </a:r>
+            <a:r>
+              <a:rPr lang="en-US" altLang="ko-KR" sz="1600" dirty="0"/>
+              <a:t>, </a:t>
+            </a:r>
+            <a:r>
+              <a:rPr lang="ko-KR" altLang="en-US" sz="1600" dirty="0"/>
+              <a:t>러시아가 </a:t>
+            </a:r>
+            <a:r>
+              <a:rPr lang="en-US" altLang="ko-KR" sz="1600" dirty="0"/>
+              <a:t>4</a:t>
+            </a:r>
+            <a:r>
+              <a:rPr lang="ko-KR" altLang="en-US" sz="1600" dirty="0"/>
+              <a:t>대 천연가스 수출국이며</a:t>
+            </a:r>
+            <a:r>
+              <a:rPr lang="en-US" altLang="ko-KR" sz="1600" dirty="0"/>
+              <a:t>, </a:t>
+            </a:r>
+            <a:r>
+              <a:rPr lang="ko-KR" altLang="en-US" sz="1600" dirty="0"/>
+              <a:t>전 세계 수출의 </a:t>
+            </a:r>
+            <a:r>
+              <a:rPr lang="en-US" altLang="ko-KR" sz="1600" dirty="0"/>
+              <a:t>68.8% </a:t>
+            </a:r>
+            <a:r>
+              <a:rPr lang="ko-KR" altLang="en-US" sz="1600" dirty="0"/>
+              <a:t>차지한다</a:t>
+            </a:r>
+            <a:r>
+              <a:rPr lang="en-US" altLang="ko-KR" sz="1600" dirty="0"/>
+              <a:t>.</a:t>
+            </a:r>
+          </a:p>
+          <a:p>
+            <a:pPr marL="835025" lvl="1" indent="-285750">
+              <a:lnSpc>
+                <a:spcPct val="150000"/>
+              </a:lnSpc>
+              <a:buFont typeface="Wingdings" panose="05000000000000000000" pitchFamily="2" charset="2"/>
+              <a:buChar char="ü"/>
+            </a:pPr>
+            <a:r>
+              <a:rPr lang="ko-KR" altLang="en-US" sz="1600" dirty="0"/>
+              <a:t>국가별 비중은 미국</a:t>
+            </a:r>
+            <a:r>
+              <a:rPr lang="en-US" altLang="ko-KR" sz="1600" dirty="0"/>
+              <a:t>(20.8%), </a:t>
+            </a:r>
+            <a:r>
+              <a:rPr lang="ko-KR" altLang="en-US" sz="1600" dirty="0"/>
+              <a:t>카타르</a:t>
+            </a:r>
+            <a:r>
+              <a:rPr lang="en-US" altLang="ko-KR" sz="1600" dirty="0"/>
+              <a:t>(19.7%), </a:t>
+            </a:r>
+            <a:r>
+              <a:rPr lang="ko-KR" altLang="en-US" sz="1600" dirty="0"/>
+              <a:t>호주</a:t>
+            </a:r>
+            <a:r>
+              <a:rPr lang="en-US" altLang="ko-KR" sz="1600" dirty="0"/>
+              <a:t>(19.6%), </a:t>
+            </a:r>
+            <a:r>
+              <a:rPr lang="ko-KR" altLang="en-US" sz="1600" dirty="0"/>
+              <a:t>러시아</a:t>
+            </a:r>
+            <a:r>
+              <a:rPr lang="en-US" altLang="ko-KR" sz="1600" dirty="0"/>
+              <a:t>(7.8%)</a:t>
+            </a:r>
+            <a:r>
+              <a:rPr lang="ko-KR" altLang="en-US" sz="1600" dirty="0"/>
+              <a:t>를 나타내고 있다</a:t>
+            </a:r>
+            <a:r>
+              <a:rPr lang="en-US" altLang="ko-KR" sz="1600" dirty="0"/>
+              <a:t>.</a:t>
+            </a:r>
+          </a:p>
+          <a:p>
+            <a:pPr marL="835025" lvl="1" indent="-285750">
+              <a:lnSpc>
+                <a:spcPct val="150000"/>
+              </a:lnSpc>
+              <a:buFont typeface="Wingdings" panose="05000000000000000000" pitchFamily="2" charset="2"/>
+              <a:buChar char="ü"/>
+            </a:pPr>
+            <a:r>
+              <a:rPr lang="ko-KR" altLang="en-US" sz="1600" dirty="0"/>
+              <a:t>최근에는 미국과 호주의 비중이 점차 증가하고 있음을 볼 수 있다</a:t>
+            </a:r>
+            <a:r>
+              <a:rPr lang="en-US" altLang="ko-KR" sz="1600" dirty="0"/>
+              <a:t>.</a:t>
+            </a:r>
+          </a:p>
+        </p:txBody>
+      </p:sp>
+    </p:spTree>
+    <p:extLst>
+      <p:ext uri="{BB962C8B-B14F-4D97-AF65-F5344CB8AC3E}">
+        <p14:creationId xmlns:p14="http://schemas.microsoft.com/office/powerpoint/2010/main" val="1512533493"/>
+      </p:ext>
+    </p:extLst>
+  </p:cSld>
+  <p:clrMapOvr>
+    <a:masterClrMapping/>
+  </p:clrMapOvr>
+</p:sld>
+</file>
+
+<file path=ppt/slides/slide32.xml><?xml version="1.0" encoding="utf-8"?>
+<p:sld xmlns:a="http://schemas.openxmlformats.org/drawingml/2006/main" xmlns:r="http://schemas.openxmlformats.org/officeDocument/2006/relationships" xmlns:p="http://schemas.openxmlformats.org/presentationml/2006/main">
+  <p:cSld>
+    <p:spTree>
+      <p:nvGrpSpPr>
+        <p:cNvPr id="1" name="">
+          <a:extLst>
+            <a:ext uri="{FF2B5EF4-FFF2-40B4-BE49-F238E27FC236}">
+              <a16:creationId xmlns:a16="http://schemas.microsoft.com/office/drawing/2014/main" id="{6DF76DF7-795D-675C-12D1-C260F4A4C2A7}"/>
+            </a:ext>
+          </a:extLst>
+        </p:cNvPr>
+        <p:cNvGrpSpPr/>
+        <p:nvPr/>
+      </p:nvGrpSpPr>
+      <p:grpSpPr>
+        <a:xfrm>
+          <a:off x="0" y="0"/>
+          <a:ext cx="0" cy="0"/>
+          <a:chOff x="0" y="0"/>
+          <a:chExt cx="0" cy="0"/>
+        </a:xfrm>
+      </p:grpSpPr>
+      <p:sp>
+        <p:nvSpPr>
+          <p:cNvPr id="2" name="제목 1">
+            <a:extLst>
+              <a:ext uri="{FF2B5EF4-FFF2-40B4-BE49-F238E27FC236}">
+                <a16:creationId xmlns:a16="http://schemas.microsoft.com/office/drawing/2014/main" id="{96380991-F804-0298-159B-6F941FEFFD0F}"/>
+              </a:ext>
+            </a:extLst>
+          </p:cNvPr>
+          <p:cNvSpPr>
+            <a:spLocks noGrp="1"/>
+          </p:cNvSpPr>
+          <p:nvPr>
+            <p:ph type="title"/>
+          </p:nvPr>
+        </p:nvSpPr>
+        <p:spPr/>
+        <p:txBody>
+          <a:bodyPr/>
+          <a:lstStyle/>
+          <a:p>
+            <a:r>
+              <a:rPr lang="ko-KR" altLang="en-US" dirty="0"/>
+              <a:t>천연가스 소비</a:t>
+            </a:r>
+          </a:p>
+        </p:txBody>
+      </p:sp>
+      <p:sp>
+        <p:nvSpPr>
+          <p:cNvPr id="4" name="슬라이드 번호 개체 틀 3">
+            <a:extLst>
+              <a:ext uri="{FF2B5EF4-FFF2-40B4-BE49-F238E27FC236}">
+                <a16:creationId xmlns:a16="http://schemas.microsoft.com/office/drawing/2014/main" id="{50B46301-025D-DEFD-BD6D-03C717E46B41}"/>
+              </a:ext>
+            </a:extLst>
+          </p:cNvPr>
+          <p:cNvSpPr>
+            <a:spLocks noGrp="1"/>
+          </p:cNvSpPr>
+          <p:nvPr>
+            <p:ph type="sldNum" sz="quarter" idx="12"/>
+          </p:nvPr>
+        </p:nvSpPr>
+        <p:spPr/>
+        <p:txBody>
+          <a:bodyPr/>
+          <a:lstStyle/>
+          <a:p>
+            <a:fld id="{109C872D-39A9-4065-8BF3-6A613116E2A1}" type="slidenum">
+              <a:rPr lang="ko-KR" altLang="en-US" smtClean="0"/>
+              <a:t>32</a:t>
+            </a:fld>
+            <a:endParaRPr lang="ko-KR" altLang="en-US"/>
+          </a:p>
+        </p:txBody>
+      </p:sp>
+      <p:sp>
+        <p:nvSpPr>
+          <p:cNvPr id="3" name="TextBox 2">
+            <a:extLst>
+              <a:ext uri="{FF2B5EF4-FFF2-40B4-BE49-F238E27FC236}">
+                <a16:creationId xmlns:a16="http://schemas.microsoft.com/office/drawing/2014/main" id="{6CABE3FA-6D9C-5CC8-51E4-443A787CE86C}"/>
+              </a:ext>
+            </a:extLst>
+          </p:cNvPr>
+          <p:cNvSpPr txBox="1"/>
+          <p:nvPr/>
+        </p:nvSpPr>
+        <p:spPr>
+          <a:xfrm>
+            <a:off x="288790" y="958844"/>
+            <a:ext cx="6001575" cy="1152688"/>
+          </a:xfrm>
+          <a:prstGeom prst="rect">
+            <a:avLst/>
+          </a:prstGeom>
+          <a:noFill/>
+        </p:spPr>
+        <p:txBody>
+          <a:bodyPr wrap="square" rtlCol="0" anchor="t">
+            <a:spAutoFit/>
+          </a:bodyPr>
+          <a:lstStyle/>
+          <a:p>
+            <a:pPr marL="377825" indent="-285750">
+              <a:lnSpc>
+                <a:spcPct val="150000"/>
+              </a:lnSpc>
+              <a:buFont typeface="Arial" panose="020B0604020202020204" pitchFamily="34" charset="0"/>
+              <a:buChar char="•"/>
+            </a:pPr>
+            <a:r>
+              <a:rPr lang="ko-KR" altLang="en-US" sz="1600" dirty="0"/>
+              <a:t>미국의 </a:t>
+            </a:r>
+            <a:r>
+              <a:rPr lang="en-US" altLang="ko-KR" sz="1600" dirty="0"/>
+              <a:t>LNG </a:t>
+            </a:r>
+            <a:r>
+              <a:rPr lang="ko-KR" altLang="en-US" sz="1600" dirty="0"/>
+              <a:t>수출국은 프랑스</a:t>
+            </a:r>
+            <a:r>
+              <a:rPr lang="en-US" altLang="ko-KR" sz="1600" dirty="0"/>
+              <a:t>, </a:t>
+            </a:r>
+            <a:r>
+              <a:rPr lang="ko-KR" altLang="en-US" sz="1600" dirty="0"/>
+              <a:t>영국</a:t>
+            </a:r>
+            <a:r>
+              <a:rPr lang="en-US" altLang="ko-KR" sz="1600" dirty="0"/>
+              <a:t> </a:t>
+            </a:r>
+            <a:r>
+              <a:rPr lang="ko-KR" altLang="en-US" sz="1600" dirty="0"/>
+              <a:t>등을 중심으로 한 유럽 지역이 </a:t>
+            </a:r>
+            <a:r>
+              <a:rPr lang="en-US" altLang="ko-KR" sz="1600" dirty="0"/>
+              <a:t>67%</a:t>
+            </a:r>
+            <a:r>
+              <a:rPr lang="ko-KR" altLang="en-US" sz="1600" dirty="0"/>
+              <a:t>를 차지하고 있고</a:t>
+            </a:r>
+            <a:r>
+              <a:rPr lang="en-US" altLang="ko-KR" sz="1600" dirty="0"/>
+              <a:t>, </a:t>
+            </a:r>
+            <a:r>
+              <a:rPr lang="ko-KR" altLang="en-US" sz="1600" dirty="0"/>
+              <a:t>일본 중국</a:t>
+            </a:r>
+            <a:r>
+              <a:rPr lang="en-US" altLang="ko-KR" sz="1600" dirty="0"/>
+              <a:t>, </a:t>
+            </a:r>
+            <a:r>
+              <a:rPr lang="ko-KR" altLang="en-US" sz="1600" dirty="0"/>
+              <a:t>한국을 포함한 아시아 지역으로의 수출이 </a:t>
+            </a:r>
+            <a:r>
+              <a:rPr lang="en-US" altLang="ko-KR" sz="1600" dirty="0"/>
+              <a:t>26%</a:t>
+            </a:r>
+            <a:r>
+              <a:rPr lang="ko-KR" altLang="en-US" sz="1600" dirty="0"/>
+              <a:t>를 차지하고 있다</a:t>
+            </a:r>
+            <a:r>
+              <a:rPr lang="en-US" altLang="ko-KR" sz="1600" dirty="0"/>
+              <a:t>.</a:t>
+            </a:r>
+          </a:p>
+        </p:txBody>
+      </p:sp>
+      <p:sp>
+        <p:nvSpPr>
+          <p:cNvPr id="6" name="TextBox 5">
+            <a:extLst>
+              <a:ext uri="{FF2B5EF4-FFF2-40B4-BE49-F238E27FC236}">
+                <a16:creationId xmlns:a16="http://schemas.microsoft.com/office/drawing/2014/main" id="{6405DCC5-BFBA-2419-0F7E-D77CB6F24D46}"/>
+              </a:ext>
+            </a:extLst>
+          </p:cNvPr>
+          <p:cNvSpPr txBox="1"/>
+          <p:nvPr/>
+        </p:nvSpPr>
+        <p:spPr>
+          <a:xfrm>
+            <a:off x="7804333" y="794349"/>
+            <a:ext cx="3225894" cy="253916"/>
+          </a:xfrm>
+          <a:prstGeom prst="rect">
+            <a:avLst/>
+          </a:prstGeom>
+          <a:noFill/>
+        </p:spPr>
+        <p:txBody>
+          <a:bodyPr wrap="square">
+            <a:spAutoFit/>
+          </a:bodyPr>
+          <a:lstStyle/>
+          <a:p>
+            <a:pPr algn="ctr"/>
+            <a:r>
+              <a:rPr lang="en-US" altLang="ko-KR" sz="1050" spc="-50" dirty="0"/>
+              <a:t>&lt; </a:t>
+            </a:r>
+            <a:r>
+              <a:rPr lang="ko-KR" altLang="en-US" sz="1050" spc="-50" dirty="0"/>
+              <a:t>미국의 주요 </a:t>
+            </a:r>
+            <a:r>
+              <a:rPr lang="en-US" altLang="ko-KR" sz="1050" spc="-50" dirty="0"/>
+              <a:t>LNG </a:t>
+            </a:r>
+            <a:r>
+              <a:rPr lang="ko-KR" altLang="en-US" sz="1050" spc="-50" dirty="0"/>
+              <a:t>수출국 </a:t>
+            </a:r>
+            <a:r>
+              <a:rPr lang="en-US" altLang="ko-KR" sz="1050" spc="-50" dirty="0"/>
+              <a:t>(10</a:t>
+            </a:r>
+            <a:r>
+              <a:rPr lang="ko-KR" altLang="en-US" sz="1050" spc="-50" dirty="0"/>
+              <a:t>억 </a:t>
+            </a:r>
+            <a:r>
+              <a:rPr lang="ko-KR" altLang="en-US" sz="1050" spc="-50" dirty="0" err="1"/>
+              <a:t>입방미터</a:t>
+            </a:r>
+            <a:r>
+              <a:rPr lang="en-US" altLang="ko-KR" sz="1050" spc="-50" dirty="0"/>
+              <a:t>) &gt;</a:t>
+            </a:r>
+            <a:endParaRPr lang="ko-KR" altLang="en-US" sz="1050" dirty="0"/>
+          </a:p>
+        </p:txBody>
+      </p:sp>
+      <p:pic>
+        <p:nvPicPr>
+          <p:cNvPr id="8" name="그림 7">
+            <a:extLst>
+              <a:ext uri="{FF2B5EF4-FFF2-40B4-BE49-F238E27FC236}">
+                <a16:creationId xmlns:a16="http://schemas.microsoft.com/office/drawing/2014/main" id="{FAD8DFB7-8119-905E-283E-2B229995A702}"/>
+              </a:ext>
+            </a:extLst>
+          </p:cNvPr>
+          <p:cNvPicPr>
+            <a:picLocks noChangeAspect="1"/>
+          </p:cNvPicPr>
+          <p:nvPr/>
+        </p:nvPicPr>
+        <p:blipFill rotWithShape="1">
+          <a:blip r:embed="rId2"/>
+          <a:srcRect t="18929" r="3673"/>
+          <a:stretch>
+            <a:fillRect/>
+          </a:stretch>
+        </p:blipFill>
+        <p:spPr>
+          <a:xfrm>
+            <a:off x="6935303" y="1048265"/>
+            <a:ext cx="4823793" cy="2167597"/>
+          </a:xfrm>
+          <a:prstGeom prst="rect">
+            <a:avLst/>
+          </a:prstGeom>
+        </p:spPr>
+      </p:pic>
+      <p:pic>
+        <p:nvPicPr>
+          <p:cNvPr id="9" name="그림 8">
+            <a:extLst>
+              <a:ext uri="{FF2B5EF4-FFF2-40B4-BE49-F238E27FC236}">
+                <a16:creationId xmlns:a16="http://schemas.microsoft.com/office/drawing/2014/main" id="{4CBE5180-A8C1-4799-093C-339A7E3E93C7}"/>
+              </a:ext>
+            </a:extLst>
+          </p:cNvPr>
+          <p:cNvPicPr>
+            <a:picLocks noChangeAspect="1"/>
+          </p:cNvPicPr>
+          <p:nvPr/>
+        </p:nvPicPr>
+        <p:blipFill rotWithShape="1">
+          <a:blip r:embed="rId3"/>
+          <a:srcRect t="2792" r="6418"/>
+          <a:stretch>
+            <a:fillRect/>
+          </a:stretch>
+        </p:blipFill>
+        <p:spPr>
+          <a:xfrm>
+            <a:off x="6993680" y="4055164"/>
+            <a:ext cx="4641729" cy="2556735"/>
+          </a:xfrm>
+          <a:prstGeom prst="rect">
+            <a:avLst/>
+          </a:prstGeom>
+        </p:spPr>
+      </p:pic>
+      <p:sp>
+        <p:nvSpPr>
+          <p:cNvPr id="10" name="TextBox 9">
+            <a:extLst>
+              <a:ext uri="{FF2B5EF4-FFF2-40B4-BE49-F238E27FC236}">
+                <a16:creationId xmlns:a16="http://schemas.microsoft.com/office/drawing/2014/main" id="{9A8690A0-7E07-D32A-D69F-538011896E90}"/>
+              </a:ext>
+            </a:extLst>
+          </p:cNvPr>
+          <p:cNvSpPr txBox="1"/>
+          <p:nvPr/>
+        </p:nvSpPr>
+        <p:spPr>
+          <a:xfrm>
+            <a:off x="7804333" y="3801247"/>
+            <a:ext cx="3225894" cy="253916"/>
+          </a:xfrm>
+          <a:prstGeom prst="rect">
+            <a:avLst/>
+          </a:prstGeom>
+          <a:noFill/>
+        </p:spPr>
+        <p:txBody>
+          <a:bodyPr wrap="square">
+            <a:spAutoFit/>
+          </a:bodyPr>
+          <a:lstStyle/>
+          <a:p>
+            <a:pPr algn="ctr"/>
+            <a:r>
+              <a:rPr lang="en-US" altLang="ko-KR" sz="1050" spc="-50" dirty="0"/>
+              <a:t>&lt; </a:t>
+            </a:r>
+            <a:r>
+              <a:rPr lang="ko-KR" altLang="en-US" sz="1050" spc="-50" dirty="0"/>
+              <a:t>러시아의 주요 </a:t>
+            </a:r>
+            <a:r>
+              <a:rPr lang="en-US" altLang="ko-KR" sz="1050" spc="-50" dirty="0"/>
+              <a:t>LNG </a:t>
+            </a:r>
+            <a:r>
+              <a:rPr lang="ko-KR" altLang="en-US" sz="1050" spc="-50" dirty="0"/>
+              <a:t>수출국 </a:t>
+            </a:r>
+            <a:r>
+              <a:rPr lang="en-US" altLang="ko-KR" sz="1050" spc="-50" dirty="0"/>
+              <a:t>(10</a:t>
+            </a:r>
+            <a:r>
+              <a:rPr lang="ko-KR" altLang="en-US" sz="1050" spc="-50" dirty="0"/>
+              <a:t>억 </a:t>
+            </a:r>
+            <a:r>
+              <a:rPr lang="ko-KR" altLang="en-US" sz="1050" spc="-50" dirty="0" err="1"/>
+              <a:t>입방미터</a:t>
+            </a:r>
+            <a:r>
+              <a:rPr lang="en-US" altLang="ko-KR" sz="1050" spc="-50" dirty="0"/>
+              <a:t>) &gt;</a:t>
+            </a:r>
+            <a:endParaRPr lang="ko-KR" altLang="en-US" sz="1050" dirty="0"/>
+          </a:p>
+        </p:txBody>
+      </p:sp>
+      <p:sp>
+        <p:nvSpPr>
+          <p:cNvPr id="11" name="TextBox 10">
+            <a:extLst>
+              <a:ext uri="{FF2B5EF4-FFF2-40B4-BE49-F238E27FC236}">
+                <a16:creationId xmlns:a16="http://schemas.microsoft.com/office/drawing/2014/main" id="{BC2C1203-B705-268B-C294-9D9A739A4264}"/>
+              </a:ext>
+            </a:extLst>
+          </p:cNvPr>
+          <p:cNvSpPr txBox="1"/>
+          <p:nvPr/>
+        </p:nvSpPr>
+        <p:spPr>
+          <a:xfrm>
+            <a:off x="288790" y="3928205"/>
+            <a:ext cx="6001575" cy="1152688"/>
+          </a:xfrm>
+          <a:prstGeom prst="rect">
+            <a:avLst/>
+          </a:prstGeom>
+          <a:noFill/>
+        </p:spPr>
+        <p:txBody>
+          <a:bodyPr wrap="square" rtlCol="0" anchor="t">
+            <a:spAutoFit/>
+          </a:bodyPr>
+          <a:lstStyle/>
+          <a:p>
+            <a:pPr marL="377825" indent="-285750">
+              <a:lnSpc>
+                <a:spcPct val="150000"/>
+              </a:lnSpc>
+              <a:buFont typeface="Arial" panose="020B0604020202020204" pitchFamily="34" charset="0"/>
+              <a:buChar char="•"/>
+            </a:pPr>
+            <a:r>
+              <a:rPr lang="ko-KR" altLang="en-US" sz="1600" dirty="0"/>
+              <a:t>러시아는 중국과 일본을 중심으로 아시아태평양 지역에 전체의 </a:t>
+            </a:r>
+            <a:r>
+              <a:rPr lang="en-US" altLang="ko-KR" sz="1600" dirty="0"/>
+              <a:t>54.1%</a:t>
+            </a:r>
+            <a:r>
+              <a:rPr lang="ko-KR" altLang="en-US" sz="1600" dirty="0"/>
+              <a:t>를 수출하고 있고</a:t>
+            </a:r>
+            <a:r>
+              <a:rPr lang="en-US" altLang="ko-KR" sz="1600" dirty="0"/>
+              <a:t>, </a:t>
+            </a:r>
+            <a:r>
+              <a:rPr lang="ko-KR" altLang="en-US" sz="1600" dirty="0"/>
+              <a:t>유럽의 비중은 </a:t>
+            </a:r>
+            <a:r>
+              <a:rPr lang="ko-KR" altLang="en-US" sz="1600" dirty="0" err="1"/>
+              <a:t>스페과</a:t>
+            </a:r>
+            <a:r>
+              <a:rPr lang="ko-KR" altLang="en-US" sz="1600" dirty="0"/>
+              <a:t> 프랑스를 중심으로 </a:t>
+            </a:r>
+            <a:r>
+              <a:rPr lang="en-US" altLang="ko-KR" sz="1600" dirty="0"/>
+              <a:t>45.5%</a:t>
+            </a:r>
+            <a:r>
+              <a:rPr lang="ko-KR" altLang="en-US" sz="1600" dirty="0"/>
+              <a:t>를 차지하고 있다</a:t>
+            </a:r>
+            <a:r>
+              <a:rPr lang="en-US" altLang="ko-KR" sz="1600" dirty="0"/>
+              <a:t>.</a:t>
+            </a:r>
+          </a:p>
+        </p:txBody>
+      </p:sp>
+    </p:spTree>
+    <p:extLst>
+      <p:ext uri="{BB962C8B-B14F-4D97-AF65-F5344CB8AC3E}">
+        <p14:creationId xmlns:p14="http://schemas.microsoft.com/office/powerpoint/2010/main" val="3280875149"/>
+      </p:ext>
+    </p:extLst>
+  </p:cSld>
+  <p:clrMapOvr>
+    <a:masterClrMapping/>
+  </p:clrMapOvr>
+</p:sld>
+</file>
+
+<file path=ppt/slides/slide33.xml><?xml version="1.0" encoding="utf-8"?>
+<p:sld xmlns:a="http://schemas.openxmlformats.org/drawingml/2006/main" xmlns:r="http://schemas.openxmlformats.org/officeDocument/2006/relationships" xmlns:p="http://schemas.openxmlformats.org/presentationml/2006/main">
+  <p:cSld>
+    <p:spTree>
+      <p:nvGrpSpPr>
+        <p:cNvPr id="1" name="">
+          <a:extLst>
+            <a:ext uri="{FF2B5EF4-FFF2-40B4-BE49-F238E27FC236}">
+              <a16:creationId xmlns:a16="http://schemas.microsoft.com/office/drawing/2014/main" id="{1A6B6740-578F-BCF5-1C06-8D5E0B25759C}"/>
+            </a:ext>
+          </a:extLst>
+        </p:cNvPr>
+        <p:cNvGrpSpPr/>
+        <p:nvPr/>
+      </p:nvGrpSpPr>
+      <p:grpSpPr>
+        <a:xfrm>
+          <a:off x="0" y="0"/>
+          <a:ext cx="0" cy="0"/>
+          <a:chOff x="0" y="0"/>
+          <a:chExt cx="0" cy="0"/>
+        </a:xfrm>
+      </p:grpSpPr>
+      <p:sp>
+        <p:nvSpPr>
+          <p:cNvPr id="2" name="제목 1">
+            <a:extLst>
+              <a:ext uri="{FF2B5EF4-FFF2-40B4-BE49-F238E27FC236}">
+                <a16:creationId xmlns:a16="http://schemas.microsoft.com/office/drawing/2014/main" id="{B4180EAA-1F75-2CC2-7AC5-7D66B52C37D4}"/>
+              </a:ext>
+            </a:extLst>
+          </p:cNvPr>
+          <p:cNvSpPr>
+            <a:spLocks noGrp="1"/>
+          </p:cNvSpPr>
+          <p:nvPr>
+            <p:ph type="title"/>
+          </p:nvPr>
+        </p:nvSpPr>
+        <p:spPr/>
+        <p:txBody>
+          <a:bodyPr/>
+          <a:lstStyle/>
+          <a:p>
+            <a:r>
+              <a:rPr lang="ko-KR" altLang="en-US" dirty="0"/>
+              <a:t>천연가스 소비</a:t>
+            </a:r>
+          </a:p>
+        </p:txBody>
+      </p:sp>
+      <p:sp>
+        <p:nvSpPr>
+          <p:cNvPr id="4" name="슬라이드 번호 개체 틀 3">
+            <a:extLst>
+              <a:ext uri="{FF2B5EF4-FFF2-40B4-BE49-F238E27FC236}">
+                <a16:creationId xmlns:a16="http://schemas.microsoft.com/office/drawing/2014/main" id="{B86BB38D-7453-D5CB-9E95-0A9369626776}"/>
+              </a:ext>
+            </a:extLst>
+          </p:cNvPr>
+          <p:cNvSpPr>
+            <a:spLocks noGrp="1"/>
+          </p:cNvSpPr>
+          <p:nvPr>
+            <p:ph type="sldNum" sz="quarter" idx="12"/>
+          </p:nvPr>
+        </p:nvSpPr>
+        <p:spPr/>
+        <p:txBody>
+          <a:bodyPr/>
+          <a:lstStyle/>
+          <a:p>
+            <a:fld id="{109C872D-39A9-4065-8BF3-6A613116E2A1}" type="slidenum">
+              <a:rPr lang="ko-KR" altLang="en-US" smtClean="0"/>
+              <a:t>33</a:t>
+            </a:fld>
+            <a:endParaRPr lang="ko-KR" altLang="en-US"/>
+          </a:p>
+        </p:txBody>
+      </p:sp>
+      <p:sp>
+        <p:nvSpPr>
+          <p:cNvPr id="3" name="TextBox 2">
+            <a:extLst>
+              <a:ext uri="{FF2B5EF4-FFF2-40B4-BE49-F238E27FC236}">
+                <a16:creationId xmlns:a16="http://schemas.microsoft.com/office/drawing/2014/main" id="{B7037CD8-F2C2-1C14-8620-845FE3DEFA61}"/>
+              </a:ext>
+            </a:extLst>
+          </p:cNvPr>
+          <p:cNvSpPr txBox="1"/>
+          <p:nvPr/>
+        </p:nvSpPr>
+        <p:spPr>
+          <a:xfrm>
+            <a:off x="288790" y="958844"/>
+            <a:ext cx="6001575" cy="1152688"/>
+          </a:xfrm>
+          <a:prstGeom prst="rect">
+            <a:avLst/>
+          </a:prstGeom>
+          <a:noFill/>
+        </p:spPr>
+        <p:txBody>
+          <a:bodyPr wrap="square" rtlCol="0" anchor="t">
+            <a:spAutoFit/>
+          </a:bodyPr>
+          <a:lstStyle/>
+          <a:p>
+            <a:pPr marL="377825" indent="-285750">
+              <a:lnSpc>
+                <a:spcPct val="150000"/>
+              </a:lnSpc>
+              <a:buFont typeface="Arial" panose="020B0604020202020204" pitchFamily="34" charset="0"/>
+              <a:buChar char="•"/>
+            </a:pPr>
+            <a:r>
+              <a:rPr lang="ko-KR" altLang="en-US" sz="1600" dirty="0"/>
+              <a:t>카타르는 중국</a:t>
+            </a:r>
+            <a:r>
+              <a:rPr lang="en-US" altLang="ko-KR" sz="1600" dirty="0"/>
+              <a:t>, </a:t>
+            </a:r>
+            <a:r>
+              <a:rPr lang="ko-KR" altLang="en-US" sz="1600" dirty="0"/>
+              <a:t>인도</a:t>
+            </a:r>
+            <a:r>
+              <a:rPr lang="en-US" altLang="ko-KR" sz="1600" dirty="0"/>
+              <a:t>, </a:t>
+            </a:r>
+            <a:r>
+              <a:rPr lang="ko-KR" altLang="en-US" sz="1600" dirty="0"/>
+              <a:t>한국을 포함한 아시아 지역으로의 수출이 전체 수출량의 </a:t>
+            </a:r>
+            <a:r>
+              <a:rPr lang="en-US" altLang="ko-KR" sz="1600" dirty="0"/>
+              <a:t>75%</a:t>
+            </a:r>
+            <a:r>
+              <a:rPr lang="ko-KR" altLang="en-US" sz="1600" dirty="0"/>
+              <a:t>를 차지하고 있고</a:t>
+            </a:r>
+            <a:r>
+              <a:rPr lang="en-US" altLang="ko-KR" sz="1600" dirty="0"/>
+              <a:t>, </a:t>
+            </a:r>
+            <a:r>
+              <a:rPr lang="ko-KR" altLang="en-US" sz="1600" dirty="0"/>
+              <a:t>이태리</a:t>
+            </a:r>
+            <a:r>
+              <a:rPr lang="en-US" altLang="ko-KR" sz="1600" dirty="0"/>
+              <a:t>, </a:t>
+            </a:r>
+            <a:r>
+              <a:rPr lang="ko-KR" altLang="en-US" sz="1600" dirty="0"/>
+              <a:t>벨기에를 포함한 유럽지역에 </a:t>
+            </a:r>
+            <a:r>
+              <a:rPr lang="en-US" altLang="ko-KR" sz="1600" dirty="0"/>
+              <a:t>19.2%</a:t>
+            </a:r>
+            <a:r>
+              <a:rPr lang="ko-KR" altLang="en-US" sz="1600" dirty="0"/>
+              <a:t>를 수출하고 있다</a:t>
+            </a:r>
+            <a:r>
+              <a:rPr lang="en-US" altLang="ko-KR" sz="1600" dirty="0"/>
+              <a:t>.</a:t>
+            </a:r>
+          </a:p>
+        </p:txBody>
+      </p:sp>
+      <p:sp>
+        <p:nvSpPr>
+          <p:cNvPr id="6" name="TextBox 5">
+            <a:extLst>
+              <a:ext uri="{FF2B5EF4-FFF2-40B4-BE49-F238E27FC236}">
+                <a16:creationId xmlns:a16="http://schemas.microsoft.com/office/drawing/2014/main" id="{0B4AF9A2-A3FF-E0DE-3030-464CCCE19A94}"/>
+              </a:ext>
+            </a:extLst>
+          </p:cNvPr>
+          <p:cNvSpPr txBox="1"/>
+          <p:nvPr/>
+        </p:nvSpPr>
+        <p:spPr>
+          <a:xfrm>
+            <a:off x="7804333" y="794349"/>
+            <a:ext cx="3225894" cy="253916"/>
+          </a:xfrm>
+          <a:prstGeom prst="rect">
+            <a:avLst/>
+          </a:prstGeom>
+          <a:noFill/>
+        </p:spPr>
+        <p:txBody>
+          <a:bodyPr wrap="square">
+            <a:spAutoFit/>
+          </a:bodyPr>
+          <a:lstStyle/>
+          <a:p>
+            <a:pPr algn="ctr"/>
+            <a:r>
+              <a:rPr lang="en-US" altLang="ko-KR" sz="1050" spc="-50" dirty="0"/>
+              <a:t>&lt; </a:t>
+            </a:r>
+            <a:r>
+              <a:rPr lang="ko-KR" altLang="en-US" sz="1050" spc="-50" dirty="0"/>
+              <a:t>카타르의 주요 </a:t>
+            </a:r>
+            <a:r>
+              <a:rPr lang="en-US" altLang="ko-KR" sz="1050" spc="-50" dirty="0"/>
+              <a:t>LNG </a:t>
+            </a:r>
+            <a:r>
+              <a:rPr lang="ko-KR" altLang="en-US" sz="1050" spc="-50" dirty="0"/>
+              <a:t>수출국 </a:t>
+            </a:r>
+            <a:r>
+              <a:rPr lang="en-US" altLang="ko-KR" sz="1050" spc="-50" dirty="0"/>
+              <a:t>(10</a:t>
+            </a:r>
+            <a:r>
+              <a:rPr lang="ko-KR" altLang="en-US" sz="1050" spc="-50" dirty="0"/>
+              <a:t>억 </a:t>
+            </a:r>
+            <a:r>
+              <a:rPr lang="ko-KR" altLang="en-US" sz="1050" spc="-50" dirty="0" err="1"/>
+              <a:t>입방미터</a:t>
+            </a:r>
+            <a:r>
+              <a:rPr lang="en-US" altLang="ko-KR" sz="1050" spc="-50" dirty="0"/>
+              <a:t>) &gt;</a:t>
+            </a:r>
+            <a:endParaRPr lang="ko-KR" altLang="en-US" sz="1050" dirty="0"/>
+          </a:p>
+        </p:txBody>
+      </p:sp>
+      <p:sp>
+        <p:nvSpPr>
+          <p:cNvPr id="10" name="TextBox 9">
+            <a:extLst>
+              <a:ext uri="{FF2B5EF4-FFF2-40B4-BE49-F238E27FC236}">
+                <a16:creationId xmlns:a16="http://schemas.microsoft.com/office/drawing/2014/main" id="{324BFEC3-9C90-5CAE-EF5C-526EF1AB47F6}"/>
+              </a:ext>
+            </a:extLst>
+          </p:cNvPr>
+          <p:cNvSpPr txBox="1"/>
+          <p:nvPr/>
+        </p:nvSpPr>
+        <p:spPr>
+          <a:xfrm>
+            <a:off x="7804333" y="3801247"/>
+            <a:ext cx="3225894" cy="253916"/>
+          </a:xfrm>
+          <a:prstGeom prst="rect">
+            <a:avLst/>
+          </a:prstGeom>
+          <a:noFill/>
+        </p:spPr>
+        <p:txBody>
+          <a:bodyPr wrap="square">
+            <a:spAutoFit/>
+          </a:bodyPr>
+          <a:lstStyle/>
+          <a:p>
+            <a:pPr algn="ctr"/>
+            <a:r>
+              <a:rPr lang="en-US" altLang="ko-KR" sz="1050" spc="-50" dirty="0"/>
+              <a:t>&lt; </a:t>
+            </a:r>
+            <a:r>
+              <a:rPr lang="ko-KR" altLang="en-US" sz="1050" spc="-50" dirty="0"/>
+              <a:t>호주의 주요 </a:t>
+            </a:r>
+            <a:r>
+              <a:rPr lang="en-US" altLang="ko-KR" sz="1050" spc="-50" dirty="0"/>
+              <a:t>LNG </a:t>
+            </a:r>
+            <a:r>
+              <a:rPr lang="ko-KR" altLang="en-US" sz="1050" spc="-50" dirty="0"/>
+              <a:t>수출국 </a:t>
+            </a:r>
+            <a:r>
+              <a:rPr lang="en-US" altLang="ko-KR" sz="1050" spc="-50" dirty="0"/>
+              <a:t>(10</a:t>
+            </a:r>
+            <a:r>
+              <a:rPr lang="ko-KR" altLang="en-US" sz="1050" spc="-50" dirty="0"/>
+              <a:t>억 </a:t>
+            </a:r>
+            <a:r>
+              <a:rPr lang="ko-KR" altLang="en-US" sz="1050" spc="-50" dirty="0" err="1"/>
+              <a:t>입방미터</a:t>
+            </a:r>
+            <a:r>
+              <a:rPr lang="en-US" altLang="ko-KR" sz="1050" spc="-50" dirty="0"/>
+              <a:t>) &gt;</a:t>
+            </a:r>
+            <a:endParaRPr lang="ko-KR" altLang="en-US" sz="1050" dirty="0"/>
+          </a:p>
+        </p:txBody>
+      </p:sp>
+      <p:sp>
+        <p:nvSpPr>
+          <p:cNvPr id="11" name="TextBox 10">
+            <a:extLst>
+              <a:ext uri="{FF2B5EF4-FFF2-40B4-BE49-F238E27FC236}">
+                <a16:creationId xmlns:a16="http://schemas.microsoft.com/office/drawing/2014/main" id="{EA5DB801-04CD-D02A-E416-136AA9DB095F}"/>
+              </a:ext>
+            </a:extLst>
+          </p:cNvPr>
+          <p:cNvSpPr txBox="1"/>
+          <p:nvPr/>
+        </p:nvSpPr>
+        <p:spPr>
+          <a:xfrm>
+            <a:off x="288790" y="3928205"/>
+            <a:ext cx="6001575" cy="783356"/>
+          </a:xfrm>
+          <a:prstGeom prst="rect">
+            <a:avLst/>
+          </a:prstGeom>
+          <a:noFill/>
+        </p:spPr>
+        <p:txBody>
+          <a:bodyPr wrap="square" rtlCol="0" anchor="t">
+            <a:spAutoFit/>
+          </a:bodyPr>
+          <a:lstStyle/>
+          <a:p>
+            <a:pPr marL="377825" indent="-285750">
+              <a:lnSpc>
+                <a:spcPct val="150000"/>
+              </a:lnSpc>
+              <a:buFont typeface="Arial" panose="020B0604020202020204" pitchFamily="34" charset="0"/>
+              <a:buChar char="•"/>
+            </a:pPr>
+            <a:r>
+              <a:rPr lang="ko-KR" altLang="en-US" sz="1600" dirty="0"/>
+              <a:t>호주의 경우 수출 전량이 아시아 지역으로 향하고 있으며</a:t>
+            </a:r>
+            <a:r>
+              <a:rPr lang="en-US" altLang="ko-KR" sz="1600" dirty="0"/>
+              <a:t>, </a:t>
+            </a:r>
+            <a:r>
+              <a:rPr lang="ko-KR" altLang="en-US" sz="1600" dirty="0"/>
+              <a:t>일본</a:t>
+            </a:r>
+            <a:r>
+              <a:rPr lang="en-US" altLang="ko-KR" sz="1600" dirty="0"/>
+              <a:t>, </a:t>
+            </a:r>
+            <a:r>
+              <a:rPr lang="ko-KR" altLang="en-US" sz="1600" dirty="0"/>
+              <a:t>중국</a:t>
+            </a:r>
+            <a:r>
+              <a:rPr lang="en-US" altLang="ko-KR" sz="1600" dirty="0"/>
+              <a:t>, </a:t>
+            </a:r>
+            <a:r>
+              <a:rPr lang="ko-KR" altLang="en-US" sz="1600" dirty="0"/>
+              <a:t>한국 순으로 수출량이 많다</a:t>
+            </a:r>
+            <a:r>
+              <a:rPr lang="en-US" altLang="ko-KR" sz="1600" dirty="0"/>
+              <a:t>.</a:t>
+            </a:r>
+          </a:p>
+        </p:txBody>
+      </p:sp>
+      <p:pic>
+        <p:nvPicPr>
+          <p:cNvPr id="5" name="그림 4">
+            <a:extLst>
+              <a:ext uri="{FF2B5EF4-FFF2-40B4-BE49-F238E27FC236}">
+                <a16:creationId xmlns:a16="http://schemas.microsoft.com/office/drawing/2014/main" id="{FBF8D998-AF48-61D5-C872-62D3B69FD0CD}"/>
+              </a:ext>
+            </a:extLst>
+          </p:cNvPr>
+          <p:cNvPicPr>
+            <a:picLocks noChangeAspect="1"/>
+          </p:cNvPicPr>
+          <p:nvPr/>
+        </p:nvPicPr>
+        <p:blipFill rotWithShape="1">
+          <a:blip r:embed="rId2"/>
+          <a:srcRect r="3866"/>
+          <a:stretch>
+            <a:fillRect/>
+          </a:stretch>
+        </p:blipFill>
+        <p:spPr>
+          <a:xfrm>
+            <a:off x="6993680" y="1007168"/>
+            <a:ext cx="4557799" cy="2470428"/>
+          </a:xfrm>
+          <a:prstGeom prst="rect">
+            <a:avLst/>
+          </a:prstGeom>
+        </p:spPr>
+      </p:pic>
+      <p:pic>
+        <p:nvPicPr>
+          <p:cNvPr id="7" name="그림 6">
+            <a:extLst>
+              <a:ext uri="{FF2B5EF4-FFF2-40B4-BE49-F238E27FC236}">
+                <a16:creationId xmlns:a16="http://schemas.microsoft.com/office/drawing/2014/main" id="{C186D9D3-A172-0CF0-4094-70626B234419}"/>
+              </a:ext>
+            </a:extLst>
+          </p:cNvPr>
+          <p:cNvPicPr>
+            <a:picLocks noChangeAspect="1"/>
+          </p:cNvPicPr>
+          <p:nvPr/>
+        </p:nvPicPr>
+        <p:blipFill rotWithShape="1">
+          <a:blip r:embed="rId3"/>
+          <a:srcRect t="8960" r="4259"/>
+          <a:stretch>
+            <a:fillRect/>
+          </a:stretch>
+        </p:blipFill>
+        <p:spPr>
+          <a:xfrm>
+            <a:off x="6874410" y="4206663"/>
+            <a:ext cx="4836094" cy="2330244"/>
+          </a:xfrm>
+          <a:prstGeom prst="rect">
+            <a:avLst/>
+          </a:prstGeom>
+        </p:spPr>
+      </p:pic>
+    </p:spTree>
+    <p:extLst>
+      <p:ext uri="{BB962C8B-B14F-4D97-AF65-F5344CB8AC3E}">
+        <p14:creationId xmlns:p14="http://schemas.microsoft.com/office/powerpoint/2010/main" val="31859290"/>
+      </p:ext>
+    </p:extLst>
+  </p:cSld>
+  <p:clrMapOvr>
+    <a:masterClrMapping/>
+  </p:clrMapOvr>
+</p:sld>
+</file>
+
+<file path=ppt/slides/slide34.xml><?xml version="1.0" encoding="utf-8"?>
+<p:sld xmlns:a="http://schemas.openxmlformats.org/drawingml/2006/main" xmlns:r="http://schemas.openxmlformats.org/officeDocument/2006/relationships" xmlns:p="http://schemas.openxmlformats.org/presentationml/2006/main">
+  <p:cSld>
+    <p:spTree>
+      <p:nvGrpSpPr>
+        <p:cNvPr id="1" name="">
+          <a:extLst>
+            <a:ext uri="{FF2B5EF4-FFF2-40B4-BE49-F238E27FC236}">
+              <a16:creationId xmlns:a16="http://schemas.microsoft.com/office/drawing/2014/main" id="{BC88D32C-AEB3-D81F-A31F-C377CB311B0D}"/>
+            </a:ext>
+          </a:extLst>
+        </p:cNvPr>
+        <p:cNvGrpSpPr/>
+        <p:nvPr/>
+      </p:nvGrpSpPr>
+      <p:grpSpPr>
+        <a:xfrm>
+          <a:off x="0" y="0"/>
+          <a:ext cx="0" cy="0"/>
+          <a:chOff x="0" y="0"/>
+          <a:chExt cx="0" cy="0"/>
+        </a:xfrm>
+      </p:grpSpPr>
+      <p:sp>
+        <p:nvSpPr>
+          <p:cNvPr id="2" name="제목 1">
+            <a:extLst>
+              <a:ext uri="{FF2B5EF4-FFF2-40B4-BE49-F238E27FC236}">
+                <a16:creationId xmlns:a16="http://schemas.microsoft.com/office/drawing/2014/main" id="{9CE5BE5D-C602-B8A0-C176-798A1EBB9846}"/>
+              </a:ext>
+            </a:extLst>
+          </p:cNvPr>
+          <p:cNvSpPr>
+            <a:spLocks noGrp="1"/>
+          </p:cNvSpPr>
+          <p:nvPr>
+            <p:ph type="title"/>
+          </p:nvPr>
+        </p:nvSpPr>
+        <p:spPr/>
+        <p:txBody>
+          <a:bodyPr/>
+          <a:lstStyle/>
+          <a:p>
+            <a:r>
+              <a:rPr lang="ko-KR" altLang="en-US" dirty="0"/>
+              <a:t>천연가스 소비</a:t>
+            </a:r>
+          </a:p>
+        </p:txBody>
+      </p:sp>
+      <p:sp>
+        <p:nvSpPr>
+          <p:cNvPr id="4" name="슬라이드 번호 개체 틀 3">
+            <a:extLst>
+              <a:ext uri="{FF2B5EF4-FFF2-40B4-BE49-F238E27FC236}">
+                <a16:creationId xmlns:a16="http://schemas.microsoft.com/office/drawing/2014/main" id="{2E335379-43C7-A4EC-53C1-47C1547B415E}"/>
+              </a:ext>
+            </a:extLst>
+          </p:cNvPr>
+          <p:cNvSpPr>
+            <a:spLocks noGrp="1"/>
+          </p:cNvSpPr>
+          <p:nvPr>
+            <p:ph type="sldNum" sz="quarter" idx="12"/>
+          </p:nvPr>
+        </p:nvSpPr>
+        <p:spPr/>
+        <p:txBody>
+          <a:bodyPr/>
+          <a:lstStyle/>
+          <a:p>
+            <a:fld id="{109C872D-39A9-4065-8BF3-6A613116E2A1}" type="slidenum">
+              <a:rPr lang="ko-KR" altLang="en-US" smtClean="0"/>
+              <a:t>34</a:t>
+            </a:fld>
+            <a:endParaRPr lang="ko-KR" altLang="en-US"/>
+          </a:p>
+        </p:txBody>
+      </p:sp>
+      <p:sp>
+        <p:nvSpPr>
+          <p:cNvPr id="3" name="TextBox 2">
+            <a:extLst>
+              <a:ext uri="{FF2B5EF4-FFF2-40B4-BE49-F238E27FC236}">
+                <a16:creationId xmlns:a16="http://schemas.microsoft.com/office/drawing/2014/main" id="{4F251A54-FAAF-1E88-0D81-9D48FAF9CED9}"/>
+              </a:ext>
+            </a:extLst>
+          </p:cNvPr>
+          <p:cNvSpPr txBox="1"/>
+          <p:nvPr/>
+        </p:nvSpPr>
+        <p:spPr>
+          <a:xfrm>
+            <a:off x="288790" y="958844"/>
+            <a:ext cx="11118453" cy="414024"/>
+          </a:xfrm>
+          <a:prstGeom prst="rect">
+            <a:avLst/>
+          </a:prstGeom>
+          <a:noFill/>
+        </p:spPr>
+        <p:txBody>
+          <a:bodyPr wrap="square" rtlCol="0" anchor="t">
+            <a:spAutoFit/>
+          </a:bodyPr>
+          <a:lstStyle/>
+          <a:p>
+            <a:pPr marL="377825" indent="-285750">
+              <a:lnSpc>
+                <a:spcPct val="150000"/>
+              </a:lnSpc>
+              <a:buFont typeface="Arial" panose="020B0604020202020204" pitchFamily="34" charset="0"/>
+              <a:buChar char="•"/>
+            </a:pPr>
+            <a:r>
+              <a:rPr lang="ko-KR" altLang="en-US" sz="1600" dirty="0"/>
+              <a:t>글로벌 파이프라인 천연가스</a:t>
+            </a:r>
+            <a:r>
+              <a:rPr lang="en-US" altLang="ko-KR" sz="1600"/>
+              <a:t>(PNG)</a:t>
+            </a:r>
+            <a:r>
+              <a:rPr lang="ko-KR" altLang="en-US" sz="1600"/>
+              <a:t> 수출</a:t>
+            </a:r>
+            <a:endParaRPr lang="en-US" altLang="ko-KR" sz="1600" dirty="0"/>
+          </a:p>
+        </p:txBody>
+      </p:sp>
+    </p:spTree>
+    <p:extLst>
+      <p:ext uri="{BB962C8B-B14F-4D97-AF65-F5344CB8AC3E}">
+        <p14:creationId xmlns:p14="http://schemas.microsoft.com/office/powerpoint/2010/main" val="1238661569"/>
+      </p:ext>
+    </p:extLst>
+  </p:cSld>
+  <p:clrMapOvr>
+    <a:masterClrMapping/>
+  </p:clrMapOvr>
+</p:sld>
+</file>
+
+<file path=ppt/slides/slide35.xml><?xml version="1.0" encoding="utf-8"?>
+<p:sld xmlns:a="http://schemas.openxmlformats.org/drawingml/2006/main" xmlns:r="http://schemas.openxmlformats.org/officeDocument/2006/relationships" xmlns:p="http://schemas.openxmlformats.org/presentationml/2006/main">
+  <p:cSld>
+    <p:spTree>
+      <p:nvGrpSpPr>
+        <p:cNvPr id="1" name="">
+          <a:extLst>
+            <a:ext uri="{FF2B5EF4-FFF2-40B4-BE49-F238E27FC236}">
+              <a16:creationId xmlns:a16="http://schemas.microsoft.com/office/drawing/2014/main" id="{2221EDDE-B308-8FA7-8116-DAD482D863C8}"/>
+            </a:ext>
+          </a:extLst>
+        </p:cNvPr>
+        <p:cNvGrpSpPr/>
+        <p:nvPr/>
+      </p:nvGrpSpPr>
+      <p:grpSpPr>
+        <a:xfrm>
+          <a:off x="0" y="0"/>
+          <a:ext cx="0" cy="0"/>
+          <a:chOff x="0" y="0"/>
+          <a:chExt cx="0" cy="0"/>
+        </a:xfrm>
+      </p:grpSpPr>
+      <p:pic>
+        <p:nvPicPr>
+          <p:cNvPr id="3" name="그림 2" descr="텍스트, 로고, 원, 폰트이(가) 표시된 사진&#10;&#10;AI 생성 콘텐츠는 정확하지 않을 수 있습니다.">
+            <a:extLst>
+              <a:ext uri="{FF2B5EF4-FFF2-40B4-BE49-F238E27FC236}">
+                <a16:creationId xmlns:a16="http://schemas.microsoft.com/office/drawing/2014/main" id="{396FF0BD-25A1-7840-4B63-B2ECDF7CFA54}"/>
+              </a:ext>
+            </a:extLst>
+          </p:cNvPr>
+          <p:cNvPicPr>
+            <a:picLocks noChangeAspect="1"/>
+          </p:cNvPicPr>
+          <p:nvPr/>
+        </p:nvPicPr>
+        <p:blipFill>
+          <a:blip r:embed="rId2">
+            <a:alphaModFix amt="20000"/>
+            <a:extLst>
+              <a:ext uri="{28A0092B-C50C-407E-A947-70E740481C1C}">
+                <a14:useLocalDpi xmlns:a14="http://schemas.microsoft.com/office/drawing/2010/main" val="0"/>
+              </a:ext>
+            </a:extLst>
+          </a:blip>
+          <a:stretch>
+            <a:fillRect/>
+          </a:stretch>
+        </p:blipFill>
+        <p:spPr>
+          <a:xfrm>
+            <a:off x="4012070" y="1673061"/>
+            <a:ext cx="4167861" cy="4167861"/>
+          </a:xfrm>
+          <a:prstGeom prst="rect">
+            <a:avLst/>
+          </a:prstGeom>
+        </p:spPr>
+      </p:pic>
+      <p:sp>
+        <p:nvSpPr>
+          <p:cNvPr id="2" name="제목 1">
+            <a:extLst>
+              <a:ext uri="{FF2B5EF4-FFF2-40B4-BE49-F238E27FC236}">
+                <a16:creationId xmlns:a16="http://schemas.microsoft.com/office/drawing/2014/main" id="{CA03F291-495C-4A31-DF0A-8F9CC97672B8}"/>
+              </a:ext>
+            </a:extLst>
+          </p:cNvPr>
+          <p:cNvSpPr>
+            <a:spLocks noGrp="1"/>
+          </p:cNvSpPr>
+          <p:nvPr>
+            <p:ph type="title"/>
+          </p:nvPr>
+        </p:nvSpPr>
+        <p:spPr>
+          <a:xfrm>
+            <a:off x="831850" y="1709739"/>
+            <a:ext cx="10515600" cy="2134292"/>
+          </a:xfrm>
+          <a:effectLst>
+            <a:reflection blurRad="50800" stA="45000" endPos="44000" dir="5400000" sy="-100000" algn="bl" rotWithShape="0"/>
+          </a:effectLst>
+        </p:spPr>
+        <p:txBody>
+          <a:bodyPr/>
+          <a:lstStyle/>
+          <a:p>
+            <a:r>
+              <a:rPr lang="en-US" altLang="ko-KR" b="1" i="0" spc="150">
+                <a:solidFill>
+                  <a:schemeClr val="accent2"/>
+                </a:solidFill>
+              </a:rPr>
+              <a:t>T</a:t>
+            </a:r>
+            <a:r>
+              <a:rPr lang="en-US" altLang="ko-KR" sz="5400" i="0" spc="100"/>
+              <a:t>hank you</a:t>
+            </a:r>
+            <a:endParaRPr lang="ko-KR" altLang="en-US" sz="5400" i="0" spc="100"/>
+          </a:p>
+        </p:txBody>
+      </p:sp>
+      <p:sp>
+        <p:nvSpPr>
+          <p:cNvPr id="4" name="슬라이드 번호 개체 틀 3">
+            <a:extLst>
+              <a:ext uri="{FF2B5EF4-FFF2-40B4-BE49-F238E27FC236}">
+                <a16:creationId xmlns:a16="http://schemas.microsoft.com/office/drawing/2014/main" id="{6EFC0B50-C677-27B7-56F6-14F7BF9A70A9}"/>
+              </a:ext>
+            </a:extLst>
+          </p:cNvPr>
+          <p:cNvSpPr>
+            <a:spLocks noGrp="1"/>
+          </p:cNvSpPr>
+          <p:nvPr>
+            <p:ph type="sldNum" sz="quarter" idx="12"/>
+          </p:nvPr>
+        </p:nvSpPr>
+        <p:spPr/>
+        <p:txBody>
+          <a:bodyPr/>
+          <a:lstStyle/>
+          <a:p>
+            <a:fld id="{109C872D-39A9-4065-8BF3-6A613116E2A1}" type="slidenum">
+              <a:rPr lang="ko-KR" altLang="en-US" smtClean="0"/>
+              <a:t>35</a:t>
+            </a:fld>
+            <a:endParaRPr lang="ko-KR" altLang="en-US"/>
+          </a:p>
+        </p:txBody>
+      </p:sp>
+    </p:spTree>
+    <p:extLst>
+      <p:ext uri="{BB962C8B-B14F-4D97-AF65-F5344CB8AC3E}">
+        <p14:creationId xmlns:p14="http://schemas.microsoft.com/office/powerpoint/2010/main" val="103939182"/>
       </p:ext>
     </p:extLst>
   </p:cSld>

--- a/에너지경제학/자원에너지경제학_Chapter_3 (가스).pptx
+++ b/에너지경제학/자원에너지경제학_Chapter_3 (가스).pptx
@@ -5,7 +5,7 @@
     <p:sldMasterId id="2147483648" r:id="rId1"/>
   </p:sldMasterIdLst>
   <p:notesMasterIdLst>
-    <p:notesMasterId r:id="rId37"/>
+    <p:notesMasterId r:id="rId40"/>
   </p:notesMasterIdLst>
   <p:sldIdLst>
     <p:sldId id="375" r:id="rId2"/>
@@ -42,7 +42,10 @@
     <p:sldId id="664" r:id="rId33"/>
     <p:sldId id="665" r:id="rId34"/>
     <p:sldId id="666" r:id="rId35"/>
-    <p:sldId id="598" r:id="rId36"/>
+    <p:sldId id="667" r:id="rId36"/>
+    <p:sldId id="668" r:id="rId37"/>
+    <p:sldId id="669" r:id="rId38"/>
+    <p:sldId id="598" r:id="rId39"/>
   </p:sldIdLst>
   <p:sldSz cx="12192000" cy="6858000"/>
   <p:notesSz cx="6858000" cy="9144000"/>
@@ -253,7 +256,7 @@
           <a:p>
             <a:fld id="{4A5E00EF-AEA4-43E2-9451-8F9C59A39471}" type="datetimeFigureOut">
               <a:rPr lang="ko-KR" altLang="en-US" smtClean="0"/>
-              <a:t>2026-05-31</a:t>
+              <a:t>2026-06-01</a:t>
             </a:fld>
             <a:endParaRPr lang="ko-KR" altLang="en-US"/>
           </a:p>
@@ -675,7 +678,7 @@
           <a:p>
             <a:fld id="{CD32C56F-BD27-4999-9E6D-D4EACE3DA9F4}" type="datetime1">
               <a:rPr lang="ko-KR" altLang="en-US" smtClean="0"/>
-              <a:t>2026-05-31</a:t>
+              <a:t>2026-06-01</a:t>
             </a:fld>
             <a:endParaRPr lang="ko-KR" altLang="en-US"/>
           </a:p>
@@ -889,7 +892,7 @@
           <a:p>
             <a:fld id="{8EF4A19C-72C8-45CA-8E3F-68A7FA345D6C}" type="datetime1">
               <a:rPr lang="ko-KR" altLang="en-US" smtClean="0"/>
-              <a:t>2026-05-31</a:t>
+              <a:t>2026-06-01</a:t>
             </a:fld>
             <a:endParaRPr lang="ko-KR" altLang="en-US"/>
           </a:p>
@@ -1113,7 +1116,7 @@
           <a:p>
             <a:fld id="{56A175B2-010B-4341-954C-5F8F5C70B124}" type="datetime1">
               <a:rPr lang="ko-KR" altLang="en-US" smtClean="0"/>
-              <a:t>2026-05-31</a:t>
+              <a:t>2026-06-01</a:t>
             </a:fld>
             <a:endParaRPr lang="ko-KR" altLang="en-US"/>
           </a:p>
@@ -1327,7 +1330,7 @@
           <a:p>
             <a:fld id="{16B83F9E-22C9-45CA-9E85-070F1D3EF530}" type="datetime1">
               <a:rPr lang="ko-KR" altLang="en-US" smtClean="0"/>
-              <a:t>2026-05-31</a:t>
+              <a:t>2026-06-01</a:t>
             </a:fld>
             <a:endParaRPr lang="ko-KR" altLang="en-US"/>
           </a:p>
@@ -1618,7 +1621,7 @@
           <a:p>
             <a:fld id="{03278F45-FB3C-4C4D-B89A-7BC3F5F229F6}" type="datetime1">
               <a:rPr lang="ko-KR" altLang="en-US" smtClean="0"/>
-              <a:t>2026-05-31</a:t>
+              <a:t>2026-06-01</a:t>
             </a:fld>
             <a:endParaRPr lang="ko-KR" altLang="en-US"/>
           </a:p>
@@ -2011,7 +2014,7 @@
           <a:p>
             <a:fld id="{38FDAC3C-35A6-415C-9F03-738A6AC328B1}" type="datetime1">
               <a:rPr lang="ko-KR" altLang="en-US" smtClean="0"/>
-              <a:t>2026-05-31</a:t>
+              <a:t>2026-06-01</a:t>
             </a:fld>
             <a:endParaRPr lang="ko-KR" altLang="en-US"/>
           </a:p>
@@ -3605,7 +3608,7 @@
           <a:p>
             <a:fld id="{507A0DF1-AEE6-4B0D-89D2-351E7B3EF65C}" type="datetime1">
               <a:rPr lang="ko-KR" altLang="en-US" smtClean="0"/>
-              <a:t>2026-05-31</a:t>
+              <a:t>2026-06-01</a:t>
             </a:fld>
             <a:endParaRPr lang="ko-KR" altLang="en-US"/>
           </a:p>
@@ -4033,7 +4036,7 @@
           <a:p>
             <a:fld id="{CA93B8C9-630F-4D57-944D-04FD37CECCD3}" type="datetime1">
               <a:rPr lang="ko-KR" altLang="en-US" smtClean="0"/>
-              <a:t>2026-05-31</a:t>
+              <a:t>2026-06-01</a:t>
             </a:fld>
             <a:endParaRPr lang="ko-KR" altLang="en-US"/>
           </a:p>
@@ -4190,7 +4193,7 @@
           <a:p>
             <a:fld id="{E986165A-AC43-4902-9541-874ECD310BA3}" type="datetime1">
               <a:rPr lang="ko-KR" altLang="en-US" smtClean="0"/>
-              <a:t>2026-05-31</a:t>
+              <a:t>2026-06-01</a:t>
             </a:fld>
             <a:endParaRPr lang="ko-KR" altLang="en-US"/>
           </a:p>
@@ -4517,7 +4520,7 @@
           <a:p>
             <a:fld id="{47E6EE6D-2B0E-43A9-87A2-7354CDB998F4}" type="datetime1">
               <a:rPr lang="ko-KR" altLang="en-US" smtClean="0"/>
-              <a:t>2026-05-31</a:t>
+              <a:t>2026-06-01</a:t>
             </a:fld>
             <a:endParaRPr lang="ko-KR" altLang="en-US"/>
           </a:p>
@@ -4821,7 +4824,7 @@
           <a:p>
             <a:fld id="{5CC5944E-0BC8-4FAA-9F94-6B4B05834E10}" type="datetime1">
               <a:rPr lang="ko-KR" altLang="en-US" smtClean="0"/>
-              <a:t>2026-05-31</a:t>
+              <a:t>2026-06-01</a:t>
             </a:fld>
             <a:endParaRPr lang="ko-KR" altLang="en-US"/>
           </a:p>
@@ -33212,7 +33215,7 @@
         <p:spPr>
           <a:xfrm>
             <a:off x="288790" y="958844"/>
-            <a:ext cx="11118453" cy="414024"/>
+            <a:ext cx="11118453" cy="4476675"/>
           </a:xfrm>
           <a:prstGeom prst="rect">
             <a:avLst/>
@@ -33237,14 +33240,263 @@
               <a:t>글로벌 파이프라인 천연가스</a:t>
             </a:r>
             <a:r>
-              <a:rPr lang="en-US" altLang="ko-KR" sz="1600"/>
+              <a:rPr lang="en-US" altLang="ko-KR" sz="1600" dirty="0"/>
               <a:t>(PNG)</a:t>
             </a:r>
             <a:r>
-              <a:rPr lang="ko-KR" altLang="en-US" sz="1600"/>
-              <a:t> 수출</a:t>
-            </a:r>
+              <a:rPr lang="ko-KR" altLang="en-US" sz="1600" dirty="0"/>
+              <a:t> 수출은 지리적 인접성과 장기적 상호 의존성을 기반으로 형성된 에너지 공급 형태이다</a:t>
+            </a:r>
+            <a:r>
+              <a:rPr lang="en-US" altLang="ko-KR" sz="1600" dirty="0"/>
+              <a:t>.</a:t>
+            </a:r>
+          </a:p>
+          <a:p>
+            <a:pPr marL="835025" lvl="1" indent="-285750">
+              <a:lnSpc>
+                <a:spcPct val="150000"/>
+              </a:lnSpc>
+              <a:buFont typeface="Wingdings" panose="05000000000000000000" pitchFamily="2" charset="2"/>
+              <a:buChar char="ü"/>
+            </a:pPr>
+            <a:r>
+              <a:rPr lang="en-US" altLang="ko-KR" sz="1600" dirty="0"/>
+              <a:t>LNG</a:t>
+            </a:r>
+            <a:r>
+              <a:rPr lang="ko-KR" altLang="en-US" sz="1600" dirty="0"/>
+              <a:t>와 달리 고정된 수송 경로와 이로 인한 지정학적 민감성이 특징이다</a:t>
+            </a:r>
+            <a:r>
+              <a:rPr lang="en-US" altLang="ko-KR" sz="1600" dirty="0"/>
+              <a:t>.</a:t>
+            </a:r>
+          </a:p>
+          <a:p>
+            <a:pPr marL="835025" lvl="1" indent="-285750">
+              <a:lnSpc>
+                <a:spcPct val="150000"/>
+              </a:lnSpc>
+              <a:buFont typeface="Wingdings" panose="05000000000000000000" pitchFamily="2" charset="2"/>
+              <a:buChar char="ü"/>
+            </a:pPr>
+            <a:r>
+              <a:rPr lang="ko-KR" altLang="en-US" sz="1600" dirty="0"/>
+              <a:t>생산국과 소비국 간의 지리적 근접성</a:t>
+            </a:r>
+            <a:r>
+              <a:rPr lang="en-US" altLang="ko-KR" sz="1600" dirty="0"/>
+              <a:t>, </a:t>
+            </a:r>
+            <a:r>
+              <a:rPr lang="ko-KR" altLang="en-US" sz="1600" dirty="0"/>
+              <a:t>역사적 에너지 관계</a:t>
+            </a:r>
+            <a:r>
+              <a:rPr lang="en-US" altLang="ko-KR" sz="1600" dirty="0"/>
+              <a:t>, </a:t>
+            </a:r>
+            <a:r>
+              <a:rPr lang="ko-KR" altLang="en-US" sz="1600" dirty="0"/>
+              <a:t>정치적 협력 수준에 크게 좌우된다</a:t>
+            </a:r>
+            <a:r>
+              <a:rPr lang="en-US" altLang="ko-KR" sz="1600" dirty="0"/>
+              <a:t>.</a:t>
+            </a:r>
+          </a:p>
+          <a:p>
+            <a:pPr marL="1292225" lvl="2" indent="-285750">
+              <a:lnSpc>
+                <a:spcPct val="150000"/>
+              </a:lnSpc>
+              <a:buFont typeface="Wingdings" panose="05000000000000000000" pitchFamily="2" charset="2"/>
+              <a:buChar char="Ø"/>
+            </a:pPr>
+            <a:r>
+              <a:rPr lang="ko-KR" altLang="en-US" sz="1600" dirty="0"/>
+              <a:t>이에 따라 거래 구조의 안정성과 동시에 위험 요소를 내포하고 있다</a:t>
+            </a:r>
+            <a:r>
+              <a:rPr lang="en-US" altLang="ko-KR" sz="1600" dirty="0"/>
+              <a:t>.</a:t>
+            </a:r>
+          </a:p>
+          <a:p>
+            <a:pPr marL="377825" indent="-285750">
+              <a:lnSpc>
+                <a:spcPct val="150000"/>
+              </a:lnSpc>
+              <a:buFont typeface="Arial" panose="020B0604020202020204" pitchFamily="34" charset="0"/>
+              <a:buChar char="•"/>
+            </a:pPr>
             <a:endParaRPr lang="en-US" altLang="ko-KR" sz="1600" dirty="0"/>
+          </a:p>
+          <a:p>
+            <a:pPr marL="377825" indent="-285750">
+              <a:lnSpc>
+                <a:spcPct val="150000"/>
+              </a:lnSpc>
+              <a:buFont typeface="Arial" panose="020B0604020202020204" pitchFamily="34" charset="0"/>
+              <a:buChar char="•"/>
+            </a:pPr>
+            <a:r>
+              <a:rPr lang="en-US" altLang="ko-KR" sz="1600" dirty="0"/>
+              <a:t>PNG </a:t>
+            </a:r>
+            <a:r>
+              <a:rPr lang="ko-KR" altLang="en-US" sz="1600" dirty="0"/>
+              <a:t>수출은 전통적으로 유라시아 대륙을 중심으로 이루어져 왔다</a:t>
+            </a:r>
+            <a:r>
+              <a:rPr lang="en-US" altLang="ko-KR" sz="1600" dirty="0"/>
+              <a:t>.</a:t>
+            </a:r>
+          </a:p>
+          <a:p>
+            <a:pPr marL="835025" lvl="1" indent="-285750">
+              <a:lnSpc>
+                <a:spcPct val="150000"/>
+              </a:lnSpc>
+              <a:buFont typeface="Wingdings" panose="05000000000000000000" pitchFamily="2" charset="2"/>
+              <a:buChar char="ü"/>
+            </a:pPr>
+            <a:r>
+              <a:rPr lang="ko-KR" altLang="en-US" sz="1600" dirty="0"/>
+              <a:t>대표적으로 러시아는 유럽과 아시아를 잇는 파이프라인 네트워크를 통해 세계 최대의 </a:t>
+            </a:r>
+            <a:r>
+              <a:rPr lang="en-US" altLang="ko-KR" sz="1600" dirty="0"/>
+              <a:t>PNG </a:t>
+            </a:r>
+            <a:r>
+              <a:rPr lang="ko-KR" altLang="en-US" sz="1600" dirty="0"/>
+              <a:t>수출국이 되었다</a:t>
+            </a:r>
+            <a:r>
+              <a:rPr lang="en-US" altLang="ko-KR" sz="1600" dirty="0"/>
+              <a:t>.</a:t>
+            </a:r>
+          </a:p>
+          <a:p>
+            <a:pPr marL="1292225" lvl="2" indent="-285750">
+              <a:lnSpc>
+                <a:spcPct val="150000"/>
+              </a:lnSpc>
+              <a:buFont typeface="Wingdings" panose="05000000000000000000" pitchFamily="2" charset="2"/>
+              <a:buChar char="Ø"/>
+            </a:pPr>
+            <a:r>
+              <a:rPr lang="ko-KR" altLang="en-US" sz="1600" dirty="0"/>
+              <a:t>러시아산 가스는 독일</a:t>
+            </a:r>
+            <a:r>
+              <a:rPr lang="en-US" altLang="ko-KR" sz="1600" dirty="0"/>
+              <a:t>, </a:t>
+            </a:r>
+            <a:r>
+              <a:rPr lang="ko-KR" altLang="en-US" sz="1600" dirty="0"/>
+              <a:t>이탈리아</a:t>
+            </a:r>
+            <a:r>
+              <a:rPr lang="en-US" altLang="ko-KR" sz="1600" dirty="0"/>
+              <a:t>, </a:t>
+            </a:r>
+            <a:r>
+              <a:rPr lang="ko-KR" altLang="en-US" sz="1600" dirty="0"/>
+              <a:t>프랑스 등 주요 </a:t>
+            </a:r>
+            <a:r>
+              <a:rPr lang="ko-KR" altLang="en-US" sz="1600" dirty="0" err="1"/>
+              <a:t>유러</a:t>
+            </a:r>
+            <a:r>
+              <a:rPr lang="ko-KR" altLang="en-US" sz="1600" dirty="0"/>
+              <a:t> 국가에 대규모로 공급되었다</a:t>
+            </a:r>
+            <a:r>
+              <a:rPr lang="en-US" altLang="ko-KR" sz="1600" dirty="0"/>
+              <a:t>.</a:t>
+            </a:r>
+          </a:p>
+          <a:p>
+            <a:pPr marL="1292225" lvl="2" indent="-285750">
+              <a:lnSpc>
+                <a:spcPct val="150000"/>
+              </a:lnSpc>
+              <a:buFont typeface="Wingdings" panose="05000000000000000000" pitchFamily="2" charset="2"/>
+              <a:buChar char="Ø"/>
+            </a:pPr>
+            <a:r>
+              <a:rPr lang="en-US" altLang="ko-KR" sz="1600" dirty="0"/>
+              <a:t>2021</a:t>
+            </a:r>
+            <a:r>
+              <a:rPr lang="ko-KR" altLang="en-US" sz="1600" dirty="0"/>
+              <a:t>년 기준</a:t>
+            </a:r>
+            <a:r>
+              <a:rPr lang="en-US" altLang="ko-KR" sz="1600" dirty="0"/>
+              <a:t>, </a:t>
+            </a:r>
+            <a:r>
+              <a:rPr lang="ko-KR" altLang="en-US" sz="1600" dirty="0"/>
+              <a:t>유럽 천연가스 수입량의 약</a:t>
+            </a:r>
+            <a:r>
+              <a:rPr lang="en-US" altLang="ko-KR" sz="1600" dirty="0"/>
+              <a:t> 40%</a:t>
+            </a:r>
+            <a:r>
+              <a:rPr lang="ko-KR" altLang="en-US" sz="1600" dirty="0"/>
+              <a:t>가 러시아 파이프라인을 통해 이루어졌다</a:t>
+            </a:r>
+            <a:r>
+              <a:rPr lang="en-US" altLang="ko-KR" sz="1600" dirty="0"/>
+              <a:t>.</a:t>
+            </a:r>
+          </a:p>
+          <a:p>
+            <a:pPr marL="835025" lvl="1" indent="-285750">
+              <a:lnSpc>
+                <a:spcPct val="150000"/>
+              </a:lnSpc>
+              <a:buFont typeface="Wingdings" panose="05000000000000000000" pitchFamily="2" charset="2"/>
+              <a:buChar char="ü"/>
+            </a:pPr>
+            <a:r>
+              <a:rPr lang="ko-KR" altLang="en-US" sz="1600" dirty="0"/>
+              <a:t>그러나 </a:t>
+            </a:r>
+            <a:r>
+              <a:rPr lang="en-US" altLang="ko-KR" sz="1600" dirty="0"/>
+              <a:t>2022</a:t>
+            </a:r>
+            <a:r>
+              <a:rPr lang="ko-KR" altLang="en-US" sz="1600" dirty="0"/>
+              <a:t>년 러시아</a:t>
+            </a:r>
+            <a:r>
+              <a:rPr lang="en-US" altLang="ko-KR" sz="1600" dirty="0"/>
+              <a:t>-</a:t>
+            </a:r>
+            <a:r>
+              <a:rPr lang="ko-KR" altLang="en-US" sz="1600" dirty="0"/>
+              <a:t>우크라이나 전쟁 이후 유럽의 수입구조는 급격히 변화하였고</a:t>
+            </a:r>
+            <a:r>
+              <a:rPr lang="en-US" altLang="ko-KR" sz="1600" dirty="0"/>
+              <a:t>, PNG </a:t>
+            </a:r>
+            <a:r>
+              <a:rPr lang="ko-KR" altLang="en-US" sz="1600" dirty="0"/>
+              <a:t>수출은 정치적 리스크에 매우 취약한 구조임이 재확인 되었다</a:t>
+            </a:r>
+            <a:r>
+              <a:rPr lang="en-US" altLang="ko-KR" sz="1600" dirty="0"/>
+              <a:t>.</a:t>
+            </a:r>
           </a:p>
         </p:txBody>
       </p:sp>
@@ -33262,6 +33514,1222 @@
 </file>
 
 <file path=ppt/slides/slide35.xml><?xml version="1.0" encoding="utf-8"?>
+<p:sld xmlns:a="http://schemas.openxmlformats.org/drawingml/2006/main" xmlns:r="http://schemas.openxmlformats.org/officeDocument/2006/relationships" xmlns:p="http://schemas.openxmlformats.org/presentationml/2006/main">
+  <p:cSld>
+    <p:spTree>
+      <p:nvGrpSpPr>
+        <p:cNvPr id="1" name="">
+          <a:extLst>
+            <a:ext uri="{FF2B5EF4-FFF2-40B4-BE49-F238E27FC236}">
+              <a16:creationId xmlns:a16="http://schemas.microsoft.com/office/drawing/2014/main" id="{109287DF-A2AF-9D03-E4F3-4C3E37E38A4A}"/>
+            </a:ext>
+          </a:extLst>
+        </p:cNvPr>
+        <p:cNvGrpSpPr/>
+        <p:nvPr/>
+      </p:nvGrpSpPr>
+      <p:grpSpPr>
+        <a:xfrm>
+          <a:off x="0" y="0"/>
+          <a:ext cx="0" cy="0"/>
+          <a:chOff x="0" y="0"/>
+          <a:chExt cx="0" cy="0"/>
+        </a:xfrm>
+      </p:grpSpPr>
+      <p:sp>
+        <p:nvSpPr>
+          <p:cNvPr id="2" name="제목 1">
+            <a:extLst>
+              <a:ext uri="{FF2B5EF4-FFF2-40B4-BE49-F238E27FC236}">
+                <a16:creationId xmlns:a16="http://schemas.microsoft.com/office/drawing/2014/main" id="{E0DCE1CA-348B-5235-7EDC-41DD89BF1CB9}"/>
+              </a:ext>
+            </a:extLst>
+          </p:cNvPr>
+          <p:cNvSpPr>
+            <a:spLocks noGrp="1"/>
+          </p:cNvSpPr>
+          <p:nvPr>
+            <p:ph type="title"/>
+          </p:nvPr>
+        </p:nvSpPr>
+        <p:spPr/>
+        <p:txBody>
+          <a:bodyPr/>
+          <a:lstStyle/>
+          <a:p>
+            <a:r>
+              <a:rPr lang="ko-KR" altLang="en-US" dirty="0"/>
+              <a:t>천연가스 소비</a:t>
+            </a:r>
+          </a:p>
+        </p:txBody>
+      </p:sp>
+      <p:sp>
+        <p:nvSpPr>
+          <p:cNvPr id="4" name="슬라이드 번호 개체 틀 3">
+            <a:extLst>
+              <a:ext uri="{FF2B5EF4-FFF2-40B4-BE49-F238E27FC236}">
+                <a16:creationId xmlns:a16="http://schemas.microsoft.com/office/drawing/2014/main" id="{D128BB13-B62B-B493-99DD-7FE0389FDF16}"/>
+              </a:ext>
+            </a:extLst>
+          </p:cNvPr>
+          <p:cNvSpPr>
+            <a:spLocks noGrp="1"/>
+          </p:cNvSpPr>
+          <p:nvPr>
+            <p:ph type="sldNum" sz="quarter" idx="12"/>
+          </p:nvPr>
+        </p:nvSpPr>
+        <p:spPr/>
+        <p:txBody>
+          <a:bodyPr/>
+          <a:lstStyle/>
+          <a:p>
+            <a:fld id="{109C872D-39A9-4065-8BF3-6A613116E2A1}" type="slidenum">
+              <a:rPr lang="ko-KR" altLang="en-US" smtClean="0"/>
+              <a:t>35</a:t>
+            </a:fld>
+            <a:endParaRPr lang="ko-KR" altLang="en-US"/>
+          </a:p>
+        </p:txBody>
+      </p:sp>
+      <p:sp>
+        <p:nvSpPr>
+          <p:cNvPr id="3" name="TextBox 2">
+            <a:extLst>
+              <a:ext uri="{FF2B5EF4-FFF2-40B4-BE49-F238E27FC236}">
+                <a16:creationId xmlns:a16="http://schemas.microsoft.com/office/drawing/2014/main" id="{216BB703-F3A4-2692-078E-0C5684AF45EA}"/>
+              </a:ext>
+            </a:extLst>
+          </p:cNvPr>
+          <p:cNvSpPr txBox="1"/>
+          <p:nvPr/>
+        </p:nvSpPr>
+        <p:spPr>
+          <a:xfrm>
+            <a:off x="288790" y="958844"/>
+            <a:ext cx="11118453" cy="5215338"/>
+          </a:xfrm>
+          <a:prstGeom prst="rect">
+            <a:avLst/>
+          </a:prstGeom>
+          <a:noFill/>
+        </p:spPr>
+        <p:txBody>
+          <a:bodyPr wrap="square" rtlCol="0" anchor="t">
+            <a:spAutoFit/>
+          </a:bodyPr>
+          <a:lstStyle/>
+          <a:p>
+            <a:pPr marL="377825" indent="-285750">
+              <a:lnSpc>
+                <a:spcPct val="150000"/>
+              </a:lnSpc>
+              <a:buFont typeface="Arial" panose="020B0604020202020204" pitchFamily="34" charset="0"/>
+              <a:buChar char="•"/>
+            </a:pPr>
+            <a:r>
+              <a:rPr lang="ko-KR" altLang="en-US" sz="1600" dirty="0"/>
+              <a:t>기술적</a:t>
+            </a:r>
+            <a:r>
+              <a:rPr lang="en-US" altLang="ko-KR" sz="1600" dirty="0"/>
+              <a:t>·</a:t>
+            </a:r>
+            <a:r>
+              <a:rPr lang="ko-KR" altLang="en-US" sz="1600" dirty="0"/>
+              <a:t>경제적 특성상 </a:t>
+            </a:r>
+            <a:r>
+              <a:rPr lang="en-US" altLang="ko-KR" sz="1600" dirty="0"/>
+              <a:t>PNG </a:t>
+            </a:r>
+            <a:r>
+              <a:rPr lang="ko-KR" altLang="en-US" sz="1600" dirty="0"/>
+              <a:t>수출은 특정 생산국이 특정 수입국에 장기적으로 가스를 공급하는 고정적 이원 거래구조를 형성하는 경향이 있다</a:t>
+            </a:r>
+            <a:r>
+              <a:rPr lang="en-US" altLang="ko-KR" sz="1600" dirty="0"/>
+              <a:t>.</a:t>
+            </a:r>
+          </a:p>
+          <a:p>
+            <a:pPr marL="835025" lvl="1" indent="-285750">
+              <a:lnSpc>
+                <a:spcPct val="150000"/>
+              </a:lnSpc>
+              <a:buFont typeface="Wingdings" panose="05000000000000000000" pitchFamily="2" charset="2"/>
+              <a:buChar char="ü"/>
+            </a:pPr>
+            <a:r>
+              <a:rPr lang="ko-KR" altLang="en-US" sz="1600" dirty="0"/>
+              <a:t>대표적으로 러시아</a:t>
+            </a:r>
+            <a:r>
+              <a:rPr lang="en-US" altLang="ko-KR" sz="1600" dirty="0"/>
+              <a:t>-</a:t>
+            </a:r>
+            <a:r>
+              <a:rPr lang="ko-KR" altLang="en-US" sz="1600" dirty="0"/>
+              <a:t>독일 간 </a:t>
+            </a:r>
+            <a:r>
+              <a:rPr lang="ko-KR" altLang="en-US" sz="1600" dirty="0" err="1"/>
+              <a:t>노드스트림</a:t>
+            </a:r>
+            <a:r>
+              <a:rPr lang="en-US" altLang="ko-KR" sz="1600" dirty="0"/>
+              <a:t>, </a:t>
+            </a:r>
+            <a:r>
+              <a:rPr lang="ko-KR" altLang="en-US" sz="1600" dirty="0"/>
+              <a:t>알제리</a:t>
+            </a:r>
+            <a:r>
+              <a:rPr lang="en-US" altLang="ko-KR" sz="1600" dirty="0"/>
+              <a:t>-</a:t>
+            </a:r>
+            <a:r>
+              <a:rPr lang="ko-KR" altLang="en-US" sz="1600" dirty="0"/>
+              <a:t>이탈리아 간 </a:t>
+            </a:r>
+            <a:r>
+              <a:rPr lang="ko-KR" altLang="en-US" sz="1600" dirty="0" err="1"/>
+              <a:t>트랜스메드</a:t>
+            </a:r>
+            <a:r>
+              <a:rPr lang="en-US" altLang="ko-KR" sz="1600" dirty="0"/>
+              <a:t>, </a:t>
+            </a:r>
+            <a:r>
+              <a:rPr lang="ko-KR" altLang="en-US" sz="1600" dirty="0"/>
+              <a:t>노르웨이</a:t>
+            </a:r>
+            <a:r>
+              <a:rPr lang="en-US" altLang="ko-KR" sz="1600" dirty="0"/>
+              <a:t>-</a:t>
+            </a:r>
+            <a:r>
+              <a:rPr lang="ko-KR" altLang="en-US" sz="1600" dirty="0"/>
+              <a:t>영국 간 </a:t>
+            </a:r>
+            <a:r>
+              <a:rPr lang="ko-KR" altLang="en-US" sz="1600" dirty="0" err="1"/>
+              <a:t>랭가스와</a:t>
+            </a:r>
+            <a:r>
+              <a:rPr lang="ko-KR" altLang="en-US" sz="1600" dirty="0"/>
+              <a:t> 같은 대형 파이프라인은 막대한 인프라 투자와 수십 년 단위 장기 계약을 바탕으로 운영된다</a:t>
+            </a:r>
+            <a:r>
+              <a:rPr lang="en-US" altLang="ko-KR" sz="1600" dirty="0"/>
+              <a:t>.</a:t>
+            </a:r>
+          </a:p>
+          <a:p>
+            <a:pPr marL="835025" lvl="1" indent="-285750">
+              <a:lnSpc>
+                <a:spcPct val="150000"/>
+              </a:lnSpc>
+              <a:buFont typeface="Wingdings" panose="05000000000000000000" pitchFamily="2" charset="2"/>
+              <a:buChar char="ü"/>
+            </a:pPr>
+            <a:r>
+              <a:rPr lang="ko-KR" altLang="en-US" sz="1600" dirty="0"/>
+              <a:t>이는 </a:t>
+            </a:r>
+            <a:r>
+              <a:rPr lang="en-US" altLang="ko-KR" sz="1600" dirty="0"/>
+              <a:t>LNG</a:t>
+            </a:r>
+            <a:r>
+              <a:rPr lang="ko-KR" altLang="en-US" sz="1600" dirty="0"/>
+              <a:t>시장에서 나타나는 현물 거래 및 계약 유연성 확대와 대비된다</a:t>
+            </a:r>
+            <a:r>
+              <a:rPr lang="en-US" altLang="ko-KR" sz="1600" dirty="0"/>
+              <a:t>.</a:t>
+            </a:r>
+          </a:p>
+          <a:p>
+            <a:pPr marL="377825" indent="-285750">
+              <a:lnSpc>
+                <a:spcPct val="150000"/>
+              </a:lnSpc>
+              <a:buFont typeface="Arial" panose="020B0604020202020204" pitchFamily="34" charset="0"/>
+              <a:buChar char="•"/>
+            </a:pPr>
+            <a:endParaRPr lang="en-US" altLang="ko-KR" sz="1600" dirty="0"/>
+          </a:p>
+          <a:p>
+            <a:pPr marL="377825" indent="-285750">
+              <a:lnSpc>
+                <a:spcPct val="150000"/>
+              </a:lnSpc>
+              <a:buFont typeface="Arial" panose="020B0604020202020204" pitchFamily="34" charset="0"/>
+              <a:buChar char="•"/>
+            </a:pPr>
+            <a:r>
+              <a:rPr lang="ko-KR" altLang="en-US" sz="1600" dirty="0"/>
+              <a:t>지역적으로 보면</a:t>
+            </a:r>
+            <a:r>
+              <a:rPr lang="en-US" altLang="ko-KR" sz="1600" dirty="0"/>
+              <a:t>, PNG </a:t>
+            </a:r>
+            <a:r>
+              <a:rPr lang="ko-KR" altLang="en-US" sz="1600" dirty="0"/>
+              <a:t>수출은 유럽</a:t>
+            </a:r>
+            <a:r>
+              <a:rPr lang="en-US" altLang="ko-KR" sz="1600" dirty="0"/>
+              <a:t>, </a:t>
+            </a:r>
+            <a:r>
+              <a:rPr lang="ko-KR" altLang="en-US" sz="1600" dirty="0"/>
+              <a:t>북미</a:t>
+            </a:r>
+            <a:r>
+              <a:rPr lang="en-US" altLang="ko-KR" sz="1600" dirty="0"/>
+              <a:t>, </a:t>
+            </a:r>
+            <a:r>
+              <a:rPr lang="ko-KR" altLang="en-US" sz="1600" dirty="0"/>
+              <a:t>아시아를 중심으로 지역별 클러스터를 형성하고 있다</a:t>
+            </a:r>
+            <a:r>
+              <a:rPr lang="en-US" altLang="ko-KR" sz="1600" dirty="0"/>
+              <a:t>.</a:t>
+            </a:r>
+          </a:p>
+          <a:p>
+            <a:pPr marL="835025" lvl="1" indent="-285750">
+              <a:lnSpc>
+                <a:spcPct val="150000"/>
+              </a:lnSpc>
+              <a:buFont typeface="Wingdings" panose="05000000000000000000" pitchFamily="2" charset="2"/>
+              <a:buChar char="ü"/>
+            </a:pPr>
+            <a:r>
+              <a:rPr lang="ko-KR" altLang="en-US" sz="1600" dirty="0"/>
+              <a:t>유럽은 러시아</a:t>
+            </a:r>
+            <a:r>
+              <a:rPr lang="en-US" altLang="ko-KR" sz="1600" dirty="0"/>
+              <a:t>, </a:t>
+            </a:r>
+            <a:r>
+              <a:rPr lang="ko-KR" altLang="en-US" sz="1600" dirty="0"/>
+              <a:t>노르웨이</a:t>
+            </a:r>
+            <a:r>
+              <a:rPr lang="en-US" altLang="ko-KR" sz="1600" dirty="0"/>
+              <a:t>, </a:t>
+            </a:r>
+            <a:r>
+              <a:rPr lang="ko-KR" altLang="en-US" sz="1600" dirty="0"/>
+              <a:t>알제리 등의 공급국과 광범위한 파이프라인 네트워크를 공유하고 있다</a:t>
+            </a:r>
+            <a:r>
+              <a:rPr lang="en-US" altLang="ko-KR" sz="1600" dirty="0"/>
+              <a:t>.</a:t>
+            </a:r>
+          </a:p>
+          <a:p>
+            <a:pPr marL="835025" lvl="1" indent="-285750">
+              <a:lnSpc>
+                <a:spcPct val="150000"/>
+              </a:lnSpc>
+              <a:buFont typeface="Wingdings" panose="05000000000000000000" pitchFamily="2" charset="2"/>
+              <a:buChar char="ü"/>
+            </a:pPr>
+            <a:r>
+              <a:rPr lang="ko-KR" altLang="en-US" sz="1600" dirty="0"/>
+              <a:t>북미에서는 미국과 캐나다 간</a:t>
+            </a:r>
+            <a:r>
+              <a:rPr lang="en-US" altLang="ko-KR" sz="1600" dirty="0"/>
+              <a:t>, </a:t>
+            </a:r>
+            <a:r>
+              <a:rPr lang="ko-KR" altLang="en-US" sz="1600" dirty="0"/>
+              <a:t>그리고 멕시코로 이어지는 </a:t>
+            </a:r>
+            <a:r>
+              <a:rPr lang="en-US" altLang="ko-KR" sz="1600" dirty="0"/>
+              <a:t>PNG </a:t>
+            </a:r>
+            <a:r>
+              <a:rPr lang="ko-KR" altLang="en-US" sz="1600" dirty="0"/>
+              <a:t>수출이 활발하다</a:t>
+            </a:r>
+            <a:r>
+              <a:rPr lang="en-US" altLang="ko-KR" sz="1600" dirty="0"/>
+              <a:t>.</a:t>
+            </a:r>
+          </a:p>
+          <a:p>
+            <a:pPr marL="835025" lvl="1" indent="-285750">
+              <a:lnSpc>
+                <a:spcPct val="150000"/>
+              </a:lnSpc>
+              <a:buFont typeface="Wingdings" panose="05000000000000000000" pitchFamily="2" charset="2"/>
+              <a:buChar char="ü"/>
+            </a:pPr>
+            <a:r>
+              <a:rPr lang="ko-KR" altLang="en-US" sz="1600" dirty="0"/>
+              <a:t>아시아에서는 투르크메니스탄</a:t>
+            </a:r>
+            <a:r>
+              <a:rPr lang="en-US" altLang="ko-KR" sz="1600" dirty="0"/>
+              <a:t>, </a:t>
+            </a:r>
+            <a:r>
+              <a:rPr lang="ko-KR" altLang="en-US" sz="1600" dirty="0"/>
+              <a:t>카자흐스탄</a:t>
+            </a:r>
+            <a:r>
+              <a:rPr lang="en-US" altLang="ko-KR" sz="1600" dirty="0"/>
+              <a:t>, </a:t>
+            </a:r>
+            <a:r>
+              <a:rPr lang="ko-KR" altLang="en-US" sz="1600" dirty="0"/>
+              <a:t>우즈베키스탄 등 중앙아시아 국가들이 중국으로 천연가스를 수출하는 파이프라인 체계를 갖추고 있다</a:t>
+            </a:r>
+            <a:r>
+              <a:rPr lang="en-US" altLang="ko-KR" sz="1600" dirty="0"/>
+              <a:t>.</a:t>
+            </a:r>
+          </a:p>
+          <a:p>
+            <a:pPr marL="835025" lvl="1" indent="-285750">
+              <a:lnSpc>
+                <a:spcPct val="150000"/>
+              </a:lnSpc>
+              <a:buFont typeface="Wingdings" panose="05000000000000000000" pitchFamily="2" charset="2"/>
+              <a:buChar char="ü"/>
+            </a:pPr>
+            <a:endParaRPr lang="en-US" altLang="ko-KR" sz="1600" dirty="0"/>
+          </a:p>
+          <a:p>
+            <a:pPr marL="377825" indent="-285750">
+              <a:lnSpc>
+                <a:spcPct val="150000"/>
+              </a:lnSpc>
+              <a:buFont typeface="Arial" panose="020B0604020202020204" pitchFamily="34" charset="0"/>
+              <a:buChar char="•"/>
+            </a:pPr>
+            <a:r>
+              <a:rPr lang="ko-KR" altLang="en-US" sz="1600" dirty="0"/>
+              <a:t>한편</a:t>
+            </a:r>
+            <a:r>
+              <a:rPr lang="en-US" altLang="ko-KR" sz="1600" dirty="0"/>
+              <a:t>, PNG </a:t>
+            </a:r>
+            <a:r>
+              <a:rPr lang="ko-KR" altLang="en-US" sz="1600" dirty="0"/>
+              <a:t>수출은 인프라 건설에 장시간이 소요되고</a:t>
+            </a:r>
+            <a:r>
+              <a:rPr lang="en-US" altLang="ko-KR" sz="1600" dirty="0"/>
+              <a:t>, </a:t>
+            </a:r>
+            <a:r>
+              <a:rPr lang="ko-KR" altLang="en-US" sz="1600" dirty="0"/>
+              <a:t>정치적</a:t>
+            </a:r>
+            <a:r>
+              <a:rPr lang="en-US" altLang="ko-KR" sz="1600" dirty="0"/>
+              <a:t>·</a:t>
+            </a:r>
+            <a:r>
+              <a:rPr lang="ko-KR" altLang="en-US" sz="1600" dirty="0"/>
+              <a:t>환경적 인허가 요건이 까다롭기 때문에 확장성과 유연성 측면에서 </a:t>
+            </a:r>
+            <a:r>
+              <a:rPr lang="en-US" altLang="ko-KR" sz="1600" dirty="0"/>
+              <a:t>LNG</a:t>
+            </a:r>
+            <a:r>
+              <a:rPr lang="ko-KR" altLang="en-US" sz="1600" dirty="0"/>
+              <a:t>에 비해 제약이 크다</a:t>
+            </a:r>
+            <a:r>
+              <a:rPr lang="en-US" altLang="ko-KR" sz="1600" dirty="0"/>
+              <a:t>.</a:t>
+            </a:r>
+          </a:p>
+        </p:txBody>
+      </p:sp>
+    </p:spTree>
+    <p:extLst>
+      <p:ext uri="{BB962C8B-B14F-4D97-AF65-F5344CB8AC3E}">
+        <p14:creationId xmlns:p14="http://schemas.microsoft.com/office/powerpoint/2010/main" val="3098362877"/>
+      </p:ext>
+    </p:extLst>
+  </p:cSld>
+  <p:clrMapOvr>
+    <a:masterClrMapping/>
+  </p:clrMapOvr>
+</p:sld>
+</file>
+
+<file path=ppt/slides/slide36.xml><?xml version="1.0" encoding="utf-8"?>
+<p:sld xmlns:a="http://schemas.openxmlformats.org/drawingml/2006/main" xmlns:r="http://schemas.openxmlformats.org/officeDocument/2006/relationships" xmlns:p="http://schemas.openxmlformats.org/presentationml/2006/main">
+  <p:cSld>
+    <p:spTree>
+      <p:nvGrpSpPr>
+        <p:cNvPr id="1" name="">
+          <a:extLst>
+            <a:ext uri="{FF2B5EF4-FFF2-40B4-BE49-F238E27FC236}">
+              <a16:creationId xmlns:a16="http://schemas.microsoft.com/office/drawing/2014/main" id="{B33A629D-9A18-7D6A-D00D-0037F3CA5278}"/>
+            </a:ext>
+          </a:extLst>
+        </p:cNvPr>
+        <p:cNvGrpSpPr/>
+        <p:nvPr/>
+      </p:nvGrpSpPr>
+      <p:grpSpPr>
+        <a:xfrm>
+          <a:off x="0" y="0"/>
+          <a:ext cx="0" cy="0"/>
+          <a:chOff x="0" y="0"/>
+          <a:chExt cx="0" cy="0"/>
+        </a:xfrm>
+      </p:grpSpPr>
+      <p:sp>
+        <p:nvSpPr>
+          <p:cNvPr id="2" name="제목 1">
+            <a:extLst>
+              <a:ext uri="{FF2B5EF4-FFF2-40B4-BE49-F238E27FC236}">
+                <a16:creationId xmlns:a16="http://schemas.microsoft.com/office/drawing/2014/main" id="{C614131D-B3E1-304D-2EE8-B2275B8ED652}"/>
+              </a:ext>
+            </a:extLst>
+          </p:cNvPr>
+          <p:cNvSpPr>
+            <a:spLocks noGrp="1"/>
+          </p:cNvSpPr>
+          <p:nvPr>
+            <p:ph type="title"/>
+          </p:nvPr>
+        </p:nvSpPr>
+        <p:spPr/>
+        <p:txBody>
+          <a:bodyPr/>
+          <a:lstStyle/>
+          <a:p>
+            <a:r>
+              <a:rPr lang="ko-KR" altLang="en-US" dirty="0"/>
+              <a:t>천연가스 소비</a:t>
+            </a:r>
+          </a:p>
+        </p:txBody>
+      </p:sp>
+      <p:sp>
+        <p:nvSpPr>
+          <p:cNvPr id="4" name="슬라이드 번호 개체 틀 3">
+            <a:extLst>
+              <a:ext uri="{FF2B5EF4-FFF2-40B4-BE49-F238E27FC236}">
+                <a16:creationId xmlns:a16="http://schemas.microsoft.com/office/drawing/2014/main" id="{379B6F34-7EAE-B6C2-B903-A169A3B9763B}"/>
+              </a:ext>
+            </a:extLst>
+          </p:cNvPr>
+          <p:cNvSpPr>
+            <a:spLocks noGrp="1"/>
+          </p:cNvSpPr>
+          <p:nvPr>
+            <p:ph type="sldNum" sz="quarter" idx="12"/>
+          </p:nvPr>
+        </p:nvSpPr>
+        <p:spPr/>
+        <p:txBody>
+          <a:bodyPr/>
+          <a:lstStyle/>
+          <a:p>
+            <a:fld id="{109C872D-39A9-4065-8BF3-6A613116E2A1}" type="slidenum">
+              <a:rPr lang="ko-KR" altLang="en-US" smtClean="0"/>
+              <a:t>36</a:t>
+            </a:fld>
+            <a:endParaRPr lang="ko-KR" altLang="en-US"/>
+          </a:p>
+        </p:txBody>
+      </p:sp>
+      <p:sp>
+        <p:nvSpPr>
+          <p:cNvPr id="3" name="TextBox 2">
+            <a:extLst>
+              <a:ext uri="{FF2B5EF4-FFF2-40B4-BE49-F238E27FC236}">
+                <a16:creationId xmlns:a16="http://schemas.microsoft.com/office/drawing/2014/main" id="{7F6B2708-E3C2-4E31-6F02-A15C4DB5A38B}"/>
+              </a:ext>
+            </a:extLst>
+          </p:cNvPr>
+          <p:cNvSpPr txBox="1"/>
+          <p:nvPr/>
+        </p:nvSpPr>
+        <p:spPr>
+          <a:xfrm>
+            <a:off x="288790" y="958844"/>
+            <a:ext cx="11118453" cy="2999347"/>
+          </a:xfrm>
+          <a:prstGeom prst="rect">
+            <a:avLst/>
+          </a:prstGeom>
+          <a:noFill/>
+        </p:spPr>
+        <p:txBody>
+          <a:bodyPr wrap="square" rtlCol="0" anchor="t">
+            <a:spAutoFit/>
+          </a:bodyPr>
+          <a:lstStyle/>
+          <a:p>
+            <a:pPr marL="377825" indent="-285750">
+              <a:lnSpc>
+                <a:spcPct val="150000"/>
+              </a:lnSpc>
+              <a:buFont typeface="Arial" panose="020B0604020202020204" pitchFamily="34" charset="0"/>
+              <a:buChar char="•"/>
+            </a:pPr>
+            <a:r>
+              <a:rPr lang="ko-KR" altLang="en-US" sz="1600" dirty="0"/>
+              <a:t>한편</a:t>
+            </a:r>
+            <a:r>
+              <a:rPr lang="en-US" altLang="ko-KR" sz="1600" dirty="0"/>
+              <a:t>, PNG </a:t>
+            </a:r>
+            <a:r>
+              <a:rPr lang="ko-KR" altLang="en-US" sz="1600" dirty="0"/>
+              <a:t>수출은 인프라 건설에 장시간이 소요되고</a:t>
+            </a:r>
+            <a:r>
+              <a:rPr lang="en-US" altLang="ko-KR" sz="1600" dirty="0"/>
+              <a:t>, </a:t>
+            </a:r>
+            <a:r>
+              <a:rPr lang="ko-KR" altLang="en-US" sz="1600" dirty="0"/>
+              <a:t>정치적</a:t>
+            </a:r>
+            <a:r>
+              <a:rPr lang="en-US" altLang="ko-KR" sz="1600" dirty="0"/>
+              <a:t>·</a:t>
+            </a:r>
+            <a:r>
+              <a:rPr lang="ko-KR" altLang="en-US" sz="1600" dirty="0"/>
+              <a:t>환경적 인허가 요건이 까다롭기 때문에 확장성과 유연성 측면에서 </a:t>
+            </a:r>
+            <a:r>
+              <a:rPr lang="en-US" altLang="ko-KR" sz="1600" dirty="0"/>
+              <a:t>LNG</a:t>
+            </a:r>
+            <a:r>
+              <a:rPr lang="ko-KR" altLang="en-US" sz="1600" dirty="0"/>
+              <a:t>에 비해 제약이 크다</a:t>
+            </a:r>
+            <a:r>
+              <a:rPr lang="en-US" altLang="ko-KR" sz="1600" dirty="0"/>
+              <a:t>.</a:t>
+            </a:r>
+          </a:p>
+          <a:p>
+            <a:pPr marL="835025" lvl="1" indent="-285750">
+              <a:lnSpc>
+                <a:spcPct val="150000"/>
+              </a:lnSpc>
+              <a:buFont typeface="Wingdings" panose="05000000000000000000" pitchFamily="2" charset="2"/>
+              <a:buChar char="ü"/>
+            </a:pPr>
+            <a:r>
+              <a:rPr lang="ko-KR" altLang="en-US" sz="1600" dirty="0"/>
+              <a:t>대륙 간 수송은 사실상 불가능하고</a:t>
+            </a:r>
+            <a:r>
+              <a:rPr lang="en-US" altLang="ko-KR" sz="1600" dirty="0"/>
+              <a:t>, </a:t>
+            </a:r>
+            <a:r>
+              <a:rPr lang="ko-KR" altLang="en-US" sz="1600" dirty="0"/>
+              <a:t>해저 구간이 길어지는 경우 건설비용이 급격히 증가한다</a:t>
+            </a:r>
+            <a:r>
+              <a:rPr lang="en-US" altLang="ko-KR" sz="1600" dirty="0"/>
+              <a:t>.</a:t>
+            </a:r>
+          </a:p>
+          <a:p>
+            <a:pPr marL="835025" lvl="1" indent="-285750">
+              <a:lnSpc>
+                <a:spcPct val="150000"/>
+              </a:lnSpc>
+              <a:buFont typeface="Wingdings" panose="05000000000000000000" pitchFamily="2" charset="2"/>
+              <a:buChar char="ü"/>
+            </a:pPr>
+            <a:r>
+              <a:rPr lang="ko-KR" altLang="en-US" sz="1600" dirty="0"/>
+              <a:t>이에 따라 </a:t>
+            </a:r>
+            <a:r>
+              <a:rPr lang="en-US" altLang="ko-KR" sz="1600" dirty="0"/>
+              <a:t>PNG </a:t>
+            </a:r>
+            <a:r>
+              <a:rPr lang="ko-KR" altLang="en-US" sz="1600" dirty="0"/>
+              <a:t>수출국들은 지역 내 안정적인 수요처를 기반으로 보수적인 수출 전략을 채택하는 경향을 보인다</a:t>
+            </a:r>
+            <a:r>
+              <a:rPr lang="en-US" altLang="ko-KR" sz="1600" dirty="0"/>
+              <a:t>.</a:t>
+            </a:r>
+          </a:p>
+          <a:p>
+            <a:pPr marL="835025" lvl="1" indent="-285750">
+              <a:lnSpc>
+                <a:spcPct val="150000"/>
+              </a:lnSpc>
+              <a:buFont typeface="Wingdings" panose="05000000000000000000" pitchFamily="2" charset="2"/>
+              <a:buChar char="ü"/>
+            </a:pPr>
+            <a:endParaRPr lang="en-US" altLang="ko-KR" sz="1600" dirty="0"/>
+          </a:p>
+          <a:p>
+            <a:pPr marL="377825" indent="-285750">
+              <a:lnSpc>
+                <a:spcPct val="150000"/>
+              </a:lnSpc>
+              <a:buFont typeface="Arial" panose="020B0604020202020204" pitchFamily="34" charset="0"/>
+              <a:buChar char="•"/>
+            </a:pPr>
+            <a:r>
+              <a:rPr lang="ko-KR" altLang="en-US" sz="1600" dirty="0"/>
+              <a:t>그럼에도 불구하고</a:t>
+            </a:r>
+            <a:r>
+              <a:rPr lang="en-US" altLang="ko-KR" sz="1600" dirty="0"/>
+              <a:t>, PNG</a:t>
+            </a:r>
+            <a:r>
+              <a:rPr lang="ko-KR" altLang="en-US" sz="1600" dirty="0"/>
+              <a:t>는 운송비용이 낮고 대량 수송에 적합하다는 장점이 있어</a:t>
+            </a:r>
+            <a:r>
+              <a:rPr lang="en-US" altLang="ko-KR" sz="1600" dirty="0"/>
+              <a:t>, </a:t>
+            </a:r>
+            <a:r>
+              <a:rPr lang="ko-KR" altLang="en-US" sz="1600" dirty="0"/>
+              <a:t>생산국과 수입국 간에 신뢰관계가 구축된 경우에는 매우 효율적인 에너지 공급방식이다</a:t>
+            </a:r>
+            <a:r>
+              <a:rPr lang="en-US" altLang="ko-KR" sz="1600" dirty="0"/>
+              <a:t>.</a:t>
+            </a:r>
+          </a:p>
+        </p:txBody>
+      </p:sp>
+      <p:pic>
+        <p:nvPicPr>
+          <p:cNvPr id="5" name="그림 4">
+            <a:extLst>
+              <a:ext uri="{FF2B5EF4-FFF2-40B4-BE49-F238E27FC236}">
+                <a16:creationId xmlns:a16="http://schemas.microsoft.com/office/drawing/2014/main" id="{6E6A0319-C55D-D2D0-6F1B-9646CA548F1C}"/>
+              </a:ext>
+            </a:extLst>
+          </p:cNvPr>
+          <p:cNvPicPr>
+            <a:picLocks noChangeAspect="1"/>
+          </p:cNvPicPr>
+          <p:nvPr/>
+        </p:nvPicPr>
+        <p:blipFill rotWithShape="1">
+          <a:blip r:embed="rId2"/>
+          <a:srcRect t="3630" r="6566" b="7640"/>
+          <a:stretch>
+            <a:fillRect/>
+          </a:stretch>
+        </p:blipFill>
+        <p:spPr>
+          <a:xfrm>
+            <a:off x="6816035" y="3918226"/>
+            <a:ext cx="4960730" cy="2693674"/>
+          </a:xfrm>
+          <a:prstGeom prst="rect">
+            <a:avLst/>
+          </a:prstGeom>
+        </p:spPr>
+      </p:pic>
+      <p:sp>
+        <p:nvSpPr>
+          <p:cNvPr id="6" name="TextBox 5">
+            <a:extLst>
+              <a:ext uri="{FF2B5EF4-FFF2-40B4-BE49-F238E27FC236}">
+                <a16:creationId xmlns:a16="http://schemas.microsoft.com/office/drawing/2014/main" id="{23E64B49-0EF5-826D-CDDC-2FC64E7BCFE7}"/>
+              </a:ext>
+            </a:extLst>
+          </p:cNvPr>
+          <p:cNvSpPr txBox="1"/>
+          <p:nvPr/>
+        </p:nvSpPr>
+        <p:spPr>
+          <a:xfrm>
+            <a:off x="7804333" y="3783579"/>
+            <a:ext cx="3225894" cy="253916"/>
+          </a:xfrm>
+          <a:prstGeom prst="rect">
+            <a:avLst/>
+          </a:prstGeom>
+          <a:noFill/>
+        </p:spPr>
+        <p:txBody>
+          <a:bodyPr wrap="square">
+            <a:spAutoFit/>
+          </a:bodyPr>
+          <a:lstStyle/>
+          <a:p>
+            <a:pPr algn="ctr"/>
+            <a:r>
+              <a:rPr lang="en-US" altLang="ko-KR" sz="1050" spc="-50" dirty="0"/>
+              <a:t>&lt; </a:t>
+            </a:r>
+            <a:r>
+              <a:rPr lang="ko-KR" altLang="en-US" sz="1050" spc="-50" dirty="0"/>
+              <a:t>주요국의 </a:t>
+            </a:r>
+            <a:r>
+              <a:rPr lang="en-US" altLang="ko-KR" sz="1050" spc="-50" dirty="0"/>
+              <a:t>PNG </a:t>
+            </a:r>
+            <a:r>
+              <a:rPr lang="ko-KR" altLang="en-US" sz="1050" spc="-50" dirty="0"/>
+              <a:t>수출 </a:t>
+            </a:r>
+            <a:r>
+              <a:rPr lang="en-US" altLang="ko-KR" sz="1050" spc="-50" dirty="0"/>
+              <a:t>(10</a:t>
+            </a:r>
+            <a:r>
+              <a:rPr lang="ko-KR" altLang="en-US" sz="1050" spc="-50" dirty="0"/>
+              <a:t>억 </a:t>
+            </a:r>
+            <a:r>
+              <a:rPr lang="ko-KR" altLang="en-US" sz="1050" spc="-50" dirty="0" err="1"/>
+              <a:t>입방미터</a:t>
+            </a:r>
+            <a:r>
+              <a:rPr lang="en-US" altLang="ko-KR" sz="1050" spc="-50" dirty="0"/>
+              <a:t>) &gt;</a:t>
+            </a:r>
+            <a:endParaRPr lang="ko-KR" altLang="en-US" sz="1050" dirty="0"/>
+          </a:p>
+        </p:txBody>
+      </p:sp>
+      <p:sp>
+        <p:nvSpPr>
+          <p:cNvPr id="7" name="TextBox 6">
+            <a:extLst>
+              <a:ext uri="{FF2B5EF4-FFF2-40B4-BE49-F238E27FC236}">
+                <a16:creationId xmlns:a16="http://schemas.microsoft.com/office/drawing/2014/main" id="{7FB58F0D-709A-EF49-0772-084C0E4308E5}"/>
+              </a:ext>
+            </a:extLst>
+          </p:cNvPr>
+          <p:cNvSpPr txBox="1"/>
+          <p:nvPr/>
+        </p:nvSpPr>
+        <p:spPr>
+          <a:xfrm>
+            <a:off x="288790" y="4091647"/>
+            <a:ext cx="6001575" cy="1891352"/>
+          </a:xfrm>
+          <a:prstGeom prst="rect">
+            <a:avLst/>
+          </a:prstGeom>
+          <a:noFill/>
+        </p:spPr>
+        <p:txBody>
+          <a:bodyPr wrap="square" rtlCol="0" anchor="t">
+            <a:spAutoFit/>
+          </a:bodyPr>
+          <a:lstStyle/>
+          <a:p>
+            <a:pPr marL="377825" indent="-285750">
+              <a:lnSpc>
+                <a:spcPct val="150000"/>
+              </a:lnSpc>
+              <a:buFont typeface="Arial" panose="020B0604020202020204" pitchFamily="34" charset="0"/>
+              <a:buChar char="•"/>
+            </a:pPr>
+            <a:r>
+              <a:rPr lang="en-US" altLang="ko-KR" sz="1600" dirty="0"/>
+              <a:t>2023</a:t>
+            </a:r>
+            <a:r>
+              <a:rPr lang="ko-KR" altLang="en-US" sz="1600" dirty="0"/>
+              <a:t>년 기준 </a:t>
+            </a:r>
+            <a:r>
+              <a:rPr lang="en-US" altLang="ko-KR" sz="1600" dirty="0"/>
+              <a:t>PNG </a:t>
+            </a:r>
+            <a:r>
+              <a:rPr lang="ko-KR" altLang="en-US" sz="1600" dirty="0"/>
+              <a:t>수출량은 약 </a:t>
+            </a:r>
+            <a:r>
+              <a:rPr lang="en-US" altLang="ko-KR" sz="1600" dirty="0"/>
+              <a:t>6,770</a:t>
+            </a:r>
+            <a:r>
+              <a:rPr lang="ko-KR" altLang="en-US" sz="1600" dirty="0"/>
+              <a:t>억 </a:t>
+            </a:r>
+            <a:r>
+              <a:rPr lang="ko-KR" altLang="en-US" sz="1600" dirty="0" err="1"/>
+              <a:t>입방미터로</a:t>
+            </a:r>
+            <a:r>
+              <a:rPr lang="ko-KR" altLang="en-US" sz="1600" dirty="0"/>
+              <a:t> 집계되었으며</a:t>
+            </a:r>
+            <a:r>
+              <a:rPr lang="en-US" altLang="ko-KR" sz="1600" dirty="0"/>
+              <a:t>, </a:t>
+            </a:r>
+            <a:r>
+              <a:rPr lang="ko-KR" altLang="en-US" sz="1600" dirty="0"/>
+              <a:t>이는 같은 해 </a:t>
+            </a:r>
+            <a:r>
+              <a:rPr lang="en-US" altLang="ko-KR" sz="1600" dirty="0"/>
+              <a:t>LNG </a:t>
+            </a:r>
+            <a:r>
+              <a:rPr lang="ko-KR" altLang="en-US" sz="1600" dirty="0"/>
+              <a:t>수출량인 </a:t>
+            </a:r>
+            <a:r>
+              <a:rPr lang="en-US" altLang="ko-KR" sz="1600" dirty="0"/>
+              <a:t>5,492</a:t>
+            </a:r>
+            <a:r>
+              <a:rPr lang="ko-KR" altLang="en-US" sz="1600" dirty="0"/>
+              <a:t>억 </a:t>
+            </a:r>
+            <a:r>
+              <a:rPr lang="ko-KR" altLang="en-US" sz="1600" dirty="0" err="1"/>
+              <a:t>입방미터를</a:t>
+            </a:r>
+            <a:r>
+              <a:rPr lang="ko-KR" altLang="en-US" sz="1600" dirty="0"/>
+              <a:t> 상회 하였다</a:t>
+            </a:r>
+            <a:r>
+              <a:rPr lang="en-US" altLang="ko-KR" sz="1600" dirty="0"/>
+              <a:t>.</a:t>
+            </a:r>
+          </a:p>
+          <a:p>
+            <a:pPr marL="835025" lvl="1" indent="-285750">
+              <a:lnSpc>
+                <a:spcPct val="150000"/>
+              </a:lnSpc>
+              <a:buFont typeface="Wingdings" panose="05000000000000000000" pitchFamily="2" charset="2"/>
+              <a:buChar char="ü"/>
+            </a:pPr>
+            <a:r>
+              <a:rPr lang="ko-KR" altLang="en-US" sz="1600" dirty="0"/>
+              <a:t>오른쪽 그래프는 노르웨이</a:t>
+            </a:r>
+            <a:r>
+              <a:rPr lang="en-US" altLang="ko-KR" sz="1600" dirty="0"/>
+              <a:t>, </a:t>
+            </a:r>
+            <a:r>
+              <a:rPr lang="ko-KR" altLang="en-US" sz="1600" dirty="0"/>
+              <a:t>러시아</a:t>
+            </a:r>
+            <a:r>
+              <a:rPr lang="en-US" altLang="ko-KR" sz="1600" dirty="0"/>
+              <a:t>, </a:t>
+            </a:r>
+            <a:r>
+              <a:rPr lang="ko-KR" altLang="en-US" sz="1600" dirty="0"/>
+              <a:t>미국</a:t>
+            </a:r>
+            <a:r>
+              <a:rPr lang="en-US" altLang="ko-KR" sz="1600" dirty="0"/>
+              <a:t>, </a:t>
+            </a:r>
+            <a:r>
+              <a:rPr lang="ko-KR" altLang="en-US" sz="1600" dirty="0"/>
+              <a:t>캐나다 등 주요 </a:t>
+            </a:r>
+            <a:r>
+              <a:rPr lang="en-US" altLang="ko-KR" sz="1600" dirty="0"/>
+              <a:t>PNG </a:t>
+            </a:r>
+            <a:r>
+              <a:rPr lang="ko-KR" altLang="en-US" sz="1600" dirty="0"/>
+              <a:t>수출국들의 수출 물량을 보여주고 있다</a:t>
+            </a:r>
+            <a:r>
+              <a:rPr lang="en-US" altLang="ko-KR" sz="1600" dirty="0"/>
+              <a:t>.</a:t>
+            </a:r>
+          </a:p>
+        </p:txBody>
+      </p:sp>
+    </p:spTree>
+    <p:extLst>
+      <p:ext uri="{BB962C8B-B14F-4D97-AF65-F5344CB8AC3E}">
+        <p14:creationId xmlns:p14="http://schemas.microsoft.com/office/powerpoint/2010/main" val="3126265311"/>
+      </p:ext>
+    </p:extLst>
+  </p:cSld>
+  <p:clrMapOvr>
+    <a:masterClrMapping/>
+  </p:clrMapOvr>
+</p:sld>
+</file>
+
+<file path=ppt/slides/slide37.xml><?xml version="1.0" encoding="utf-8"?>
+<p:sld xmlns:a="http://schemas.openxmlformats.org/drawingml/2006/main" xmlns:r="http://schemas.openxmlformats.org/officeDocument/2006/relationships" xmlns:p="http://schemas.openxmlformats.org/presentationml/2006/main">
+  <p:cSld>
+    <p:spTree>
+      <p:nvGrpSpPr>
+        <p:cNvPr id="1" name="">
+          <a:extLst>
+            <a:ext uri="{FF2B5EF4-FFF2-40B4-BE49-F238E27FC236}">
+              <a16:creationId xmlns:a16="http://schemas.microsoft.com/office/drawing/2014/main" id="{22C0D9A9-B774-6E31-A7F5-7BE27716DDBE}"/>
+            </a:ext>
+          </a:extLst>
+        </p:cNvPr>
+        <p:cNvGrpSpPr/>
+        <p:nvPr/>
+      </p:nvGrpSpPr>
+      <p:grpSpPr>
+        <a:xfrm>
+          <a:off x="0" y="0"/>
+          <a:ext cx="0" cy="0"/>
+          <a:chOff x="0" y="0"/>
+          <a:chExt cx="0" cy="0"/>
+        </a:xfrm>
+      </p:grpSpPr>
+      <p:sp>
+        <p:nvSpPr>
+          <p:cNvPr id="2" name="제목 1">
+            <a:extLst>
+              <a:ext uri="{FF2B5EF4-FFF2-40B4-BE49-F238E27FC236}">
+                <a16:creationId xmlns:a16="http://schemas.microsoft.com/office/drawing/2014/main" id="{7C2676F2-D913-3980-110A-8578C1A92D6B}"/>
+              </a:ext>
+            </a:extLst>
+          </p:cNvPr>
+          <p:cNvSpPr>
+            <a:spLocks noGrp="1"/>
+          </p:cNvSpPr>
+          <p:nvPr>
+            <p:ph type="title"/>
+          </p:nvPr>
+        </p:nvSpPr>
+        <p:spPr/>
+        <p:txBody>
+          <a:bodyPr/>
+          <a:lstStyle/>
+          <a:p>
+            <a:r>
+              <a:rPr lang="ko-KR" altLang="en-US" dirty="0"/>
+              <a:t>천연가스 시장의 구조와 시장지배력</a:t>
+            </a:r>
+          </a:p>
+        </p:txBody>
+      </p:sp>
+      <p:sp>
+        <p:nvSpPr>
+          <p:cNvPr id="4" name="슬라이드 번호 개체 틀 3">
+            <a:extLst>
+              <a:ext uri="{FF2B5EF4-FFF2-40B4-BE49-F238E27FC236}">
+                <a16:creationId xmlns:a16="http://schemas.microsoft.com/office/drawing/2014/main" id="{7804B0FA-914F-FD78-4B35-089587F50174}"/>
+              </a:ext>
+            </a:extLst>
+          </p:cNvPr>
+          <p:cNvSpPr>
+            <a:spLocks noGrp="1"/>
+          </p:cNvSpPr>
+          <p:nvPr>
+            <p:ph type="sldNum" sz="quarter" idx="12"/>
+          </p:nvPr>
+        </p:nvSpPr>
+        <p:spPr/>
+        <p:txBody>
+          <a:bodyPr/>
+          <a:lstStyle/>
+          <a:p>
+            <a:fld id="{109C872D-39A9-4065-8BF3-6A613116E2A1}" type="slidenum">
+              <a:rPr lang="ko-KR" altLang="en-US" smtClean="0"/>
+              <a:t>37</a:t>
+            </a:fld>
+            <a:endParaRPr lang="ko-KR" altLang="en-US"/>
+          </a:p>
+        </p:txBody>
+      </p:sp>
+      <p:sp>
+        <p:nvSpPr>
+          <p:cNvPr id="3" name="TextBox 2">
+            <a:extLst>
+              <a:ext uri="{FF2B5EF4-FFF2-40B4-BE49-F238E27FC236}">
+                <a16:creationId xmlns:a16="http://schemas.microsoft.com/office/drawing/2014/main" id="{DDCCE876-7D67-8FFB-F0B2-AE3F152F1118}"/>
+              </a:ext>
+            </a:extLst>
+          </p:cNvPr>
+          <p:cNvSpPr txBox="1"/>
+          <p:nvPr/>
+        </p:nvSpPr>
+        <p:spPr>
+          <a:xfrm>
+            <a:off x="288790" y="958844"/>
+            <a:ext cx="11118453" cy="1891352"/>
+          </a:xfrm>
+          <a:prstGeom prst="rect">
+            <a:avLst/>
+          </a:prstGeom>
+          <a:noFill/>
+        </p:spPr>
+        <p:txBody>
+          <a:bodyPr wrap="square" rtlCol="0" anchor="t">
+            <a:spAutoFit/>
+          </a:bodyPr>
+          <a:lstStyle/>
+          <a:p>
+            <a:pPr marL="377825" indent="-285750">
+              <a:lnSpc>
+                <a:spcPct val="150000"/>
+              </a:lnSpc>
+              <a:buFont typeface="Arial" panose="020B0604020202020204" pitchFamily="34" charset="0"/>
+              <a:buChar char="•"/>
+            </a:pPr>
+            <a:r>
+              <a:rPr lang="ko-KR" altLang="en-US" sz="1600" dirty="0"/>
+              <a:t>천연가스 시장은 본질적으로 탐사</a:t>
+            </a:r>
+            <a:r>
+              <a:rPr lang="en-US" altLang="ko-KR" sz="1600" dirty="0"/>
+              <a:t>, </a:t>
+            </a:r>
+            <a:r>
+              <a:rPr lang="ko-KR" altLang="en-US" sz="1600" dirty="0"/>
+              <a:t>생산</a:t>
+            </a:r>
+            <a:r>
+              <a:rPr lang="en-US" altLang="ko-KR" sz="1600" dirty="0"/>
+              <a:t>, </a:t>
+            </a:r>
+            <a:r>
+              <a:rPr lang="ko-KR" altLang="en-US" sz="1600" dirty="0"/>
+              <a:t>수송</a:t>
+            </a:r>
+            <a:r>
+              <a:rPr lang="en-US" altLang="ko-KR" sz="1600" dirty="0"/>
+              <a:t>, </a:t>
+            </a:r>
+            <a:r>
+              <a:rPr lang="ko-KR" altLang="en-US" sz="1600" dirty="0"/>
+              <a:t>가공</a:t>
+            </a:r>
+            <a:r>
+              <a:rPr lang="en-US" altLang="ko-KR" sz="1600" dirty="0"/>
+              <a:t>, </a:t>
+            </a:r>
+            <a:r>
+              <a:rPr lang="ko-KR" altLang="en-US" sz="1600" dirty="0"/>
+              <a:t>분배 등 여러 단계에 걸쳐 높은 자본집약성과 자산특수성을 특징으로 하며</a:t>
+            </a:r>
+            <a:r>
+              <a:rPr lang="en-US" altLang="ko-KR" sz="1600" dirty="0"/>
+              <a:t>, </a:t>
+            </a:r>
+            <a:r>
+              <a:rPr lang="ko-KR" altLang="en-US" sz="1600" dirty="0"/>
+              <a:t>이로 인해 각 단계별로 독점적 또는 과점적 시장구조가 형성되는 경향이 있다</a:t>
+            </a:r>
+            <a:r>
+              <a:rPr lang="en-US" altLang="ko-KR" sz="1600" dirty="0"/>
+              <a:t>.</a:t>
+            </a:r>
+          </a:p>
+          <a:p>
+            <a:pPr marL="835025" lvl="1" indent="-285750">
+              <a:lnSpc>
+                <a:spcPct val="150000"/>
+              </a:lnSpc>
+              <a:buFont typeface="Wingdings" panose="05000000000000000000" pitchFamily="2" charset="2"/>
+              <a:buChar char="ü"/>
+            </a:pPr>
+            <a:r>
+              <a:rPr lang="ko-KR" altLang="en-US" sz="1600" dirty="0"/>
+              <a:t>특히 수송 및 가공부문은 초기 투자비용이 막대하고 대체가 어려운 특성으로 인해 자연독점적 성격을 강화한다</a:t>
+            </a:r>
+            <a:r>
+              <a:rPr lang="en-US" altLang="ko-KR" sz="1600" dirty="0"/>
+              <a:t>.</a:t>
+            </a:r>
+          </a:p>
+          <a:p>
+            <a:pPr marL="1292225" lvl="2" indent="-285750">
+              <a:lnSpc>
+                <a:spcPct val="150000"/>
+              </a:lnSpc>
+              <a:buFont typeface="Wingdings" panose="05000000000000000000" pitchFamily="2" charset="2"/>
+              <a:buChar char="Ø"/>
+            </a:pPr>
+            <a:r>
+              <a:rPr lang="ko-KR" altLang="en-US" sz="1600" dirty="0"/>
+              <a:t>시장 진입장벽을 높이고 경쟁을 제한하는 주요 요인이 된다</a:t>
+            </a:r>
+            <a:r>
+              <a:rPr lang="en-US" altLang="ko-KR" sz="1600" dirty="0"/>
+              <a:t>.</a:t>
+            </a:r>
+          </a:p>
+          <a:p>
+            <a:pPr marL="835025" lvl="1" indent="-285750">
+              <a:lnSpc>
+                <a:spcPct val="150000"/>
+              </a:lnSpc>
+              <a:buFont typeface="Wingdings" panose="05000000000000000000" pitchFamily="2" charset="2"/>
+              <a:buChar char="ü"/>
+            </a:pPr>
+            <a:r>
+              <a:rPr lang="ko-KR" altLang="en-US" sz="1600" dirty="0"/>
+              <a:t>이러한 구조적 특성은 천연가스 가격 형성과 공급 안정성</a:t>
+            </a:r>
+            <a:r>
+              <a:rPr lang="en-US" altLang="ko-KR" sz="1600" dirty="0"/>
+              <a:t>, </a:t>
+            </a:r>
+            <a:r>
+              <a:rPr lang="ko-KR" altLang="en-US" sz="1600" dirty="0"/>
+              <a:t>그리고 소비자 후생에 중대한 영향을 미친다</a:t>
+            </a:r>
+            <a:r>
+              <a:rPr lang="en-US" altLang="ko-KR" sz="1600"/>
+              <a:t>.</a:t>
+            </a:r>
+            <a:endParaRPr lang="en-US" altLang="ko-KR" sz="1600" dirty="0"/>
+          </a:p>
+        </p:txBody>
+      </p:sp>
+    </p:spTree>
+    <p:extLst>
+      <p:ext uri="{BB962C8B-B14F-4D97-AF65-F5344CB8AC3E}">
+        <p14:creationId xmlns:p14="http://schemas.microsoft.com/office/powerpoint/2010/main" val="521610642"/>
+      </p:ext>
+    </p:extLst>
+  </p:cSld>
+  <p:clrMapOvr>
+    <a:masterClrMapping/>
+  </p:clrMapOvr>
+</p:sld>
+</file>
+
+<file path=ppt/slides/slide38.xml><?xml version="1.0" encoding="utf-8"?>
 <p:sld xmlns:a="http://schemas.openxmlformats.org/drawingml/2006/main" xmlns:r="http://schemas.openxmlformats.org/officeDocument/2006/relationships" xmlns:p="http://schemas.openxmlformats.org/presentationml/2006/main">
   <p:cSld>
     <p:spTree>
@@ -33389,7 +34857,7 @@
           <a:p>
             <a:fld id="{109C872D-39A9-4065-8BF3-6A613116E2A1}" type="slidenum">
               <a:rPr lang="ko-KR" altLang="en-US" smtClean="0"/>
-              <a:t>35</a:t>
+              <a:t>38</a:t>
             </a:fld>
             <a:endParaRPr lang="ko-KR" altLang="en-US"/>
           </a:p>

--- a/에너지경제학/자원에너지경제학_Chapter_3 (가스).pptx
+++ b/에너지경제학/자원에너지경제학_Chapter_3 (가스).pptx
@@ -5,7 +5,7 @@
     <p:sldMasterId id="2147483648" r:id="rId1"/>
   </p:sldMasterIdLst>
   <p:notesMasterIdLst>
-    <p:notesMasterId r:id="rId40"/>
+    <p:notesMasterId r:id="rId55"/>
   </p:notesMasterIdLst>
   <p:sldIdLst>
     <p:sldId id="375" r:id="rId2"/>
@@ -44,8 +44,23 @@
     <p:sldId id="666" r:id="rId35"/>
     <p:sldId id="667" r:id="rId36"/>
     <p:sldId id="668" r:id="rId37"/>
-    <p:sldId id="669" r:id="rId38"/>
-    <p:sldId id="598" r:id="rId39"/>
+    <p:sldId id="676" r:id="rId38"/>
+    <p:sldId id="669" r:id="rId39"/>
+    <p:sldId id="670" r:id="rId40"/>
+    <p:sldId id="671" r:id="rId41"/>
+    <p:sldId id="677" r:id="rId42"/>
+    <p:sldId id="672" r:id="rId43"/>
+    <p:sldId id="673" r:id="rId44"/>
+    <p:sldId id="674" r:id="rId45"/>
+    <p:sldId id="675" r:id="rId46"/>
+    <p:sldId id="678" r:id="rId47"/>
+    <p:sldId id="679" r:id="rId48"/>
+    <p:sldId id="680" r:id="rId49"/>
+    <p:sldId id="681" r:id="rId50"/>
+    <p:sldId id="682" r:id="rId51"/>
+    <p:sldId id="683" r:id="rId52"/>
+    <p:sldId id="684" r:id="rId53"/>
+    <p:sldId id="598" r:id="rId54"/>
   </p:sldIdLst>
   <p:sldSz cx="12192000" cy="6858000"/>
   <p:notesSz cx="6858000" cy="9144000"/>
@@ -256,7 +271,7 @@
           <a:p>
             <a:fld id="{4A5E00EF-AEA4-43E2-9451-8F9C59A39471}" type="datetimeFigureOut">
               <a:rPr lang="ko-KR" altLang="en-US" smtClean="0"/>
-              <a:t>2026-06-01</a:t>
+              <a:t>2026-06-02</a:t>
             </a:fld>
             <a:endParaRPr lang="ko-KR" altLang="en-US"/>
           </a:p>
@@ -523,6 +538,390 @@
 </p:notesMaster>
 </file>
 
+<file path=ppt/notesSlides/notesSlide1.xml><?xml version="1.0" encoding="utf-8"?>
+<p:notes xmlns:a="http://schemas.openxmlformats.org/drawingml/2006/main" xmlns:r="http://schemas.openxmlformats.org/officeDocument/2006/relationships" xmlns:p="http://schemas.openxmlformats.org/presentationml/2006/main">
+  <p:cSld>
+    <p:spTree>
+      <p:nvGrpSpPr>
+        <p:cNvPr id="1" name=""/>
+        <p:cNvGrpSpPr/>
+        <p:nvPr/>
+      </p:nvGrpSpPr>
+      <p:grpSpPr>
+        <a:xfrm>
+          <a:off x="0" y="0"/>
+          <a:ext cx="0" cy="0"/>
+          <a:chOff x="0" y="0"/>
+          <a:chExt cx="0" cy="0"/>
+        </a:xfrm>
+      </p:grpSpPr>
+      <p:sp>
+        <p:nvSpPr>
+          <p:cNvPr id="2" name="슬라이드 이미지 개체 틀 1"/>
+          <p:cNvSpPr>
+            <a:spLocks noGrp="1" noRot="1" noChangeAspect="1"/>
+          </p:cNvSpPr>
+          <p:nvPr>
+            <p:ph type="sldImg"/>
+          </p:nvPr>
+        </p:nvSpPr>
+        <p:spPr/>
+      </p:sp>
+      <p:sp>
+        <p:nvSpPr>
+          <p:cNvPr id="3" name="슬라이드 노트 개체 틀 2"/>
+          <p:cNvSpPr>
+            <a:spLocks noGrp="1"/>
+          </p:cNvSpPr>
+          <p:nvPr>
+            <p:ph type="body" idx="1"/>
+          </p:nvPr>
+        </p:nvSpPr>
+        <p:spPr/>
+        <p:txBody>
+          <a:bodyPr/>
+          <a:lstStyle/>
+          <a:p>
+            <a:endParaRPr lang="ko-KR" altLang="en-US" dirty="0"/>
+          </a:p>
+        </p:txBody>
+      </p:sp>
+      <p:sp>
+        <p:nvSpPr>
+          <p:cNvPr id="4" name="슬라이드 번호 개체 틀 3"/>
+          <p:cNvSpPr>
+            <a:spLocks noGrp="1"/>
+          </p:cNvSpPr>
+          <p:nvPr>
+            <p:ph type="sldNum" sz="quarter" idx="5"/>
+          </p:nvPr>
+        </p:nvSpPr>
+        <p:spPr/>
+        <p:txBody>
+          <a:bodyPr/>
+          <a:lstStyle/>
+          <a:p>
+            <a:fld id="{D6183C86-FCDD-4CD4-A668-4DF0BEDE3EB5}" type="slidenum">
+              <a:rPr lang="ko-KR" altLang="en-US" smtClean="0"/>
+              <a:t>48</a:t>
+            </a:fld>
+            <a:endParaRPr lang="ko-KR" altLang="en-US"/>
+          </a:p>
+        </p:txBody>
+      </p:sp>
+    </p:spTree>
+    <p:extLst>
+      <p:ext uri="{BB962C8B-B14F-4D97-AF65-F5344CB8AC3E}">
+        <p14:creationId xmlns:p14="http://schemas.microsoft.com/office/powerpoint/2010/main" val="2282152368"/>
+      </p:ext>
+    </p:extLst>
+  </p:cSld>
+  <p:clrMapOvr>
+    <a:masterClrMapping/>
+  </p:clrMapOvr>
+</p:notes>
+</file>
+
+<file path=ppt/notesSlides/notesSlide2.xml><?xml version="1.0" encoding="utf-8"?>
+<p:notes xmlns:a="http://schemas.openxmlformats.org/drawingml/2006/main" xmlns:r="http://schemas.openxmlformats.org/officeDocument/2006/relationships" xmlns:p="http://schemas.openxmlformats.org/presentationml/2006/main">
+  <p:cSld>
+    <p:spTree>
+      <p:nvGrpSpPr>
+        <p:cNvPr id="1" name="">
+          <a:extLst>
+            <a:ext uri="{FF2B5EF4-FFF2-40B4-BE49-F238E27FC236}">
+              <a16:creationId xmlns:a16="http://schemas.microsoft.com/office/drawing/2014/main" id="{694BA439-0FFE-7713-8D69-E0856B047870}"/>
+            </a:ext>
+          </a:extLst>
+        </p:cNvPr>
+        <p:cNvGrpSpPr/>
+        <p:nvPr/>
+      </p:nvGrpSpPr>
+      <p:grpSpPr>
+        <a:xfrm>
+          <a:off x="0" y="0"/>
+          <a:ext cx="0" cy="0"/>
+          <a:chOff x="0" y="0"/>
+          <a:chExt cx="0" cy="0"/>
+        </a:xfrm>
+      </p:grpSpPr>
+      <p:sp>
+        <p:nvSpPr>
+          <p:cNvPr id="2" name="슬라이드 이미지 개체 틀 1">
+            <a:extLst>
+              <a:ext uri="{FF2B5EF4-FFF2-40B4-BE49-F238E27FC236}">
+                <a16:creationId xmlns:a16="http://schemas.microsoft.com/office/drawing/2014/main" id="{B0D507AA-8F1F-0065-8896-A02CAF515933}"/>
+              </a:ext>
+            </a:extLst>
+          </p:cNvPr>
+          <p:cNvSpPr>
+            <a:spLocks noGrp="1" noRot="1" noChangeAspect="1"/>
+          </p:cNvSpPr>
+          <p:nvPr>
+            <p:ph type="sldImg"/>
+          </p:nvPr>
+        </p:nvSpPr>
+        <p:spPr/>
+      </p:sp>
+      <p:sp>
+        <p:nvSpPr>
+          <p:cNvPr id="3" name="슬라이드 노트 개체 틀 2">
+            <a:extLst>
+              <a:ext uri="{FF2B5EF4-FFF2-40B4-BE49-F238E27FC236}">
+                <a16:creationId xmlns:a16="http://schemas.microsoft.com/office/drawing/2014/main" id="{818B5BAA-9AF9-E5C5-777A-F1A96710C996}"/>
+              </a:ext>
+            </a:extLst>
+          </p:cNvPr>
+          <p:cNvSpPr>
+            <a:spLocks noGrp="1"/>
+          </p:cNvSpPr>
+          <p:nvPr>
+            <p:ph type="body" idx="1"/>
+          </p:nvPr>
+        </p:nvSpPr>
+        <p:spPr/>
+        <p:txBody>
+          <a:bodyPr/>
+          <a:lstStyle/>
+          <a:p>
+            <a:endParaRPr lang="ko-KR" altLang="en-US" dirty="0"/>
+          </a:p>
+        </p:txBody>
+      </p:sp>
+      <p:sp>
+        <p:nvSpPr>
+          <p:cNvPr id="4" name="슬라이드 번호 개체 틀 3">
+            <a:extLst>
+              <a:ext uri="{FF2B5EF4-FFF2-40B4-BE49-F238E27FC236}">
+                <a16:creationId xmlns:a16="http://schemas.microsoft.com/office/drawing/2014/main" id="{B025B38E-CCAB-59F4-2265-14C0CE39ADF0}"/>
+              </a:ext>
+            </a:extLst>
+          </p:cNvPr>
+          <p:cNvSpPr>
+            <a:spLocks noGrp="1"/>
+          </p:cNvSpPr>
+          <p:nvPr>
+            <p:ph type="sldNum" sz="quarter" idx="5"/>
+          </p:nvPr>
+        </p:nvSpPr>
+        <p:spPr/>
+        <p:txBody>
+          <a:bodyPr/>
+          <a:lstStyle/>
+          <a:p>
+            <a:fld id="{D6183C86-FCDD-4CD4-A668-4DF0BEDE3EB5}" type="slidenum">
+              <a:rPr lang="ko-KR" altLang="en-US" smtClean="0"/>
+              <a:t>49</a:t>
+            </a:fld>
+            <a:endParaRPr lang="ko-KR" altLang="en-US"/>
+          </a:p>
+        </p:txBody>
+      </p:sp>
+    </p:spTree>
+    <p:extLst>
+      <p:ext uri="{BB962C8B-B14F-4D97-AF65-F5344CB8AC3E}">
+        <p14:creationId xmlns:p14="http://schemas.microsoft.com/office/powerpoint/2010/main" val="3155088223"/>
+      </p:ext>
+    </p:extLst>
+  </p:cSld>
+  <p:clrMapOvr>
+    <a:masterClrMapping/>
+  </p:clrMapOvr>
+</p:notes>
+</file>
+
+<file path=ppt/notesSlides/notesSlide3.xml><?xml version="1.0" encoding="utf-8"?>
+<p:notes xmlns:a="http://schemas.openxmlformats.org/drawingml/2006/main" xmlns:r="http://schemas.openxmlformats.org/officeDocument/2006/relationships" xmlns:p="http://schemas.openxmlformats.org/presentationml/2006/main">
+  <p:cSld>
+    <p:spTree>
+      <p:nvGrpSpPr>
+        <p:cNvPr id="1" name="">
+          <a:extLst>
+            <a:ext uri="{FF2B5EF4-FFF2-40B4-BE49-F238E27FC236}">
+              <a16:creationId xmlns:a16="http://schemas.microsoft.com/office/drawing/2014/main" id="{BFB3B71A-E805-510D-7EB3-0E745A11F719}"/>
+            </a:ext>
+          </a:extLst>
+        </p:cNvPr>
+        <p:cNvGrpSpPr/>
+        <p:nvPr/>
+      </p:nvGrpSpPr>
+      <p:grpSpPr>
+        <a:xfrm>
+          <a:off x="0" y="0"/>
+          <a:ext cx="0" cy="0"/>
+          <a:chOff x="0" y="0"/>
+          <a:chExt cx="0" cy="0"/>
+        </a:xfrm>
+      </p:grpSpPr>
+      <p:sp>
+        <p:nvSpPr>
+          <p:cNvPr id="2" name="슬라이드 이미지 개체 틀 1">
+            <a:extLst>
+              <a:ext uri="{FF2B5EF4-FFF2-40B4-BE49-F238E27FC236}">
+                <a16:creationId xmlns:a16="http://schemas.microsoft.com/office/drawing/2014/main" id="{1912A8B1-7D6F-A0F2-BE33-4E4DFA4922DC}"/>
+              </a:ext>
+            </a:extLst>
+          </p:cNvPr>
+          <p:cNvSpPr>
+            <a:spLocks noGrp="1" noRot="1" noChangeAspect="1"/>
+          </p:cNvSpPr>
+          <p:nvPr>
+            <p:ph type="sldImg"/>
+          </p:nvPr>
+        </p:nvSpPr>
+        <p:spPr/>
+      </p:sp>
+      <p:sp>
+        <p:nvSpPr>
+          <p:cNvPr id="3" name="슬라이드 노트 개체 틀 2">
+            <a:extLst>
+              <a:ext uri="{FF2B5EF4-FFF2-40B4-BE49-F238E27FC236}">
+                <a16:creationId xmlns:a16="http://schemas.microsoft.com/office/drawing/2014/main" id="{47C9F92C-E302-2E74-0A6A-E643E83FAE61}"/>
+              </a:ext>
+            </a:extLst>
+          </p:cNvPr>
+          <p:cNvSpPr>
+            <a:spLocks noGrp="1"/>
+          </p:cNvSpPr>
+          <p:nvPr>
+            <p:ph type="body" idx="1"/>
+          </p:nvPr>
+        </p:nvSpPr>
+        <p:spPr/>
+        <p:txBody>
+          <a:bodyPr/>
+          <a:lstStyle/>
+          <a:p>
+            <a:endParaRPr lang="ko-KR" altLang="en-US" dirty="0"/>
+          </a:p>
+        </p:txBody>
+      </p:sp>
+      <p:sp>
+        <p:nvSpPr>
+          <p:cNvPr id="4" name="슬라이드 번호 개체 틀 3">
+            <a:extLst>
+              <a:ext uri="{FF2B5EF4-FFF2-40B4-BE49-F238E27FC236}">
+                <a16:creationId xmlns:a16="http://schemas.microsoft.com/office/drawing/2014/main" id="{2DC7F319-BA98-5F65-783B-3CB72AA43070}"/>
+              </a:ext>
+            </a:extLst>
+          </p:cNvPr>
+          <p:cNvSpPr>
+            <a:spLocks noGrp="1"/>
+          </p:cNvSpPr>
+          <p:nvPr>
+            <p:ph type="sldNum" sz="quarter" idx="5"/>
+          </p:nvPr>
+        </p:nvSpPr>
+        <p:spPr/>
+        <p:txBody>
+          <a:bodyPr/>
+          <a:lstStyle/>
+          <a:p>
+            <a:fld id="{D6183C86-FCDD-4CD4-A668-4DF0BEDE3EB5}" type="slidenum">
+              <a:rPr lang="ko-KR" altLang="en-US" smtClean="0"/>
+              <a:t>50</a:t>
+            </a:fld>
+            <a:endParaRPr lang="ko-KR" altLang="en-US"/>
+          </a:p>
+        </p:txBody>
+      </p:sp>
+    </p:spTree>
+    <p:extLst>
+      <p:ext uri="{BB962C8B-B14F-4D97-AF65-F5344CB8AC3E}">
+        <p14:creationId xmlns:p14="http://schemas.microsoft.com/office/powerpoint/2010/main" val="617183170"/>
+      </p:ext>
+    </p:extLst>
+  </p:cSld>
+  <p:clrMapOvr>
+    <a:masterClrMapping/>
+  </p:clrMapOvr>
+</p:notes>
+</file>
+
+<file path=ppt/notesSlides/notesSlide4.xml><?xml version="1.0" encoding="utf-8"?>
+<p:notes xmlns:a="http://schemas.openxmlformats.org/drawingml/2006/main" xmlns:r="http://schemas.openxmlformats.org/officeDocument/2006/relationships" xmlns:p="http://schemas.openxmlformats.org/presentationml/2006/main">
+  <p:cSld>
+    <p:spTree>
+      <p:nvGrpSpPr>
+        <p:cNvPr id="1" name=""/>
+        <p:cNvGrpSpPr/>
+        <p:nvPr/>
+      </p:nvGrpSpPr>
+      <p:grpSpPr>
+        <a:xfrm>
+          <a:off x="0" y="0"/>
+          <a:ext cx="0" cy="0"/>
+          <a:chOff x="0" y="0"/>
+          <a:chExt cx="0" cy="0"/>
+        </a:xfrm>
+      </p:grpSpPr>
+      <p:sp>
+        <p:nvSpPr>
+          <p:cNvPr id="2" name="슬라이드 이미지 개체 틀 1"/>
+          <p:cNvSpPr>
+            <a:spLocks noGrp="1" noRot="1" noChangeAspect="1"/>
+          </p:cNvSpPr>
+          <p:nvPr>
+            <p:ph type="sldImg"/>
+          </p:nvPr>
+        </p:nvSpPr>
+        <p:spPr/>
+      </p:sp>
+      <p:sp>
+        <p:nvSpPr>
+          <p:cNvPr id="3" name="슬라이드 노트 개체 틀 2"/>
+          <p:cNvSpPr>
+            <a:spLocks noGrp="1"/>
+          </p:cNvSpPr>
+          <p:nvPr>
+            <p:ph type="body" idx="1"/>
+          </p:nvPr>
+        </p:nvSpPr>
+        <p:spPr/>
+        <p:txBody>
+          <a:bodyPr/>
+          <a:lstStyle/>
+          <a:p>
+            <a:endParaRPr lang="ko-KR" altLang="en-US"/>
+          </a:p>
+        </p:txBody>
+      </p:sp>
+      <p:sp>
+        <p:nvSpPr>
+          <p:cNvPr id="4" name="슬라이드 번호 개체 틀 3"/>
+          <p:cNvSpPr>
+            <a:spLocks noGrp="1"/>
+          </p:cNvSpPr>
+          <p:nvPr>
+            <p:ph type="sldNum" sz="quarter" idx="5"/>
+          </p:nvPr>
+        </p:nvSpPr>
+        <p:spPr/>
+        <p:txBody>
+          <a:bodyPr/>
+          <a:lstStyle/>
+          <a:p>
+            <a:fld id="{D6183C86-FCDD-4CD4-A668-4DF0BEDE3EB5}" type="slidenum">
+              <a:rPr lang="ko-KR" altLang="en-US" smtClean="0"/>
+              <a:t>52</a:t>
+            </a:fld>
+            <a:endParaRPr lang="ko-KR" altLang="en-US"/>
+          </a:p>
+        </p:txBody>
+      </p:sp>
+    </p:spTree>
+    <p:extLst>
+      <p:ext uri="{BB962C8B-B14F-4D97-AF65-F5344CB8AC3E}">
+        <p14:creationId xmlns:p14="http://schemas.microsoft.com/office/powerpoint/2010/main" val="2592083697"/>
+      </p:ext>
+    </p:extLst>
+  </p:cSld>
+  <p:clrMapOvr>
+    <a:masterClrMapping/>
+  </p:clrMapOvr>
+</p:notes>
+</file>
+
 <file path=ppt/slideLayouts/slideLayout1.xml><?xml version="1.0" encoding="utf-8"?>
 <p:sldLayout xmlns:a="http://schemas.openxmlformats.org/drawingml/2006/main" xmlns:r="http://schemas.openxmlformats.org/officeDocument/2006/relationships" xmlns:p="http://schemas.openxmlformats.org/presentationml/2006/main" showMasterSp="0" type="title" preserve="1">
   <p:cSld name="제목 슬라이드">
@@ -678,7 +1077,7 @@
           <a:p>
             <a:fld id="{CD32C56F-BD27-4999-9E6D-D4EACE3DA9F4}" type="datetime1">
               <a:rPr lang="ko-KR" altLang="en-US" smtClean="0"/>
-              <a:t>2026-06-01</a:t>
+              <a:t>2026-06-02</a:t>
             </a:fld>
             <a:endParaRPr lang="ko-KR" altLang="en-US"/>
           </a:p>
@@ -892,7 +1291,7 @@
           <a:p>
             <a:fld id="{8EF4A19C-72C8-45CA-8E3F-68A7FA345D6C}" type="datetime1">
               <a:rPr lang="ko-KR" altLang="en-US" smtClean="0"/>
-              <a:t>2026-06-01</a:t>
+              <a:t>2026-06-02</a:t>
             </a:fld>
             <a:endParaRPr lang="ko-KR" altLang="en-US"/>
           </a:p>
@@ -1116,7 +1515,7 @@
           <a:p>
             <a:fld id="{56A175B2-010B-4341-954C-5F8F5C70B124}" type="datetime1">
               <a:rPr lang="ko-KR" altLang="en-US" smtClean="0"/>
-              <a:t>2026-06-01</a:t>
+              <a:t>2026-06-02</a:t>
             </a:fld>
             <a:endParaRPr lang="ko-KR" altLang="en-US"/>
           </a:p>
@@ -1330,7 +1729,7 @@
           <a:p>
             <a:fld id="{16B83F9E-22C9-45CA-9E85-070F1D3EF530}" type="datetime1">
               <a:rPr lang="ko-KR" altLang="en-US" smtClean="0"/>
-              <a:t>2026-06-01</a:t>
+              <a:t>2026-06-02</a:t>
             </a:fld>
             <a:endParaRPr lang="ko-KR" altLang="en-US"/>
           </a:p>
@@ -1621,7 +2020,7 @@
           <a:p>
             <a:fld id="{03278F45-FB3C-4C4D-B89A-7BC3F5F229F6}" type="datetime1">
               <a:rPr lang="ko-KR" altLang="en-US" smtClean="0"/>
-              <a:t>2026-06-01</a:t>
+              <a:t>2026-06-02</a:t>
             </a:fld>
             <a:endParaRPr lang="ko-KR" altLang="en-US"/>
           </a:p>
@@ -2014,7 +2413,7 @@
           <a:p>
             <a:fld id="{38FDAC3C-35A6-415C-9F03-738A6AC328B1}" type="datetime1">
               <a:rPr lang="ko-KR" altLang="en-US" smtClean="0"/>
-              <a:t>2026-06-01</a:t>
+              <a:t>2026-06-02</a:t>
             </a:fld>
             <a:endParaRPr lang="ko-KR" altLang="en-US"/>
           </a:p>
@@ -3608,7 +4007,7 @@
           <a:p>
             <a:fld id="{507A0DF1-AEE6-4B0D-89D2-351E7B3EF65C}" type="datetime1">
               <a:rPr lang="ko-KR" altLang="en-US" smtClean="0"/>
-              <a:t>2026-06-01</a:t>
+              <a:t>2026-06-02</a:t>
             </a:fld>
             <a:endParaRPr lang="ko-KR" altLang="en-US"/>
           </a:p>
@@ -4036,7 +4435,7 @@
           <a:p>
             <a:fld id="{CA93B8C9-630F-4D57-944D-04FD37CECCD3}" type="datetime1">
               <a:rPr lang="ko-KR" altLang="en-US" smtClean="0"/>
-              <a:t>2026-06-01</a:t>
+              <a:t>2026-06-02</a:t>
             </a:fld>
             <a:endParaRPr lang="ko-KR" altLang="en-US"/>
           </a:p>
@@ -4193,7 +4592,7 @@
           <a:p>
             <a:fld id="{E986165A-AC43-4902-9541-874ECD310BA3}" type="datetime1">
               <a:rPr lang="ko-KR" altLang="en-US" smtClean="0"/>
-              <a:t>2026-06-01</a:t>
+              <a:t>2026-06-02</a:t>
             </a:fld>
             <a:endParaRPr lang="ko-KR" altLang="en-US"/>
           </a:p>
@@ -4520,7 +4919,7 @@
           <a:p>
             <a:fld id="{47E6EE6D-2B0E-43A9-87A2-7354CDB998F4}" type="datetime1">
               <a:rPr lang="ko-KR" altLang="en-US" smtClean="0"/>
-              <a:t>2026-06-01</a:t>
+              <a:t>2026-06-02</a:t>
             </a:fld>
             <a:endParaRPr lang="ko-KR" altLang="en-US"/>
           </a:p>
@@ -4824,7 +5223,7 @@
           <a:p>
             <a:fld id="{5CC5944E-0BC8-4FAA-9F94-6B4B05834E10}" type="datetime1">
               <a:rPr lang="ko-KR" altLang="en-US" smtClean="0"/>
-              <a:t>2026-06-01</a:t>
+              <a:t>2026-06-02</a:t>
             </a:fld>
             <a:endParaRPr lang="ko-KR" altLang="en-US"/>
           </a:p>
@@ -34498,6 +34897,149 @@
         <p:cNvPr id="1" name="">
           <a:extLst>
             <a:ext uri="{FF2B5EF4-FFF2-40B4-BE49-F238E27FC236}">
+              <a16:creationId xmlns:a16="http://schemas.microsoft.com/office/drawing/2014/main" id="{97E91783-7ADB-202A-A1DE-5858CEE2B0E1}"/>
+            </a:ext>
+          </a:extLst>
+        </p:cNvPr>
+        <p:cNvGrpSpPr/>
+        <p:nvPr/>
+      </p:nvGrpSpPr>
+      <p:grpSpPr>
+        <a:xfrm>
+          <a:off x="0" y="0"/>
+          <a:ext cx="0" cy="0"/>
+          <a:chOff x="0" y="0"/>
+          <a:chExt cx="0" cy="0"/>
+        </a:xfrm>
+      </p:grpSpPr>
+      <p:pic>
+        <p:nvPicPr>
+          <p:cNvPr id="6" name="그림 5" descr="텍스트, 로고, 원, 폰트이(가) 표시된 사진&#10;&#10;AI 생성 콘텐츠는 정확하지 않을 수 있습니다.">
+            <a:extLst>
+              <a:ext uri="{FF2B5EF4-FFF2-40B4-BE49-F238E27FC236}">
+                <a16:creationId xmlns:a16="http://schemas.microsoft.com/office/drawing/2014/main" id="{B218ABB1-6004-A749-D067-9808900FD0BB}"/>
+              </a:ext>
+            </a:extLst>
+          </p:cNvPr>
+          <p:cNvPicPr>
+            <a:picLocks noChangeAspect="1"/>
+          </p:cNvPicPr>
+          <p:nvPr/>
+        </p:nvPicPr>
+        <p:blipFill>
+          <a:blip r:embed="rId2">
+            <a:alphaModFix amt="20000"/>
+            <a:extLst>
+              <a:ext uri="{28A0092B-C50C-407E-A947-70E740481C1C}">
+                <a14:useLocalDpi xmlns:a14="http://schemas.microsoft.com/office/drawing/2010/main" val="0"/>
+              </a:ext>
+            </a:extLst>
+          </a:blip>
+          <a:stretch>
+            <a:fillRect/>
+          </a:stretch>
+        </p:blipFill>
+        <p:spPr>
+          <a:xfrm>
+            <a:off x="4012070" y="1673061"/>
+            <a:ext cx="4167861" cy="4167861"/>
+          </a:xfrm>
+          <a:prstGeom prst="rect">
+            <a:avLst/>
+          </a:prstGeom>
+        </p:spPr>
+      </p:pic>
+      <p:sp>
+        <p:nvSpPr>
+          <p:cNvPr id="4" name="슬라이드 번호 개체 틀 3">
+            <a:extLst>
+              <a:ext uri="{FF2B5EF4-FFF2-40B4-BE49-F238E27FC236}">
+                <a16:creationId xmlns:a16="http://schemas.microsoft.com/office/drawing/2014/main" id="{4777217D-31EA-D0A1-C3C0-06E55D0BBA67}"/>
+              </a:ext>
+            </a:extLst>
+          </p:cNvPr>
+          <p:cNvSpPr>
+            <a:spLocks noGrp="1"/>
+          </p:cNvSpPr>
+          <p:nvPr>
+            <p:ph type="sldNum" sz="quarter" idx="12"/>
+          </p:nvPr>
+        </p:nvSpPr>
+        <p:spPr/>
+        <p:txBody>
+          <a:bodyPr/>
+          <a:lstStyle/>
+          <a:p>
+            <a:fld id="{109C872D-39A9-4065-8BF3-6A613116E2A1}" type="slidenum">
+              <a:rPr lang="ko-KR" altLang="en-US" smtClean="0"/>
+              <a:t>37</a:t>
+            </a:fld>
+            <a:endParaRPr lang="ko-KR" altLang="en-US"/>
+          </a:p>
+        </p:txBody>
+      </p:sp>
+      <p:sp>
+        <p:nvSpPr>
+          <p:cNvPr id="7" name="제목 1">
+            <a:extLst>
+              <a:ext uri="{FF2B5EF4-FFF2-40B4-BE49-F238E27FC236}">
+                <a16:creationId xmlns:a16="http://schemas.microsoft.com/office/drawing/2014/main" id="{703242AE-927A-B016-61A1-339C52842EAF}"/>
+              </a:ext>
+            </a:extLst>
+          </p:cNvPr>
+          <p:cNvSpPr>
+            <a:spLocks noGrp="1"/>
+          </p:cNvSpPr>
+          <p:nvPr>
+            <p:ph type="title"/>
+          </p:nvPr>
+        </p:nvSpPr>
+        <p:spPr>
+          <a:xfrm>
+            <a:off x="831850" y="3765550"/>
+            <a:ext cx="11150600" cy="652818"/>
+          </a:xfrm>
+          <a:effectLst>
+            <a:reflection blurRad="50800" stA="45000" endPos="44000" dir="5400000" sy="-100000" algn="bl" rotWithShape="0"/>
+          </a:effectLst>
+        </p:spPr>
+        <p:txBody>
+          <a:bodyPr anchor="b"/>
+          <a:lstStyle/>
+          <a:p>
+            <a:r>
+              <a:rPr lang="en-US" altLang="ko-KR" sz="4000" b="1" i="0" spc="150" dirty="0"/>
+              <a:t>Section 4. </a:t>
+            </a:r>
+            <a:r>
+              <a:rPr lang="ko-KR" altLang="en-US" sz="4000" b="1" i="0" spc="150" dirty="0"/>
+              <a:t>천연가스 시장구조와 시장지배력</a:t>
+            </a:r>
+            <a:endParaRPr lang="ko-KR" altLang="en-US" sz="3600" i="0" spc="150" dirty="0"/>
+          </a:p>
+        </p:txBody>
+      </p:sp>
+    </p:spTree>
+    <p:extLst>
+      <p:ext uri="{BB962C8B-B14F-4D97-AF65-F5344CB8AC3E}">
+        <p14:creationId xmlns:p14="http://schemas.microsoft.com/office/powerpoint/2010/main" val="2635665728"/>
+      </p:ext>
+    </p:extLst>
+  </p:cSld>
+  <p:clrMapOvr>
+    <a:masterClrMapping/>
+  </p:clrMapOvr>
+</p:sld>
+</file>
+
+<file path=ppt/slides/slide38.xml><?xml version="1.0" encoding="utf-8"?>
+<p:sld xmlns:a="http://schemas.openxmlformats.org/drawingml/2006/main" xmlns:r="http://schemas.openxmlformats.org/officeDocument/2006/relationships" xmlns:p="http://schemas.openxmlformats.org/presentationml/2006/main">
+  <p:cSld>
+    <p:spTree>
+      <p:nvGrpSpPr>
+        <p:cNvPr id="1" name="">
+          <a:extLst>
+            <a:ext uri="{FF2B5EF4-FFF2-40B4-BE49-F238E27FC236}">
               <a16:creationId xmlns:a16="http://schemas.microsoft.com/office/drawing/2014/main" id="{22C0D9A9-B774-6E31-A7F5-7BE27716DDBE}"/>
             </a:ext>
           </a:extLst>
@@ -34564,7 +35106,7 @@
           <a:p>
             <a:fld id="{109C872D-39A9-4065-8BF3-6A613116E2A1}" type="slidenum">
               <a:rPr lang="ko-KR" altLang="en-US" smtClean="0"/>
-              <a:t>37</a:t>
+              <a:t>38</a:t>
             </a:fld>
             <a:endParaRPr lang="ko-KR" altLang="en-US"/>
           </a:p>
@@ -34585,7 +35127,7 @@
         <p:spPr>
           <a:xfrm>
             <a:off x="288790" y="958844"/>
-            <a:ext cx="11118453" cy="1891352"/>
+            <a:ext cx="11118453" cy="4846007"/>
           </a:xfrm>
           <a:prstGeom prst="rect">
             <a:avLst/>
@@ -34664,7 +35206,7 @@
             </a:pPr>
             <a:r>
               <a:rPr lang="ko-KR" altLang="en-US" sz="1600" dirty="0"/>
-              <a:t>특히 수송 및 가공부문은 초기 투자비용이 막대하고 대체가 어려운 특성으로 인해 자연독점적 성격을 강화한다</a:t>
+              <a:t>탐사와 생산 단계에서는 시장 집중도와 경쟁 수준이 상이하게 나타난다</a:t>
             </a:r>
             <a:r>
               <a:rPr lang="en-US" altLang="ko-KR" sz="1600" dirty="0"/>
@@ -34681,7 +35223,7 @@
             </a:pPr>
             <a:r>
               <a:rPr lang="ko-KR" altLang="en-US" sz="1600" dirty="0"/>
-              <a:t>시장 진입장벽을 높이고 경쟁을 제한하는 주요 요인이 된다</a:t>
+              <a:t>다양한 사업자가 차명할 여지가 상대적으로 크다</a:t>
             </a:r>
             <a:r>
               <a:rPr lang="en-US" altLang="ko-KR" sz="1600" dirty="0"/>
@@ -34698,6 +35240,65 @@
             </a:pPr>
             <a:r>
               <a:rPr lang="ko-KR" altLang="en-US" sz="1600" dirty="0"/>
+              <a:t>수송 및 가공부문은 초기 투자비용이 막대하고 대체가 어려운 특성으로 인해 자연독점적 성격을 강화한다</a:t>
+            </a:r>
+            <a:r>
+              <a:rPr lang="en-US" altLang="ko-KR" sz="1600" dirty="0"/>
+              <a:t>.</a:t>
+            </a:r>
+          </a:p>
+          <a:p>
+            <a:pPr marL="1292225" lvl="2" indent="-285750">
+              <a:lnSpc>
+                <a:spcPct val="150000"/>
+              </a:lnSpc>
+              <a:buFont typeface="Wingdings" panose="05000000000000000000" pitchFamily="2" charset="2"/>
+              <a:buChar char="Ø"/>
+            </a:pPr>
+            <a:r>
+              <a:rPr lang="ko-KR" altLang="en-US" sz="1600" dirty="0"/>
+              <a:t>시장 진입장벽을 높이고 경쟁을 제한하는 주요 요인이 된다</a:t>
+            </a:r>
+            <a:r>
+              <a:rPr lang="en-US" altLang="ko-KR" sz="1600" dirty="0"/>
+              <a:t>.</a:t>
+            </a:r>
+          </a:p>
+          <a:p>
+            <a:pPr marL="835025" lvl="1" indent="-285750">
+              <a:lnSpc>
+                <a:spcPct val="150000"/>
+              </a:lnSpc>
+              <a:buFont typeface="Wingdings" panose="05000000000000000000" pitchFamily="2" charset="2"/>
+              <a:buChar char="ü"/>
+            </a:pPr>
+            <a:r>
+              <a:rPr lang="ko-KR" altLang="en-US" sz="1600" dirty="0"/>
+              <a:t>최종 분배 단계에서도 국가별 정책과 규제환경에 따라 경쟁 구도가 달라지나</a:t>
+            </a:r>
+            <a:r>
+              <a:rPr lang="en-US" altLang="ko-KR" sz="1600" dirty="0"/>
+              <a:t>, </a:t>
+            </a:r>
+            <a:r>
+              <a:rPr lang="ko-KR" altLang="en-US" sz="1600" dirty="0"/>
+              <a:t>여전히 독과점 구조가 많다</a:t>
+            </a:r>
+            <a:r>
+              <a:rPr lang="en-US" altLang="ko-KR" sz="1600" dirty="0"/>
+              <a:t>.</a:t>
+            </a:r>
+          </a:p>
+          <a:p>
+            <a:pPr marL="835025" lvl="1" indent="-285750">
+              <a:lnSpc>
+                <a:spcPct val="150000"/>
+              </a:lnSpc>
+              <a:buFont typeface="Wingdings" panose="05000000000000000000" pitchFamily="2" charset="2"/>
+              <a:buChar char="ü"/>
+            </a:pPr>
+            <a:r>
+              <a:rPr lang="ko-KR" altLang="en-US" sz="1600" dirty="0"/>
               <a:t>이러한 구조적 특성은 천연가스 가격 형성과 공급 안정성</a:t>
             </a:r>
             <a:r>
@@ -34709,10 +35310,86 @@
               <a:t>그리고 소비자 후생에 중대한 영향을 미친다</a:t>
             </a:r>
             <a:r>
-              <a:rPr lang="en-US" altLang="ko-KR" sz="1600"/>
+              <a:rPr lang="en-US" altLang="ko-KR" sz="1600" dirty="0"/>
               <a:t>.</a:t>
             </a:r>
+          </a:p>
+          <a:p>
+            <a:pPr marL="835025" lvl="1" indent="-285750">
+              <a:lnSpc>
+                <a:spcPct val="150000"/>
+              </a:lnSpc>
+              <a:buFont typeface="Wingdings" panose="05000000000000000000" pitchFamily="2" charset="2"/>
+              <a:buChar char="ü"/>
+            </a:pPr>
             <a:endParaRPr lang="en-US" altLang="ko-KR" sz="1600" dirty="0"/>
+          </a:p>
+          <a:p>
+            <a:pPr marL="377825" indent="-285750">
+              <a:lnSpc>
+                <a:spcPct val="150000"/>
+              </a:lnSpc>
+              <a:buFont typeface="Arial" panose="020B0604020202020204" pitchFamily="34" charset="0"/>
+              <a:buChar char="•"/>
+            </a:pPr>
+            <a:r>
+              <a:rPr lang="ko-KR" altLang="en-US" sz="1600" dirty="0"/>
+              <a:t>시장 집중도가 높은 경우</a:t>
+            </a:r>
+            <a:r>
+              <a:rPr lang="en-US" altLang="ko-KR" sz="1600" dirty="0"/>
+              <a:t>, </a:t>
+            </a:r>
+            <a:r>
+              <a:rPr lang="ko-KR" altLang="en-US" sz="1600" dirty="0"/>
+              <a:t>주요 공급자는 가격을 인위적으로 조정하거나 공급량을 통제함으로써 소비자에게 과도한 비용을 전가할 수 있다</a:t>
+            </a:r>
+            <a:r>
+              <a:rPr lang="en-US" altLang="ko-KR" sz="1600" dirty="0"/>
+              <a:t>.</a:t>
+            </a:r>
+          </a:p>
+          <a:p>
+            <a:pPr marL="835025" lvl="1" indent="-285750">
+              <a:lnSpc>
+                <a:spcPct val="150000"/>
+              </a:lnSpc>
+              <a:buFont typeface="Wingdings" panose="05000000000000000000" pitchFamily="2" charset="2"/>
+              <a:buChar char="ü"/>
+            </a:pPr>
+            <a:r>
+              <a:rPr lang="ko-KR" altLang="en-US" sz="1600" dirty="0"/>
+              <a:t>이는 시장의 불확실성을 </a:t>
+            </a:r>
+            <a:r>
+              <a:rPr lang="ko-KR" altLang="en-US" sz="1600" dirty="0" err="1"/>
+              <a:t>증대시키고</a:t>
+            </a:r>
+            <a:r>
+              <a:rPr lang="ko-KR" altLang="en-US" sz="1600" dirty="0"/>
+              <a:t> 장기적으로 경쟁을 저해하여 혁신 유인을 약화할 수 있다</a:t>
+            </a:r>
+            <a:r>
+              <a:rPr lang="en-US" altLang="ko-KR" sz="1600" dirty="0"/>
+              <a:t>.</a:t>
+            </a:r>
+          </a:p>
+          <a:p>
+            <a:pPr marL="835025" lvl="1" indent="-285750">
+              <a:lnSpc>
+                <a:spcPct val="150000"/>
+              </a:lnSpc>
+              <a:buFont typeface="Wingdings" panose="05000000000000000000" pitchFamily="2" charset="2"/>
+              <a:buChar char="ü"/>
+            </a:pPr>
+            <a:r>
+              <a:rPr lang="ko-KR" altLang="en-US" sz="1600" dirty="0"/>
+              <a:t>천연가스 산업에서는 경쟁 촉진과 시장 감시를 통한 규제의 중요성이 지속적으로 강조되고 있다</a:t>
+            </a:r>
+            <a:r>
+              <a:rPr lang="en-US" altLang="ko-KR" sz="1600" dirty="0"/>
+              <a:t>.</a:t>
+            </a:r>
           </a:p>
         </p:txBody>
       </p:sp>
@@ -34729,7 +35406,6612 @@
 </p:sld>
 </file>
 
-<file path=ppt/slides/slide38.xml><?xml version="1.0" encoding="utf-8"?>
+<file path=ppt/slides/slide39.xml><?xml version="1.0" encoding="utf-8"?>
+<p:sld xmlns:a="http://schemas.openxmlformats.org/drawingml/2006/main" xmlns:r="http://schemas.openxmlformats.org/officeDocument/2006/relationships" xmlns:p="http://schemas.openxmlformats.org/presentationml/2006/main">
+  <p:cSld>
+    <p:spTree>
+      <p:nvGrpSpPr>
+        <p:cNvPr id="1" name="">
+          <a:extLst>
+            <a:ext uri="{FF2B5EF4-FFF2-40B4-BE49-F238E27FC236}">
+              <a16:creationId xmlns:a16="http://schemas.microsoft.com/office/drawing/2014/main" id="{053D53D8-FB0B-9931-AE62-3D0C5EC1ECF2}"/>
+            </a:ext>
+          </a:extLst>
+        </p:cNvPr>
+        <p:cNvGrpSpPr/>
+        <p:nvPr/>
+      </p:nvGrpSpPr>
+      <p:grpSpPr>
+        <a:xfrm>
+          <a:off x="0" y="0"/>
+          <a:ext cx="0" cy="0"/>
+          <a:chOff x="0" y="0"/>
+          <a:chExt cx="0" cy="0"/>
+        </a:xfrm>
+      </p:grpSpPr>
+      <p:sp>
+        <p:nvSpPr>
+          <p:cNvPr id="2" name="제목 1">
+            <a:extLst>
+              <a:ext uri="{FF2B5EF4-FFF2-40B4-BE49-F238E27FC236}">
+                <a16:creationId xmlns:a16="http://schemas.microsoft.com/office/drawing/2014/main" id="{AE41B40A-9936-B98C-28F9-A571B515D1F5}"/>
+              </a:ext>
+            </a:extLst>
+          </p:cNvPr>
+          <p:cNvSpPr>
+            <a:spLocks noGrp="1"/>
+          </p:cNvSpPr>
+          <p:nvPr>
+            <p:ph type="title"/>
+          </p:nvPr>
+        </p:nvSpPr>
+        <p:spPr/>
+        <p:txBody>
+          <a:bodyPr/>
+          <a:lstStyle/>
+          <a:p>
+            <a:r>
+              <a:rPr lang="ko-KR" altLang="en-US" dirty="0"/>
+              <a:t>천연가스 시장의 구조와 시장지배력</a:t>
+            </a:r>
+          </a:p>
+        </p:txBody>
+      </p:sp>
+      <p:sp>
+        <p:nvSpPr>
+          <p:cNvPr id="4" name="슬라이드 번호 개체 틀 3">
+            <a:extLst>
+              <a:ext uri="{FF2B5EF4-FFF2-40B4-BE49-F238E27FC236}">
+                <a16:creationId xmlns:a16="http://schemas.microsoft.com/office/drawing/2014/main" id="{DA050EAC-7A20-E20E-9CE0-F7FB2F69D369}"/>
+              </a:ext>
+            </a:extLst>
+          </p:cNvPr>
+          <p:cNvSpPr>
+            <a:spLocks noGrp="1"/>
+          </p:cNvSpPr>
+          <p:nvPr>
+            <p:ph type="sldNum" sz="quarter" idx="12"/>
+          </p:nvPr>
+        </p:nvSpPr>
+        <p:spPr/>
+        <p:txBody>
+          <a:bodyPr/>
+          <a:lstStyle/>
+          <a:p>
+            <a:fld id="{109C872D-39A9-4065-8BF3-6A613116E2A1}" type="slidenum">
+              <a:rPr lang="ko-KR" altLang="en-US" smtClean="0"/>
+              <a:t>39</a:t>
+            </a:fld>
+            <a:endParaRPr lang="ko-KR" altLang="en-US"/>
+          </a:p>
+        </p:txBody>
+      </p:sp>
+      <p:sp>
+        <p:nvSpPr>
+          <p:cNvPr id="3" name="TextBox 2">
+            <a:extLst>
+              <a:ext uri="{FF2B5EF4-FFF2-40B4-BE49-F238E27FC236}">
+                <a16:creationId xmlns:a16="http://schemas.microsoft.com/office/drawing/2014/main" id="{8159D27A-E156-4E05-E2D6-CECB223381E7}"/>
+              </a:ext>
+            </a:extLst>
+          </p:cNvPr>
+          <p:cNvSpPr txBox="1"/>
+          <p:nvPr/>
+        </p:nvSpPr>
+        <p:spPr>
+          <a:xfrm>
+            <a:off x="288790" y="958844"/>
+            <a:ext cx="11118453" cy="4846007"/>
+          </a:xfrm>
+          <a:prstGeom prst="rect">
+            <a:avLst/>
+          </a:prstGeom>
+          <a:noFill/>
+        </p:spPr>
+        <p:txBody>
+          <a:bodyPr wrap="square" rtlCol="0" anchor="t">
+            <a:spAutoFit/>
+          </a:bodyPr>
+          <a:lstStyle/>
+          <a:p>
+            <a:pPr marL="377825" indent="-285750">
+              <a:lnSpc>
+                <a:spcPct val="150000"/>
+              </a:lnSpc>
+              <a:buFont typeface="Arial" panose="020B0604020202020204" pitchFamily="34" charset="0"/>
+              <a:buChar char="•"/>
+            </a:pPr>
+            <a:r>
+              <a:rPr lang="ko-KR" altLang="en-US" sz="1600" dirty="0"/>
+              <a:t>천연가스 주요 생산국인 러시아</a:t>
+            </a:r>
+            <a:r>
+              <a:rPr lang="en-US" altLang="ko-KR" sz="1600" dirty="0"/>
+              <a:t>, </a:t>
+            </a:r>
+            <a:r>
+              <a:rPr lang="ko-KR" altLang="en-US" sz="1600" dirty="0"/>
+              <a:t>미국</a:t>
+            </a:r>
+            <a:r>
+              <a:rPr lang="en-US" altLang="ko-KR" sz="1600" dirty="0"/>
+              <a:t>, </a:t>
+            </a:r>
+            <a:r>
+              <a:rPr lang="ko-KR" altLang="en-US" sz="1600" dirty="0"/>
+              <a:t>카타르는 각국의 에너지 정책과 공급망 전략을 통해 글로벌 시장에 큰 영향을 미치고 있다</a:t>
+            </a:r>
+            <a:r>
+              <a:rPr lang="en-US" altLang="ko-KR" sz="1600" dirty="0"/>
+              <a:t>.</a:t>
+            </a:r>
+          </a:p>
+          <a:p>
+            <a:pPr marL="835025" lvl="1" indent="-285750">
+              <a:lnSpc>
+                <a:spcPct val="150000"/>
+              </a:lnSpc>
+              <a:buFont typeface="Wingdings" panose="05000000000000000000" pitchFamily="2" charset="2"/>
+              <a:buChar char="ü"/>
+            </a:pPr>
+            <a:r>
+              <a:rPr lang="ko-KR" altLang="en-US" sz="1600" dirty="0"/>
+              <a:t>러시아 국영기업인 </a:t>
+            </a:r>
+            <a:r>
+              <a:rPr lang="ko-KR" altLang="en-US" sz="1600" dirty="0" err="1"/>
+              <a:t>가즈프롬은</a:t>
+            </a:r>
+            <a:r>
+              <a:rPr lang="ko-KR" altLang="en-US" sz="1600" dirty="0"/>
+              <a:t> 천연가스 생산과 수출을 독점하고</a:t>
+            </a:r>
+            <a:r>
+              <a:rPr lang="en-US" altLang="ko-KR" sz="1600" dirty="0"/>
+              <a:t>, </a:t>
+            </a:r>
+            <a:r>
+              <a:rPr lang="ko-KR" altLang="en-US" sz="1600" dirty="0"/>
+              <a:t>파이프라인 네트워크를 통한 유럽 시장 지배력을 바탕으로 강한 시장지배력을 행사하고 있다</a:t>
+            </a:r>
+            <a:r>
+              <a:rPr lang="en-US" altLang="ko-KR" sz="1600" dirty="0"/>
+              <a:t>.</a:t>
+            </a:r>
+          </a:p>
+          <a:p>
+            <a:pPr marL="1292225" lvl="2" indent="-285750">
+              <a:lnSpc>
+                <a:spcPct val="150000"/>
+              </a:lnSpc>
+              <a:buFont typeface="Wingdings" panose="05000000000000000000" pitchFamily="2" charset="2"/>
+              <a:buChar char="Ø"/>
+            </a:pPr>
+            <a:r>
+              <a:rPr lang="ko-KR" altLang="en-US" sz="1600" dirty="0"/>
+              <a:t>이러한 전략적 행위는 특정 지역의 에너지 안보를 위협하고</a:t>
+            </a:r>
+            <a:r>
+              <a:rPr lang="en-US" altLang="ko-KR" sz="1600" dirty="0"/>
+              <a:t>, </a:t>
+            </a:r>
+            <a:r>
+              <a:rPr lang="ko-KR" altLang="en-US" sz="1600" dirty="0"/>
+              <a:t>천연가스 시장의 국제정치적 긴장을 </a:t>
+            </a:r>
+            <a:r>
+              <a:rPr lang="ko-KR" altLang="en-US" sz="1600" dirty="0" err="1"/>
+              <a:t>심화시킨다</a:t>
+            </a:r>
+            <a:r>
+              <a:rPr lang="en-US" altLang="ko-KR" sz="1600" dirty="0"/>
+              <a:t>.</a:t>
+            </a:r>
+          </a:p>
+          <a:p>
+            <a:pPr marL="1292225" lvl="2" indent="-285750">
+              <a:lnSpc>
+                <a:spcPct val="150000"/>
+              </a:lnSpc>
+              <a:buFont typeface="Wingdings" panose="05000000000000000000" pitchFamily="2" charset="2"/>
+              <a:buChar char="Ø"/>
+            </a:pPr>
+            <a:endParaRPr lang="en-US" altLang="ko-KR" sz="1600" dirty="0"/>
+          </a:p>
+          <a:p>
+            <a:pPr marL="377825" indent="-285750">
+              <a:lnSpc>
+                <a:spcPct val="150000"/>
+              </a:lnSpc>
+              <a:buFont typeface="Arial" panose="020B0604020202020204" pitchFamily="34" charset="0"/>
+              <a:buChar char="•"/>
+            </a:pPr>
+            <a:r>
+              <a:rPr lang="ko-KR" altLang="en-US" sz="1600" dirty="0"/>
+              <a:t>천연가스 수송 및 가공 단계에서는 파이프라인 인프라가 매우 </a:t>
+            </a:r>
+            <a:r>
+              <a:rPr lang="ko-KR" altLang="en-US" sz="1600" dirty="0" err="1"/>
+              <a:t>자본집약적이기</a:t>
+            </a:r>
+            <a:r>
+              <a:rPr lang="ko-KR" altLang="en-US" sz="1600" dirty="0"/>
+              <a:t> 때문에</a:t>
+            </a:r>
+            <a:r>
+              <a:rPr lang="en-US" altLang="ko-KR" sz="1600" dirty="0"/>
+              <a:t>, </a:t>
+            </a:r>
+            <a:r>
+              <a:rPr lang="ko-KR" altLang="en-US" sz="1600" dirty="0"/>
+              <a:t>신규 공급자의 진입이 어려워</a:t>
+            </a:r>
+            <a:r>
+              <a:rPr lang="en-US" altLang="ko-KR" sz="1600" dirty="0"/>
+              <a:t>, </a:t>
+            </a:r>
+            <a:r>
+              <a:rPr lang="ko-KR" altLang="en-US" sz="1600" dirty="0"/>
+              <a:t>자연스럽게 독점 구조가 형성될 가능성이 크다</a:t>
+            </a:r>
+            <a:r>
+              <a:rPr lang="en-US" altLang="ko-KR" sz="1600" dirty="0"/>
+              <a:t>.</a:t>
+            </a:r>
+          </a:p>
+          <a:p>
+            <a:pPr marL="835025" lvl="1" indent="-285750">
+              <a:lnSpc>
+                <a:spcPct val="150000"/>
+              </a:lnSpc>
+              <a:buFont typeface="Wingdings" panose="05000000000000000000" pitchFamily="2" charset="2"/>
+              <a:buChar char="ü"/>
+            </a:pPr>
+            <a:r>
+              <a:rPr lang="ko-KR" altLang="en-US" sz="1600" dirty="0"/>
+              <a:t>파이프라인은 건설 이후에는 한계비용이 낮지만 초기 고정투자비용이 매우 높아 진입장벽이 된다</a:t>
+            </a:r>
+            <a:r>
+              <a:rPr lang="en-US" altLang="ko-KR" sz="1600" dirty="0"/>
+              <a:t>.</a:t>
+            </a:r>
+          </a:p>
+          <a:p>
+            <a:pPr marL="835025" lvl="1" indent="-285750">
+              <a:lnSpc>
+                <a:spcPct val="150000"/>
+              </a:lnSpc>
+              <a:buFont typeface="Wingdings" panose="05000000000000000000" pitchFamily="2" charset="2"/>
+              <a:buChar char="ü"/>
+            </a:pPr>
+            <a:r>
+              <a:rPr lang="ko-KR" altLang="en-US" sz="1600" dirty="0"/>
+              <a:t>운송 인프라를 통제하는 기업들은 파이프라인 접근을 제한하거나 운송비용을 높여 시장지배력을 행사한다</a:t>
+            </a:r>
+            <a:r>
+              <a:rPr lang="en-US" altLang="ko-KR" sz="1600" dirty="0"/>
+              <a:t>.</a:t>
+            </a:r>
+          </a:p>
+          <a:p>
+            <a:pPr marL="835025" lvl="1" indent="-285750">
+              <a:lnSpc>
+                <a:spcPct val="150000"/>
+              </a:lnSpc>
+              <a:buFont typeface="Wingdings" panose="05000000000000000000" pitchFamily="2" charset="2"/>
+              <a:buChar char="ü"/>
+            </a:pPr>
+            <a:r>
+              <a:rPr lang="ko-KR" altLang="en-US" sz="1600" dirty="0"/>
+              <a:t>천연가스 가공 과정에서도 대규모 처리시설을 보유한 기업들은 비용구조를 통제함으로써 경쟁을 제한하고 높은 처리비용을 강제할 수 있다</a:t>
+            </a:r>
+            <a:r>
+              <a:rPr lang="en-US" altLang="ko-KR" sz="1600" dirty="0"/>
+              <a:t>.</a:t>
+            </a:r>
+          </a:p>
+        </p:txBody>
+      </p:sp>
+    </p:spTree>
+    <p:extLst>
+      <p:ext uri="{BB962C8B-B14F-4D97-AF65-F5344CB8AC3E}">
+        <p14:creationId xmlns:p14="http://schemas.microsoft.com/office/powerpoint/2010/main" val="2558454729"/>
+      </p:ext>
+    </p:extLst>
+  </p:cSld>
+  <p:clrMapOvr>
+    <a:masterClrMapping/>
+  </p:clrMapOvr>
+</p:sld>
+</file>
+
+<file path=ppt/slides/slide4.xml><?xml version="1.0" encoding="utf-8"?>
+<p:sld xmlns:a="http://schemas.openxmlformats.org/drawingml/2006/main" xmlns:r="http://schemas.openxmlformats.org/officeDocument/2006/relationships" xmlns:p="http://schemas.openxmlformats.org/presentationml/2006/main">
+  <p:cSld>
+    <p:spTree>
+      <p:nvGrpSpPr>
+        <p:cNvPr id="1" name=""/>
+        <p:cNvGrpSpPr/>
+        <p:nvPr/>
+      </p:nvGrpSpPr>
+      <p:grpSpPr>
+        <a:xfrm>
+          <a:off x="0" y="0"/>
+          <a:ext cx="0" cy="0"/>
+          <a:chOff x="0" y="0"/>
+          <a:chExt cx="0" cy="0"/>
+        </a:xfrm>
+      </p:grpSpPr>
+      <p:sp>
+        <p:nvSpPr>
+          <p:cNvPr id="2" name="제목 1">
+            <a:extLst>
+              <a:ext uri="{FF2B5EF4-FFF2-40B4-BE49-F238E27FC236}">
+                <a16:creationId xmlns:a16="http://schemas.microsoft.com/office/drawing/2014/main" id="{708E53AA-7D50-5F4A-320F-293F315471D7}"/>
+              </a:ext>
+            </a:extLst>
+          </p:cNvPr>
+          <p:cNvSpPr>
+            <a:spLocks noGrp="1"/>
+          </p:cNvSpPr>
+          <p:nvPr>
+            <p:ph type="title"/>
+          </p:nvPr>
+        </p:nvSpPr>
+        <p:spPr/>
+        <p:txBody>
+          <a:bodyPr/>
+          <a:lstStyle/>
+          <a:p>
+            <a:r>
+              <a:rPr lang="ko-KR" altLang="en-US" dirty="0"/>
+              <a:t>서론</a:t>
+            </a:r>
+          </a:p>
+        </p:txBody>
+      </p:sp>
+      <p:sp>
+        <p:nvSpPr>
+          <p:cNvPr id="4" name="슬라이드 번호 개체 틀 3">
+            <a:extLst>
+              <a:ext uri="{FF2B5EF4-FFF2-40B4-BE49-F238E27FC236}">
+                <a16:creationId xmlns:a16="http://schemas.microsoft.com/office/drawing/2014/main" id="{0E66E9B2-B0DB-FDCD-AA50-636EA4E5B253}"/>
+              </a:ext>
+            </a:extLst>
+          </p:cNvPr>
+          <p:cNvSpPr>
+            <a:spLocks noGrp="1"/>
+          </p:cNvSpPr>
+          <p:nvPr>
+            <p:ph type="sldNum" sz="quarter" idx="12"/>
+          </p:nvPr>
+        </p:nvSpPr>
+        <p:spPr/>
+        <p:txBody>
+          <a:bodyPr/>
+          <a:lstStyle/>
+          <a:p>
+            <a:fld id="{109C872D-39A9-4065-8BF3-6A613116E2A1}" type="slidenum">
+              <a:rPr lang="ko-KR" altLang="en-US" smtClean="0"/>
+              <a:t>4</a:t>
+            </a:fld>
+            <a:endParaRPr lang="ko-KR" altLang="en-US"/>
+          </a:p>
+        </p:txBody>
+      </p:sp>
+      <p:sp>
+        <p:nvSpPr>
+          <p:cNvPr id="3" name="TextBox 2">
+            <a:extLst>
+              <a:ext uri="{FF2B5EF4-FFF2-40B4-BE49-F238E27FC236}">
+                <a16:creationId xmlns:a16="http://schemas.microsoft.com/office/drawing/2014/main" id="{6C27E35B-63AE-3D62-3078-BE10F308BEDD}"/>
+              </a:ext>
+            </a:extLst>
+          </p:cNvPr>
+          <p:cNvSpPr txBox="1"/>
+          <p:nvPr/>
+        </p:nvSpPr>
+        <p:spPr>
+          <a:xfrm>
+            <a:off x="288790" y="958844"/>
+            <a:ext cx="11118453" cy="5584670"/>
+          </a:xfrm>
+          <a:prstGeom prst="rect">
+            <a:avLst/>
+          </a:prstGeom>
+          <a:noFill/>
+        </p:spPr>
+        <p:txBody>
+          <a:bodyPr wrap="square" rtlCol="0" anchor="t">
+            <a:spAutoFit/>
+          </a:bodyPr>
+          <a:lstStyle/>
+          <a:p>
+            <a:pPr marL="377825" indent="-285750">
+              <a:lnSpc>
+                <a:spcPct val="150000"/>
+              </a:lnSpc>
+              <a:buFont typeface="Arial" panose="020B0604020202020204" pitchFamily="34" charset="0"/>
+              <a:buChar char="•"/>
+            </a:pPr>
+            <a:r>
+              <a:rPr lang="ko-KR" altLang="en-US" sz="1600" dirty="0"/>
+              <a:t>천연가스는 주로 메탄</a:t>
+            </a:r>
+            <a:r>
+              <a:rPr lang="en-US" altLang="ko-KR" sz="1600" dirty="0"/>
+              <a:t>(CH</a:t>
+            </a:r>
+            <a:r>
+              <a:rPr lang="en-US" altLang="ko-KR" sz="1600" baseline="-25000" dirty="0"/>
+              <a:t>4</a:t>
+            </a:r>
+            <a:r>
+              <a:rPr lang="en-US" altLang="ko-KR" sz="1600" dirty="0"/>
+              <a:t>)</a:t>
+            </a:r>
+            <a:r>
+              <a:rPr lang="ko-KR" altLang="en-US" sz="1600" dirty="0"/>
+              <a:t>으로 구성되어 있으며</a:t>
+            </a:r>
+            <a:r>
+              <a:rPr lang="en-US" altLang="ko-KR" sz="1600" dirty="0"/>
+              <a:t>, </a:t>
+            </a:r>
+            <a:r>
+              <a:rPr lang="ko-KR" altLang="en-US" sz="1600" dirty="0"/>
+              <a:t>다른 연료</a:t>
+            </a:r>
+            <a:r>
+              <a:rPr lang="en-US" altLang="ko-KR" sz="1600" dirty="0"/>
+              <a:t>(</a:t>
+            </a:r>
+            <a:r>
+              <a:rPr lang="ko-KR" altLang="en-US" sz="1600" dirty="0"/>
+              <a:t>석탄 및 석유</a:t>
+            </a:r>
+            <a:r>
+              <a:rPr lang="en-US" altLang="ko-KR" sz="1600" dirty="0"/>
+              <a:t>)</a:t>
+            </a:r>
+            <a:r>
+              <a:rPr lang="ko-KR" altLang="en-US" sz="1600" dirty="0"/>
+              <a:t>에 비해 연소할 때 배출되는 오염물질이 적어</a:t>
+            </a:r>
+            <a:r>
+              <a:rPr lang="en-US" altLang="ko-KR" sz="1600" dirty="0"/>
+              <a:t>, </a:t>
+            </a:r>
+            <a:r>
+              <a:rPr lang="ko-KR" altLang="en-US" sz="1600" dirty="0"/>
+              <a:t>화석연료 중에서는 가장 청정한 연료로 평가된다</a:t>
+            </a:r>
+            <a:r>
+              <a:rPr lang="en-US" altLang="ko-KR" sz="1600" dirty="0"/>
+              <a:t>.</a:t>
+            </a:r>
+          </a:p>
+          <a:p>
+            <a:pPr marL="835025" lvl="1" indent="-285750">
+              <a:lnSpc>
+                <a:spcPct val="150000"/>
+              </a:lnSpc>
+              <a:buFont typeface="Wingdings" panose="05000000000000000000" pitchFamily="2" charset="2"/>
+              <a:buChar char="ü"/>
+            </a:pPr>
+            <a:r>
+              <a:rPr lang="ko-KR" altLang="en-US" sz="1600" dirty="0"/>
+              <a:t>이러한 특성으로</a:t>
+            </a:r>
+            <a:r>
+              <a:rPr lang="en-US" altLang="ko-KR" sz="1600" dirty="0"/>
+              <a:t> </a:t>
+            </a:r>
+            <a:r>
+              <a:rPr lang="ko-KR" altLang="en-US" sz="1600" dirty="0"/>
+              <a:t>기후변화 대응과 에너지 전환 과정에서 </a:t>
+            </a:r>
+            <a:r>
+              <a:rPr lang="en-US" altLang="ko-KR" sz="1600" dirty="0"/>
+              <a:t>‘</a:t>
+            </a:r>
+            <a:r>
+              <a:rPr lang="ko-KR" altLang="en-US" sz="1600" dirty="0"/>
+              <a:t>교량 연료</a:t>
+            </a:r>
+            <a:r>
+              <a:rPr lang="en-US" altLang="ko-KR" sz="1600" dirty="0"/>
+              <a:t>‘</a:t>
+            </a:r>
+            <a:r>
+              <a:rPr lang="ko-KR" altLang="en-US" sz="1600" dirty="0"/>
+              <a:t>로 주목받고 있으며</a:t>
+            </a:r>
+            <a:r>
+              <a:rPr lang="en-US" altLang="ko-KR" sz="1600" dirty="0"/>
+              <a:t>, </a:t>
+            </a:r>
+            <a:r>
+              <a:rPr lang="ko-KR" altLang="en-US" sz="1600" dirty="0"/>
+              <a:t>재생에너지의 간헐성을 보완하는 유연한 발전원으로 활용 가능하다</a:t>
+            </a:r>
+            <a:r>
+              <a:rPr lang="en-US" altLang="ko-KR" sz="1600" dirty="0"/>
+              <a:t>.</a:t>
+            </a:r>
+          </a:p>
+          <a:p>
+            <a:pPr marL="377825" indent="-285750">
+              <a:lnSpc>
+                <a:spcPct val="150000"/>
+              </a:lnSpc>
+              <a:buFont typeface="Arial" panose="020B0604020202020204" pitchFamily="34" charset="0"/>
+              <a:buChar char="•"/>
+            </a:pPr>
+            <a:endParaRPr lang="en-US" altLang="ko-KR" sz="1600" dirty="0"/>
+          </a:p>
+          <a:p>
+            <a:pPr marL="377825" indent="-285750">
+              <a:lnSpc>
+                <a:spcPct val="150000"/>
+              </a:lnSpc>
+              <a:buFont typeface="Arial" panose="020B0604020202020204" pitchFamily="34" charset="0"/>
+              <a:buChar char="•"/>
+            </a:pPr>
+            <a:r>
+              <a:rPr lang="ko-KR" altLang="en-US" sz="1600" dirty="0"/>
+              <a:t>인류의 천연가스 이용은 고대까지 거슬러 올라가며</a:t>
+            </a:r>
+            <a:r>
+              <a:rPr lang="en-US" altLang="ko-KR" sz="1600" dirty="0"/>
+              <a:t>, </a:t>
+            </a:r>
+            <a:r>
+              <a:rPr lang="ko-KR" altLang="en-US" sz="1600" dirty="0"/>
+              <a:t>상징적</a:t>
+            </a:r>
+            <a:r>
+              <a:rPr lang="en-US" altLang="ko-KR" sz="1600" dirty="0"/>
+              <a:t>·</a:t>
+            </a:r>
+            <a:r>
+              <a:rPr lang="ko-KR" altLang="en-US" sz="1600" dirty="0"/>
+              <a:t>제의적 의미에 머무르고</a:t>
+            </a:r>
+            <a:r>
+              <a:rPr lang="en-US" altLang="ko-KR" sz="1600" dirty="0"/>
+              <a:t>, </a:t>
+            </a:r>
+            <a:r>
+              <a:rPr lang="ko-KR" altLang="en-US" sz="1600" dirty="0"/>
+              <a:t>본격적으로 활용되지는 않았다</a:t>
+            </a:r>
+            <a:r>
+              <a:rPr lang="en-US" altLang="ko-KR" sz="1600" dirty="0"/>
+              <a:t>.</a:t>
+            </a:r>
+          </a:p>
+          <a:p>
+            <a:pPr marL="835025" lvl="1" indent="-285750">
+              <a:lnSpc>
+                <a:spcPct val="150000"/>
+              </a:lnSpc>
+              <a:buFont typeface="Wingdings" panose="05000000000000000000" pitchFamily="2" charset="2"/>
+              <a:buChar char="ü"/>
+            </a:pPr>
+            <a:r>
+              <a:rPr lang="ko-KR" altLang="en-US" sz="1600" dirty="0"/>
+              <a:t>기원전 </a:t>
+            </a:r>
+            <a:r>
+              <a:rPr lang="en-US" altLang="ko-KR" sz="1600" dirty="0"/>
+              <a:t>1,000</a:t>
+            </a:r>
+            <a:r>
+              <a:rPr lang="ko-KR" altLang="en-US" sz="1600" dirty="0" err="1"/>
+              <a:t>년경</a:t>
+            </a:r>
+            <a:r>
+              <a:rPr lang="ko-KR" altLang="en-US" sz="1600" dirty="0"/>
+              <a:t> 중국에서는 대나무 파이프를 사용하여 천연가스를 지표로부터 추출하였다</a:t>
+            </a:r>
+            <a:r>
+              <a:rPr lang="en-US" altLang="ko-KR" sz="1600" dirty="0"/>
+              <a:t>.</a:t>
+            </a:r>
+          </a:p>
+          <a:p>
+            <a:pPr marL="835025" lvl="1" indent="-285750">
+              <a:lnSpc>
+                <a:spcPct val="150000"/>
+              </a:lnSpc>
+              <a:buFont typeface="Wingdings" panose="05000000000000000000" pitchFamily="2" charset="2"/>
+              <a:buChar char="ü"/>
+            </a:pPr>
+            <a:r>
+              <a:rPr lang="ko-KR" altLang="en-US" sz="1600" dirty="0"/>
+              <a:t>고대 그리스 및 페르시아에서도 천연가스의 자연 누출로 발생하는 </a:t>
+            </a:r>
+            <a:r>
+              <a:rPr lang="en-US" altLang="ko-KR" sz="1600" dirty="0"/>
+              <a:t>‘</a:t>
+            </a:r>
+            <a:r>
+              <a:rPr lang="ko-KR" altLang="en-US" sz="1600" dirty="0"/>
+              <a:t>영원한 불</a:t>
+            </a:r>
+            <a:r>
+              <a:rPr lang="en-US" altLang="ko-KR" sz="1600" dirty="0"/>
+              <a:t>‘</a:t>
+            </a:r>
+            <a:r>
+              <a:rPr lang="ko-KR" altLang="en-US" sz="1600" dirty="0"/>
+              <a:t>은 신성한 존재로 인식되며 종교적 의례에 사용되었다</a:t>
+            </a:r>
+            <a:r>
+              <a:rPr lang="en-US" altLang="ko-KR" sz="1600" dirty="0"/>
+              <a:t>.</a:t>
+            </a:r>
+          </a:p>
+          <a:p>
+            <a:pPr marL="835025" lvl="1" indent="-285750">
+              <a:lnSpc>
+                <a:spcPct val="150000"/>
+              </a:lnSpc>
+              <a:buFont typeface="Wingdings" panose="05000000000000000000" pitchFamily="2" charset="2"/>
+              <a:buChar char="ü"/>
+            </a:pPr>
+            <a:endParaRPr lang="en-US" altLang="ko-KR" sz="1600" dirty="0"/>
+          </a:p>
+          <a:p>
+            <a:pPr marL="377825" indent="-285750">
+              <a:lnSpc>
+                <a:spcPct val="150000"/>
+              </a:lnSpc>
+              <a:buFont typeface="Arial" panose="020B0604020202020204" pitchFamily="34" charset="0"/>
+              <a:buChar char="•"/>
+            </a:pPr>
+            <a:r>
+              <a:rPr lang="en-US" altLang="ko-KR" sz="1600" dirty="0"/>
+              <a:t>19</a:t>
+            </a:r>
+            <a:r>
+              <a:rPr lang="ko-KR" altLang="en-US" sz="1600" dirty="0"/>
+              <a:t>세기 들어 산업화에 따라 천연가스의 상업적 활용이 시작되었다</a:t>
+            </a:r>
+            <a:r>
+              <a:rPr lang="en-US" altLang="ko-KR" sz="1600" dirty="0"/>
+              <a:t>.</a:t>
+            </a:r>
+          </a:p>
+          <a:p>
+            <a:pPr marL="835025" lvl="1" indent="-285750">
+              <a:lnSpc>
+                <a:spcPct val="150000"/>
+              </a:lnSpc>
+              <a:buFont typeface="Wingdings" panose="05000000000000000000" pitchFamily="2" charset="2"/>
+              <a:buChar char="ü"/>
+            </a:pPr>
+            <a:r>
+              <a:rPr lang="en-US" altLang="ko-KR" sz="1600" dirty="0"/>
+              <a:t>1821</a:t>
+            </a:r>
+            <a:r>
+              <a:rPr lang="ko-KR" altLang="en-US" sz="1600" dirty="0"/>
+              <a:t>년 미국 뉴욕주에서 세계 최초의 천연가스 우물이 </a:t>
+            </a:r>
+            <a:r>
+              <a:rPr lang="ko-KR" altLang="en-US" sz="1600" dirty="0" err="1"/>
+              <a:t>시추되었다</a:t>
+            </a:r>
+            <a:r>
+              <a:rPr lang="en-US" altLang="ko-KR" sz="1600" dirty="0"/>
+              <a:t>.</a:t>
+            </a:r>
+          </a:p>
+          <a:p>
+            <a:pPr marL="835025" lvl="1" indent="-285750">
+              <a:lnSpc>
+                <a:spcPct val="150000"/>
+              </a:lnSpc>
+              <a:buFont typeface="Wingdings" panose="05000000000000000000" pitchFamily="2" charset="2"/>
+              <a:buChar char="ü"/>
+            </a:pPr>
+            <a:r>
+              <a:rPr lang="en-US" altLang="ko-KR" sz="1600" dirty="0"/>
+              <a:t>1850</a:t>
+            </a:r>
+            <a:r>
+              <a:rPr lang="ko-KR" altLang="en-US" sz="1600" dirty="0"/>
+              <a:t>년대 중반부터는 도시의 가로등</a:t>
+            </a:r>
+            <a:r>
+              <a:rPr lang="en-US" altLang="ko-KR" sz="1600" dirty="0"/>
+              <a:t>, </a:t>
+            </a:r>
+            <a:r>
+              <a:rPr lang="ko-KR" altLang="en-US" sz="1600" dirty="0"/>
+              <a:t>가정 난방용으로 천연가스가 사용되기 시작하였다</a:t>
+            </a:r>
+            <a:r>
+              <a:rPr lang="en-US" altLang="ko-KR" sz="1600" dirty="0"/>
+              <a:t>.</a:t>
+            </a:r>
+          </a:p>
+          <a:p>
+            <a:pPr marL="835025" lvl="1" indent="-285750">
+              <a:lnSpc>
+                <a:spcPct val="150000"/>
+              </a:lnSpc>
+              <a:buFont typeface="Wingdings" panose="05000000000000000000" pitchFamily="2" charset="2"/>
+              <a:buChar char="ü"/>
+            </a:pPr>
+            <a:r>
+              <a:rPr lang="en-US" altLang="ko-KR" sz="1600" dirty="0"/>
+              <a:t>1859</a:t>
+            </a:r>
+            <a:r>
+              <a:rPr lang="ko-KR" altLang="en-US" sz="1600" dirty="0"/>
+              <a:t>년 펜실베니아 드레이크 성공은 </a:t>
+            </a:r>
+            <a:r>
+              <a:rPr lang="en-US" altLang="ko-KR" sz="1600" dirty="0"/>
+              <a:t>(</a:t>
+            </a:r>
+            <a:r>
+              <a:rPr lang="ko-KR" altLang="en-US" sz="1600" dirty="0" err="1"/>
+              <a:t>석유챕터</a:t>
+            </a:r>
+            <a:r>
+              <a:rPr lang="en-US" altLang="ko-KR" sz="1600" dirty="0"/>
+              <a:t> </a:t>
+            </a:r>
+            <a:r>
+              <a:rPr lang="ko-KR" altLang="en-US" sz="1600" dirty="0"/>
+              <a:t>참고</a:t>
+            </a:r>
+            <a:r>
+              <a:rPr lang="en-US" altLang="ko-KR" sz="1600" dirty="0"/>
+              <a:t>)</a:t>
+            </a:r>
+            <a:r>
+              <a:rPr lang="ko-KR" altLang="en-US" sz="1600" dirty="0"/>
+              <a:t> 석유 뿐만 아니라 천연가스 산업에도 기폭제 역할을 하였다</a:t>
+            </a:r>
+            <a:r>
+              <a:rPr lang="en-US" altLang="ko-KR" sz="1600" dirty="0"/>
+              <a:t>.</a:t>
+            </a:r>
+          </a:p>
+        </p:txBody>
+      </p:sp>
+    </p:spTree>
+    <p:extLst>
+      <p:ext uri="{BB962C8B-B14F-4D97-AF65-F5344CB8AC3E}">
+        <p14:creationId xmlns:p14="http://schemas.microsoft.com/office/powerpoint/2010/main" val="152177136"/>
+      </p:ext>
+    </p:extLst>
+  </p:cSld>
+  <p:clrMapOvr>
+    <a:masterClrMapping/>
+  </p:clrMapOvr>
+</p:sld>
+</file>
+
+<file path=ppt/slides/slide40.xml><?xml version="1.0" encoding="utf-8"?>
+<p:sld xmlns:a="http://schemas.openxmlformats.org/drawingml/2006/main" xmlns:r="http://schemas.openxmlformats.org/officeDocument/2006/relationships" xmlns:p="http://schemas.openxmlformats.org/presentationml/2006/main">
+  <p:cSld>
+    <p:spTree>
+      <p:nvGrpSpPr>
+        <p:cNvPr id="1" name="">
+          <a:extLst>
+            <a:ext uri="{FF2B5EF4-FFF2-40B4-BE49-F238E27FC236}">
+              <a16:creationId xmlns:a16="http://schemas.microsoft.com/office/drawing/2014/main" id="{E97EBD2D-4467-798D-9C2B-B712DBD72530}"/>
+            </a:ext>
+          </a:extLst>
+        </p:cNvPr>
+        <p:cNvGrpSpPr/>
+        <p:nvPr/>
+      </p:nvGrpSpPr>
+      <p:grpSpPr>
+        <a:xfrm>
+          <a:off x="0" y="0"/>
+          <a:ext cx="0" cy="0"/>
+          <a:chOff x="0" y="0"/>
+          <a:chExt cx="0" cy="0"/>
+        </a:xfrm>
+      </p:grpSpPr>
+      <p:sp>
+        <p:nvSpPr>
+          <p:cNvPr id="2" name="제목 1">
+            <a:extLst>
+              <a:ext uri="{FF2B5EF4-FFF2-40B4-BE49-F238E27FC236}">
+                <a16:creationId xmlns:a16="http://schemas.microsoft.com/office/drawing/2014/main" id="{27B3AD43-BB3A-A89C-FB00-7E6A8F5AE0FE}"/>
+              </a:ext>
+            </a:extLst>
+          </p:cNvPr>
+          <p:cNvSpPr>
+            <a:spLocks noGrp="1"/>
+          </p:cNvSpPr>
+          <p:nvPr>
+            <p:ph type="title"/>
+          </p:nvPr>
+        </p:nvSpPr>
+        <p:spPr/>
+        <p:txBody>
+          <a:bodyPr/>
+          <a:lstStyle/>
+          <a:p>
+            <a:r>
+              <a:rPr lang="ko-KR" altLang="en-US" dirty="0"/>
+              <a:t>천연가스 시장의 구조와 시장지배력</a:t>
+            </a:r>
+          </a:p>
+        </p:txBody>
+      </p:sp>
+      <p:sp>
+        <p:nvSpPr>
+          <p:cNvPr id="4" name="슬라이드 번호 개체 틀 3">
+            <a:extLst>
+              <a:ext uri="{FF2B5EF4-FFF2-40B4-BE49-F238E27FC236}">
+                <a16:creationId xmlns:a16="http://schemas.microsoft.com/office/drawing/2014/main" id="{B6485B48-F90E-6C16-998B-06FB267D35C4}"/>
+              </a:ext>
+            </a:extLst>
+          </p:cNvPr>
+          <p:cNvSpPr>
+            <a:spLocks noGrp="1"/>
+          </p:cNvSpPr>
+          <p:nvPr>
+            <p:ph type="sldNum" sz="quarter" idx="12"/>
+          </p:nvPr>
+        </p:nvSpPr>
+        <p:spPr/>
+        <p:txBody>
+          <a:bodyPr/>
+          <a:lstStyle/>
+          <a:p>
+            <a:fld id="{109C872D-39A9-4065-8BF3-6A613116E2A1}" type="slidenum">
+              <a:rPr lang="ko-KR" altLang="en-US" smtClean="0"/>
+              <a:t>40</a:t>
+            </a:fld>
+            <a:endParaRPr lang="ko-KR" altLang="en-US"/>
+          </a:p>
+        </p:txBody>
+      </p:sp>
+      <p:sp>
+        <p:nvSpPr>
+          <p:cNvPr id="3" name="TextBox 2">
+            <a:extLst>
+              <a:ext uri="{FF2B5EF4-FFF2-40B4-BE49-F238E27FC236}">
+                <a16:creationId xmlns:a16="http://schemas.microsoft.com/office/drawing/2014/main" id="{AC73AE8E-A54C-CE9E-7364-2C257F4DF70E}"/>
+              </a:ext>
+            </a:extLst>
+          </p:cNvPr>
+          <p:cNvSpPr txBox="1"/>
+          <p:nvPr/>
+        </p:nvSpPr>
+        <p:spPr>
+          <a:xfrm>
+            <a:off x="288790" y="958844"/>
+            <a:ext cx="11118453" cy="5584670"/>
+          </a:xfrm>
+          <a:prstGeom prst="rect">
+            <a:avLst/>
+          </a:prstGeom>
+          <a:noFill/>
+        </p:spPr>
+        <p:txBody>
+          <a:bodyPr wrap="square" rtlCol="0" anchor="t">
+            <a:spAutoFit/>
+          </a:bodyPr>
+          <a:lstStyle/>
+          <a:p>
+            <a:pPr marL="377825" indent="-285750">
+              <a:lnSpc>
+                <a:spcPct val="150000"/>
+              </a:lnSpc>
+              <a:buFont typeface="Arial" panose="020B0604020202020204" pitchFamily="34" charset="0"/>
+              <a:buChar char="•"/>
+            </a:pPr>
+            <a:r>
+              <a:rPr lang="ko-KR" altLang="en-US" sz="1600" dirty="0"/>
+              <a:t>최종분배단계에서는 지역 유틸리티 회사들이 특정 지역에서 가스를 독점적으로 공급하는 경우가 흔하며</a:t>
+            </a:r>
+            <a:r>
+              <a:rPr lang="en-US" altLang="ko-KR" sz="1600" dirty="0"/>
+              <a:t>, </a:t>
+            </a:r>
+            <a:r>
+              <a:rPr lang="ko-KR" altLang="en-US" sz="1600" dirty="0"/>
+              <a:t>이는 가격 결정에 공급자의 영향력을 강화하고 시장 경쟁을 저해하는 요인이 된다</a:t>
+            </a:r>
+            <a:r>
+              <a:rPr lang="en-US" altLang="ko-KR" sz="1600" dirty="0"/>
+              <a:t>.</a:t>
+            </a:r>
+          </a:p>
+          <a:p>
+            <a:pPr marL="377825" indent="-285750">
+              <a:lnSpc>
+                <a:spcPct val="150000"/>
+              </a:lnSpc>
+              <a:buFont typeface="Arial" panose="020B0604020202020204" pitchFamily="34" charset="0"/>
+              <a:buChar char="•"/>
+            </a:pPr>
+            <a:r>
+              <a:rPr lang="ko-KR" altLang="en-US" sz="1600" dirty="0"/>
+              <a:t>또한 천연가스 공급자들은 생산</a:t>
+            </a:r>
+            <a:r>
+              <a:rPr lang="en-US" altLang="ko-KR" sz="1600" dirty="0"/>
+              <a:t>, </a:t>
+            </a:r>
+            <a:r>
+              <a:rPr lang="ko-KR" altLang="en-US" sz="1600" dirty="0"/>
+              <a:t>운송</a:t>
+            </a:r>
+            <a:r>
+              <a:rPr lang="en-US" altLang="ko-KR" sz="1600" dirty="0"/>
+              <a:t>, </a:t>
+            </a:r>
+            <a:r>
+              <a:rPr lang="ko-KR" altLang="en-US" sz="1600" dirty="0"/>
+              <a:t>가공</a:t>
+            </a:r>
+            <a:r>
+              <a:rPr lang="en-US" altLang="ko-KR" sz="1600" dirty="0"/>
+              <a:t>, </a:t>
+            </a:r>
+            <a:r>
+              <a:rPr lang="ko-KR" altLang="en-US" sz="1600" dirty="0"/>
+              <a:t>유통 과정을 수직적으로 통합하여 시장지배력을 강화하기도 한다</a:t>
+            </a:r>
+            <a:r>
+              <a:rPr lang="en-US" altLang="ko-KR" sz="1600" dirty="0"/>
+              <a:t>.</a:t>
+            </a:r>
+          </a:p>
+          <a:p>
+            <a:pPr marL="835025" lvl="1" indent="-285750">
+              <a:lnSpc>
+                <a:spcPct val="150000"/>
+              </a:lnSpc>
+              <a:buFont typeface="Wingdings" panose="05000000000000000000" pitchFamily="2" charset="2"/>
+              <a:buChar char="ü"/>
+            </a:pPr>
+            <a:r>
+              <a:rPr lang="ko-KR" altLang="en-US" sz="1600" dirty="0"/>
+              <a:t>수직적 통합은 필수 설비에 대한 접근을 제한하거나 과도한 비용을 부과하는 방식으로 경쟁자들을 배제하고 시장 가격을 상승시킬 수 있다</a:t>
+            </a:r>
+            <a:r>
+              <a:rPr lang="en-US" altLang="ko-KR" sz="1600" dirty="0"/>
+              <a:t>.</a:t>
+            </a:r>
+          </a:p>
+          <a:p>
+            <a:pPr marL="1292225" lvl="2" indent="-285750">
+              <a:lnSpc>
+                <a:spcPct val="150000"/>
+              </a:lnSpc>
+              <a:buFont typeface="Wingdings" panose="05000000000000000000" pitchFamily="2" charset="2"/>
+              <a:buChar char="Ø"/>
+            </a:pPr>
+            <a:r>
+              <a:rPr lang="ko-KR" altLang="en-US" sz="1600" dirty="0"/>
+              <a:t>대표적으로 </a:t>
+            </a:r>
+            <a:r>
+              <a:rPr lang="ko-KR" altLang="en-US" sz="1600" dirty="0" err="1"/>
+              <a:t>가즈프롬은</a:t>
+            </a:r>
+            <a:r>
+              <a:rPr lang="ko-KR" altLang="en-US" sz="1600" dirty="0"/>
+              <a:t> 탐사</a:t>
+            </a:r>
+            <a:r>
+              <a:rPr lang="en-US" altLang="ko-KR" sz="1600" dirty="0"/>
+              <a:t>, </a:t>
+            </a:r>
+            <a:r>
+              <a:rPr lang="ko-KR" altLang="en-US" sz="1600" dirty="0"/>
+              <a:t>생산</a:t>
+            </a:r>
+            <a:r>
+              <a:rPr lang="en-US" altLang="ko-KR" sz="1600" dirty="0"/>
+              <a:t>, </a:t>
+            </a:r>
+            <a:r>
+              <a:rPr lang="ko-KR" altLang="en-US" sz="1600" dirty="0"/>
+              <a:t>수송</a:t>
+            </a:r>
+            <a:r>
+              <a:rPr lang="en-US" altLang="ko-KR" sz="1600" dirty="0"/>
+              <a:t>, </a:t>
+            </a:r>
+            <a:r>
+              <a:rPr lang="ko-KR" altLang="en-US" sz="1600" dirty="0"/>
+              <a:t>그리고 유럽시장 진출까지 일관되게 관리하여 공급망 전반에 걸쳐 지배력을 유지하고 있다</a:t>
+            </a:r>
+            <a:r>
+              <a:rPr lang="en-US" altLang="ko-KR" sz="1600" dirty="0"/>
+              <a:t>.</a:t>
+            </a:r>
+          </a:p>
+          <a:p>
+            <a:pPr marL="1292225" lvl="2" indent="-285750">
+              <a:lnSpc>
+                <a:spcPct val="150000"/>
+              </a:lnSpc>
+              <a:buFont typeface="Wingdings" panose="05000000000000000000" pitchFamily="2" charset="2"/>
+              <a:buChar char="Ø"/>
+            </a:pPr>
+            <a:endParaRPr lang="en-US" altLang="ko-KR" sz="1600" dirty="0"/>
+          </a:p>
+          <a:p>
+            <a:pPr marL="377825" indent="-285750">
+              <a:lnSpc>
+                <a:spcPct val="150000"/>
+              </a:lnSpc>
+              <a:buFont typeface="Arial" panose="020B0604020202020204" pitchFamily="34" charset="0"/>
+              <a:buChar char="•"/>
+            </a:pPr>
+            <a:r>
+              <a:rPr lang="ko-KR" altLang="en-US" sz="1600" dirty="0"/>
+              <a:t>천연가스 공급과정에서의 시장지배력 행사를 완화하기 위해 정부와 규제기관은 파이프라인에 대한 제</a:t>
+            </a:r>
+            <a:r>
+              <a:rPr lang="en-US" altLang="ko-KR" sz="1600" dirty="0"/>
+              <a:t>3</a:t>
+            </a:r>
+            <a:r>
+              <a:rPr lang="ko-KR" altLang="en-US" sz="1600" dirty="0"/>
+              <a:t>자 접근 보장</a:t>
+            </a:r>
+            <a:r>
+              <a:rPr lang="en-US" altLang="ko-KR" sz="1600" dirty="0"/>
+              <a:t>, </a:t>
+            </a:r>
+            <a:r>
+              <a:rPr lang="ko-KR" altLang="en-US" sz="1600" dirty="0"/>
+              <a:t>가격 규제</a:t>
+            </a:r>
+            <a:r>
+              <a:rPr lang="en-US" altLang="ko-KR" sz="1600" dirty="0"/>
+              <a:t>, </a:t>
+            </a:r>
+            <a:r>
+              <a:rPr lang="ko-KR" altLang="en-US" sz="1600" dirty="0"/>
+              <a:t>경쟁 촉진 등을 도입하고 있다</a:t>
+            </a:r>
+            <a:r>
+              <a:rPr lang="en-US" altLang="ko-KR" sz="1600" dirty="0"/>
+              <a:t>.</a:t>
+            </a:r>
+          </a:p>
+          <a:p>
+            <a:pPr marL="377825" indent="-285750">
+              <a:lnSpc>
+                <a:spcPct val="150000"/>
+              </a:lnSpc>
+              <a:buFont typeface="Arial" panose="020B0604020202020204" pitchFamily="34" charset="0"/>
+              <a:buChar char="•"/>
+            </a:pPr>
+            <a:endParaRPr lang="en-US" altLang="ko-KR" sz="1600" dirty="0"/>
+          </a:p>
+          <a:p>
+            <a:pPr marL="377825" indent="-285750">
+              <a:lnSpc>
+                <a:spcPct val="150000"/>
+              </a:lnSpc>
+              <a:buFont typeface="Arial" panose="020B0604020202020204" pitchFamily="34" charset="0"/>
+              <a:buChar char="•"/>
+            </a:pPr>
+            <a:r>
+              <a:rPr lang="ko-KR" altLang="en-US" sz="1600" dirty="0"/>
+              <a:t>천연가스 시장에서는 장기계약이 공급자들의 시장지배력 행사에 중요한 수단으로 작용한다</a:t>
+            </a:r>
+            <a:r>
+              <a:rPr lang="en-US" altLang="ko-KR" sz="1600" dirty="0"/>
+              <a:t>.</a:t>
+            </a:r>
+          </a:p>
+          <a:p>
+            <a:pPr marL="835025" lvl="1" indent="-285750">
+              <a:lnSpc>
+                <a:spcPct val="150000"/>
+              </a:lnSpc>
+              <a:buFont typeface="Wingdings" panose="05000000000000000000" pitchFamily="2" charset="2"/>
+              <a:buChar char="ü"/>
+            </a:pPr>
+            <a:r>
+              <a:rPr lang="ko-KR" altLang="en-US" sz="1600" dirty="0"/>
+              <a:t>장기계약은 공급자와 수요자 간 안정성을 제공하지만</a:t>
+            </a:r>
+            <a:r>
+              <a:rPr lang="en-US" altLang="ko-KR" sz="1600" dirty="0"/>
+              <a:t>, </a:t>
+            </a:r>
+            <a:r>
+              <a:rPr lang="ko-KR" altLang="en-US" sz="1600" dirty="0"/>
+              <a:t>구매자의 에너지 전환 가능성을 제약하여 </a:t>
+            </a:r>
+            <a:r>
+              <a:rPr lang="ko-KR" altLang="en-US" sz="1600" dirty="0" err="1"/>
+              <a:t>에너지원간의</a:t>
+            </a:r>
+            <a:r>
+              <a:rPr lang="ko-KR" altLang="en-US" sz="1600" dirty="0"/>
+              <a:t> 경쟁이 제한될 수 있다</a:t>
+            </a:r>
+            <a:r>
+              <a:rPr lang="en-US" altLang="ko-KR" sz="1600" dirty="0"/>
+              <a:t>.</a:t>
+            </a:r>
+          </a:p>
+          <a:p>
+            <a:pPr marL="835025" lvl="1" indent="-285750">
+              <a:lnSpc>
+                <a:spcPct val="150000"/>
+              </a:lnSpc>
+              <a:buFont typeface="Wingdings" panose="05000000000000000000" pitchFamily="2" charset="2"/>
+              <a:buChar char="ü"/>
+            </a:pPr>
+            <a:r>
+              <a:rPr lang="ko-KR" altLang="en-US" sz="1600" dirty="0"/>
+              <a:t>장기계약 비중이 높으면 신규 공급자 진입이 어렵고</a:t>
+            </a:r>
+            <a:r>
+              <a:rPr lang="en-US" altLang="ko-KR" sz="1600" dirty="0"/>
+              <a:t>, </a:t>
+            </a:r>
+            <a:r>
+              <a:rPr lang="ko-KR" altLang="en-US" sz="1600" dirty="0"/>
+              <a:t>가격 경쟁이 감소하여 소비자 가격이 상승할 수 있다</a:t>
+            </a:r>
+            <a:r>
+              <a:rPr lang="en-US" altLang="ko-KR" sz="1600" dirty="0"/>
+              <a:t>.</a:t>
+            </a:r>
+          </a:p>
+        </p:txBody>
+      </p:sp>
+    </p:spTree>
+    <p:extLst>
+      <p:ext uri="{BB962C8B-B14F-4D97-AF65-F5344CB8AC3E}">
+        <p14:creationId xmlns:p14="http://schemas.microsoft.com/office/powerpoint/2010/main" val="1258814359"/>
+      </p:ext>
+    </p:extLst>
+  </p:cSld>
+  <p:clrMapOvr>
+    <a:masterClrMapping/>
+  </p:clrMapOvr>
+</p:sld>
+</file>
+
+<file path=ppt/slides/slide41.xml><?xml version="1.0" encoding="utf-8"?>
+<p:sld xmlns:a="http://schemas.openxmlformats.org/drawingml/2006/main" xmlns:r="http://schemas.openxmlformats.org/officeDocument/2006/relationships" xmlns:p="http://schemas.openxmlformats.org/presentationml/2006/main">
+  <p:cSld>
+    <p:spTree>
+      <p:nvGrpSpPr>
+        <p:cNvPr id="1" name="">
+          <a:extLst>
+            <a:ext uri="{FF2B5EF4-FFF2-40B4-BE49-F238E27FC236}">
+              <a16:creationId xmlns:a16="http://schemas.microsoft.com/office/drawing/2014/main" id="{842F4EE6-7E91-48AF-7C58-6944D11764E4}"/>
+            </a:ext>
+          </a:extLst>
+        </p:cNvPr>
+        <p:cNvGrpSpPr/>
+        <p:nvPr/>
+      </p:nvGrpSpPr>
+      <p:grpSpPr>
+        <a:xfrm>
+          <a:off x="0" y="0"/>
+          <a:ext cx="0" cy="0"/>
+          <a:chOff x="0" y="0"/>
+          <a:chExt cx="0" cy="0"/>
+        </a:xfrm>
+      </p:grpSpPr>
+      <p:pic>
+        <p:nvPicPr>
+          <p:cNvPr id="6" name="그림 5" descr="텍스트, 로고, 원, 폰트이(가) 표시된 사진&#10;&#10;AI 생성 콘텐츠는 정확하지 않을 수 있습니다.">
+            <a:extLst>
+              <a:ext uri="{FF2B5EF4-FFF2-40B4-BE49-F238E27FC236}">
+                <a16:creationId xmlns:a16="http://schemas.microsoft.com/office/drawing/2014/main" id="{7B4FA3E8-3B2E-5DD1-14B7-BC328A0EB499}"/>
+              </a:ext>
+            </a:extLst>
+          </p:cNvPr>
+          <p:cNvPicPr>
+            <a:picLocks noChangeAspect="1"/>
+          </p:cNvPicPr>
+          <p:nvPr/>
+        </p:nvPicPr>
+        <p:blipFill>
+          <a:blip r:embed="rId2">
+            <a:alphaModFix amt="20000"/>
+            <a:extLst>
+              <a:ext uri="{28A0092B-C50C-407E-A947-70E740481C1C}">
+                <a14:useLocalDpi xmlns:a14="http://schemas.microsoft.com/office/drawing/2010/main" val="0"/>
+              </a:ext>
+            </a:extLst>
+          </a:blip>
+          <a:stretch>
+            <a:fillRect/>
+          </a:stretch>
+        </p:blipFill>
+        <p:spPr>
+          <a:xfrm>
+            <a:off x="4012070" y="1673061"/>
+            <a:ext cx="4167861" cy="4167861"/>
+          </a:xfrm>
+          <a:prstGeom prst="rect">
+            <a:avLst/>
+          </a:prstGeom>
+        </p:spPr>
+      </p:pic>
+      <p:sp>
+        <p:nvSpPr>
+          <p:cNvPr id="4" name="슬라이드 번호 개체 틀 3">
+            <a:extLst>
+              <a:ext uri="{FF2B5EF4-FFF2-40B4-BE49-F238E27FC236}">
+                <a16:creationId xmlns:a16="http://schemas.microsoft.com/office/drawing/2014/main" id="{9C7E8049-A358-3CF2-F13F-C40AE21B0A37}"/>
+              </a:ext>
+            </a:extLst>
+          </p:cNvPr>
+          <p:cNvSpPr>
+            <a:spLocks noGrp="1"/>
+          </p:cNvSpPr>
+          <p:nvPr>
+            <p:ph type="sldNum" sz="quarter" idx="12"/>
+          </p:nvPr>
+        </p:nvSpPr>
+        <p:spPr/>
+        <p:txBody>
+          <a:bodyPr/>
+          <a:lstStyle/>
+          <a:p>
+            <a:fld id="{109C872D-39A9-4065-8BF3-6A613116E2A1}" type="slidenum">
+              <a:rPr lang="ko-KR" altLang="en-US" smtClean="0"/>
+              <a:t>41</a:t>
+            </a:fld>
+            <a:endParaRPr lang="ko-KR" altLang="en-US"/>
+          </a:p>
+        </p:txBody>
+      </p:sp>
+      <p:sp>
+        <p:nvSpPr>
+          <p:cNvPr id="7" name="제목 1">
+            <a:extLst>
+              <a:ext uri="{FF2B5EF4-FFF2-40B4-BE49-F238E27FC236}">
+                <a16:creationId xmlns:a16="http://schemas.microsoft.com/office/drawing/2014/main" id="{7F97B70B-EABF-EACD-2EA9-BB8AB3F71142}"/>
+              </a:ext>
+            </a:extLst>
+          </p:cNvPr>
+          <p:cNvSpPr>
+            <a:spLocks noGrp="1"/>
+          </p:cNvSpPr>
+          <p:nvPr>
+            <p:ph type="title"/>
+          </p:nvPr>
+        </p:nvSpPr>
+        <p:spPr>
+          <a:xfrm>
+            <a:off x="641903" y="2221948"/>
+            <a:ext cx="11302723" cy="2768198"/>
+          </a:xfrm>
+          <a:effectLst>
+            <a:reflection blurRad="50800" stA="45000" endPos="44000" dir="5400000" sy="-100000" algn="bl" rotWithShape="0"/>
+          </a:effectLst>
+        </p:spPr>
+        <p:txBody>
+          <a:bodyPr anchor="ctr" anchorCtr="0"/>
+          <a:lstStyle/>
+          <a:p>
+            <a:r>
+              <a:rPr lang="en-US" altLang="ko-KR" sz="4000" b="1" i="0" spc="150" dirty="0"/>
+              <a:t>Section 5. </a:t>
+            </a:r>
+            <a:r>
+              <a:rPr lang="ko-KR" altLang="en-US" sz="4000" b="1" i="0" spc="150" dirty="0"/>
+              <a:t>천연가스 시장의 탈규제와 구조개편</a:t>
+            </a:r>
+            <a:endParaRPr lang="ko-KR" altLang="en-US" sz="3600" i="0" spc="150" dirty="0"/>
+          </a:p>
+        </p:txBody>
+      </p:sp>
+    </p:spTree>
+    <p:extLst>
+      <p:ext uri="{BB962C8B-B14F-4D97-AF65-F5344CB8AC3E}">
+        <p14:creationId xmlns:p14="http://schemas.microsoft.com/office/powerpoint/2010/main" val="3420464639"/>
+      </p:ext>
+    </p:extLst>
+  </p:cSld>
+  <p:clrMapOvr>
+    <a:masterClrMapping/>
+  </p:clrMapOvr>
+</p:sld>
+</file>
+
+<file path=ppt/slides/slide42.xml><?xml version="1.0" encoding="utf-8"?>
+<p:sld xmlns:a="http://schemas.openxmlformats.org/drawingml/2006/main" xmlns:r="http://schemas.openxmlformats.org/officeDocument/2006/relationships" xmlns:p="http://schemas.openxmlformats.org/presentationml/2006/main">
+  <p:cSld>
+    <p:spTree>
+      <p:nvGrpSpPr>
+        <p:cNvPr id="1" name="">
+          <a:extLst>
+            <a:ext uri="{FF2B5EF4-FFF2-40B4-BE49-F238E27FC236}">
+              <a16:creationId xmlns:a16="http://schemas.microsoft.com/office/drawing/2014/main" id="{50691A43-D562-52E1-09A5-D7835E9E2C67}"/>
+            </a:ext>
+          </a:extLst>
+        </p:cNvPr>
+        <p:cNvGrpSpPr/>
+        <p:nvPr/>
+      </p:nvGrpSpPr>
+      <p:grpSpPr>
+        <a:xfrm>
+          <a:off x="0" y="0"/>
+          <a:ext cx="0" cy="0"/>
+          <a:chOff x="0" y="0"/>
+          <a:chExt cx="0" cy="0"/>
+        </a:xfrm>
+      </p:grpSpPr>
+      <p:sp>
+        <p:nvSpPr>
+          <p:cNvPr id="2" name="제목 1">
+            <a:extLst>
+              <a:ext uri="{FF2B5EF4-FFF2-40B4-BE49-F238E27FC236}">
+                <a16:creationId xmlns:a16="http://schemas.microsoft.com/office/drawing/2014/main" id="{71A6EBC1-7B5E-36B1-D308-490A02A1B91C}"/>
+              </a:ext>
+            </a:extLst>
+          </p:cNvPr>
+          <p:cNvSpPr>
+            <a:spLocks noGrp="1"/>
+          </p:cNvSpPr>
+          <p:nvPr>
+            <p:ph type="title"/>
+          </p:nvPr>
+        </p:nvSpPr>
+        <p:spPr/>
+        <p:txBody>
+          <a:bodyPr/>
+          <a:lstStyle/>
+          <a:p>
+            <a:r>
+              <a:rPr lang="ko-KR" altLang="en-US" dirty="0"/>
+              <a:t>천연가스 시장의 탈규제와 구조개편</a:t>
+            </a:r>
+          </a:p>
+        </p:txBody>
+      </p:sp>
+      <p:sp>
+        <p:nvSpPr>
+          <p:cNvPr id="4" name="슬라이드 번호 개체 틀 3">
+            <a:extLst>
+              <a:ext uri="{FF2B5EF4-FFF2-40B4-BE49-F238E27FC236}">
+                <a16:creationId xmlns:a16="http://schemas.microsoft.com/office/drawing/2014/main" id="{C9B0A3F7-57BC-23EA-D8B2-0F778FD540DF}"/>
+              </a:ext>
+            </a:extLst>
+          </p:cNvPr>
+          <p:cNvSpPr>
+            <a:spLocks noGrp="1"/>
+          </p:cNvSpPr>
+          <p:nvPr>
+            <p:ph type="sldNum" sz="quarter" idx="12"/>
+          </p:nvPr>
+        </p:nvSpPr>
+        <p:spPr/>
+        <p:txBody>
+          <a:bodyPr/>
+          <a:lstStyle/>
+          <a:p>
+            <a:fld id="{109C872D-39A9-4065-8BF3-6A613116E2A1}" type="slidenum">
+              <a:rPr lang="ko-KR" altLang="en-US" smtClean="0"/>
+              <a:t>42</a:t>
+            </a:fld>
+            <a:endParaRPr lang="ko-KR" altLang="en-US"/>
+          </a:p>
+        </p:txBody>
+      </p:sp>
+      <p:sp>
+        <p:nvSpPr>
+          <p:cNvPr id="3" name="TextBox 2">
+            <a:extLst>
+              <a:ext uri="{FF2B5EF4-FFF2-40B4-BE49-F238E27FC236}">
+                <a16:creationId xmlns:a16="http://schemas.microsoft.com/office/drawing/2014/main" id="{7CBE5746-4F67-FD51-6610-89E7EE472640}"/>
+              </a:ext>
+            </a:extLst>
+          </p:cNvPr>
+          <p:cNvSpPr txBox="1"/>
+          <p:nvPr/>
+        </p:nvSpPr>
+        <p:spPr>
+          <a:xfrm>
+            <a:off x="288790" y="958844"/>
+            <a:ext cx="11118453" cy="5584670"/>
+          </a:xfrm>
+          <a:prstGeom prst="rect">
+            <a:avLst/>
+          </a:prstGeom>
+          <a:noFill/>
+        </p:spPr>
+        <p:txBody>
+          <a:bodyPr wrap="square" rtlCol="0" anchor="t">
+            <a:spAutoFit/>
+          </a:bodyPr>
+          <a:lstStyle/>
+          <a:p>
+            <a:pPr marL="377825" indent="-285750">
+              <a:lnSpc>
+                <a:spcPct val="150000"/>
+              </a:lnSpc>
+              <a:buFont typeface="Arial" panose="020B0604020202020204" pitchFamily="34" charset="0"/>
+              <a:buChar char="•"/>
+            </a:pPr>
+            <a:r>
+              <a:rPr lang="ko-KR" altLang="en-US" sz="1600" dirty="0"/>
+              <a:t>글로벌 천연가스 시장에서의 탈규제와 구조개편은 기존의 국가 독점 또는 규제된 통합 구조를 경쟁 중심의 시장 지향 구조로 전환하기 위한 정책적 변화들을 의미한다</a:t>
+            </a:r>
+            <a:r>
+              <a:rPr lang="en-US" altLang="ko-KR" sz="1600" dirty="0"/>
+              <a:t>.</a:t>
+            </a:r>
+          </a:p>
+          <a:p>
+            <a:pPr marL="835025" lvl="1" indent="-285750">
+              <a:lnSpc>
+                <a:spcPct val="150000"/>
+              </a:lnSpc>
+              <a:buFont typeface="Wingdings" panose="05000000000000000000" pitchFamily="2" charset="2"/>
+              <a:buChar char="ü"/>
+            </a:pPr>
+            <a:r>
+              <a:rPr lang="ko-KR" altLang="en-US" sz="1600" dirty="0"/>
+              <a:t>이러한 변화는 </a:t>
+            </a:r>
+            <a:r>
+              <a:rPr lang="en-US" altLang="ko-KR" sz="1600" dirty="0"/>
+              <a:t>1980</a:t>
+            </a:r>
+            <a:r>
+              <a:rPr lang="ko-KR" altLang="en-US" sz="1600" dirty="0"/>
+              <a:t>년대 미국과 영국을 중심으로 본격화되었고</a:t>
+            </a:r>
+            <a:r>
+              <a:rPr lang="en-US" altLang="ko-KR" sz="1600" dirty="0"/>
+              <a:t>, </a:t>
+            </a:r>
+            <a:r>
+              <a:rPr lang="ko-KR" altLang="en-US" sz="1600" dirty="0"/>
+              <a:t>천연가스의 가격 결정 방식</a:t>
+            </a:r>
+            <a:r>
+              <a:rPr lang="en-US" altLang="ko-KR" sz="1600" dirty="0"/>
+              <a:t>, </a:t>
+            </a:r>
+            <a:r>
+              <a:rPr lang="ko-KR" altLang="en-US" sz="1600" dirty="0"/>
+              <a:t>투자 유인</a:t>
+            </a:r>
+            <a:r>
+              <a:rPr lang="en-US" altLang="ko-KR" sz="1600" dirty="0"/>
+              <a:t>, </a:t>
+            </a:r>
+            <a:r>
+              <a:rPr lang="ko-KR" altLang="en-US" sz="1600" dirty="0"/>
+              <a:t>인프라 운영</a:t>
+            </a:r>
+            <a:r>
+              <a:rPr lang="en-US" altLang="ko-KR" sz="1600" dirty="0"/>
+              <a:t>, </a:t>
+            </a:r>
+            <a:r>
+              <a:rPr lang="ko-KR" altLang="en-US" sz="1600" dirty="0"/>
+              <a:t>국제 무역 등에 큰 영향을 미쳐왔다</a:t>
+            </a:r>
+            <a:r>
+              <a:rPr lang="en-US" altLang="ko-KR" sz="1600" dirty="0"/>
+              <a:t>.</a:t>
+            </a:r>
+          </a:p>
+          <a:p>
+            <a:pPr marL="835025" lvl="1" indent="-285750">
+              <a:lnSpc>
+                <a:spcPct val="150000"/>
+              </a:lnSpc>
+              <a:buFont typeface="Wingdings" panose="05000000000000000000" pitchFamily="2" charset="2"/>
+              <a:buChar char="ü"/>
+            </a:pPr>
+            <a:r>
+              <a:rPr lang="ko-KR" altLang="en-US" sz="1600" dirty="0"/>
+              <a:t>기업이 천연가스의 공급사슬을 수직 통합하고</a:t>
+            </a:r>
+            <a:r>
+              <a:rPr lang="en-US" altLang="ko-KR" sz="1600" dirty="0"/>
+              <a:t>, </a:t>
+            </a:r>
+            <a:r>
+              <a:rPr lang="ko-KR" altLang="en-US" sz="1600" dirty="0"/>
+              <a:t>가격은 정부 혹은 규제기관이 결정하였지만</a:t>
+            </a:r>
+            <a:r>
+              <a:rPr lang="en-US" altLang="ko-KR" sz="1600" dirty="0"/>
+              <a:t>, </a:t>
+            </a:r>
+            <a:r>
+              <a:rPr lang="ko-KR" altLang="en-US" sz="1600" dirty="0"/>
+              <a:t>시간이 지나면서 이러한 구조가 비효율적이고</a:t>
+            </a:r>
+            <a:r>
+              <a:rPr lang="en-US" altLang="ko-KR" sz="1600" dirty="0"/>
+              <a:t>, </a:t>
+            </a:r>
+            <a:r>
+              <a:rPr lang="ko-KR" altLang="en-US" sz="1600" dirty="0"/>
+              <a:t>시장 변화에 유연하게 대응하기 어렵다는 비판이 잇따르면서</a:t>
+            </a:r>
+            <a:r>
+              <a:rPr lang="en-US" altLang="ko-KR" sz="1600" dirty="0"/>
+              <a:t>, </a:t>
+            </a:r>
+            <a:r>
+              <a:rPr lang="ko-KR" altLang="en-US" sz="1600" dirty="0"/>
+              <a:t>각 국가들은 탈규제와 구조개편을 추진하게 된다</a:t>
+            </a:r>
+            <a:r>
+              <a:rPr lang="en-US" altLang="ko-KR" sz="1600" dirty="0"/>
+              <a:t>.</a:t>
+            </a:r>
+          </a:p>
+          <a:p>
+            <a:pPr marL="377825" indent="-285750">
+              <a:lnSpc>
+                <a:spcPct val="150000"/>
+              </a:lnSpc>
+              <a:buFont typeface="Arial" panose="020B0604020202020204" pitchFamily="34" charset="0"/>
+              <a:buChar char="•"/>
+            </a:pPr>
+            <a:endParaRPr lang="en-US" altLang="ko-KR" sz="1600" dirty="0"/>
+          </a:p>
+          <a:p>
+            <a:pPr marL="377825" indent="-285750">
+              <a:lnSpc>
+                <a:spcPct val="150000"/>
+              </a:lnSpc>
+              <a:buFont typeface="Arial" panose="020B0604020202020204" pitchFamily="34" charset="0"/>
+              <a:buChar char="•"/>
+            </a:pPr>
+            <a:r>
+              <a:rPr lang="ko-KR" altLang="en-US" sz="1600" dirty="0"/>
+              <a:t>탈규제는 가격</a:t>
+            </a:r>
+            <a:r>
+              <a:rPr lang="en-US" altLang="ko-KR" sz="1600" dirty="0"/>
+              <a:t>, </a:t>
+            </a:r>
+            <a:r>
+              <a:rPr lang="ko-KR" altLang="en-US" sz="1600" dirty="0"/>
+              <a:t>시장 진입</a:t>
+            </a:r>
+            <a:r>
+              <a:rPr lang="en-US" altLang="ko-KR" sz="1600" dirty="0"/>
+              <a:t>, </a:t>
+            </a:r>
+            <a:r>
+              <a:rPr lang="ko-KR" altLang="en-US" sz="1600" dirty="0"/>
+              <a:t>운영과 같은 부문에서 정부의 직접적인 통제를 완화하거나</a:t>
+            </a:r>
+            <a:r>
+              <a:rPr lang="en-US" altLang="ko-KR" sz="1600" dirty="0"/>
+              <a:t> </a:t>
+            </a:r>
+            <a:r>
+              <a:rPr lang="ko-KR" altLang="en-US" sz="1600" dirty="0"/>
+              <a:t>제거하는 것을 의미한다</a:t>
+            </a:r>
+            <a:r>
+              <a:rPr lang="en-US" altLang="ko-KR" sz="1600" dirty="0"/>
+              <a:t>.</a:t>
+            </a:r>
+          </a:p>
+          <a:p>
+            <a:pPr marL="377825" indent="-285750">
+              <a:lnSpc>
+                <a:spcPct val="150000"/>
+              </a:lnSpc>
+              <a:buFont typeface="Arial" panose="020B0604020202020204" pitchFamily="34" charset="0"/>
+              <a:buChar char="•"/>
+            </a:pPr>
+            <a:endParaRPr lang="en-US" altLang="ko-KR" sz="1600" dirty="0"/>
+          </a:p>
+          <a:p>
+            <a:pPr marL="377825" indent="-285750">
+              <a:lnSpc>
+                <a:spcPct val="150000"/>
+              </a:lnSpc>
+              <a:buFont typeface="Arial" panose="020B0604020202020204" pitchFamily="34" charset="0"/>
+              <a:buChar char="•"/>
+            </a:pPr>
+            <a:r>
+              <a:rPr lang="ko-KR" altLang="en-US" sz="1600" dirty="0"/>
+              <a:t>구조개편은 기존의 수직적으로 통합된 기업을 기능별로 분리하여</a:t>
+            </a:r>
+            <a:r>
+              <a:rPr lang="en-US" altLang="ko-KR" sz="1600" dirty="0"/>
+              <a:t>, </a:t>
+            </a:r>
+            <a:r>
+              <a:rPr lang="ko-KR" altLang="en-US" sz="1600" dirty="0"/>
+              <a:t>경쟁이 가능한 부문과 자연독점적 성격을 가진 부문을 구분하는 과정을 의미한다</a:t>
+            </a:r>
+            <a:r>
+              <a:rPr lang="en-US" altLang="ko-KR" sz="1600" dirty="0"/>
+              <a:t>.</a:t>
+            </a:r>
+          </a:p>
+          <a:p>
+            <a:pPr marL="835025" lvl="1" indent="-285750">
+              <a:lnSpc>
+                <a:spcPct val="150000"/>
+              </a:lnSpc>
+              <a:buFont typeface="Wingdings" panose="05000000000000000000" pitchFamily="2" charset="2"/>
+              <a:buChar char="Ø"/>
+            </a:pPr>
+            <a:r>
+              <a:rPr lang="ko-KR" altLang="en-US" sz="1600" dirty="0"/>
+              <a:t>예를 들면</a:t>
+            </a:r>
+            <a:r>
+              <a:rPr lang="en-US" altLang="ko-KR" sz="1600" dirty="0"/>
+              <a:t>, </a:t>
+            </a:r>
+            <a:r>
+              <a:rPr lang="ko-KR" altLang="en-US" sz="1600" dirty="0"/>
+              <a:t>에너지 산업에서는 생산과 판매 부문에 경쟁을 도입하고</a:t>
+            </a:r>
+            <a:r>
+              <a:rPr lang="en-US" altLang="ko-KR" sz="1600" dirty="0"/>
+              <a:t>, </a:t>
+            </a:r>
+            <a:r>
+              <a:rPr lang="ko-KR" altLang="en-US" sz="1600" dirty="0"/>
+              <a:t>송전이나 파이프라인 수송 부문은 공공적 규제를 유지하는 방식이 대표적이다</a:t>
+            </a:r>
+            <a:r>
+              <a:rPr lang="en-US" altLang="ko-KR" sz="1600" dirty="0"/>
+              <a:t>.</a:t>
+            </a:r>
+          </a:p>
+          <a:p>
+            <a:pPr marL="835025" lvl="1" indent="-285750">
+              <a:lnSpc>
+                <a:spcPct val="150000"/>
+              </a:lnSpc>
+              <a:buFont typeface="Wingdings" panose="05000000000000000000" pitchFamily="2" charset="2"/>
+              <a:buChar char="ü"/>
+            </a:pPr>
+            <a:endParaRPr lang="en-US" altLang="ko-KR" sz="1600" dirty="0"/>
+          </a:p>
+        </p:txBody>
+      </p:sp>
+    </p:spTree>
+    <p:extLst>
+      <p:ext uri="{BB962C8B-B14F-4D97-AF65-F5344CB8AC3E}">
+        <p14:creationId xmlns:p14="http://schemas.microsoft.com/office/powerpoint/2010/main" val="1798013359"/>
+      </p:ext>
+    </p:extLst>
+  </p:cSld>
+  <p:clrMapOvr>
+    <a:masterClrMapping/>
+  </p:clrMapOvr>
+</p:sld>
+</file>
+
+<file path=ppt/slides/slide43.xml><?xml version="1.0" encoding="utf-8"?>
+<p:sld xmlns:a="http://schemas.openxmlformats.org/drawingml/2006/main" xmlns:r="http://schemas.openxmlformats.org/officeDocument/2006/relationships" xmlns:p="http://schemas.openxmlformats.org/presentationml/2006/main">
+  <p:cSld>
+    <p:spTree>
+      <p:nvGrpSpPr>
+        <p:cNvPr id="1" name="">
+          <a:extLst>
+            <a:ext uri="{FF2B5EF4-FFF2-40B4-BE49-F238E27FC236}">
+              <a16:creationId xmlns:a16="http://schemas.microsoft.com/office/drawing/2014/main" id="{E7DF785B-1A00-44E1-50DF-8F556CC9D6D3}"/>
+            </a:ext>
+          </a:extLst>
+        </p:cNvPr>
+        <p:cNvGrpSpPr/>
+        <p:nvPr/>
+      </p:nvGrpSpPr>
+      <p:grpSpPr>
+        <a:xfrm>
+          <a:off x="0" y="0"/>
+          <a:ext cx="0" cy="0"/>
+          <a:chOff x="0" y="0"/>
+          <a:chExt cx="0" cy="0"/>
+        </a:xfrm>
+      </p:grpSpPr>
+      <p:sp>
+        <p:nvSpPr>
+          <p:cNvPr id="2" name="제목 1">
+            <a:extLst>
+              <a:ext uri="{FF2B5EF4-FFF2-40B4-BE49-F238E27FC236}">
+                <a16:creationId xmlns:a16="http://schemas.microsoft.com/office/drawing/2014/main" id="{48BFCC4B-DFD6-A58C-8878-00718F20B1AD}"/>
+              </a:ext>
+            </a:extLst>
+          </p:cNvPr>
+          <p:cNvSpPr>
+            <a:spLocks noGrp="1"/>
+          </p:cNvSpPr>
+          <p:nvPr>
+            <p:ph type="title"/>
+          </p:nvPr>
+        </p:nvSpPr>
+        <p:spPr/>
+        <p:txBody>
+          <a:bodyPr/>
+          <a:lstStyle/>
+          <a:p>
+            <a:r>
+              <a:rPr lang="ko-KR" altLang="en-US" dirty="0"/>
+              <a:t>천연가스 시장의 탈규제와 구조개편</a:t>
+            </a:r>
+          </a:p>
+        </p:txBody>
+      </p:sp>
+      <p:sp>
+        <p:nvSpPr>
+          <p:cNvPr id="4" name="슬라이드 번호 개체 틀 3">
+            <a:extLst>
+              <a:ext uri="{FF2B5EF4-FFF2-40B4-BE49-F238E27FC236}">
+                <a16:creationId xmlns:a16="http://schemas.microsoft.com/office/drawing/2014/main" id="{AD324C00-6E67-3743-58A4-398D6E1CD9E9}"/>
+              </a:ext>
+            </a:extLst>
+          </p:cNvPr>
+          <p:cNvSpPr>
+            <a:spLocks noGrp="1"/>
+          </p:cNvSpPr>
+          <p:nvPr>
+            <p:ph type="sldNum" sz="quarter" idx="12"/>
+          </p:nvPr>
+        </p:nvSpPr>
+        <p:spPr/>
+        <p:txBody>
+          <a:bodyPr/>
+          <a:lstStyle/>
+          <a:p>
+            <a:fld id="{109C872D-39A9-4065-8BF3-6A613116E2A1}" type="slidenum">
+              <a:rPr lang="ko-KR" altLang="en-US" smtClean="0"/>
+              <a:t>43</a:t>
+            </a:fld>
+            <a:endParaRPr lang="ko-KR" altLang="en-US"/>
+          </a:p>
+        </p:txBody>
+      </p:sp>
+      <p:sp>
+        <p:nvSpPr>
+          <p:cNvPr id="3" name="TextBox 2">
+            <a:extLst>
+              <a:ext uri="{FF2B5EF4-FFF2-40B4-BE49-F238E27FC236}">
+                <a16:creationId xmlns:a16="http://schemas.microsoft.com/office/drawing/2014/main" id="{7BA446E4-74EA-3A2E-F737-B06AC71F710F}"/>
+              </a:ext>
+            </a:extLst>
+          </p:cNvPr>
+          <p:cNvSpPr txBox="1"/>
+          <p:nvPr/>
+        </p:nvSpPr>
+        <p:spPr>
+          <a:xfrm>
+            <a:off x="288790" y="958844"/>
+            <a:ext cx="11118453" cy="5584670"/>
+          </a:xfrm>
+          <a:prstGeom prst="rect">
+            <a:avLst/>
+          </a:prstGeom>
+          <a:noFill/>
+        </p:spPr>
+        <p:txBody>
+          <a:bodyPr wrap="square" rtlCol="0" anchor="t">
+            <a:spAutoFit/>
+          </a:bodyPr>
+          <a:lstStyle/>
+          <a:p>
+            <a:pPr marL="377825" indent="-285750">
+              <a:lnSpc>
+                <a:spcPct val="150000"/>
+              </a:lnSpc>
+              <a:buFont typeface="Arial" panose="020B0604020202020204" pitchFamily="34" charset="0"/>
+              <a:buChar char="•"/>
+            </a:pPr>
+            <a:r>
+              <a:rPr lang="ko-KR" altLang="en-US" sz="1600" dirty="0"/>
+              <a:t>영국은 가장 먼저 천연가스 시장 자유화를 도입한 국가로</a:t>
+            </a:r>
+            <a:r>
+              <a:rPr lang="en-US" altLang="ko-KR" sz="1600" dirty="0"/>
+              <a:t>, 1980</a:t>
+            </a:r>
+            <a:r>
+              <a:rPr lang="ko-KR" altLang="en-US" sz="1600" dirty="0"/>
+              <a:t>년대 민영화를 시작으로 </a:t>
+            </a:r>
+            <a:r>
+              <a:rPr lang="en-US" altLang="ko-KR" sz="1600" dirty="0"/>
+              <a:t>1998</a:t>
+            </a:r>
+            <a:r>
+              <a:rPr lang="ko-KR" altLang="en-US" sz="1600" dirty="0"/>
+              <a:t>년에는 완전한 소매 경쟁 시장을 구축하였다</a:t>
+            </a:r>
+            <a:r>
+              <a:rPr lang="en-US" altLang="ko-KR" sz="1600" dirty="0"/>
+              <a:t>.</a:t>
+            </a:r>
+          </a:p>
+          <a:p>
+            <a:pPr marL="835025" lvl="1" indent="-285750">
+              <a:lnSpc>
+                <a:spcPct val="150000"/>
+              </a:lnSpc>
+              <a:buFont typeface="Wingdings" panose="05000000000000000000" pitchFamily="2" charset="2"/>
+              <a:buChar char="Ø"/>
+            </a:pPr>
+            <a:r>
+              <a:rPr lang="ko-KR" altLang="en-US" sz="1600" dirty="0"/>
+              <a:t>이 과정에서 제</a:t>
+            </a:r>
+            <a:r>
+              <a:rPr lang="en-US" altLang="ko-KR" sz="1600" dirty="0"/>
+              <a:t>3</a:t>
+            </a:r>
+            <a:r>
+              <a:rPr lang="ko-KR" altLang="en-US" sz="1600" dirty="0"/>
+              <a:t>자 파이프라인 접근</a:t>
+            </a:r>
+            <a:r>
+              <a:rPr lang="en-US" altLang="ko-KR" sz="1600" dirty="0"/>
+              <a:t>, </a:t>
+            </a:r>
+            <a:r>
+              <a:rPr lang="ko-KR" altLang="en-US" sz="1600" dirty="0"/>
+              <a:t>시장 기반 가격 체계</a:t>
+            </a:r>
+            <a:r>
+              <a:rPr lang="en-US" altLang="ko-KR" sz="1600" dirty="0"/>
+              <a:t>, </a:t>
+            </a:r>
+            <a:r>
+              <a:rPr lang="ko-KR" altLang="en-US" sz="1600" dirty="0"/>
+              <a:t>자연독점 부문의 규제기관 감독 등의 제도들이 단계적으로 도입되었다</a:t>
+            </a:r>
+            <a:r>
+              <a:rPr lang="en-US" altLang="ko-KR" sz="1600" dirty="0"/>
+              <a:t>.</a:t>
+            </a:r>
+          </a:p>
+          <a:p>
+            <a:pPr marL="835025" lvl="1" indent="-285750">
+              <a:lnSpc>
+                <a:spcPct val="150000"/>
+              </a:lnSpc>
+              <a:buFont typeface="Wingdings" panose="05000000000000000000" pitchFamily="2" charset="2"/>
+              <a:buChar char="Ø"/>
+            </a:pPr>
+            <a:endParaRPr lang="en-US" altLang="ko-KR" sz="1600" dirty="0"/>
+          </a:p>
+          <a:p>
+            <a:pPr marL="377825" indent="-285750">
+              <a:lnSpc>
+                <a:spcPct val="150000"/>
+              </a:lnSpc>
+              <a:buFont typeface="Arial" panose="020B0604020202020204" pitchFamily="34" charset="0"/>
+              <a:buChar char="•"/>
+            </a:pPr>
+            <a:r>
+              <a:rPr lang="ko-KR" altLang="en-US" sz="1600" dirty="0"/>
+              <a:t>유럽연합</a:t>
+            </a:r>
+            <a:r>
+              <a:rPr lang="en-US" altLang="ko-KR" sz="1600" dirty="0"/>
+              <a:t>(EU)</a:t>
+            </a:r>
+            <a:r>
+              <a:rPr lang="ko-KR" altLang="en-US" sz="1600" dirty="0"/>
+              <a:t>도 </a:t>
+            </a:r>
+            <a:r>
+              <a:rPr lang="en-US" altLang="ko-KR" sz="1600" dirty="0"/>
+              <a:t>1990</a:t>
+            </a:r>
+            <a:r>
+              <a:rPr lang="ko-KR" altLang="en-US" sz="1600" dirty="0"/>
+              <a:t>년대 말부터 </a:t>
+            </a:r>
+            <a:r>
+              <a:rPr lang="en-US" altLang="ko-KR" sz="1600" dirty="0"/>
+              <a:t>‘</a:t>
+            </a:r>
+            <a:r>
+              <a:rPr lang="ko-KR" altLang="en-US" sz="1600" dirty="0"/>
+              <a:t>가스 지침</a:t>
+            </a:r>
+            <a:r>
+              <a:rPr lang="en-US" altLang="ko-KR" sz="1600" dirty="0"/>
+              <a:t>‘</a:t>
+            </a:r>
+            <a:r>
+              <a:rPr lang="ko-KR" altLang="en-US" sz="1600" dirty="0"/>
+              <a:t>을 통해 회원국들의 시장 개방을 유도하였다</a:t>
+            </a:r>
+            <a:r>
+              <a:rPr lang="en-US" altLang="ko-KR" sz="1600" dirty="0"/>
+              <a:t>.</a:t>
+            </a:r>
+          </a:p>
+          <a:p>
+            <a:pPr marL="835025" lvl="1" indent="-285750">
+              <a:lnSpc>
+                <a:spcPct val="150000"/>
+              </a:lnSpc>
+              <a:buFont typeface="Wingdings" panose="05000000000000000000" pitchFamily="2" charset="2"/>
+              <a:buChar char="ü"/>
+            </a:pPr>
+            <a:r>
+              <a:rPr lang="en-US" altLang="ko-KR" sz="1600" dirty="0"/>
+              <a:t>1998</a:t>
+            </a:r>
+            <a:r>
+              <a:rPr lang="ko-KR" altLang="en-US" sz="1600" dirty="0"/>
+              <a:t>년</a:t>
+            </a:r>
+            <a:r>
+              <a:rPr lang="en-US" altLang="ko-KR" sz="1600" dirty="0"/>
+              <a:t>, 2003</a:t>
+            </a:r>
+            <a:r>
+              <a:rPr lang="ko-KR" altLang="en-US" sz="1600" dirty="0"/>
+              <a:t>년</a:t>
+            </a:r>
+            <a:r>
+              <a:rPr lang="en-US" altLang="ko-KR" sz="1600" dirty="0"/>
+              <a:t>, 2009</a:t>
+            </a:r>
+            <a:r>
+              <a:rPr lang="ko-KR" altLang="en-US" sz="1600" dirty="0"/>
+              <a:t>년의 세 차례 지침은 제</a:t>
+            </a:r>
+            <a:r>
+              <a:rPr lang="en-US" altLang="ko-KR" sz="1600" dirty="0"/>
+              <a:t>3</a:t>
+            </a:r>
+            <a:r>
+              <a:rPr lang="ko-KR" altLang="en-US" sz="1600" dirty="0"/>
+              <a:t>자 접근 보장</a:t>
+            </a:r>
+            <a:r>
+              <a:rPr lang="en-US" altLang="ko-KR" sz="1600" dirty="0"/>
+              <a:t>, </a:t>
+            </a:r>
+            <a:r>
+              <a:rPr lang="ko-KR" altLang="en-US" sz="1600" dirty="0"/>
+              <a:t>송</a:t>
+            </a:r>
+            <a:r>
+              <a:rPr lang="en-US" altLang="ko-KR" sz="1600" dirty="0"/>
+              <a:t>·</a:t>
+            </a:r>
+            <a:r>
+              <a:rPr lang="ko-KR" altLang="en-US" sz="1600" dirty="0"/>
+              <a:t>배전과 판매 기능의 법적 분리</a:t>
+            </a:r>
+            <a:r>
+              <a:rPr lang="en-US" altLang="ko-KR" sz="1600" dirty="0"/>
+              <a:t>, </a:t>
+            </a:r>
+            <a:r>
+              <a:rPr lang="ko-KR" altLang="en-US" sz="1600" dirty="0"/>
+              <a:t>독립 규제기관 설치 등을 요구하였고</a:t>
+            </a:r>
+            <a:r>
+              <a:rPr lang="en-US" altLang="ko-KR" sz="1600" dirty="0"/>
+              <a:t>, </a:t>
+            </a:r>
+            <a:r>
+              <a:rPr lang="ko-KR" altLang="en-US" sz="1600" dirty="0"/>
+              <a:t>다수의 국가가 </a:t>
+            </a:r>
+            <a:r>
+              <a:rPr lang="en-US" altLang="ko-KR" sz="1600" dirty="0"/>
+              <a:t>2004</a:t>
+            </a:r>
+            <a:r>
+              <a:rPr lang="ko-KR" altLang="en-US" sz="1600" dirty="0"/>
+              <a:t>년까지 전면 시장 개방을 완료하였다</a:t>
+            </a:r>
+            <a:r>
+              <a:rPr lang="en-US" altLang="ko-KR" sz="1600" dirty="0"/>
+              <a:t>.</a:t>
+            </a:r>
+          </a:p>
+          <a:p>
+            <a:pPr marL="1292225" lvl="2" indent="-285750">
+              <a:lnSpc>
+                <a:spcPct val="150000"/>
+              </a:lnSpc>
+              <a:buFont typeface="Wingdings" panose="05000000000000000000" pitchFamily="2" charset="2"/>
+              <a:buChar char="Ø"/>
+            </a:pPr>
+            <a:r>
+              <a:rPr lang="ko-KR" altLang="en-US" sz="1600" dirty="0"/>
+              <a:t>각국의 제도 도입과 실행 수준은 여전히 상이하며</a:t>
+            </a:r>
+            <a:r>
+              <a:rPr lang="en-US" altLang="ko-KR" sz="1600" dirty="0"/>
+              <a:t>, </a:t>
+            </a:r>
+            <a:r>
+              <a:rPr lang="ko-KR" altLang="en-US" sz="1600" dirty="0"/>
+              <a:t>일부 국가는 구조적 통합성이 강하다</a:t>
+            </a:r>
+            <a:r>
+              <a:rPr lang="en-US" altLang="ko-KR" sz="1600" dirty="0"/>
+              <a:t>.</a:t>
+            </a:r>
+          </a:p>
+          <a:p>
+            <a:pPr marL="377825" indent="-285750">
+              <a:lnSpc>
+                <a:spcPct val="150000"/>
+              </a:lnSpc>
+              <a:buFont typeface="Arial" panose="020B0604020202020204" pitchFamily="34" charset="0"/>
+              <a:buChar char="•"/>
+            </a:pPr>
+            <a:endParaRPr lang="en-US" altLang="ko-KR" sz="1600" dirty="0"/>
+          </a:p>
+          <a:p>
+            <a:pPr marL="377825" indent="-285750">
+              <a:lnSpc>
+                <a:spcPct val="150000"/>
+              </a:lnSpc>
+              <a:buFont typeface="Arial" panose="020B0604020202020204" pitchFamily="34" charset="0"/>
+              <a:buChar char="•"/>
+            </a:pPr>
+            <a:r>
+              <a:rPr lang="ko-KR" altLang="en-US" sz="1600" dirty="0"/>
+              <a:t>미국은 연방 에너지 규제위원회</a:t>
+            </a:r>
+            <a:r>
+              <a:rPr lang="en-US" altLang="ko-KR" sz="1600" dirty="0"/>
+              <a:t>(FERC, Federal Energy Regulatory </a:t>
+            </a:r>
+            <a:r>
+              <a:rPr lang="en-US" altLang="ko-KR" sz="1600" dirty="0" err="1"/>
+              <a:t>Commision</a:t>
+            </a:r>
+            <a:r>
+              <a:rPr lang="en-US" altLang="ko-KR" sz="1600" dirty="0"/>
+              <a:t>)</a:t>
+            </a:r>
+            <a:r>
+              <a:rPr lang="ko-KR" altLang="en-US" sz="1600" dirty="0"/>
+              <a:t>가 </a:t>
+            </a:r>
+            <a:r>
+              <a:rPr lang="en-US" altLang="ko-KR" sz="1600" dirty="0"/>
+              <a:t>1980</a:t>
+            </a:r>
+            <a:r>
+              <a:rPr lang="ko-KR" altLang="en-US" sz="1600" dirty="0"/>
+              <a:t>년대부터 탈규제를 본격 추진하였으며</a:t>
+            </a:r>
+            <a:r>
+              <a:rPr lang="en-US" altLang="ko-KR" sz="1600" dirty="0"/>
+              <a:t>, </a:t>
+            </a:r>
+            <a:r>
+              <a:rPr lang="ko-KR" altLang="en-US" sz="1600" dirty="0"/>
+              <a:t>파이프라인 사업자에게 제</a:t>
+            </a:r>
+            <a:r>
+              <a:rPr lang="en-US" altLang="ko-KR" sz="1600" dirty="0"/>
+              <a:t>3</a:t>
+            </a:r>
+            <a:r>
+              <a:rPr lang="ko-KR" altLang="en-US" sz="1600" dirty="0"/>
+              <a:t>자 접근을 의무화하고</a:t>
+            </a:r>
+            <a:r>
+              <a:rPr lang="en-US" altLang="ko-KR" sz="1600" dirty="0"/>
+              <a:t>, </a:t>
+            </a:r>
+            <a:r>
+              <a:rPr lang="ko-KR" altLang="en-US" sz="1600" dirty="0"/>
+              <a:t>소비자와 생산자가 직접 계약을 체결할 수 있게 하여</a:t>
+            </a:r>
+            <a:r>
+              <a:rPr lang="en-US" altLang="ko-KR" sz="1600" dirty="0"/>
+              <a:t>, </a:t>
+            </a:r>
+            <a:r>
+              <a:rPr lang="ko-KR" altLang="en-US" sz="1600" dirty="0"/>
+              <a:t>경쟁적 도매시장을 형성하였다</a:t>
+            </a:r>
+            <a:r>
+              <a:rPr lang="en-US" altLang="ko-KR" sz="1600" dirty="0"/>
+              <a:t>.</a:t>
+            </a:r>
+          </a:p>
+          <a:p>
+            <a:pPr marL="835025" lvl="1" indent="-285750">
+              <a:lnSpc>
+                <a:spcPct val="150000"/>
+              </a:lnSpc>
+              <a:buFont typeface="Wingdings" panose="05000000000000000000" pitchFamily="2" charset="2"/>
+              <a:buChar char="ü"/>
+            </a:pPr>
+            <a:r>
+              <a:rPr lang="ko-KR" altLang="en-US" sz="1600" dirty="0"/>
+              <a:t>그 결과 미국은 현물 및 선물 시장이 활성화된 </a:t>
+            </a:r>
+            <a:r>
+              <a:rPr lang="ko-KR" altLang="en-US" sz="1600" dirty="0" err="1"/>
+              <a:t>고유동성</a:t>
+            </a:r>
+            <a:r>
+              <a:rPr lang="ko-KR" altLang="en-US" sz="1600" dirty="0"/>
+              <a:t> 시장을 구축하고</a:t>
+            </a:r>
+            <a:r>
+              <a:rPr lang="en-US" altLang="ko-KR" sz="1600" dirty="0"/>
+              <a:t>, </a:t>
+            </a:r>
+            <a:r>
+              <a:rPr lang="ko-KR" altLang="en-US" sz="1600" dirty="0" err="1"/>
+              <a:t>헨리허브를</a:t>
+            </a:r>
+            <a:r>
+              <a:rPr lang="ko-KR" altLang="en-US" sz="1600" dirty="0"/>
+              <a:t> 중심으로 글로벌 가격 신호 전파 기능을 수행하고 있다</a:t>
+            </a:r>
+            <a:r>
+              <a:rPr lang="en-US" altLang="ko-KR" sz="1600" dirty="0"/>
+              <a:t>.</a:t>
+            </a:r>
+          </a:p>
+        </p:txBody>
+      </p:sp>
+    </p:spTree>
+    <p:extLst>
+      <p:ext uri="{BB962C8B-B14F-4D97-AF65-F5344CB8AC3E}">
+        <p14:creationId xmlns:p14="http://schemas.microsoft.com/office/powerpoint/2010/main" val="546954890"/>
+      </p:ext>
+    </p:extLst>
+  </p:cSld>
+  <p:clrMapOvr>
+    <a:masterClrMapping/>
+  </p:clrMapOvr>
+</p:sld>
+</file>
+
+<file path=ppt/slides/slide44.xml><?xml version="1.0" encoding="utf-8"?>
+<p:sld xmlns:a="http://schemas.openxmlformats.org/drawingml/2006/main" xmlns:r="http://schemas.openxmlformats.org/officeDocument/2006/relationships" xmlns:p="http://schemas.openxmlformats.org/presentationml/2006/main">
+  <p:cSld>
+    <p:spTree>
+      <p:nvGrpSpPr>
+        <p:cNvPr id="1" name="">
+          <a:extLst>
+            <a:ext uri="{FF2B5EF4-FFF2-40B4-BE49-F238E27FC236}">
+              <a16:creationId xmlns:a16="http://schemas.microsoft.com/office/drawing/2014/main" id="{FC70EA88-CBA8-F540-EF1B-7AF0DE64EAFC}"/>
+            </a:ext>
+          </a:extLst>
+        </p:cNvPr>
+        <p:cNvGrpSpPr/>
+        <p:nvPr/>
+      </p:nvGrpSpPr>
+      <p:grpSpPr>
+        <a:xfrm>
+          <a:off x="0" y="0"/>
+          <a:ext cx="0" cy="0"/>
+          <a:chOff x="0" y="0"/>
+          <a:chExt cx="0" cy="0"/>
+        </a:xfrm>
+      </p:grpSpPr>
+      <p:sp>
+        <p:nvSpPr>
+          <p:cNvPr id="2" name="제목 1">
+            <a:extLst>
+              <a:ext uri="{FF2B5EF4-FFF2-40B4-BE49-F238E27FC236}">
+                <a16:creationId xmlns:a16="http://schemas.microsoft.com/office/drawing/2014/main" id="{6B68B0A8-FF2A-022E-1EDF-831FC4FEDF60}"/>
+              </a:ext>
+            </a:extLst>
+          </p:cNvPr>
+          <p:cNvSpPr>
+            <a:spLocks noGrp="1"/>
+          </p:cNvSpPr>
+          <p:nvPr>
+            <p:ph type="title"/>
+          </p:nvPr>
+        </p:nvSpPr>
+        <p:spPr/>
+        <p:txBody>
+          <a:bodyPr/>
+          <a:lstStyle/>
+          <a:p>
+            <a:r>
+              <a:rPr lang="ko-KR" altLang="en-US" dirty="0"/>
+              <a:t>천연가스 시장의 탈규제와 구조개편</a:t>
+            </a:r>
+          </a:p>
+        </p:txBody>
+      </p:sp>
+      <p:sp>
+        <p:nvSpPr>
+          <p:cNvPr id="4" name="슬라이드 번호 개체 틀 3">
+            <a:extLst>
+              <a:ext uri="{FF2B5EF4-FFF2-40B4-BE49-F238E27FC236}">
+                <a16:creationId xmlns:a16="http://schemas.microsoft.com/office/drawing/2014/main" id="{B68CC4B4-40AF-1E15-9A36-E112FA61A6E5}"/>
+              </a:ext>
+            </a:extLst>
+          </p:cNvPr>
+          <p:cNvSpPr>
+            <a:spLocks noGrp="1"/>
+          </p:cNvSpPr>
+          <p:nvPr>
+            <p:ph type="sldNum" sz="quarter" idx="12"/>
+          </p:nvPr>
+        </p:nvSpPr>
+        <p:spPr/>
+        <p:txBody>
+          <a:bodyPr/>
+          <a:lstStyle/>
+          <a:p>
+            <a:fld id="{109C872D-39A9-4065-8BF3-6A613116E2A1}" type="slidenum">
+              <a:rPr lang="ko-KR" altLang="en-US" smtClean="0"/>
+              <a:t>44</a:t>
+            </a:fld>
+            <a:endParaRPr lang="ko-KR" altLang="en-US"/>
+          </a:p>
+        </p:txBody>
+      </p:sp>
+      <p:sp>
+        <p:nvSpPr>
+          <p:cNvPr id="3" name="TextBox 2">
+            <a:extLst>
+              <a:ext uri="{FF2B5EF4-FFF2-40B4-BE49-F238E27FC236}">
+                <a16:creationId xmlns:a16="http://schemas.microsoft.com/office/drawing/2014/main" id="{C3F4B649-30ED-D344-711A-3CD4C71BF6A1}"/>
+              </a:ext>
+            </a:extLst>
+          </p:cNvPr>
+          <p:cNvSpPr txBox="1"/>
+          <p:nvPr/>
+        </p:nvSpPr>
+        <p:spPr>
+          <a:xfrm>
+            <a:off x="288790" y="958844"/>
+            <a:ext cx="11118453" cy="4107343"/>
+          </a:xfrm>
+          <a:prstGeom prst="rect">
+            <a:avLst/>
+          </a:prstGeom>
+          <a:noFill/>
+        </p:spPr>
+        <p:txBody>
+          <a:bodyPr wrap="square" rtlCol="0" anchor="t">
+            <a:spAutoFit/>
+          </a:bodyPr>
+          <a:lstStyle/>
+          <a:p>
+            <a:pPr marL="377825" indent="-285750">
+              <a:lnSpc>
+                <a:spcPct val="150000"/>
+              </a:lnSpc>
+              <a:buFont typeface="Arial" panose="020B0604020202020204" pitchFamily="34" charset="0"/>
+              <a:buChar char="•"/>
+            </a:pPr>
+            <a:r>
+              <a:rPr lang="ko-KR" altLang="en-US" sz="1600" dirty="0"/>
+              <a:t>일본은 </a:t>
+            </a:r>
+            <a:r>
+              <a:rPr lang="en-US" altLang="ko-KR" sz="1600" dirty="0"/>
+              <a:t>1990</a:t>
+            </a:r>
+            <a:r>
+              <a:rPr lang="ko-KR" altLang="en-US" sz="1600" dirty="0"/>
+              <a:t>년대 후반부터 점진적인 천연가스 시장 자유화를 추진해왔고</a:t>
+            </a:r>
+            <a:r>
+              <a:rPr lang="en-US" altLang="ko-KR" sz="1600" dirty="0"/>
+              <a:t>, 2020</a:t>
+            </a:r>
+            <a:r>
+              <a:rPr lang="ko-KR" altLang="en-US" sz="1600" dirty="0"/>
+              <a:t>년에는 소매부문까지 완전 자유화를 달성하였다</a:t>
+            </a:r>
+            <a:r>
+              <a:rPr lang="en-US" altLang="ko-KR" sz="1600" dirty="0"/>
+              <a:t>.</a:t>
+            </a:r>
+          </a:p>
+          <a:p>
+            <a:pPr marL="835025" lvl="1" indent="-285750">
+              <a:lnSpc>
+                <a:spcPct val="150000"/>
+              </a:lnSpc>
+              <a:buFont typeface="Wingdings" panose="05000000000000000000" pitchFamily="2" charset="2"/>
+              <a:buChar char="ü"/>
+            </a:pPr>
+            <a:r>
+              <a:rPr lang="ko-KR" altLang="en-US" sz="1600" dirty="0"/>
+              <a:t>그러나 도쿄가스</a:t>
+            </a:r>
+            <a:r>
+              <a:rPr lang="en-US" altLang="ko-KR" sz="1600" dirty="0"/>
+              <a:t>, </a:t>
+            </a:r>
+            <a:r>
+              <a:rPr lang="ko-KR" altLang="en-US" sz="1600" dirty="0"/>
+              <a:t>오사카가스 등 대형 지역가스회사가 여전히 시장을 주도하고 있어</a:t>
+            </a:r>
+            <a:r>
+              <a:rPr lang="en-US" altLang="ko-KR" sz="1600" dirty="0"/>
+              <a:t>, </a:t>
+            </a:r>
+            <a:r>
+              <a:rPr lang="ko-KR" altLang="en-US" sz="1600" dirty="0"/>
+              <a:t>실질적인 경쟁은 제한적이라는 평가도 있다</a:t>
+            </a:r>
+            <a:r>
+              <a:rPr lang="en-US" altLang="ko-KR" sz="1600" dirty="0"/>
+              <a:t>.</a:t>
+            </a:r>
+          </a:p>
+          <a:p>
+            <a:pPr marL="835025" lvl="1" indent="-285750">
+              <a:lnSpc>
+                <a:spcPct val="150000"/>
+              </a:lnSpc>
+              <a:buFont typeface="Wingdings" panose="05000000000000000000" pitchFamily="2" charset="2"/>
+              <a:buChar char="ü"/>
+            </a:pPr>
+            <a:endParaRPr lang="en-US" altLang="ko-KR" sz="1600" dirty="0"/>
+          </a:p>
+          <a:p>
+            <a:pPr marL="377825" indent="-285750">
+              <a:lnSpc>
+                <a:spcPct val="150000"/>
+              </a:lnSpc>
+              <a:buFont typeface="Arial" panose="020B0604020202020204" pitchFamily="34" charset="0"/>
+              <a:buChar char="•"/>
+            </a:pPr>
+            <a:r>
+              <a:rPr lang="ko-KR" altLang="en-US" sz="1600" dirty="0"/>
+              <a:t>한국은 중국보다 점진적 접근을 취하고 있다</a:t>
+            </a:r>
+            <a:r>
+              <a:rPr lang="en-US" altLang="ko-KR" sz="1600" dirty="0"/>
+              <a:t>.</a:t>
+            </a:r>
+          </a:p>
+          <a:p>
+            <a:pPr marL="835025" lvl="1" indent="-285750">
+              <a:lnSpc>
+                <a:spcPct val="150000"/>
+              </a:lnSpc>
+              <a:buFont typeface="Wingdings" panose="05000000000000000000" pitchFamily="2" charset="2"/>
+              <a:buChar char="ü"/>
+            </a:pPr>
+            <a:r>
+              <a:rPr lang="ko-KR" altLang="en-US" sz="1600" dirty="0"/>
+              <a:t>한국은 한국가스공사</a:t>
+            </a:r>
+            <a:r>
+              <a:rPr lang="en-US" altLang="ko-KR" sz="1600" dirty="0"/>
+              <a:t>(KOGAS)</a:t>
+            </a:r>
+            <a:r>
+              <a:rPr lang="ko-KR" altLang="en-US" sz="1600" dirty="0"/>
+              <a:t>를 중심으로</a:t>
+            </a:r>
+            <a:r>
+              <a:rPr lang="en-US" altLang="ko-KR" sz="1600" dirty="0"/>
+              <a:t>, </a:t>
+            </a:r>
+            <a:r>
+              <a:rPr lang="ko-KR" altLang="en-US" sz="1600" dirty="0"/>
+              <a:t>수입</a:t>
+            </a:r>
+            <a:r>
+              <a:rPr lang="en-US" altLang="ko-KR" sz="1600" dirty="0"/>
+              <a:t>, </a:t>
+            </a:r>
+            <a:r>
+              <a:rPr lang="ko-KR" altLang="en-US" sz="1600" dirty="0"/>
+              <a:t>도매</a:t>
+            </a:r>
+            <a:r>
+              <a:rPr lang="en-US" altLang="ko-KR" sz="1600" dirty="0"/>
+              <a:t>, </a:t>
+            </a:r>
+            <a:r>
+              <a:rPr lang="ko-KR" altLang="en-US" sz="1600" dirty="0"/>
+              <a:t>인프라 운영이 통합된 규제된 구조를 유지하고 있고</a:t>
+            </a:r>
+            <a:r>
+              <a:rPr lang="en-US" altLang="ko-KR" sz="1600" dirty="0"/>
+              <a:t>, </a:t>
+            </a:r>
+            <a:r>
+              <a:rPr lang="ko-KR" altLang="en-US" sz="1600" dirty="0"/>
+              <a:t>일부 발전용 및 산업용에 한해 시장화를 시도하고 있다</a:t>
+            </a:r>
+            <a:r>
+              <a:rPr lang="en-US" altLang="ko-KR" sz="1600" dirty="0"/>
+              <a:t>.</a:t>
+            </a:r>
+          </a:p>
+          <a:p>
+            <a:pPr marL="835025" lvl="1" indent="-285750">
+              <a:lnSpc>
+                <a:spcPct val="150000"/>
+              </a:lnSpc>
+              <a:buFont typeface="Wingdings" panose="05000000000000000000" pitchFamily="2" charset="2"/>
+              <a:buChar char="ü"/>
+            </a:pPr>
+            <a:r>
+              <a:rPr lang="ko-KR" altLang="en-US" sz="1600" dirty="0"/>
+              <a:t>중국은 </a:t>
+            </a:r>
+            <a:r>
+              <a:rPr lang="en-US" altLang="ko-KR" sz="1600" dirty="0"/>
+              <a:t>2020</a:t>
+            </a:r>
+            <a:r>
+              <a:rPr lang="ko-KR" altLang="en-US" sz="1600" dirty="0"/>
+              <a:t>년 국가 파이프라인공사를 설립하여 송</a:t>
+            </a:r>
+            <a:r>
+              <a:rPr lang="en-US" altLang="ko-KR" sz="1600" dirty="0"/>
+              <a:t>·</a:t>
+            </a:r>
+            <a:r>
+              <a:rPr lang="ko-KR" altLang="en-US" sz="1600" dirty="0"/>
+              <a:t>배전 인프라를 생산</a:t>
+            </a:r>
+            <a:r>
+              <a:rPr lang="en-US" altLang="ko-KR" sz="1600" dirty="0"/>
+              <a:t>·</a:t>
+            </a:r>
+            <a:r>
+              <a:rPr lang="ko-KR" altLang="en-US" sz="1600" dirty="0"/>
+              <a:t>판매 부문과 분리하는 구조조정을 착수하여</a:t>
+            </a:r>
+            <a:r>
+              <a:rPr lang="en-US" altLang="ko-KR" sz="1600" dirty="0"/>
+              <a:t>, </a:t>
+            </a:r>
+            <a:r>
+              <a:rPr lang="ko-KR" altLang="en-US" sz="1600" dirty="0"/>
+              <a:t>천연가스 산업의 효율성과 민간투자 유인을 강화하려는 시도를 하고 있다</a:t>
+            </a:r>
+            <a:r>
+              <a:rPr lang="en-US" altLang="ko-KR" sz="1600" dirty="0"/>
+              <a:t>.</a:t>
+            </a:r>
+          </a:p>
+          <a:p>
+            <a:pPr marL="835025" lvl="1" indent="-285750">
+              <a:lnSpc>
+                <a:spcPct val="150000"/>
+              </a:lnSpc>
+              <a:buFont typeface="Wingdings" panose="05000000000000000000" pitchFamily="2" charset="2"/>
+              <a:buChar char="ü"/>
+            </a:pPr>
+            <a:endParaRPr lang="en-US" altLang="ko-KR" sz="1600" dirty="0"/>
+          </a:p>
+        </p:txBody>
+      </p:sp>
+    </p:spTree>
+    <p:extLst>
+      <p:ext uri="{BB962C8B-B14F-4D97-AF65-F5344CB8AC3E}">
+        <p14:creationId xmlns:p14="http://schemas.microsoft.com/office/powerpoint/2010/main" val="2646458161"/>
+      </p:ext>
+    </p:extLst>
+  </p:cSld>
+  <p:clrMapOvr>
+    <a:masterClrMapping/>
+  </p:clrMapOvr>
+</p:sld>
+</file>
+
+<file path=ppt/slides/slide45.xml><?xml version="1.0" encoding="utf-8"?>
+<p:sld xmlns:a="http://schemas.openxmlformats.org/drawingml/2006/main" xmlns:r="http://schemas.openxmlformats.org/officeDocument/2006/relationships" xmlns:p="http://schemas.openxmlformats.org/presentationml/2006/main">
+  <p:cSld>
+    <p:spTree>
+      <p:nvGrpSpPr>
+        <p:cNvPr id="1" name="">
+          <a:extLst>
+            <a:ext uri="{FF2B5EF4-FFF2-40B4-BE49-F238E27FC236}">
+              <a16:creationId xmlns:a16="http://schemas.microsoft.com/office/drawing/2014/main" id="{547ED844-EA08-9C45-A45A-734D28224EB4}"/>
+            </a:ext>
+          </a:extLst>
+        </p:cNvPr>
+        <p:cNvGrpSpPr/>
+        <p:nvPr/>
+      </p:nvGrpSpPr>
+      <p:grpSpPr>
+        <a:xfrm>
+          <a:off x="0" y="0"/>
+          <a:ext cx="0" cy="0"/>
+          <a:chOff x="0" y="0"/>
+          <a:chExt cx="0" cy="0"/>
+        </a:xfrm>
+      </p:grpSpPr>
+      <p:sp>
+        <p:nvSpPr>
+          <p:cNvPr id="2" name="제목 1">
+            <a:extLst>
+              <a:ext uri="{FF2B5EF4-FFF2-40B4-BE49-F238E27FC236}">
+                <a16:creationId xmlns:a16="http://schemas.microsoft.com/office/drawing/2014/main" id="{AD525C14-AD44-C38D-0CF9-CB3AF88FA919}"/>
+              </a:ext>
+            </a:extLst>
+          </p:cNvPr>
+          <p:cNvSpPr>
+            <a:spLocks noGrp="1"/>
+          </p:cNvSpPr>
+          <p:nvPr>
+            <p:ph type="title"/>
+          </p:nvPr>
+        </p:nvSpPr>
+        <p:spPr/>
+        <p:txBody>
+          <a:bodyPr/>
+          <a:lstStyle/>
+          <a:p>
+            <a:r>
+              <a:rPr lang="ko-KR" altLang="en-US" dirty="0"/>
+              <a:t>천연가스 시장의 탈규제와 구조개편</a:t>
+            </a:r>
+          </a:p>
+        </p:txBody>
+      </p:sp>
+      <p:sp>
+        <p:nvSpPr>
+          <p:cNvPr id="4" name="슬라이드 번호 개체 틀 3">
+            <a:extLst>
+              <a:ext uri="{FF2B5EF4-FFF2-40B4-BE49-F238E27FC236}">
+                <a16:creationId xmlns:a16="http://schemas.microsoft.com/office/drawing/2014/main" id="{BD7BFCE9-45FB-C5C2-ECB0-21FFF39D9459}"/>
+              </a:ext>
+            </a:extLst>
+          </p:cNvPr>
+          <p:cNvSpPr>
+            <a:spLocks noGrp="1"/>
+          </p:cNvSpPr>
+          <p:nvPr>
+            <p:ph type="sldNum" sz="quarter" idx="12"/>
+          </p:nvPr>
+        </p:nvSpPr>
+        <p:spPr/>
+        <p:txBody>
+          <a:bodyPr/>
+          <a:lstStyle/>
+          <a:p>
+            <a:fld id="{109C872D-39A9-4065-8BF3-6A613116E2A1}" type="slidenum">
+              <a:rPr lang="ko-KR" altLang="en-US" smtClean="0"/>
+              <a:t>45</a:t>
+            </a:fld>
+            <a:endParaRPr lang="ko-KR" altLang="en-US"/>
+          </a:p>
+        </p:txBody>
+      </p:sp>
+      <p:sp>
+        <p:nvSpPr>
+          <p:cNvPr id="3" name="TextBox 2">
+            <a:extLst>
+              <a:ext uri="{FF2B5EF4-FFF2-40B4-BE49-F238E27FC236}">
+                <a16:creationId xmlns:a16="http://schemas.microsoft.com/office/drawing/2014/main" id="{88C8B8DB-47DF-4212-F5CC-BF78C0F4AA40}"/>
+              </a:ext>
+            </a:extLst>
+          </p:cNvPr>
+          <p:cNvSpPr txBox="1"/>
+          <p:nvPr/>
+        </p:nvSpPr>
+        <p:spPr>
+          <a:xfrm>
+            <a:off x="288790" y="958844"/>
+            <a:ext cx="11118453" cy="3368679"/>
+          </a:xfrm>
+          <a:prstGeom prst="rect">
+            <a:avLst/>
+          </a:prstGeom>
+          <a:noFill/>
+        </p:spPr>
+        <p:txBody>
+          <a:bodyPr wrap="square" rtlCol="0" anchor="t">
+            <a:spAutoFit/>
+          </a:bodyPr>
+          <a:lstStyle/>
+          <a:p>
+            <a:pPr marL="377825" indent="-285750">
+              <a:lnSpc>
+                <a:spcPct val="150000"/>
+              </a:lnSpc>
+              <a:buFont typeface="Arial" panose="020B0604020202020204" pitchFamily="34" charset="0"/>
+              <a:buChar char="•"/>
+            </a:pPr>
+            <a:r>
+              <a:rPr lang="ko-KR" altLang="en-US" sz="1600" dirty="0"/>
+              <a:t>탈규제와 구조개편의 주요 목적은 시장 효율성 제고</a:t>
+            </a:r>
+            <a:r>
+              <a:rPr lang="en-US" altLang="ko-KR" sz="1600" dirty="0"/>
+              <a:t>, </a:t>
+            </a:r>
+            <a:r>
+              <a:rPr lang="ko-KR" altLang="en-US" sz="1600" dirty="0"/>
+              <a:t>민간투자 촉진</a:t>
+            </a:r>
+            <a:r>
+              <a:rPr lang="en-US" altLang="ko-KR" sz="1600" dirty="0"/>
+              <a:t>, </a:t>
+            </a:r>
+            <a:r>
+              <a:rPr lang="ko-KR" altLang="en-US" sz="1600" dirty="0" err="1"/>
+              <a:t>수입처</a:t>
+            </a:r>
+            <a:r>
+              <a:rPr lang="ko-KR" altLang="en-US" sz="1600" dirty="0"/>
+              <a:t> 다변화</a:t>
+            </a:r>
+            <a:r>
+              <a:rPr lang="en-US" altLang="ko-KR" sz="1600" dirty="0"/>
+              <a:t>, </a:t>
+            </a:r>
+            <a:r>
+              <a:rPr lang="ko-KR" altLang="en-US" sz="1600" dirty="0"/>
+              <a:t>가격 신호의 투명성 확보</a:t>
+            </a:r>
+            <a:r>
+              <a:rPr lang="en-US" altLang="ko-KR" sz="1600" dirty="0"/>
+              <a:t>, </a:t>
+            </a:r>
+            <a:r>
+              <a:rPr lang="ko-KR" altLang="en-US" sz="1600" dirty="0"/>
+              <a:t>에너지 안보 제고 등이다</a:t>
+            </a:r>
+            <a:r>
+              <a:rPr lang="en-US" altLang="ko-KR" sz="1600" dirty="0"/>
+              <a:t>.</a:t>
+            </a:r>
+          </a:p>
+          <a:p>
+            <a:pPr marL="835025" lvl="1" indent="-285750">
+              <a:lnSpc>
+                <a:spcPct val="150000"/>
+              </a:lnSpc>
+              <a:buFont typeface="Wingdings" panose="05000000000000000000" pitchFamily="2" charset="2"/>
+              <a:buChar char="ü"/>
+            </a:pPr>
+            <a:r>
+              <a:rPr lang="ko-KR" altLang="en-US" sz="1600" dirty="0"/>
+              <a:t>최근 </a:t>
+            </a:r>
+            <a:r>
+              <a:rPr lang="en-US" altLang="ko-KR" sz="1600" dirty="0"/>
+              <a:t>LNG</a:t>
+            </a:r>
+            <a:r>
+              <a:rPr lang="ko-KR" altLang="en-US" sz="1600" dirty="0"/>
+              <a:t> 시장에서 장기 고정가격 계약이 허브 기반의 현물가격 계약으로 전환되는 추세도 이러한 시장 유연화와 규제 완화의 일환으로 해석할 수 있다</a:t>
+            </a:r>
+            <a:r>
+              <a:rPr lang="en-US" altLang="ko-KR" sz="1600" dirty="0"/>
+              <a:t>.</a:t>
+            </a:r>
+          </a:p>
+          <a:p>
+            <a:pPr marL="835025" lvl="1" indent="-285750">
+              <a:lnSpc>
+                <a:spcPct val="150000"/>
+              </a:lnSpc>
+              <a:buFont typeface="Wingdings" panose="05000000000000000000" pitchFamily="2" charset="2"/>
+              <a:buChar char="ü"/>
+            </a:pPr>
+            <a:endParaRPr lang="en-US" altLang="ko-KR" sz="1600" dirty="0"/>
+          </a:p>
+          <a:p>
+            <a:pPr marL="377825" indent="-285750">
+              <a:lnSpc>
+                <a:spcPct val="150000"/>
+              </a:lnSpc>
+              <a:buFont typeface="Arial" panose="020B0604020202020204" pitchFamily="34" charset="0"/>
+              <a:buChar char="•"/>
+            </a:pPr>
+            <a:r>
+              <a:rPr lang="ko-KR" altLang="en-US" sz="1600" dirty="0"/>
+              <a:t>한국은 여전히 공공 중심의 안정성 지향 구조를 유지하고 있지만</a:t>
+            </a:r>
+            <a:r>
+              <a:rPr lang="en-US" altLang="ko-KR" sz="1600" dirty="0"/>
+              <a:t>, </a:t>
+            </a:r>
+            <a:r>
+              <a:rPr lang="ko-KR" altLang="en-US" sz="1600" dirty="0"/>
+              <a:t>시장 유연성 확보</a:t>
+            </a:r>
+            <a:r>
+              <a:rPr lang="en-US" altLang="ko-KR" sz="1600" dirty="0"/>
+              <a:t>, </a:t>
+            </a:r>
+            <a:r>
+              <a:rPr lang="ko-KR" altLang="en-US" sz="1600" dirty="0"/>
+              <a:t>가격 경쟁력 강화</a:t>
+            </a:r>
+            <a:r>
+              <a:rPr lang="en-US" altLang="ko-KR" sz="1600" dirty="0"/>
+              <a:t>, </a:t>
+            </a:r>
+            <a:r>
+              <a:rPr lang="ko-KR" altLang="en-US" sz="1600" dirty="0"/>
+              <a:t>공급선 다변화 측면에서 점진적인 제도 개편의 필요성이 커지고 있다</a:t>
+            </a:r>
+            <a:r>
+              <a:rPr lang="en-US" altLang="ko-KR" sz="1600" dirty="0"/>
+              <a:t>.</a:t>
+            </a:r>
+          </a:p>
+          <a:p>
+            <a:pPr marL="835025" lvl="1" indent="-285750">
+              <a:lnSpc>
+                <a:spcPct val="150000"/>
+              </a:lnSpc>
+              <a:buFont typeface="Wingdings" panose="05000000000000000000" pitchFamily="2" charset="2"/>
+              <a:buChar char="ü"/>
+            </a:pPr>
+            <a:r>
+              <a:rPr lang="ko-KR" altLang="en-US" sz="1600" dirty="0"/>
+              <a:t>미국과 유럽의 자유화 경험은 한국이 이러한 제도 개혁을 추진할 때</a:t>
+            </a:r>
+            <a:r>
+              <a:rPr lang="en-US" altLang="ko-KR" sz="1600" dirty="0"/>
+              <a:t>, </a:t>
+            </a:r>
+            <a:r>
+              <a:rPr lang="ko-KR" altLang="en-US" sz="1600" dirty="0"/>
+              <a:t>유용한 벤치마크를 제공하고</a:t>
+            </a:r>
+            <a:r>
+              <a:rPr lang="en-US" altLang="ko-KR" sz="1600" dirty="0"/>
+              <a:t>, </a:t>
+            </a:r>
+            <a:r>
+              <a:rPr lang="ko-KR" altLang="en-US" sz="1600" dirty="0"/>
+              <a:t>에너지 전환기와 글로벌 </a:t>
+            </a:r>
+            <a:r>
+              <a:rPr lang="en-US" altLang="ko-KR" sz="1600" dirty="0"/>
+              <a:t>LNG </a:t>
+            </a:r>
+            <a:r>
+              <a:rPr lang="ko-KR" altLang="en-US" sz="1600" dirty="0"/>
+              <a:t>시장 재편기에 대응하는 정책 설계에 있어 중요한 시사점을 제공한다</a:t>
+            </a:r>
+            <a:r>
+              <a:rPr lang="en-US" altLang="ko-KR" sz="1600" dirty="0"/>
+              <a:t>.</a:t>
+            </a:r>
+          </a:p>
+        </p:txBody>
+      </p:sp>
+    </p:spTree>
+    <p:extLst>
+      <p:ext uri="{BB962C8B-B14F-4D97-AF65-F5344CB8AC3E}">
+        <p14:creationId xmlns:p14="http://schemas.microsoft.com/office/powerpoint/2010/main" val="871420799"/>
+      </p:ext>
+    </p:extLst>
+  </p:cSld>
+  <p:clrMapOvr>
+    <a:masterClrMapping/>
+  </p:clrMapOvr>
+</p:sld>
+</file>
+
+<file path=ppt/slides/slide46.xml><?xml version="1.0" encoding="utf-8"?>
+<p:sld xmlns:a="http://schemas.openxmlformats.org/drawingml/2006/main" xmlns:r="http://schemas.openxmlformats.org/officeDocument/2006/relationships" xmlns:p="http://schemas.openxmlformats.org/presentationml/2006/main">
+  <p:cSld>
+    <p:spTree>
+      <p:nvGrpSpPr>
+        <p:cNvPr id="1" name="">
+          <a:extLst>
+            <a:ext uri="{FF2B5EF4-FFF2-40B4-BE49-F238E27FC236}">
+              <a16:creationId xmlns:a16="http://schemas.microsoft.com/office/drawing/2014/main" id="{87B3BEA8-9CC1-DD1F-975D-DDA9762D5FC4}"/>
+            </a:ext>
+          </a:extLst>
+        </p:cNvPr>
+        <p:cNvGrpSpPr/>
+        <p:nvPr/>
+      </p:nvGrpSpPr>
+      <p:grpSpPr>
+        <a:xfrm>
+          <a:off x="0" y="0"/>
+          <a:ext cx="0" cy="0"/>
+          <a:chOff x="0" y="0"/>
+          <a:chExt cx="0" cy="0"/>
+        </a:xfrm>
+      </p:grpSpPr>
+      <p:pic>
+        <p:nvPicPr>
+          <p:cNvPr id="6" name="그림 5" descr="텍스트, 로고, 원, 폰트이(가) 표시된 사진&#10;&#10;AI 생성 콘텐츠는 정확하지 않을 수 있습니다.">
+            <a:extLst>
+              <a:ext uri="{FF2B5EF4-FFF2-40B4-BE49-F238E27FC236}">
+                <a16:creationId xmlns:a16="http://schemas.microsoft.com/office/drawing/2014/main" id="{95D2871E-2F83-AA46-877B-BD918D41BE17}"/>
+              </a:ext>
+            </a:extLst>
+          </p:cNvPr>
+          <p:cNvPicPr>
+            <a:picLocks noChangeAspect="1"/>
+          </p:cNvPicPr>
+          <p:nvPr/>
+        </p:nvPicPr>
+        <p:blipFill>
+          <a:blip r:embed="rId2">
+            <a:alphaModFix amt="20000"/>
+            <a:extLst>
+              <a:ext uri="{28A0092B-C50C-407E-A947-70E740481C1C}">
+                <a14:useLocalDpi xmlns:a14="http://schemas.microsoft.com/office/drawing/2010/main" val="0"/>
+              </a:ext>
+            </a:extLst>
+          </a:blip>
+          <a:stretch>
+            <a:fillRect/>
+          </a:stretch>
+        </p:blipFill>
+        <p:spPr>
+          <a:xfrm>
+            <a:off x="4012070" y="1673061"/>
+            <a:ext cx="4167861" cy="4167861"/>
+          </a:xfrm>
+          <a:prstGeom prst="rect">
+            <a:avLst/>
+          </a:prstGeom>
+        </p:spPr>
+      </p:pic>
+      <p:sp>
+        <p:nvSpPr>
+          <p:cNvPr id="4" name="슬라이드 번호 개체 틀 3">
+            <a:extLst>
+              <a:ext uri="{FF2B5EF4-FFF2-40B4-BE49-F238E27FC236}">
+                <a16:creationId xmlns:a16="http://schemas.microsoft.com/office/drawing/2014/main" id="{964534A9-8A45-3E1D-2AE3-E5A674710CBE}"/>
+              </a:ext>
+            </a:extLst>
+          </p:cNvPr>
+          <p:cNvSpPr>
+            <a:spLocks noGrp="1"/>
+          </p:cNvSpPr>
+          <p:nvPr>
+            <p:ph type="sldNum" sz="quarter" idx="12"/>
+          </p:nvPr>
+        </p:nvSpPr>
+        <p:spPr/>
+        <p:txBody>
+          <a:bodyPr/>
+          <a:lstStyle/>
+          <a:p>
+            <a:fld id="{109C872D-39A9-4065-8BF3-6A613116E2A1}" type="slidenum">
+              <a:rPr lang="ko-KR" altLang="en-US" smtClean="0"/>
+              <a:t>46</a:t>
+            </a:fld>
+            <a:endParaRPr lang="ko-KR" altLang="en-US"/>
+          </a:p>
+        </p:txBody>
+      </p:sp>
+      <p:sp>
+        <p:nvSpPr>
+          <p:cNvPr id="7" name="제목 1">
+            <a:extLst>
+              <a:ext uri="{FF2B5EF4-FFF2-40B4-BE49-F238E27FC236}">
+                <a16:creationId xmlns:a16="http://schemas.microsoft.com/office/drawing/2014/main" id="{B4CEE3B9-85C8-1362-0416-5231A98C829D}"/>
+              </a:ext>
+            </a:extLst>
+          </p:cNvPr>
+          <p:cNvSpPr>
+            <a:spLocks noGrp="1"/>
+          </p:cNvSpPr>
+          <p:nvPr>
+            <p:ph type="title"/>
+          </p:nvPr>
+        </p:nvSpPr>
+        <p:spPr>
+          <a:xfrm>
+            <a:off x="831850" y="3765550"/>
+            <a:ext cx="11150600" cy="652818"/>
+          </a:xfrm>
+          <a:effectLst>
+            <a:reflection blurRad="50800" stA="45000" endPos="44000" dir="5400000" sy="-100000" algn="bl" rotWithShape="0"/>
+          </a:effectLst>
+        </p:spPr>
+        <p:txBody>
+          <a:bodyPr anchor="b"/>
+          <a:lstStyle/>
+          <a:p>
+            <a:r>
+              <a:rPr lang="en-US" altLang="ko-KR" sz="4000" b="1" i="0" spc="150" dirty="0"/>
+              <a:t>Section 6. </a:t>
+            </a:r>
+            <a:r>
+              <a:rPr lang="ko-KR" altLang="en-US" sz="4000" b="1" i="0" spc="150" dirty="0"/>
+              <a:t>천연가스 시장의 가격 결정</a:t>
+            </a:r>
+            <a:endParaRPr lang="ko-KR" altLang="en-US" sz="3600" i="0" spc="150" dirty="0"/>
+          </a:p>
+        </p:txBody>
+      </p:sp>
+    </p:spTree>
+    <p:extLst>
+      <p:ext uri="{BB962C8B-B14F-4D97-AF65-F5344CB8AC3E}">
+        <p14:creationId xmlns:p14="http://schemas.microsoft.com/office/powerpoint/2010/main" val="4093543577"/>
+      </p:ext>
+    </p:extLst>
+  </p:cSld>
+  <p:clrMapOvr>
+    <a:masterClrMapping/>
+  </p:clrMapOvr>
+</p:sld>
+</file>
+
+<file path=ppt/slides/slide47.xml><?xml version="1.0" encoding="utf-8"?>
+<p:sld xmlns:a="http://schemas.openxmlformats.org/drawingml/2006/main" xmlns:r="http://schemas.openxmlformats.org/officeDocument/2006/relationships" xmlns:p="http://schemas.openxmlformats.org/presentationml/2006/main">
+  <p:cSld>
+    <p:spTree>
+      <p:nvGrpSpPr>
+        <p:cNvPr id="1" name="">
+          <a:extLst>
+            <a:ext uri="{FF2B5EF4-FFF2-40B4-BE49-F238E27FC236}">
+              <a16:creationId xmlns:a16="http://schemas.microsoft.com/office/drawing/2014/main" id="{9DF31D4D-B178-469A-AF44-600873A462FA}"/>
+            </a:ext>
+          </a:extLst>
+        </p:cNvPr>
+        <p:cNvGrpSpPr/>
+        <p:nvPr/>
+      </p:nvGrpSpPr>
+      <p:grpSpPr>
+        <a:xfrm>
+          <a:off x="0" y="0"/>
+          <a:ext cx="0" cy="0"/>
+          <a:chOff x="0" y="0"/>
+          <a:chExt cx="0" cy="0"/>
+        </a:xfrm>
+      </p:grpSpPr>
+      <p:sp>
+        <p:nvSpPr>
+          <p:cNvPr id="2" name="제목 1">
+            <a:extLst>
+              <a:ext uri="{FF2B5EF4-FFF2-40B4-BE49-F238E27FC236}">
+                <a16:creationId xmlns:a16="http://schemas.microsoft.com/office/drawing/2014/main" id="{35C7A15B-FECB-67B0-BB4B-6EBAACEA82C0}"/>
+              </a:ext>
+            </a:extLst>
+          </p:cNvPr>
+          <p:cNvSpPr>
+            <a:spLocks noGrp="1"/>
+          </p:cNvSpPr>
+          <p:nvPr>
+            <p:ph type="title"/>
+          </p:nvPr>
+        </p:nvSpPr>
+        <p:spPr/>
+        <p:txBody>
+          <a:bodyPr/>
+          <a:lstStyle/>
+          <a:p>
+            <a:r>
+              <a:rPr lang="ko-KR" altLang="en-US" dirty="0"/>
+              <a:t>천연가스 가격의 결정 요인들</a:t>
+            </a:r>
+          </a:p>
+        </p:txBody>
+      </p:sp>
+      <p:sp>
+        <p:nvSpPr>
+          <p:cNvPr id="4" name="슬라이드 번호 개체 틀 3">
+            <a:extLst>
+              <a:ext uri="{FF2B5EF4-FFF2-40B4-BE49-F238E27FC236}">
+                <a16:creationId xmlns:a16="http://schemas.microsoft.com/office/drawing/2014/main" id="{474251A4-718D-B2D3-92D3-38917B1918CB}"/>
+              </a:ext>
+            </a:extLst>
+          </p:cNvPr>
+          <p:cNvSpPr>
+            <a:spLocks noGrp="1"/>
+          </p:cNvSpPr>
+          <p:nvPr>
+            <p:ph type="sldNum" sz="quarter" idx="12"/>
+          </p:nvPr>
+        </p:nvSpPr>
+        <p:spPr/>
+        <p:txBody>
+          <a:bodyPr/>
+          <a:lstStyle/>
+          <a:p>
+            <a:fld id="{109C872D-39A9-4065-8BF3-6A613116E2A1}" type="slidenum">
+              <a:rPr lang="ko-KR" altLang="en-US" smtClean="0"/>
+              <a:t>47</a:t>
+            </a:fld>
+            <a:endParaRPr lang="ko-KR" altLang="en-US"/>
+          </a:p>
+        </p:txBody>
+      </p:sp>
+      <p:sp>
+        <p:nvSpPr>
+          <p:cNvPr id="3" name="TextBox 2">
+            <a:extLst>
+              <a:ext uri="{FF2B5EF4-FFF2-40B4-BE49-F238E27FC236}">
+                <a16:creationId xmlns:a16="http://schemas.microsoft.com/office/drawing/2014/main" id="{F7683D07-50A8-23C4-595D-C8B3CC909C68}"/>
+              </a:ext>
+            </a:extLst>
+          </p:cNvPr>
+          <p:cNvSpPr txBox="1"/>
+          <p:nvPr/>
+        </p:nvSpPr>
+        <p:spPr>
+          <a:xfrm>
+            <a:off x="288790" y="958844"/>
+            <a:ext cx="11118453" cy="4476675"/>
+          </a:xfrm>
+          <a:prstGeom prst="rect">
+            <a:avLst/>
+          </a:prstGeom>
+          <a:noFill/>
+        </p:spPr>
+        <p:txBody>
+          <a:bodyPr wrap="square" rtlCol="0" anchor="t">
+            <a:spAutoFit/>
+          </a:bodyPr>
+          <a:lstStyle/>
+          <a:p>
+            <a:pPr marL="377825" indent="-285750">
+              <a:lnSpc>
+                <a:spcPct val="150000"/>
+              </a:lnSpc>
+              <a:buFont typeface="Arial" panose="020B0604020202020204" pitchFamily="34" charset="0"/>
+              <a:buChar char="•"/>
+            </a:pPr>
+            <a:r>
+              <a:rPr lang="ko-KR" altLang="en-US" sz="1600" dirty="0"/>
+              <a:t>천연가스 가격은 다양한 시장 요인들에 의하여 결정되며 전 세계적으로 균일한 가격이 형성되는 원유가격과 달리 천연가스는 지역의 수요와 공급</a:t>
+            </a:r>
+            <a:r>
+              <a:rPr lang="en-US" altLang="ko-KR" sz="1600" dirty="0"/>
+              <a:t>, </a:t>
+            </a:r>
+            <a:r>
+              <a:rPr lang="ko-KR" altLang="en-US" sz="1600" dirty="0"/>
+              <a:t>수송비용과 시장구조에 영향을 받는다</a:t>
+            </a:r>
+            <a:r>
+              <a:rPr lang="en-US" altLang="ko-KR" sz="1600" dirty="0"/>
+              <a:t>.</a:t>
+            </a:r>
+          </a:p>
+          <a:p>
+            <a:pPr marL="835025" lvl="1" indent="-285750">
+              <a:lnSpc>
+                <a:spcPct val="150000"/>
+              </a:lnSpc>
+              <a:buFont typeface="Wingdings" panose="05000000000000000000" pitchFamily="2" charset="2"/>
+              <a:buChar char="ü"/>
+            </a:pPr>
+            <a:r>
+              <a:rPr lang="ko-KR" altLang="en-US" sz="1600" dirty="0"/>
+              <a:t>가장 근원적인 가격 결정요인은 수요와 공급이다</a:t>
+            </a:r>
+            <a:r>
+              <a:rPr lang="en-US" altLang="ko-KR" sz="1600" dirty="0"/>
+              <a:t>.</a:t>
+            </a:r>
+          </a:p>
+          <a:p>
+            <a:pPr marL="835025" lvl="1" indent="-285750">
+              <a:lnSpc>
+                <a:spcPct val="150000"/>
+              </a:lnSpc>
+              <a:buFont typeface="Wingdings" panose="05000000000000000000" pitchFamily="2" charset="2"/>
+              <a:buChar char="ü"/>
+            </a:pPr>
+            <a:r>
+              <a:rPr lang="ko-KR" altLang="en-US" sz="1600" dirty="0"/>
+              <a:t>탐사</a:t>
+            </a:r>
+            <a:r>
+              <a:rPr lang="en-US" altLang="ko-KR" sz="1600" dirty="0"/>
+              <a:t>, </a:t>
+            </a:r>
+            <a:r>
+              <a:rPr lang="ko-KR" altLang="en-US" sz="1600" dirty="0"/>
+              <a:t>시추</a:t>
+            </a:r>
+            <a:r>
+              <a:rPr lang="en-US" altLang="ko-KR" sz="1600" dirty="0"/>
+              <a:t>, </a:t>
+            </a:r>
+            <a:r>
+              <a:rPr lang="ko-KR" altLang="en-US" sz="1600" dirty="0"/>
+              <a:t>채굴 비용 등의 생산비용 또한 시장가격에 중요한 역할을 하고</a:t>
+            </a:r>
+            <a:r>
+              <a:rPr lang="en-US" altLang="ko-KR" sz="1600" dirty="0"/>
+              <a:t>, </a:t>
+            </a:r>
+            <a:r>
+              <a:rPr lang="ko-KR" altLang="en-US" sz="1600" dirty="0"/>
+              <a:t>심해시추기술이나 </a:t>
+            </a:r>
+            <a:r>
+              <a:rPr lang="ko-KR" altLang="en-US" sz="1600" dirty="0" err="1"/>
+              <a:t>수압파쇄</a:t>
+            </a:r>
+            <a:r>
+              <a:rPr lang="ko-KR" altLang="en-US" sz="1600" dirty="0"/>
+              <a:t> 기법 등 고비용의 생산 방식을 사용하는 경우 다른 지역에 비해 시장가격이 높게 분포한다</a:t>
+            </a:r>
+            <a:r>
+              <a:rPr lang="en-US" altLang="ko-KR" sz="1600" dirty="0"/>
+              <a:t>.</a:t>
+            </a:r>
+          </a:p>
+          <a:p>
+            <a:pPr marL="835025" lvl="1" indent="-285750">
+              <a:lnSpc>
+                <a:spcPct val="150000"/>
+              </a:lnSpc>
+              <a:buFont typeface="Wingdings" panose="05000000000000000000" pitchFamily="2" charset="2"/>
+              <a:buChar char="ü"/>
+            </a:pPr>
+            <a:r>
+              <a:rPr lang="ko-KR" altLang="en-US" sz="1600" dirty="0"/>
+              <a:t>운송비용 또한 최종 시장가격에 영향을 미치는데</a:t>
+            </a:r>
+            <a:r>
+              <a:rPr lang="en-US" altLang="ko-KR" sz="1600" dirty="0"/>
+              <a:t>, LNG</a:t>
+            </a:r>
+            <a:r>
+              <a:rPr lang="ko-KR" altLang="en-US" sz="1600" dirty="0"/>
+              <a:t>의 경우 장거리 운송은 액화</a:t>
+            </a:r>
+            <a:r>
+              <a:rPr lang="en-US" altLang="ko-KR" sz="1600" dirty="0"/>
+              <a:t>, </a:t>
+            </a:r>
+            <a:r>
+              <a:rPr lang="ko-KR" altLang="en-US" sz="1600" dirty="0"/>
+              <a:t>선적</a:t>
+            </a:r>
+            <a:r>
+              <a:rPr lang="en-US" altLang="ko-KR" sz="1600" dirty="0"/>
+              <a:t> </a:t>
+            </a:r>
+            <a:r>
+              <a:rPr lang="ko-KR" altLang="en-US" sz="1600" dirty="0"/>
+              <a:t>및 재기화 비용으로 인해 비용상승의 요인으로 작용한다</a:t>
+            </a:r>
+            <a:r>
+              <a:rPr lang="en-US" altLang="ko-KR" sz="1600" dirty="0"/>
+              <a:t>.</a:t>
+            </a:r>
+          </a:p>
+          <a:p>
+            <a:pPr marL="835025" lvl="1" indent="-285750">
+              <a:lnSpc>
+                <a:spcPct val="150000"/>
+              </a:lnSpc>
+              <a:buFont typeface="Wingdings" panose="05000000000000000000" pitchFamily="2" charset="2"/>
+              <a:buChar char="ü"/>
+            </a:pPr>
+            <a:endParaRPr lang="en-US" altLang="ko-KR" sz="1600" dirty="0"/>
+          </a:p>
+          <a:p>
+            <a:pPr marL="377825" indent="-285750">
+              <a:lnSpc>
+                <a:spcPct val="150000"/>
+              </a:lnSpc>
+              <a:buFont typeface="Arial" panose="020B0604020202020204" pitchFamily="34" charset="0"/>
+              <a:buChar char="•"/>
+            </a:pPr>
+            <a:r>
+              <a:rPr lang="ko-KR" altLang="en-US" sz="1600" dirty="0"/>
+              <a:t>천연 가스의 가격 결정은 지역별 시장 구조</a:t>
+            </a:r>
+            <a:r>
+              <a:rPr lang="en-US" altLang="ko-KR" sz="1600" dirty="0"/>
+              <a:t>, </a:t>
+            </a:r>
+            <a:r>
+              <a:rPr lang="ko-KR" altLang="en-US" sz="1600" dirty="0"/>
+              <a:t>대체 연료의 존재 여부</a:t>
+            </a:r>
+            <a:r>
+              <a:rPr lang="en-US" altLang="ko-KR" sz="1600" dirty="0"/>
+              <a:t>, </a:t>
+            </a:r>
+            <a:r>
+              <a:rPr lang="ko-KR" altLang="en-US" sz="1600" dirty="0"/>
+              <a:t>계약 형태에 따라 다양한 방식을 따른다</a:t>
+            </a:r>
+            <a:r>
+              <a:rPr lang="en-US" altLang="ko-KR" sz="1600" dirty="0"/>
+              <a:t>.</a:t>
+            </a:r>
+          </a:p>
+          <a:p>
+            <a:pPr marL="835025" lvl="1" indent="-285750">
+              <a:lnSpc>
+                <a:spcPct val="150000"/>
+              </a:lnSpc>
+              <a:buFont typeface="Wingdings" panose="05000000000000000000" pitchFamily="2" charset="2"/>
+              <a:buChar char="ü"/>
+            </a:pPr>
+            <a:r>
+              <a:rPr lang="ko-KR" altLang="en-US" sz="1600" dirty="0"/>
+              <a:t>전통적으로 유럽과 아시아 시장에서는 석유 연동가격제</a:t>
+            </a:r>
+            <a:r>
+              <a:rPr lang="en-US" altLang="ko-KR" sz="1600" dirty="0"/>
+              <a:t>, </a:t>
+            </a:r>
+            <a:r>
+              <a:rPr lang="ko-KR" altLang="en-US" sz="1600" dirty="0"/>
+              <a:t>즉 가격연동제가 주요한 가격 결정 메커니즘이었다</a:t>
+            </a:r>
+            <a:r>
+              <a:rPr lang="en-US" altLang="ko-KR" sz="1600" dirty="0"/>
+              <a:t>.</a:t>
+            </a:r>
+          </a:p>
+          <a:p>
+            <a:pPr marL="835025" lvl="1" indent="-285750">
+              <a:lnSpc>
+                <a:spcPct val="150000"/>
+              </a:lnSpc>
+              <a:buFont typeface="Wingdings" panose="05000000000000000000" pitchFamily="2" charset="2"/>
+              <a:buChar char="ü"/>
+            </a:pPr>
+            <a:r>
+              <a:rPr lang="ko-KR" altLang="en-US" sz="1600" dirty="0"/>
+              <a:t>이 방식에서 천연가스 가격은 중유</a:t>
+            </a:r>
+            <a:r>
+              <a:rPr lang="en-US" altLang="ko-KR" sz="1600" dirty="0"/>
+              <a:t>, </a:t>
+            </a:r>
+            <a:r>
+              <a:rPr lang="ko-KR" altLang="en-US" sz="1600" dirty="0"/>
+              <a:t>경유</a:t>
+            </a:r>
+            <a:r>
+              <a:rPr lang="en-US" altLang="ko-KR" sz="1600" dirty="0"/>
+              <a:t> </a:t>
+            </a:r>
+            <a:r>
+              <a:rPr lang="ko-KR" altLang="en-US" sz="1600" dirty="0"/>
+              <a:t>등 석유 제품의 가격과 일정한 비율로 연동되며</a:t>
+            </a:r>
+            <a:r>
+              <a:rPr lang="en-US" altLang="ko-KR" sz="1600" dirty="0"/>
+              <a:t>, </a:t>
+            </a:r>
+            <a:r>
+              <a:rPr lang="ko-KR" altLang="en-US" sz="1600" dirty="0"/>
+              <a:t>주로 장기계약에서 활용되었다</a:t>
+            </a:r>
+            <a:r>
+              <a:rPr lang="en-US" altLang="ko-KR" sz="1600" dirty="0"/>
+              <a:t>.</a:t>
+            </a:r>
+            <a:r>
+              <a:rPr lang="ko-KR" altLang="en-US" sz="1600" dirty="0"/>
+              <a:t> </a:t>
+            </a:r>
+            <a:endParaRPr lang="en-US" altLang="ko-KR" sz="1600" dirty="0"/>
+          </a:p>
+        </p:txBody>
+      </p:sp>
+    </p:spTree>
+    <p:extLst>
+      <p:ext uri="{BB962C8B-B14F-4D97-AF65-F5344CB8AC3E}">
+        <p14:creationId xmlns:p14="http://schemas.microsoft.com/office/powerpoint/2010/main" val="904087476"/>
+      </p:ext>
+    </p:extLst>
+  </p:cSld>
+  <p:clrMapOvr>
+    <a:masterClrMapping/>
+  </p:clrMapOvr>
+</p:sld>
+</file>
+
+<file path=ppt/slides/slide48.xml><?xml version="1.0" encoding="utf-8"?>
+<p:sld xmlns:a="http://schemas.openxmlformats.org/drawingml/2006/main" xmlns:r="http://schemas.openxmlformats.org/officeDocument/2006/relationships" xmlns:p="http://schemas.openxmlformats.org/presentationml/2006/main">
+  <p:cSld>
+    <p:spTree>
+      <p:nvGrpSpPr>
+        <p:cNvPr id="1" name="">
+          <a:extLst>
+            <a:ext uri="{FF2B5EF4-FFF2-40B4-BE49-F238E27FC236}">
+              <a16:creationId xmlns:a16="http://schemas.microsoft.com/office/drawing/2014/main" id="{998A96AA-2B27-2285-8409-B263BC450BDE}"/>
+            </a:ext>
+          </a:extLst>
+        </p:cNvPr>
+        <p:cNvGrpSpPr/>
+        <p:nvPr/>
+      </p:nvGrpSpPr>
+      <p:grpSpPr>
+        <a:xfrm>
+          <a:off x="0" y="0"/>
+          <a:ext cx="0" cy="0"/>
+          <a:chOff x="0" y="0"/>
+          <a:chExt cx="0" cy="0"/>
+        </a:xfrm>
+      </p:grpSpPr>
+      <p:sp>
+        <p:nvSpPr>
+          <p:cNvPr id="2" name="제목 1">
+            <a:extLst>
+              <a:ext uri="{FF2B5EF4-FFF2-40B4-BE49-F238E27FC236}">
+                <a16:creationId xmlns:a16="http://schemas.microsoft.com/office/drawing/2014/main" id="{233838EC-682B-8718-A9A5-2714A66D1DB0}"/>
+              </a:ext>
+            </a:extLst>
+          </p:cNvPr>
+          <p:cNvSpPr>
+            <a:spLocks noGrp="1"/>
+          </p:cNvSpPr>
+          <p:nvPr>
+            <p:ph type="title"/>
+          </p:nvPr>
+        </p:nvSpPr>
+        <p:spPr/>
+        <p:txBody>
+          <a:bodyPr/>
+          <a:lstStyle/>
+          <a:p>
+            <a:r>
+              <a:rPr lang="ko-KR" altLang="en-US" dirty="0"/>
+              <a:t>천연가스 가격의 결정 요인들</a:t>
+            </a:r>
+          </a:p>
+        </p:txBody>
+      </p:sp>
+      <p:sp>
+        <p:nvSpPr>
+          <p:cNvPr id="4" name="슬라이드 번호 개체 틀 3">
+            <a:extLst>
+              <a:ext uri="{FF2B5EF4-FFF2-40B4-BE49-F238E27FC236}">
+                <a16:creationId xmlns:a16="http://schemas.microsoft.com/office/drawing/2014/main" id="{6FFEA10A-FACE-339B-CFED-7EF0D7EA9B84}"/>
+              </a:ext>
+            </a:extLst>
+          </p:cNvPr>
+          <p:cNvSpPr>
+            <a:spLocks noGrp="1"/>
+          </p:cNvSpPr>
+          <p:nvPr>
+            <p:ph type="sldNum" sz="quarter" idx="12"/>
+          </p:nvPr>
+        </p:nvSpPr>
+        <p:spPr/>
+        <p:txBody>
+          <a:bodyPr/>
+          <a:lstStyle/>
+          <a:p>
+            <a:fld id="{109C872D-39A9-4065-8BF3-6A613116E2A1}" type="slidenum">
+              <a:rPr lang="ko-KR" altLang="en-US" smtClean="0"/>
+              <a:t>48</a:t>
+            </a:fld>
+            <a:endParaRPr lang="ko-KR" altLang="en-US"/>
+          </a:p>
+        </p:txBody>
+      </p:sp>
+      <mc:AlternateContent xmlns:mc="http://schemas.openxmlformats.org/markup-compatibility/2006">
+        <mc:Choice xmlns:a14="http://schemas.microsoft.com/office/drawing/2010/main" Requires="a14">
+          <p:sp>
+            <p:nvSpPr>
+              <p:cNvPr id="3" name="TextBox 2">
+                <a:extLst>
+                  <a:ext uri="{FF2B5EF4-FFF2-40B4-BE49-F238E27FC236}">
+                    <a16:creationId xmlns:a16="http://schemas.microsoft.com/office/drawing/2014/main" id="{2CC89ACE-4393-7D0A-2702-4B5526C02AF1}"/>
+                  </a:ext>
+                </a:extLst>
+              </p:cNvPr>
+              <p:cNvSpPr txBox="1"/>
+              <p:nvPr/>
+            </p:nvSpPr>
+            <p:spPr>
+              <a:xfrm>
+                <a:off x="288790" y="958844"/>
+                <a:ext cx="11118453" cy="2660024"/>
+              </a:xfrm>
+              <a:prstGeom prst="rect">
+                <a:avLst/>
+              </a:prstGeom>
+              <a:noFill/>
+            </p:spPr>
+            <p:txBody>
+              <a:bodyPr wrap="square" rtlCol="0" anchor="t">
+                <a:spAutoFit/>
+              </a:bodyPr>
+              <a:lstStyle/>
+              <a:p>
+                <a:pPr marL="377825" indent="-285750">
+                  <a:lnSpc>
+                    <a:spcPct val="150000"/>
+                  </a:lnSpc>
+                  <a:buFont typeface="Arial" panose="020B0604020202020204" pitchFamily="34" charset="0"/>
+                  <a:buChar char="•"/>
+                </a:pPr>
+                <a:r>
+                  <a:rPr lang="ko-KR" altLang="en-US" sz="1600" dirty="0"/>
+                  <a:t>앞서 살펴본 가격연동을 수식으로 표현하면 다음과 같다</a:t>
+                </a:r>
+                <a:r>
+                  <a:rPr lang="en-US" altLang="ko-KR" sz="1600" dirty="0"/>
+                  <a:t>.</a:t>
+                </a:r>
+              </a:p>
+              <a:p>
+                <a:pPr marL="377825" indent="-285750">
+                  <a:lnSpc>
+                    <a:spcPct val="150000"/>
+                  </a:lnSpc>
+                  <a:buFont typeface="Arial" panose="020B0604020202020204" pitchFamily="34" charset="0"/>
+                  <a:buChar char="•"/>
+                </a:pPr>
+                <a:endParaRPr lang="en-US" altLang="ko-KR" sz="1600" dirty="0"/>
+              </a:p>
+              <a:p>
+                <a:pPr marL="377825" indent="-285750">
+                  <a:lnSpc>
+                    <a:spcPct val="150000"/>
+                  </a:lnSpc>
+                  <a:buFont typeface="Arial" panose="020B0604020202020204" pitchFamily="34" charset="0"/>
+                  <a:buChar char="•"/>
+                </a:pPr>
+                <a:endParaRPr lang="en-US" altLang="ko-KR" sz="1600" dirty="0"/>
+              </a:p>
+              <a:p>
+                <a:pPr marL="835025" lvl="1" indent="-285750">
+                  <a:lnSpc>
+                    <a:spcPct val="150000"/>
+                  </a:lnSpc>
+                  <a:buFont typeface="Wingdings" panose="05000000000000000000" pitchFamily="2" charset="2"/>
+                  <a:buChar char="ü"/>
+                </a:pPr>
+                <a:r>
+                  <a:rPr lang="ko-KR" altLang="en-US" sz="1600" dirty="0"/>
+                  <a:t>여기서 </a:t>
+                </a:r>
+                <a14:m>
+                  <m:oMath xmlns:m="http://schemas.openxmlformats.org/officeDocument/2006/math">
+                    <m:sSub>
+                      <m:sSubPr>
+                        <m:ctrlPr>
+                          <a:rPr lang="en-US" altLang="ko-KR" sz="1600" i="1">
+                            <a:latin typeface="Cambria Math" panose="02040503050406030204" pitchFamily="18" charset="0"/>
+                          </a:rPr>
+                        </m:ctrlPr>
+                      </m:sSubPr>
+                      <m:e>
+                        <m:r>
+                          <a:rPr lang="en-US" altLang="ko-KR" sz="1600" i="1">
+                            <a:latin typeface="Cambria Math" panose="02040503050406030204" pitchFamily="18" charset="0"/>
+                          </a:rPr>
+                          <m:t>𝑃</m:t>
+                        </m:r>
+                      </m:e>
+                      <m:sub>
+                        <m:r>
+                          <a:rPr lang="en-US" altLang="ko-KR" sz="1600" i="1">
+                            <a:latin typeface="Cambria Math" panose="02040503050406030204" pitchFamily="18" charset="0"/>
+                          </a:rPr>
+                          <m:t>𝑔𝑎𝑠</m:t>
+                        </m:r>
+                      </m:sub>
+                    </m:sSub>
+                  </m:oMath>
+                </a14:m>
+                <a:r>
+                  <a:rPr lang="ko-KR" altLang="en-US" sz="1600" dirty="0"/>
+                  <a:t>는 천연가스 가격</a:t>
+                </a:r>
+                <a:r>
+                  <a:rPr lang="en-US" altLang="ko-KR" sz="1600" dirty="0"/>
+                  <a:t>, </a:t>
+                </a:r>
+                <a14:m>
+                  <m:oMath xmlns:m="http://schemas.openxmlformats.org/officeDocument/2006/math">
+                    <m:sSub>
+                      <m:sSubPr>
+                        <m:ctrlPr>
+                          <a:rPr lang="en-US" altLang="ko-KR" sz="1600" i="1">
+                            <a:latin typeface="Cambria Math" panose="02040503050406030204" pitchFamily="18" charset="0"/>
+                          </a:rPr>
+                        </m:ctrlPr>
+                      </m:sSubPr>
+                      <m:e>
+                        <m:r>
+                          <a:rPr lang="en-US" altLang="ko-KR" sz="1600" i="1">
+                            <a:latin typeface="Cambria Math" panose="02040503050406030204" pitchFamily="18" charset="0"/>
+                          </a:rPr>
+                          <m:t>𝑃</m:t>
+                        </m:r>
+                      </m:e>
+                      <m:sub>
+                        <m:r>
+                          <a:rPr lang="en-US" altLang="ko-KR" sz="1600" b="0" i="1" smtClean="0">
+                            <a:latin typeface="Cambria Math" panose="02040503050406030204" pitchFamily="18" charset="0"/>
+                          </a:rPr>
+                          <m:t>𝑜𝑖𝑙</m:t>
+                        </m:r>
+                      </m:sub>
+                    </m:sSub>
+                  </m:oMath>
+                </a14:m>
+                <a:r>
+                  <a:rPr lang="ko-KR" altLang="en-US" sz="1600" dirty="0"/>
+                  <a:t>은 기준 석유제품 가격</a:t>
+                </a:r>
+                <a:r>
+                  <a:rPr lang="en-US" altLang="ko-KR" sz="1600" dirty="0"/>
+                  <a:t>, </a:t>
+                </a:r>
+                <a14:m>
+                  <m:oMath xmlns:m="http://schemas.openxmlformats.org/officeDocument/2006/math">
+                    <m:r>
+                      <a:rPr lang="ko-KR" altLang="en-US" sz="1600" i="1">
+                        <a:latin typeface="Cambria Math" panose="02040503050406030204" pitchFamily="18" charset="0"/>
+                      </a:rPr>
+                      <m:t>𝛼</m:t>
+                    </m:r>
+                  </m:oMath>
+                </a14:m>
+                <a:r>
+                  <a:rPr lang="ko-KR" altLang="en-US" sz="1600" dirty="0"/>
+                  <a:t>는 에너지 등가기준 계수</a:t>
+                </a:r>
+                <a:r>
+                  <a:rPr lang="en-US" altLang="ko-KR" sz="1600" dirty="0"/>
+                  <a:t>, </a:t>
+                </a:r>
+                <a:r>
+                  <a:rPr lang="ko-KR" altLang="en-US" sz="1600" dirty="0"/>
+                  <a:t>그리고 </a:t>
+                </a:r>
+                <a14:m>
+                  <m:oMath xmlns:m="http://schemas.openxmlformats.org/officeDocument/2006/math">
+                    <m:r>
+                      <a:rPr lang="ko-KR" altLang="en-US" sz="1600" i="1">
+                        <a:latin typeface="Cambria Math" panose="02040503050406030204" pitchFamily="18" charset="0"/>
+                      </a:rPr>
+                      <m:t>𝛽</m:t>
+                    </m:r>
+                  </m:oMath>
+                </a14:m>
+                <a:r>
+                  <a:rPr lang="ko-KR" altLang="en-US" sz="1600" dirty="0"/>
+                  <a:t>는 조정상수로서 운송비용</a:t>
+                </a:r>
+                <a:r>
+                  <a:rPr lang="en-US" altLang="ko-KR" sz="1600" dirty="0"/>
+                  <a:t>, </a:t>
+                </a:r>
+                <a:r>
+                  <a:rPr lang="ko-KR" altLang="en-US" sz="1600" dirty="0"/>
+                  <a:t>시장조정 요소를 반영한다</a:t>
+                </a:r>
+                <a:r>
+                  <a:rPr lang="en-US" altLang="ko-KR" sz="1600" dirty="0"/>
+                  <a:t>.</a:t>
+                </a:r>
+              </a:p>
+              <a:p>
+                <a:pPr marL="835025" lvl="1" indent="-285750">
+                  <a:lnSpc>
+                    <a:spcPct val="150000"/>
+                  </a:lnSpc>
+                  <a:buFont typeface="Wingdings" panose="05000000000000000000" pitchFamily="2" charset="2"/>
+                  <a:buChar char="ü"/>
+                </a:pPr>
+                <a:r>
+                  <a:rPr lang="ko-KR" altLang="en-US" sz="1600" dirty="0"/>
+                  <a:t>이러한 방식은 가격 변동성을 유가에 연동시켜 장기적인 안정성을 제공하지만</a:t>
+                </a:r>
+                <a:r>
+                  <a:rPr lang="en-US" altLang="ko-KR" sz="1600" dirty="0"/>
+                  <a:t>, </a:t>
+                </a:r>
+                <a:r>
+                  <a:rPr lang="ko-KR" altLang="en-US" sz="1600" dirty="0"/>
+                  <a:t>시장의 수급 상황이나 천연가스 고유의 수요</a:t>
+                </a:r>
+                <a:r>
+                  <a:rPr lang="en-US" altLang="ko-KR" sz="1600" dirty="0"/>
+                  <a:t>·</a:t>
+                </a:r>
+                <a:r>
+                  <a:rPr lang="ko-KR" altLang="en-US" sz="1600" dirty="0"/>
+                  <a:t>공급 특성을 반영하는 데 한계가 있다</a:t>
+                </a:r>
+                <a:r>
+                  <a:rPr lang="en-US" altLang="ko-KR" sz="1600" dirty="0"/>
+                  <a:t>.</a:t>
+                </a:r>
+              </a:p>
+            </p:txBody>
+          </p:sp>
+        </mc:Choice>
+        <mc:Fallback>
+          <p:sp>
+            <p:nvSpPr>
+              <p:cNvPr id="3" name="TextBox 2">
+                <a:extLst>
+                  <a:ext uri="{FF2B5EF4-FFF2-40B4-BE49-F238E27FC236}">
+                    <a16:creationId xmlns:a16="http://schemas.microsoft.com/office/drawing/2014/main" id="{2CC89ACE-4393-7D0A-2702-4B5526C02AF1}"/>
+                  </a:ext>
+                </a:extLst>
+              </p:cNvPr>
+              <p:cNvSpPr txBox="1">
+                <a:spLocks noRot="1" noChangeAspect="1" noMove="1" noResize="1" noEditPoints="1" noAdjustHandles="1" noChangeArrowheads="1" noChangeShapeType="1" noTextEdit="1"/>
+              </p:cNvSpPr>
+              <p:nvPr/>
+            </p:nvSpPr>
+            <p:spPr>
+              <a:xfrm>
+                <a:off x="288790" y="958844"/>
+                <a:ext cx="11118453" cy="2660024"/>
+              </a:xfrm>
+              <a:prstGeom prst="rect">
+                <a:avLst/>
+              </a:prstGeom>
+              <a:blipFill>
+                <a:blip r:embed="rId3"/>
+                <a:stretch>
+                  <a:fillRect b="-1831"/>
+                </a:stretch>
+              </a:blipFill>
+            </p:spPr>
+            <p:txBody>
+              <a:bodyPr/>
+              <a:lstStyle/>
+              <a:p>
+                <a:r>
+                  <a:rPr lang="ko-KR" altLang="en-US">
+                    <a:noFill/>
+                  </a:rPr>
+                  <a:t> </a:t>
+                </a:r>
+              </a:p>
+            </p:txBody>
+          </p:sp>
+        </mc:Fallback>
+      </mc:AlternateContent>
+      <mc:AlternateContent xmlns:mc="http://schemas.openxmlformats.org/markup-compatibility/2006">
+        <mc:Choice xmlns:a14="http://schemas.microsoft.com/office/drawing/2010/main" Requires="a14">
+          <p:sp>
+            <p:nvSpPr>
+              <p:cNvPr id="6" name="TextBox 5">
+                <a:extLst>
+                  <a:ext uri="{FF2B5EF4-FFF2-40B4-BE49-F238E27FC236}">
+                    <a16:creationId xmlns:a16="http://schemas.microsoft.com/office/drawing/2014/main" id="{BE600957-BB1D-C6F8-9C67-DB4A45CB599B}"/>
+                  </a:ext>
+                </a:extLst>
+              </p:cNvPr>
+              <p:cNvSpPr txBox="1"/>
+              <p:nvPr/>
+            </p:nvSpPr>
+            <p:spPr>
+              <a:xfrm>
+                <a:off x="775251" y="1531044"/>
+                <a:ext cx="6135756" cy="407484"/>
+              </a:xfrm>
+              <a:prstGeom prst="rect">
+                <a:avLst/>
+              </a:prstGeom>
+              <a:noFill/>
+            </p:spPr>
+            <p:txBody>
+              <a:bodyPr wrap="square">
+                <a:spAutoFit/>
+              </a:bodyPr>
+              <a:lstStyle/>
+              <a:p>
+                <a:pPr/>
+                <a14:m>
+                  <m:oMathPara xmlns:m="http://schemas.openxmlformats.org/officeDocument/2006/math">
+                    <m:oMathParaPr>
+                      <m:jc m:val="centerGroup"/>
+                    </m:oMathParaPr>
+                    <m:oMath xmlns:m="http://schemas.openxmlformats.org/officeDocument/2006/math">
+                      <m:sSub>
+                        <m:sSubPr>
+                          <m:ctrlPr>
+                            <a:rPr lang="en-US" altLang="ko-KR" b="0" i="1" smtClean="0">
+                              <a:latin typeface="Cambria Math" panose="02040503050406030204" pitchFamily="18" charset="0"/>
+                            </a:rPr>
+                          </m:ctrlPr>
+                        </m:sSubPr>
+                        <m:e>
+                          <m:r>
+                            <a:rPr lang="en-US" altLang="ko-KR" b="0" i="1" smtClean="0">
+                              <a:latin typeface="Cambria Math" panose="02040503050406030204" pitchFamily="18" charset="0"/>
+                            </a:rPr>
+                            <m:t>𝑃</m:t>
+                          </m:r>
+                        </m:e>
+                        <m:sub>
+                          <m:r>
+                            <a:rPr lang="en-US" altLang="ko-KR" b="0" i="1" smtClean="0">
+                              <a:latin typeface="Cambria Math" panose="02040503050406030204" pitchFamily="18" charset="0"/>
+                            </a:rPr>
+                            <m:t>𝑔𝑎𝑠</m:t>
+                          </m:r>
+                        </m:sub>
+                      </m:sSub>
+                      <m:r>
+                        <a:rPr lang="en-US" altLang="ko-KR" b="0" i="1" smtClean="0">
+                          <a:latin typeface="Cambria Math" panose="02040503050406030204" pitchFamily="18" charset="0"/>
+                        </a:rPr>
+                        <m:t>= </m:t>
+                      </m:r>
+                      <m:r>
+                        <a:rPr lang="ko-KR" altLang="en-US" b="0" i="1" smtClean="0">
+                          <a:latin typeface="Cambria Math" panose="02040503050406030204" pitchFamily="18" charset="0"/>
+                        </a:rPr>
+                        <m:t>𝛼</m:t>
+                      </m:r>
+                      <m:r>
+                        <a:rPr lang="en-US" altLang="ko-KR" b="0" i="1" smtClean="0">
+                          <a:latin typeface="Cambria Math" panose="02040503050406030204" pitchFamily="18" charset="0"/>
+                        </a:rPr>
+                        <m:t>·</m:t>
+                      </m:r>
+                      <m:sSub>
+                        <m:sSubPr>
+                          <m:ctrlPr>
+                            <a:rPr lang="en-US" altLang="ko-KR" i="1">
+                              <a:latin typeface="Cambria Math" panose="02040503050406030204" pitchFamily="18" charset="0"/>
+                            </a:rPr>
+                          </m:ctrlPr>
+                        </m:sSubPr>
+                        <m:e>
+                          <m:r>
+                            <a:rPr lang="en-US" altLang="ko-KR" i="1">
+                              <a:latin typeface="Cambria Math" panose="02040503050406030204" pitchFamily="18" charset="0"/>
+                            </a:rPr>
+                            <m:t>𝑃</m:t>
+                          </m:r>
+                        </m:e>
+                        <m:sub>
+                          <m:r>
+                            <a:rPr lang="en-US" altLang="ko-KR" b="0" i="1" smtClean="0">
+                              <a:latin typeface="Cambria Math" panose="02040503050406030204" pitchFamily="18" charset="0"/>
+                            </a:rPr>
+                            <m:t>𝑜𝑖𝑙</m:t>
+                          </m:r>
+                        </m:sub>
+                      </m:sSub>
+                      <m:r>
+                        <a:rPr lang="en-US" altLang="ko-KR" b="0" i="1" smtClean="0">
+                          <a:latin typeface="Cambria Math" panose="02040503050406030204" pitchFamily="18" charset="0"/>
+                        </a:rPr>
+                        <m:t>+ </m:t>
+                      </m:r>
+                      <m:r>
+                        <a:rPr lang="ko-KR" altLang="en-US" b="0" i="1" smtClean="0">
+                          <a:latin typeface="Cambria Math" panose="02040503050406030204" pitchFamily="18" charset="0"/>
+                        </a:rPr>
+                        <m:t>𝛽</m:t>
+                      </m:r>
+                    </m:oMath>
+                  </m:oMathPara>
+                </a14:m>
+                <a:endParaRPr lang="ko-KR" altLang="en-US" dirty="0"/>
+              </a:p>
+            </p:txBody>
+          </p:sp>
+        </mc:Choice>
+        <mc:Fallback>
+          <p:sp>
+            <p:nvSpPr>
+              <p:cNvPr id="6" name="TextBox 5">
+                <a:extLst>
+                  <a:ext uri="{FF2B5EF4-FFF2-40B4-BE49-F238E27FC236}">
+                    <a16:creationId xmlns:a16="http://schemas.microsoft.com/office/drawing/2014/main" id="{BE600957-BB1D-C6F8-9C67-DB4A45CB599B}"/>
+                  </a:ext>
+                </a:extLst>
+              </p:cNvPr>
+              <p:cNvSpPr txBox="1">
+                <a:spLocks noRot="1" noChangeAspect="1" noMove="1" noResize="1" noEditPoints="1" noAdjustHandles="1" noChangeArrowheads="1" noChangeShapeType="1" noTextEdit="1"/>
+              </p:cNvSpPr>
+              <p:nvPr/>
+            </p:nvSpPr>
+            <p:spPr>
+              <a:xfrm>
+                <a:off x="775251" y="1531044"/>
+                <a:ext cx="6135756" cy="407484"/>
+              </a:xfrm>
+              <a:prstGeom prst="rect">
+                <a:avLst/>
+              </a:prstGeom>
+              <a:blipFill>
+                <a:blip r:embed="rId4"/>
+                <a:stretch>
+                  <a:fillRect b="-4478"/>
+                </a:stretch>
+              </a:blipFill>
+            </p:spPr>
+            <p:txBody>
+              <a:bodyPr/>
+              <a:lstStyle/>
+              <a:p>
+                <a:r>
+                  <a:rPr lang="ko-KR" altLang="en-US">
+                    <a:noFill/>
+                  </a:rPr>
+                  <a:t> </a:t>
+                </a:r>
+              </a:p>
+            </p:txBody>
+          </p:sp>
+        </mc:Fallback>
+      </mc:AlternateContent>
+    </p:spTree>
+    <p:extLst>
+      <p:ext uri="{BB962C8B-B14F-4D97-AF65-F5344CB8AC3E}">
+        <p14:creationId xmlns:p14="http://schemas.microsoft.com/office/powerpoint/2010/main" val="3845763455"/>
+      </p:ext>
+    </p:extLst>
+  </p:cSld>
+  <p:clrMapOvr>
+    <a:masterClrMapping/>
+  </p:clrMapOvr>
+</p:sld>
+</file>
+
+<file path=ppt/slides/slide49.xml><?xml version="1.0" encoding="utf-8"?>
+<p:sld xmlns:a="http://schemas.openxmlformats.org/drawingml/2006/main" xmlns:r="http://schemas.openxmlformats.org/officeDocument/2006/relationships" xmlns:p="http://schemas.openxmlformats.org/presentationml/2006/main">
+  <p:cSld>
+    <p:spTree>
+      <p:nvGrpSpPr>
+        <p:cNvPr id="1" name="">
+          <a:extLst>
+            <a:ext uri="{FF2B5EF4-FFF2-40B4-BE49-F238E27FC236}">
+              <a16:creationId xmlns:a16="http://schemas.microsoft.com/office/drawing/2014/main" id="{73B7697D-8458-B2E9-23BC-D564D2A42F61}"/>
+            </a:ext>
+          </a:extLst>
+        </p:cNvPr>
+        <p:cNvGrpSpPr/>
+        <p:nvPr/>
+      </p:nvGrpSpPr>
+      <p:grpSpPr>
+        <a:xfrm>
+          <a:off x="0" y="0"/>
+          <a:ext cx="0" cy="0"/>
+          <a:chOff x="0" y="0"/>
+          <a:chExt cx="0" cy="0"/>
+        </a:xfrm>
+      </p:grpSpPr>
+      <p:sp>
+        <p:nvSpPr>
+          <p:cNvPr id="2" name="제목 1">
+            <a:extLst>
+              <a:ext uri="{FF2B5EF4-FFF2-40B4-BE49-F238E27FC236}">
+                <a16:creationId xmlns:a16="http://schemas.microsoft.com/office/drawing/2014/main" id="{A07117C1-2A48-3C31-A676-A07D645E3538}"/>
+              </a:ext>
+            </a:extLst>
+          </p:cNvPr>
+          <p:cNvSpPr>
+            <a:spLocks noGrp="1"/>
+          </p:cNvSpPr>
+          <p:nvPr>
+            <p:ph type="title"/>
+          </p:nvPr>
+        </p:nvSpPr>
+        <p:spPr/>
+        <p:txBody>
+          <a:bodyPr/>
+          <a:lstStyle/>
+          <a:p>
+            <a:r>
+              <a:rPr lang="ko-KR" altLang="en-US" dirty="0"/>
+              <a:t>천연가스 가격의 결정 요인들</a:t>
+            </a:r>
+          </a:p>
+        </p:txBody>
+      </p:sp>
+      <p:sp>
+        <p:nvSpPr>
+          <p:cNvPr id="4" name="슬라이드 번호 개체 틀 3">
+            <a:extLst>
+              <a:ext uri="{FF2B5EF4-FFF2-40B4-BE49-F238E27FC236}">
+                <a16:creationId xmlns:a16="http://schemas.microsoft.com/office/drawing/2014/main" id="{011B495F-2503-212C-39D9-6C6791D567D8}"/>
+              </a:ext>
+            </a:extLst>
+          </p:cNvPr>
+          <p:cNvSpPr>
+            <a:spLocks noGrp="1"/>
+          </p:cNvSpPr>
+          <p:nvPr>
+            <p:ph type="sldNum" sz="quarter" idx="12"/>
+          </p:nvPr>
+        </p:nvSpPr>
+        <p:spPr/>
+        <p:txBody>
+          <a:bodyPr/>
+          <a:lstStyle/>
+          <a:p>
+            <a:fld id="{109C872D-39A9-4065-8BF3-6A613116E2A1}" type="slidenum">
+              <a:rPr lang="ko-KR" altLang="en-US" smtClean="0"/>
+              <a:t>49</a:t>
+            </a:fld>
+            <a:endParaRPr lang="ko-KR" altLang="en-US"/>
+          </a:p>
+        </p:txBody>
+      </p:sp>
+      <mc:AlternateContent xmlns:mc="http://schemas.openxmlformats.org/markup-compatibility/2006">
+        <mc:Choice xmlns:a14="http://schemas.microsoft.com/office/drawing/2010/main" Requires="a14">
+          <p:sp>
+            <p:nvSpPr>
+              <p:cNvPr id="3" name="TextBox 2">
+                <a:extLst>
+                  <a:ext uri="{FF2B5EF4-FFF2-40B4-BE49-F238E27FC236}">
+                    <a16:creationId xmlns:a16="http://schemas.microsoft.com/office/drawing/2014/main" id="{5345030A-541F-E0F5-CBD7-51B0C24F1DE4}"/>
+                  </a:ext>
+                </a:extLst>
+              </p:cNvPr>
+              <p:cNvSpPr txBox="1"/>
+              <p:nvPr/>
+            </p:nvSpPr>
+            <p:spPr>
+              <a:xfrm>
+                <a:off x="288790" y="958844"/>
+                <a:ext cx="11118453" cy="3428311"/>
+              </a:xfrm>
+              <a:prstGeom prst="rect">
+                <a:avLst/>
+              </a:prstGeom>
+              <a:noFill/>
+            </p:spPr>
+            <p:txBody>
+              <a:bodyPr wrap="square" rtlCol="0" anchor="t">
+                <a:spAutoFit/>
+              </a:bodyPr>
+              <a:lstStyle/>
+              <a:p>
+                <a:pPr marL="377825" indent="-285750">
+                  <a:lnSpc>
+                    <a:spcPct val="150000"/>
+                  </a:lnSpc>
+                  <a:buFont typeface="Arial" panose="020B0604020202020204" pitchFamily="34" charset="0"/>
+                  <a:buChar char="•"/>
+                </a:pPr>
+                <a:r>
+                  <a:rPr lang="ko-KR" altLang="en-US" sz="1600" dirty="0"/>
+                  <a:t>한편</a:t>
+                </a:r>
+                <a:r>
+                  <a:rPr lang="en-US" altLang="ko-KR" sz="1600" dirty="0"/>
+                  <a:t>, </a:t>
+                </a:r>
+                <a:r>
+                  <a:rPr lang="ko-KR" altLang="en-US" sz="1600" dirty="0"/>
+                  <a:t>글로벌 </a:t>
+                </a:r>
+                <a:r>
+                  <a:rPr lang="en-US" altLang="ko-KR" sz="1600" dirty="0"/>
+                  <a:t>LNG </a:t>
+                </a:r>
+                <a:r>
+                  <a:rPr lang="ko-KR" altLang="en-US" sz="1600" dirty="0"/>
+                  <a:t>시장의 확대와 함께 점차 중요성이 증가하고 있는 방식은 순환수 가격방식 </a:t>
+                </a:r>
+                <a:r>
+                  <a:rPr lang="en-US" altLang="ko-KR" sz="1600" dirty="0"/>
+                  <a:t>(netback pricing)</a:t>
+                </a:r>
+                <a:r>
+                  <a:rPr lang="ko-KR" altLang="en-US" sz="1600" dirty="0"/>
+                  <a:t>으로</a:t>
+                </a:r>
+                <a:r>
+                  <a:rPr lang="en-US" altLang="ko-KR" sz="1600" dirty="0"/>
+                  <a:t>, </a:t>
+                </a:r>
+                <a:r>
+                  <a:rPr lang="ko-KR" altLang="en-US" sz="1600" dirty="0"/>
+                  <a:t>이는 수요지에서의 천연가스 판매 가격을 기준으로</a:t>
+                </a:r>
+                <a:r>
+                  <a:rPr lang="en-US" altLang="ko-KR" sz="1600" dirty="0"/>
+                  <a:t>, </a:t>
+                </a:r>
+                <a:r>
+                  <a:rPr lang="ko-KR" altLang="en-US" sz="1600" dirty="0"/>
+                  <a:t>생산지 가격을 역산하는 방식으로</a:t>
+                </a:r>
+                <a:r>
+                  <a:rPr lang="en-US" altLang="ko-KR" sz="1600" dirty="0"/>
+                  <a:t>, </a:t>
+                </a:r>
+                <a:r>
+                  <a:rPr lang="ko-KR" altLang="en-US" sz="1600" dirty="0"/>
+                  <a:t>다음과 같이 표현할 수 있다</a:t>
+                </a:r>
+                <a:r>
+                  <a:rPr lang="en-US" altLang="ko-KR" sz="1600" dirty="0"/>
+                  <a:t>.</a:t>
+                </a:r>
+              </a:p>
+              <a:p>
+                <a:pPr marL="377825" indent="-285750">
+                  <a:lnSpc>
+                    <a:spcPct val="150000"/>
+                  </a:lnSpc>
+                  <a:buFont typeface="Arial" panose="020B0604020202020204" pitchFamily="34" charset="0"/>
+                  <a:buChar char="•"/>
+                </a:pPr>
+                <a:endParaRPr lang="en-US" altLang="ko-KR" sz="1600" dirty="0"/>
+              </a:p>
+              <a:p>
+                <a:pPr marL="377825" indent="-285750">
+                  <a:lnSpc>
+                    <a:spcPct val="150000"/>
+                  </a:lnSpc>
+                  <a:buFont typeface="Arial" panose="020B0604020202020204" pitchFamily="34" charset="0"/>
+                  <a:buChar char="•"/>
+                </a:pPr>
+                <a:endParaRPr lang="en-US" altLang="ko-KR" sz="1600" dirty="0"/>
+              </a:p>
+              <a:p>
+                <a:pPr marL="835025" lvl="1" indent="-285750">
+                  <a:lnSpc>
+                    <a:spcPct val="150000"/>
+                  </a:lnSpc>
+                  <a:buFont typeface="Wingdings" panose="05000000000000000000" pitchFamily="2" charset="2"/>
+                  <a:buChar char="ü"/>
+                </a:pPr>
+                <a14:m>
+                  <m:oMath xmlns:m="http://schemas.openxmlformats.org/officeDocument/2006/math">
+                    <m:sSub>
+                      <m:sSubPr>
+                        <m:ctrlPr>
+                          <a:rPr lang="en-US" altLang="ko-KR" sz="1600" i="1">
+                            <a:latin typeface="Cambria Math" panose="02040503050406030204" pitchFamily="18" charset="0"/>
+                          </a:rPr>
+                        </m:ctrlPr>
+                      </m:sSubPr>
+                      <m:e>
+                        <m:r>
+                          <a:rPr lang="en-US" altLang="ko-KR" sz="1600" i="1">
+                            <a:latin typeface="Cambria Math" panose="02040503050406030204" pitchFamily="18" charset="0"/>
+                          </a:rPr>
+                          <m:t>𝑃</m:t>
+                        </m:r>
+                      </m:e>
+                      <m:sub>
+                        <m:r>
+                          <a:rPr lang="en-US" altLang="ko-KR" sz="1600" i="1">
+                            <a:latin typeface="Cambria Math" panose="02040503050406030204" pitchFamily="18" charset="0"/>
+                          </a:rPr>
+                          <m:t>𝑛𝑒𝑡𝑏𝑎𝑐𝑘</m:t>
+                        </m:r>
+                      </m:sub>
+                    </m:sSub>
+                  </m:oMath>
+                </a14:m>
+                <a:r>
+                  <a:rPr lang="ko-KR" altLang="en-US" sz="1600" dirty="0"/>
+                  <a:t>은 생산지</a:t>
+                </a:r>
+                <a:r>
+                  <a:rPr lang="en-US" altLang="ko-KR" sz="1600" dirty="0"/>
+                  <a:t>(</a:t>
+                </a:r>
+                <a:r>
+                  <a:rPr lang="ko-KR" altLang="en-US" sz="1600" dirty="0"/>
+                  <a:t>수출국</a:t>
+                </a:r>
+                <a:r>
+                  <a:rPr lang="en-US" altLang="ko-KR" sz="1600" dirty="0"/>
+                  <a:t>)</a:t>
+                </a:r>
+                <a:r>
+                  <a:rPr lang="ko-KR" altLang="en-US" sz="1600" dirty="0"/>
+                  <a:t>에서의 순환수 가격</a:t>
+                </a:r>
+                <a:r>
+                  <a:rPr lang="en-US" altLang="ko-KR" sz="1600" dirty="0"/>
+                  <a:t>, </a:t>
+                </a:r>
+                <a14:m>
+                  <m:oMath xmlns:m="http://schemas.openxmlformats.org/officeDocument/2006/math">
+                    <m:sSub>
+                      <m:sSubPr>
+                        <m:ctrlPr>
+                          <a:rPr lang="en-US" altLang="ko-KR" sz="1600" i="1">
+                            <a:latin typeface="Cambria Math" panose="02040503050406030204" pitchFamily="18" charset="0"/>
+                          </a:rPr>
+                        </m:ctrlPr>
+                      </m:sSubPr>
+                      <m:e>
+                        <m:r>
+                          <a:rPr lang="en-US" altLang="ko-KR" sz="1600" i="1">
+                            <a:latin typeface="Cambria Math" panose="02040503050406030204" pitchFamily="18" charset="0"/>
+                          </a:rPr>
+                          <m:t>𝑃</m:t>
+                        </m:r>
+                      </m:e>
+                      <m:sub>
+                        <m:r>
+                          <a:rPr lang="en-US" altLang="ko-KR" sz="1600" i="1">
+                            <a:latin typeface="Cambria Math" panose="02040503050406030204" pitchFamily="18" charset="0"/>
+                          </a:rPr>
+                          <m:t>𝑑𝑒𝑙𝑖𝑣𝑒𝑟𝑒𝑑</m:t>
+                        </m:r>
+                      </m:sub>
+                    </m:sSub>
+                  </m:oMath>
+                </a14:m>
+                <a:r>
+                  <a:rPr lang="ko-KR" altLang="en-US" sz="1600" dirty="0"/>
+                  <a:t>는 </a:t>
+                </a:r>
+                <a:r>
+                  <a:rPr lang="ko-KR" altLang="en-US" sz="1600" dirty="0" err="1"/>
+                  <a:t>수요지</a:t>
+                </a:r>
+                <a:r>
+                  <a:rPr lang="en-US" altLang="ko-KR" sz="1600" dirty="0"/>
+                  <a:t>(</a:t>
+                </a:r>
+                <a:r>
+                  <a:rPr lang="ko-KR" altLang="en-US" sz="1600" dirty="0"/>
+                  <a:t>수입국</a:t>
+                </a:r>
+                <a:r>
+                  <a:rPr lang="en-US" altLang="ko-KR" sz="1600" dirty="0"/>
+                  <a:t>)</a:t>
+                </a:r>
+                <a:r>
+                  <a:rPr lang="ko-KR" altLang="en-US" sz="1600" dirty="0"/>
+                  <a:t>에서의 도착가격</a:t>
+                </a:r>
+                <a:r>
+                  <a:rPr lang="en-US" altLang="ko-KR" sz="1600" dirty="0"/>
+                  <a:t>, </a:t>
+                </a:r>
+                <a14:m>
+                  <m:oMath xmlns:m="http://schemas.openxmlformats.org/officeDocument/2006/math">
+                    <m:sSub>
+                      <m:sSubPr>
+                        <m:ctrlPr>
+                          <a:rPr lang="en-US" altLang="ko-KR" sz="1600" i="1">
+                            <a:latin typeface="Cambria Math" panose="02040503050406030204" pitchFamily="18" charset="0"/>
+                          </a:rPr>
+                        </m:ctrlPr>
+                      </m:sSubPr>
+                      <m:e>
+                        <m:r>
+                          <a:rPr lang="en-US" altLang="ko-KR" sz="1600" i="1">
+                            <a:latin typeface="Cambria Math" panose="02040503050406030204" pitchFamily="18" charset="0"/>
+                          </a:rPr>
+                          <m:t>𝐶</m:t>
+                        </m:r>
+                      </m:e>
+                      <m:sub>
+                        <m:r>
+                          <a:rPr lang="en-US" altLang="ko-KR" sz="1600" i="1">
+                            <a:latin typeface="Cambria Math" panose="02040503050406030204" pitchFamily="18" charset="0"/>
+                          </a:rPr>
+                          <m:t>𝑙𝑖𝑞𝑢𝑒𝑓𝑎𝑐𝑡𝑖𝑜𝑛</m:t>
+                        </m:r>
+                      </m:sub>
+                    </m:sSub>
+                  </m:oMath>
+                </a14:m>
+                <a:r>
+                  <a:rPr lang="ko-KR" altLang="en-US" sz="1600" dirty="0"/>
+                  <a:t>은 액화비용</a:t>
+                </a:r>
+                <a:r>
+                  <a:rPr lang="en-US" altLang="ko-KR" sz="1600" dirty="0"/>
+                  <a:t>, </a:t>
+                </a:r>
+                <a14:m>
+                  <m:oMath xmlns:m="http://schemas.openxmlformats.org/officeDocument/2006/math">
+                    <m:sSub>
+                      <m:sSubPr>
+                        <m:ctrlPr>
+                          <a:rPr lang="en-US" altLang="ko-KR" sz="1600" i="1">
+                            <a:latin typeface="Cambria Math" panose="02040503050406030204" pitchFamily="18" charset="0"/>
+                          </a:rPr>
+                        </m:ctrlPr>
+                      </m:sSubPr>
+                      <m:e>
+                        <m:r>
+                          <a:rPr lang="en-US" altLang="ko-KR" sz="1600" i="1">
+                            <a:latin typeface="Cambria Math" panose="02040503050406030204" pitchFamily="18" charset="0"/>
+                          </a:rPr>
+                          <m:t>𝐶</m:t>
+                        </m:r>
+                      </m:e>
+                      <m:sub>
+                        <m:r>
+                          <a:rPr lang="en-US" altLang="ko-KR" sz="1600" i="1">
+                            <a:latin typeface="Cambria Math" panose="02040503050406030204" pitchFamily="18" charset="0"/>
+                          </a:rPr>
+                          <m:t>𝑡𝑟𝑎𝑛𝑠𝑝𝑜𝑟𝑡</m:t>
+                        </m:r>
+                      </m:sub>
+                    </m:sSub>
+                  </m:oMath>
+                </a14:m>
+                <a:r>
+                  <a:rPr lang="ko-KR" altLang="en-US" sz="1600" dirty="0"/>
+                  <a:t>는 운송비용</a:t>
+                </a:r>
+                <a:r>
+                  <a:rPr lang="en-US" altLang="ko-KR" sz="1600" dirty="0"/>
+                  <a:t>, </a:t>
+                </a:r>
+                <a14:m>
+                  <m:oMath xmlns:m="http://schemas.openxmlformats.org/officeDocument/2006/math">
+                    <m:sSub>
+                      <m:sSubPr>
+                        <m:ctrlPr>
+                          <a:rPr lang="en-US" altLang="ko-KR" sz="1600" i="1">
+                            <a:latin typeface="Cambria Math" panose="02040503050406030204" pitchFamily="18" charset="0"/>
+                          </a:rPr>
+                        </m:ctrlPr>
+                      </m:sSubPr>
+                      <m:e>
+                        <m:r>
+                          <a:rPr lang="en-US" altLang="ko-KR" sz="1600" i="1">
+                            <a:latin typeface="Cambria Math" panose="02040503050406030204" pitchFamily="18" charset="0"/>
+                          </a:rPr>
+                          <m:t>𝐶</m:t>
+                        </m:r>
+                      </m:e>
+                      <m:sub>
+                        <m:r>
+                          <a:rPr lang="en-US" altLang="ko-KR" sz="1600" i="1">
+                            <a:latin typeface="Cambria Math" panose="02040503050406030204" pitchFamily="18" charset="0"/>
+                          </a:rPr>
+                          <m:t>𝑟𝑒𝑔𝑎𝑠𝑖𝑓𝑖𝑐𝑎𝑡𝑖𝑜𝑛</m:t>
+                        </m:r>
+                      </m:sub>
+                    </m:sSub>
+                  </m:oMath>
+                </a14:m>
+                <a:r>
+                  <a:rPr lang="ko-KR" altLang="en-US" sz="1600" dirty="0"/>
+                  <a:t>은 재기화비용을 나타낸다</a:t>
+                </a:r>
+                <a:r>
+                  <a:rPr lang="en-US" altLang="ko-KR" sz="1600" dirty="0"/>
+                  <a:t>.</a:t>
+                </a:r>
+              </a:p>
+              <a:p>
+                <a:pPr marL="835025" lvl="1" indent="-285750">
+                  <a:lnSpc>
+                    <a:spcPct val="150000"/>
+                  </a:lnSpc>
+                  <a:buFont typeface="Wingdings" panose="05000000000000000000" pitchFamily="2" charset="2"/>
+                  <a:buChar char="ü"/>
+                </a:pPr>
+                <a:r>
+                  <a:rPr lang="en-US" altLang="ko-KR" sz="1600" dirty="0"/>
+                  <a:t>Netback </a:t>
+                </a:r>
+                <a:r>
+                  <a:rPr lang="ko-KR" altLang="en-US" sz="1600" dirty="0"/>
+                  <a:t>방식은 가격 결정이 수요지의 시장 가격에 따라 유연하게 조정되므로</a:t>
+                </a:r>
+                <a:r>
+                  <a:rPr lang="en-US" altLang="ko-KR" sz="1600" dirty="0"/>
+                  <a:t>, </a:t>
+                </a:r>
+                <a:r>
+                  <a:rPr lang="ko-KR" altLang="en-US" sz="1600" dirty="0"/>
+                  <a:t>시장 기반의 경쟁적 거래에 유리하다</a:t>
+                </a:r>
+                <a:r>
+                  <a:rPr lang="en-US" altLang="ko-KR" sz="1600" dirty="0"/>
+                  <a:t>.</a:t>
+                </a:r>
+              </a:p>
+              <a:p>
+                <a:pPr marL="835025" lvl="1" indent="-285750">
+                  <a:lnSpc>
+                    <a:spcPct val="150000"/>
+                  </a:lnSpc>
+                  <a:buFont typeface="Wingdings" panose="05000000000000000000" pitchFamily="2" charset="2"/>
+                  <a:buChar char="ü"/>
+                </a:pPr>
+                <a:r>
+                  <a:rPr lang="ko-KR" altLang="en-US" sz="1600" dirty="0"/>
+                  <a:t>이 방식은 특히 미국</a:t>
+                </a:r>
+                <a:r>
+                  <a:rPr lang="en-US" altLang="ko-KR" sz="1600" dirty="0"/>
+                  <a:t>, </a:t>
+                </a:r>
+                <a:r>
+                  <a:rPr lang="ko-KR" altLang="en-US" sz="1600" dirty="0"/>
+                  <a:t>호주 등 자유화된 가스 생산국에서 </a:t>
+                </a:r>
+                <a:r>
+                  <a:rPr lang="en-US" altLang="ko-KR" sz="1600" dirty="0"/>
+                  <a:t>LNG </a:t>
+                </a:r>
+                <a:r>
+                  <a:rPr lang="ko-KR" altLang="en-US" sz="1600" dirty="0"/>
+                  <a:t>수출 시 가격 책정의 핵심 도구로 활용되고 있다</a:t>
+                </a:r>
+                <a:r>
+                  <a:rPr lang="en-US" altLang="ko-KR" sz="1600" dirty="0"/>
+                  <a:t>. </a:t>
+                </a:r>
+              </a:p>
+            </p:txBody>
+          </p:sp>
+        </mc:Choice>
+        <mc:Fallback>
+          <p:sp>
+            <p:nvSpPr>
+              <p:cNvPr id="3" name="TextBox 2">
+                <a:extLst>
+                  <a:ext uri="{FF2B5EF4-FFF2-40B4-BE49-F238E27FC236}">
+                    <a16:creationId xmlns:a16="http://schemas.microsoft.com/office/drawing/2014/main" id="{5345030A-541F-E0F5-CBD7-51B0C24F1DE4}"/>
+                  </a:ext>
+                </a:extLst>
+              </p:cNvPr>
+              <p:cNvSpPr txBox="1">
+                <a:spLocks noRot="1" noChangeAspect="1" noMove="1" noResize="1" noEditPoints="1" noAdjustHandles="1" noChangeArrowheads="1" noChangeShapeType="1" noTextEdit="1"/>
+              </p:cNvSpPr>
+              <p:nvPr/>
+            </p:nvSpPr>
+            <p:spPr>
+              <a:xfrm>
+                <a:off x="288790" y="958844"/>
+                <a:ext cx="11118453" cy="3428311"/>
+              </a:xfrm>
+              <a:prstGeom prst="rect">
+                <a:avLst/>
+              </a:prstGeom>
+              <a:blipFill>
+                <a:blip r:embed="rId3"/>
+                <a:stretch>
+                  <a:fillRect r="-329" b="-1243"/>
+                </a:stretch>
+              </a:blipFill>
+            </p:spPr>
+            <p:txBody>
+              <a:bodyPr/>
+              <a:lstStyle/>
+              <a:p>
+                <a:r>
+                  <a:rPr lang="ko-KR" altLang="en-US">
+                    <a:noFill/>
+                  </a:rPr>
+                  <a:t> </a:t>
+                </a:r>
+              </a:p>
+            </p:txBody>
+          </p:sp>
+        </mc:Fallback>
+      </mc:AlternateContent>
+      <mc:AlternateContent xmlns:mc="http://schemas.openxmlformats.org/markup-compatibility/2006">
+        <mc:Choice xmlns:a14="http://schemas.microsoft.com/office/drawing/2010/main" Requires="a14">
+          <p:sp>
+            <p:nvSpPr>
+              <p:cNvPr id="7" name="TextBox 6">
+                <a:extLst>
+                  <a:ext uri="{FF2B5EF4-FFF2-40B4-BE49-F238E27FC236}">
+                    <a16:creationId xmlns:a16="http://schemas.microsoft.com/office/drawing/2014/main" id="{2636F128-5F12-5DF4-E134-0507E789787A}"/>
+                  </a:ext>
+                </a:extLst>
+              </p:cNvPr>
+              <p:cNvSpPr txBox="1"/>
+              <p:nvPr/>
+            </p:nvSpPr>
+            <p:spPr>
+              <a:xfrm>
+                <a:off x="1037626" y="1893273"/>
+                <a:ext cx="7679636" cy="391902"/>
+              </a:xfrm>
+              <a:prstGeom prst="rect">
+                <a:avLst/>
+              </a:prstGeom>
+              <a:noFill/>
+            </p:spPr>
+            <p:txBody>
+              <a:bodyPr wrap="square">
+                <a:spAutoFit/>
+              </a:bodyPr>
+              <a:lstStyle/>
+              <a:p>
+                <a14:m>
+                  <m:oMathPara xmlns:m="http://schemas.openxmlformats.org/officeDocument/2006/math">
+                    <m:oMathParaPr>
+                      <m:jc m:val="centerGroup"/>
+                    </m:oMathParaPr>
+                    <m:oMath xmlns:m="http://schemas.openxmlformats.org/officeDocument/2006/math">
+                      <m:sSub>
+                        <m:sSubPr>
+                          <m:ctrlPr>
+                            <a:rPr lang="en-US" altLang="ko-KR" b="0" i="1" smtClean="0">
+                              <a:latin typeface="Cambria Math" panose="02040503050406030204" pitchFamily="18" charset="0"/>
+                            </a:rPr>
+                          </m:ctrlPr>
+                        </m:sSubPr>
+                        <m:e>
+                          <m:r>
+                            <a:rPr lang="en-US" altLang="ko-KR" b="0" i="1" smtClean="0">
+                              <a:latin typeface="Cambria Math" panose="02040503050406030204" pitchFamily="18" charset="0"/>
+                            </a:rPr>
+                            <m:t>𝑃</m:t>
+                          </m:r>
+                        </m:e>
+                        <m:sub>
+                          <m:r>
+                            <a:rPr lang="en-US" altLang="ko-KR" b="0" i="1" smtClean="0">
+                              <a:latin typeface="Cambria Math" panose="02040503050406030204" pitchFamily="18" charset="0"/>
+                            </a:rPr>
+                            <m:t>𝑛𝑒𝑡𝑏𝑎𝑐𝑘</m:t>
+                          </m:r>
+                        </m:sub>
+                      </m:sSub>
+                      <m:r>
+                        <a:rPr lang="en-US" altLang="ko-KR" b="0" i="1" smtClean="0">
+                          <a:latin typeface="Cambria Math" panose="02040503050406030204" pitchFamily="18" charset="0"/>
+                        </a:rPr>
+                        <m:t>= </m:t>
+                      </m:r>
+                      <m:sSub>
+                        <m:sSubPr>
+                          <m:ctrlPr>
+                            <a:rPr lang="en-US" altLang="ko-KR" i="1" smtClean="0">
+                              <a:latin typeface="Cambria Math" panose="02040503050406030204" pitchFamily="18" charset="0"/>
+                            </a:rPr>
+                          </m:ctrlPr>
+                        </m:sSubPr>
+                        <m:e>
+                          <m:r>
+                            <a:rPr lang="en-US" altLang="ko-KR" i="1">
+                              <a:latin typeface="Cambria Math" panose="02040503050406030204" pitchFamily="18" charset="0"/>
+                            </a:rPr>
+                            <m:t>𝑃</m:t>
+                          </m:r>
+                        </m:e>
+                        <m:sub>
+                          <m:r>
+                            <a:rPr lang="en-US" altLang="ko-KR" b="0" i="1" smtClean="0">
+                              <a:latin typeface="Cambria Math" panose="02040503050406030204" pitchFamily="18" charset="0"/>
+                            </a:rPr>
+                            <m:t>𝑑𝑒𝑙𝑖𝑣𝑒𝑟𝑒𝑑</m:t>
+                          </m:r>
+                        </m:sub>
+                      </m:sSub>
+                      <m:r>
+                        <a:rPr lang="en-US" altLang="ko-KR" b="0" i="1" smtClean="0">
+                          <a:latin typeface="Cambria Math" panose="02040503050406030204" pitchFamily="18" charset="0"/>
+                        </a:rPr>
+                        <m:t>−</m:t>
+                      </m:r>
+                      <m:sSub>
+                        <m:sSubPr>
+                          <m:ctrlPr>
+                            <a:rPr lang="en-US" altLang="ko-KR" i="1">
+                              <a:latin typeface="Cambria Math" panose="02040503050406030204" pitchFamily="18" charset="0"/>
+                            </a:rPr>
+                          </m:ctrlPr>
+                        </m:sSubPr>
+                        <m:e>
+                          <m:r>
+                            <a:rPr lang="en-US" altLang="ko-KR" b="0" i="1" smtClean="0">
+                              <a:latin typeface="Cambria Math" panose="02040503050406030204" pitchFamily="18" charset="0"/>
+                            </a:rPr>
+                            <m:t>𝐶</m:t>
+                          </m:r>
+                        </m:e>
+                        <m:sub>
+                          <m:r>
+                            <a:rPr lang="en-US" altLang="ko-KR" b="0" i="1" smtClean="0">
+                              <a:latin typeface="Cambria Math" panose="02040503050406030204" pitchFamily="18" charset="0"/>
+                            </a:rPr>
+                            <m:t>𝑙𝑖𝑞𝑢𝑒𝑓𝑎𝑐𝑡𝑖𝑜𝑛</m:t>
+                          </m:r>
+                        </m:sub>
+                      </m:sSub>
+                      <m:r>
+                        <a:rPr lang="en-US" altLang="ko-KR" b="0" i="1" smtClean="0">
+                          <a:latin typeface="Cambria Math" panose="02040503050406030204" pitchFamily="18" charset="0"/>
+                        </a:rPr>
+                        <m:t>−</m:t>
+                      </m:r>
+                      <m:sSub>
+                        <m:sSubPr>
+                          <m:ctrlPr>
+                            <a:rPr lang="en-US" altLang="ko-KR" i="1">
+                              <a:latin typeface="Cambria Math" panose="02040503050406030204" pitchFamily="18" charset="0"/>
+                            </a:rPr>
+                          </m:ctrlPr>
+                        </m:sSubPr>
+                        <m:e>
+                          <m:r>
+                            <a:rPr lang="en-US" altLang="ko-KR" i="1">
+                              <a:latin typeface="Cambria Math" panose="02040503050406030204" pitchFamily="18" charset="0"/>
+                            </a:rPr>
+                            <m:t>𝐶</m:t>
+                          </m:r>
+                        </m:e>
+                        <m:sub>
+                          <m:r>
+                            <a:rPr lang="en-US" altLang="ko-KR" b="0" i="1" smtClean="0">
+                              <a:latin typeface="Cambria Math" panose="02040503050406030204" pitchFamily="18" charset="0"/>
+                            </a:rPr>
+                            <m:t>𝑡𝑟𝑎𝑛𝑠𝑝𝑜𝑟𝑡</m:t>
+                          </m:r>
+                        </m:sub>
+                      </m:sSub>
+                      <m:r>
+                        <a:rPr lang="en-US" altLang="ko-KR" b="0" i="1" smtClean="0">
+                          <a:latin typeface="Cambria Math" panose="02040503050406030204" pitchFamily="18" charset="0"/>
+                        </a:rPr>
+                        <m:t>−</m:t>
+                      </m:r>
+                      <m:sSub>
+                        <m:sSubPr>
+                          <m:ctrlPr>
+                            <a:rPr lang="en-US" altLang="ko-KR" i="1">
+                              <a:latin typeface="Cambria Math" panose="02040503050406030204" pitchFamily="18" charset="0"/>
+                            </a:rPr>
+                          </m:ctrlPr>
+                        </m:sSubPr>
+                        <m:e>
+                          <m:r>
+                            <a:rPr lang="en-US" altLang="ko-KR" i="1">
+                              <a:latin typeface="Cambria Math" panose="02040503050406030204" pitchFamily="18" charset="0"/>
+                            </a:rPr>
+                            <m:t>𝐶</m:t>
+                          </m:r>
+                        </m:e>
+                        <m:sub>
+                          <m:r>
+                            <a:rPr lang="en-US" altLang="ko-KR" b="0" i="1" smtClean="0">
+                              <a:latin typeface="Cambria Math" panose="02040503050406030204" pitchFamily="18" charset="0"/>
+                            </a:rPr>
+                            <m:t>𝑟𝑒𝑔𝑎𝑠𝑖𝑓𝑖𝑐𝑎𝑡𝑖𝑜𝑛</m:t>
+                          </m:r>
+                        </m:sub>
+                      </m:sSub>
+                    </m:oMath>
+                  </m:oMathPara>
+                </a14:m>
+                <a:endParaRPr lang="ko-KR" altLang="en-US" dirty="0"/>
+              </a:p>
+            </p:txBody>
+          </p:sp>
+        </mc:Choice>
+        <mc:Fallback>
+          <p:sp>
+            <p:nvSpPr>
+              <p:cNvPr id="7" name="TextBox 6">
+                <a:extLst>
+                  <a:ext uri="{FF2B5EF4-FFF2-40B4-BE49-F238E27FC236}">
+                    <a16:creationId xmlns:a16="http://schemas.microsoft.com/office/drawing/2014/main" id="{2636F128-5F12-5DF4-E134-0507E789787A}"/>
+                  </a:ext>
+                </a:extLst>
+              </p:cNvPr>
+              <p:cNvSpPr txBox="1">
+                <a:spLocks noRot="1" noChangeAspect="1" noMove="1" noResize="1" noEditPoints="1" noAdjustHandles="1" noChangeArrowheads="1" noChangeShapeType="1" noTextEdit="1"/>
+              </p:cNvSpPr>
+              <p:nvPr/>
+            </p:nvSpPr>
+            <p:spPr>
+              <a:xfrm>
+                <a:off x="1037626" y="1893273"/>
+                <a:ext cx="7679636" cy="391902"/>
+              </a:xfrm>
+              <a:prstGeom prst="rect">
+                <a:avLst/>
+              </a:prstGeom>
+              <a:blipFill>
+                <a:blip r:embed="rId4"/>
+                <a:stretch>
+                  <a:fillRect b="-9375"/>
+                </a:stretch>
+              </a:blipFill>
+            </p:spPr>
+            <p:txBody>
+              <a:bodyPr/>
+              <a:lstStyle/>
+              <a:p>
+                <a:r>
+                  <a:rPr lang="ko-KR" altLang="en-US">
+                    <a:noFill/>
+                  </a:rPr>
+                  <a:t> </a:t>
+                </a:r>
+              </a:p>
+            </p:txBody>
+          </p:sp>
+        </mc:Fallback>
+      </mc:AlternateContent>
+    </p:spTree>
+    <p:extLst>
+      <p:ext uri="{BB962C8B-B14F-4D97-AF65-F5344CB8AC3E}">
+        <p14:creationId xmlns:p14="http://schemas.microsoft.com/office/powerpoint/2010/main" val="2677260698"/>
+      </p:ext>
+    </p:extLst>
+  </p:cSld>
+  <p:clrMapOvr>
+    <a:masterClrMapping/>
+  </p:clrMapOvr>
+</p:sld>
+</file>
+
+<file path=ppt/slides/slide5.xml><?xml version="1.0" encoding="utf-8"?>
+<p:sld xmlns:a="http://schemas.openxmlformats.org/drawingml/2006/main" xmlns:r="http://schemas.openxmlformats.org/officeDocument/2006/relationships" xmlns:p="http://schemas.openxmlformats.org/presentationml/2006/main">
+  <p:cSld>
+    <p:spTree>
+      <p:nvGrpSpPr>
+        <p:cNvPr id="1" name="">
+          <a:extLst>
+            <a:ext uri="{FF2B5EF4-FFF2-40B4-BE49-F238E27FC236}">
+              <a16:creationId xmlns:a16="http://schemas.microsoft.com/office/drawing/2014/main" id="{AA58849E-C3EC-66C2-D5C9-C59E5D5BC968}"/>
+            </a:ext>
+          </a:extLst>
+        </p:cNvPr>
+        <p:cNvGrpSpPr/>
+        <p:nvPr/>
+      </p:nvGrpSpPr>
+      <p:grpSpPr>
+        <a:xfrm>
+          <a:off x="0" y="0"/>
+          <a:ext cx="0" cy="0"/>
+          <a:chOff x="0" y="0"/>
+          <a:chExt cx="0" cy="0"/>
+        </a:xfrm>
+      </p:grpSpPr>
+      <p:sp>
+        <p:nvSpPr>
+          <p:cNvPr id="2" name="제목 1">
+            <a:extLst>
+              <a:ext uri="{FF2B5EF4-FFF2-40B4-BE49-F238E27FC236}">
+                <a16:creationId xmlns:a16="http://schemas.microsoft.com/office/drawing/2014/main" id="{B4FAA21E-A0E0-EB01-8A47-F492A782CE9A}"/>
+              </a:ext>
+            </a:extLst>
+          </p:cNvPr>
+          <p:cNvSpPr>
+            <a:spLocks noGrp="1"/>
+          </p:cNvSpPr>
+          <p:nvPr>
+            <p:ph type="title"/>
+          </p:nvPr>
+        </p:nvSpPr>
+        <p:spPr/>
+        <p:txBody>
+          <a:bodyPr/>
+          <a:lstStyle/>
+          <a:p>
+            <a:r>
+              <a:rPr lang="ko-KR" altLang="en-US" dirty="0"/>
+              <a:t>서론</a:t>
+            </a:r>
+          </a:p>
+        </p:txBody>
+      </p:sp>
+      <p:sp>
+        <p:nvSpPr>
+          <p:cNvPr id="4" name="슬라이드 번호 개체 틀 3">
+            <a:extLst>
+              <a:ext uri="{FF2B5EF4-FFF2-40B4-BE49-F238E27FC236}">
+                <a16:creationId xmlns:a16="http://schemas.microsoft.com/office/drawing/2014/main" id="{3055CFF5-1045-A861-0C88-5A1DFAB93430}"/>
+              </a:ext>
+            </a:extLst>
+          </p:cNvPr>
+          <p:cNvSpPr>
+            <a:spLocks noGrp="1"/>
+          </p:cNvSpPr>
+          <p:nvPr>
+            <p:ph type="sldNum" sz="quarter" idx="12"/>
+          </p:nvPr>
+        </p:nvSpPr>
+        <p:spPr/>
+        <p:txBody>
+          <a:bodyPr/>
+          <a:lstStyle/>
+          <a:p>
+            <a:fld id="{109C872D-39A9-4065-8BF3-6A613116E2A1}" type="slidenum">
+              <a:rPr lang="ko-KR" altLang="en-US" smtClean="0"/>
+              <a:t>5</a:t>
+            </a:fld>
+            <a:endParaRPr lang="ko-KR" altLang="en-US"/>
+          </a:p>
+        </p:txBody>
+      </p:sp>
+      <p:sp>
+        <p:nvSpPr>
+          <p:cNvPr id="3" name="TextBox 2">
+            <a:extLst>
+              <a:ext uri="{FF2B5EF4-FFF2-40B4-BE49-F238E27FC236}">
+                <a16:creationId xmlns:a16="http://schemas.microsoft.com/office/drawing/2014/main" id="{F68FFC37-4353-1DB7-17B9-97C4402833EA}"/>
+              </a:ext>
+            </a:extLst>
+          </p:cNvPr>
+          <p:cNvSpPr txBox="1"/>
+          <p:nvPr/>
+        </p:nvSpPr>
+        <p:spPr>
+          <a:xfrm>
+            <a:off x="288790" y="958844"/>
+            <a:ext cx="11118453" cy="5584670"/>
+          </a:xfrm>
+          <a:prstGeom prst="rect">
+            <a:avLst/>
+          </a:prstGeom>
+          <a:noFill/>
+        </p:spPr>
+        <p:txBody>
+          <a:bodyPr wrap="square" rtlCol="0" anchor="t">
+            <a:spAutoFit/>
+          </a:bodyPr>
+          <a:lstStyle/>
+          <a:p>
+            <a:pPr marL="377825" indent="-285750">
+              <a:lnSpc>
+                <a:spcPct val="150000"/>
+              </a:lnSpc>
+              <a:buFont typeface="Arial" panose="020B0604020202020204" pitchFamily="34" charset="0"/>
+              <a:buChar char="•"/>
+            </a:pPr>
+            <a:r>
+              <a:rPr lang="en-US" altLang="ko-KR" sz="1600" dirty="0"/>
+              <a:t>20</a:t>
+            </a:r>
+            <a:r>
+              <a:rPr lang="ko-KR" altLang="en-US" sz="1600" dirty="0"/>
+              <a:t>세기 초반에는 파이프라인 기술의 발전으로</a:t>
+            </a:r>
+            <a:r>
+              <a:rPr lang="en-US" altLang="ko-KR" sz="1600" dirty="0"/>
+              <a:t> </a:t>
+            </a:r>
+            <a:r>
+              <a:rPr lang="ko-KR" altLang="en-US" sz="1600" dirty="0"/>
+              <a:t>천연가스의 대규모 수송이 가능해지며 산업적 활용이 크게 확대 </a:t>
+            </a:r>
+            <a:r>
+              <a:rPr lang="ko-KR" altLang="en-US" sz="1600" dirty="0" err="1"/>
+              <a:t>됬다</a:t>
+            </a:r>
+            <a:r>
+              <a:rPr lang="en-US" altLang="ko-KR" sz="1600" dirty="0"/>
+              <a:t>.</a:t>
+            </a:r>
+          </a:p>
+          <a:p>
+            <a:pPr marL="835025" lvl="1" indent="-285750">
+              <a:lnSpc>
+                <a:spcPct val="150000"/>
+              </a:lnSpc>
+              <a:buFont typeface="Wingdings" panose="05000000000000000000" pitchFamily="2" charset="2"/>
+              <a:buChar char="ü"/>
+            </a:pPr>
+            <a:r>
+              <a:rPr lang="en-US" altLang="ko-KR" sz="1600" dirty="0"/>
+              <a:t>1920</a:t>
+            </a:r>
+            <a:r>
+              <a:rPr lang="ko-KR" altLang="en-US" sz="1600" dirty="0"/>
+              <a:t>년대에는 장거리 천연가스 파이프라인이 건설되기 시작하였다</a:t>
+            </a:r>
+            <a:r>
+              <a:rPr lang="en-US" altLang="ko-KR" sz="1600" dirty="0"/>
+              <a:t>.</a:t>
+            </a:r>
+          </a:p>
+          <a:p>
+            <a:pPr marL="835025" lvl="1" indent="-285750">
+              <a:lnSpc>
+                <a:spcPct val="150000"/>
+              </a:lnSpc>
+              <a:buFont typeface="Wingdings" panose="05000000000000000000" pitchFamily="2" charset="2"/>
+              <a:buChar char="ü"/>
+            </a:pPr>
+            <a:r>
+              <a:rPr lang="en-US" altLang="ko-KR" sz="1600" dirty="0"/>
+              <a:t>1927</a:t>
+            </a:r>
+            <a:r>
+              <a:rPr lang="ko-KR" altLang="en-US" sz="1600" dirty="0"/>
+              <a:t>년에는 인디애나주와 시카고를 잇는 미국 최초의 장거리 파이프라인이 가동되었다</a:t>
+            </a:r>
+            <a:r>
+              <a:rPr lang="en-US" altLang="ko-KR" sz="1600" dirty="0"/>
+              <a:t>.</a:t>
+            </a:r>
+          </a:p>
+          <a:p>
+            <a:pPr marL="835025" lvl="1" indent="-285750">
+              <a:lnSpc>
+                <a:spcPct val="150000"/>
+              </a:lnSpc>
+              <a:buFont typeface="Wingdings" panose="05000000000000000000" pitchFamily="2" charset="2"/>
+              <a:buChar char="ü"/>
+            </a:pPr>
+            <a:endParaRPr lang="en-US" altLang="ko-KR" sz="1600" dirty="0"/>
+          </a:p>
+          <a:p>
+            <a:pPr marL="377825" indent="-285750">
+              <a:lnSpc>
+                <a:spcPct val="150000"/>
+              </a:lnSpc>
+              <a:buFont typeface="Arial" panose="020B0604020202020204" pitchFamily="34" charset="0"/>
+              <a:buChar char="•"/>
+            </a:pPr>
+            <a:r>
+              <a:rPr lang="en-US" altLang="ko-KR" sz="1600" dirty="0"/>
+              <a:t>1950~1960</a:t>
+            </a:r>
+            <a:r>
+              <a:rPr lang="ko-KR" altLang="en-US" sz="1600" dirty="0"/>
+              <a:t>년대는 천연가스 산업의 황금기이며</a:t>
+            </a:r>
+            <a:r>
+              <a:rPr lang="en-US" altLang="ko-KR" sz="1600" dirty="0"/>
+              <a:t>, </a:t>
+            </a:r>
+            <a:r>
+              <a:rPr lang="ko-KR" altLang="en-US" sz="1600" dirty="0"/>
+              <a:t>가정용과 산업용 에너지원으로서 수요가 폭발적인 증가를 보였다</a:t>
+            </a:r>
+            <a:r>
+              <a:rPr lang="en-US" altLang="ko-KR" sz="1600" dirty="0"/>
+              <a:t>.</a:t>
+            </a:r>
+          </a:p>
+          <a:p>
+            <a:pPr marL="835025" lvl="1" indent="-285750">
+              <a:lnSpc>
+                <a:spcPct val="150000"/>
+              </a:lnSpc>
+              <a:buFont typeface="Wingdings" panose="05000000000000000000" pitchFamily="2" charset="2"/>
+              <a:buChar char="ü"/>
+            </a:pPr>
+            <a:r>
+              <a:rPr lang="ko-KR" altLang="en-US" sz="1600" dirty="0"/>
+              <a:t>전력 생산부문에서는 석탄과 함께 주요 기저발전원으로 자리 잡았고</a:t>
+            </a:r>
+            <a:r>
+              <a:rPr lang="en-US" altLang="ko-KR" sz="1600" dirty="0"/>
+              <a:t>, </a:t>
+            </a:r>
+            <a:r>
+              <a:rPr lang="ko-KR" altLang="en-US" sz="1600" dirty="0"/>
+              <a:t>천연가스의 청정성과 연소 효율성으로 도시지역의 </a:t>
+            </a:r>
+            <a:r>
+              <a:rPr lang="ko-KR" altLang="en-US" sz="1600" dirty="0" err="1"/>
+              <a:t>대기질</a:t>
+            </a:r>
+            <a:r>
+              <a:rPr lang="ko-KR" altLang="en-US" sz="1600" dirty="0"/>
+              <a:t> 개선에도 기여하였다</a:t>
+            </a:r>
+            <a:r>
+              <a:rPr lang="en-US" altLang="ko-KR" sz="1600" dirty="0"/>
+              <a:t>.</a:t>
+            </a:r>
+          </a:p>
+          <a:p>
+            <a:pPr marL="835025" lvl="1" indent="-285750">
+              <a:lnSpc>
+                <a:spcPct val="150000"/>
+              </a:lnSpc>
+              <a:buFont typeface="Wingdings" panose="05000000000000000000" pitchFamily="2" charset="2"/>
+              <a:buChar char="ü"/>
+            </a:pPr>
+            <a:r>
+              <a:rPr lang="ko-KR" altLang="en-US" sz="1600" dirty="0"/>
+              <a:t>이 시기에 미국과 구소련</a:t>
+            </a:r>
+            <a:r>
+              <a:rPr lang="en-US" altLang="ko-KR" sz="1600" dirty="0"/>
+              <a:t>, </a:t>
+            </a:r>
+            <a:r>
+              <a:rPr lang="ko-KR" altLang="en-US" sz="1600" dirty="0"/>
+              <a:t>중동 지역에서는 대규모 가스전이 연이어 발견되었고</a:t>
+            </a:r>
+            <a:r>
+              <a:rPr lang="en-US" altLang="ko-KR" sz="1600" dirty="0"/>
+              <a:t>, </a:t>
+            </a:r>
+            <a:r>
+              <a:rPr lang="ko-KR" altLang="en-US" sz="1600" dirty="0"/>
+              <a:t>향후 글로벌 천연가스 공급의 기반이 되었다</a:t>
+            </a:r>
+            <a:r>
+              <a:rPr lang="en-US" altLang="ko-KR" sz="1600" dirty="0"/>
+              <a:t>.</a:t>
+            </a:r>
+          </a:p>
+          <a:p>
+            <a:pPr marL="835025" lvl="1" indent="-285750">
+              <a:lnSpc>
+                <a:spcPct val="150000"/>
+              </a:lnSpc>
+              <a:buFont typeface="Wingdings" panose="05000000000000000000" pitchFamily="2" charset="2"/>
+              <a:buChar char="ü"/>
+            </a:pPr>
+            <a:endParaRPr lang="en-US" altLang="ko-KR" sz="1600" dirty="0"/>
+          </a:p>
+          <a:p>
+            <a:pPr marL="377825" indent="-285750">
+              <a:lnSpc>
+                <a:spcPct val="150000"/>
+              </a:lnSpc>
+              <a:buFont typeface="Arial" panose="020B0604020202020204" pitchFamily="34" charset="0"/>
+              <a:buChar char="•"/>
+            </a:pPr>
+            <a:r>
+              <a:rPr lang="en-US" altLang="ko-KR" sz="1600" dirty="0"/>
+              <a:t>1980</a:t>
+            </a:r>
+            <a:r>
+              <a:rPr lang="ko-KR" altLang="en-US" sz="1600" dirty="0"/>
+              <a:t>년</a:t>
+            </a:r>
+            <a:r>
+              <a:rPr lang="en-US" altLang="ko-KR" sz="1600" dirty="0"/>
+              <a:t>~1990</a:t>
+            </a:r>
+            <a:r>
+              <a:rPr lang="ko-KR" altLang="en-US" sz="1600" dirty="0"/>
+              <a:t>년대는 천연가스의 국제무역이 본격화된 시기로 액화천연가스 기술의 발달이 중요한 전환점이 되었다</a:t>
+            </a:r>
+            <a:r>
+              <a:rPr lang="en-US" altLang="ko-KR" sz="1600" dirty="0"/>
+              <a:t>.</a:t>
+            </a:r>
+          </a:p>
+          <a:p>
+            <a:pPr marL="835025" lvl="1" indent="-285750">
+              <a:lnSpc>
+                <a:spcPct val="150000"/>
+              </a:lnSpc>
+              <a:buFont typeface="Wingdings" panose="05000000000000000000" pitchFamily="2" charset="2"/>
+              <a:buChar char="ü"/>
+            </a:pPr>
+            <a:r>
+              <a:rPr lang="ko-KR" altLang="en-US" sz="1600" dirty="0"/>
+              <a:t>액화천연가스</a:t>
+            </a:r>
+            <a:r>
+              <a:rPr lang="en-US" altLang="ko-KR" sz="1600" dirty="0"/>
+              <a:t>(LNG; Liquified Natural Gas) </a:t>
+            </a:r>
+            <a:r>
+              <a:rPr lang="ko-KR" altLang="en-US" sz="1600" dirty="0"/>
+              <a:t>기술은 가스를 영하</a:t>
+            </a:r>
+            <a:r>
+              <a:rPr lang="en-US" altLang="ko-KR" sz="1600" dirty="0"/>
+              <a:t>162</a:t>
+            </a:r>
+            <a:r>
+              <a:rPr lang="ko-KR" altLang="en-US" sz="1600" dirty="0"/>
+              <a:t>도까지 냉각하여 </a:t>
+            </a:r>
+            <a:r>
+              <a:rPr lang="ko-KR" altLang="en-US" sz="1600" dirty="0" err="1"/>
+              <a:t>액화한</a:t>
+            </a:r>
+            <a:r>
+              <a:rPr lang="ko-KR" altLang="en-US" sz="1600" dirty="0"/>
+              <a:t> 뒤 해상으로 수송하는 방식을 가능케 하여</a:t>
+            </a:r>
+            <a:r>
+              <a:rPr lang="en-US" altLang="ko-KR" sz="1600" dirty="0"/>
+              <a:t>, </a:t>
+            </a:r>
+            <a:r>
+              <a:rPr lang="ko-KR" altLang="en-US" sz="1600" dirty="0"/>
+              <a:t>파이프라인으로 공급하지 못하는 지역에도 천연가스를 공급할 수 있게 되었다</a:t>
+            </a:r>
+            <a:r>
+              <a:rPr lang="en-US" altLang="ko-KR" sz="1600" dirty="0"/>
+              <a:t>.</a:t>
+            </a:r>
+          </a:p>
+          <a:p>
+            <a:pPr marL="835025" lvl="1" indent="-285750">
+              <a:lnSpc>
+                <a:spcPct val="150000"/>
+              </a:lnSpc>
+              <a:buFont typeface="Wingdings" panose="05000000000000000000" pitchFamily="2" charset="2"/>
+              <a:buChar char="ü"/>
+            </a:pPr>
+            <a:r>
+              <a:rPr lang="en-US" altLang="ko-KR" sz="1600" dirty="0"/>
+              <a:t>1964</a:t>
+            </a:r>
+            <a:r>
+              <a:rPr lang="ko-KR" altLang="en-US" sz="1600" dirty="0"/>
+              <a:t>년 알제리에서 영국으로 </a:t>
+            </a:r>
+            <a:r>
+              <a:rPr lang="en-US" altLang="ko-KR" sz="1600" dirty="0"/>
+              <a:t>LNG </a:t>
+            </a:r>
+            <a:r>
+              <a:rPr lang="ko-KR" altLang="en-US" sz="1600" dirty="0"/>
+              <a:t>수출이 최초로 이루어지고</a:t>
+            </a:r>
+            <a:r>
+              <a:rPr lang="en-US" altLang="ko-KR" sz="1600" dirty="0"/>
+              <a:t>, </a:t>
+            </a:r>
+            <a:r>
+              <a:rPr lang="ko-KR" altLang="en-US" sz="1600" dirty="0"/>
+              <a:t>해상수송은 세계 천연가스시장에서 중요한 운송수단으로 자리잡았다</a:t>
+            </a:r>
+            <a:r>
+              <a:rPr lang="en-US" altLang="ko-KR" sz="1600" dirty="0"/>
+              <a:t>.</a:t>
+            </a:r>
+          </a:p>
+        </p:txBody>
+      </p:sp>
+    </p:spTree>
+    <p:extLst>
+      <p:ext uri="{BB962C8B-B14F-4D97-AF65-F5344CB8AC3E}">
+        <p14:creationId xmlns:p14="http://schemas.microsoft.com/office/powerpoint/2010/main" val="2296139293"/>
+      </p:ext>
+    </p:extLst>
+  </p:cSld>
+  <p:clrMapOvr>
+    <a:masterClrMapping/>
+  </p:clrMapOvr>
+</p:sld>
+</file>
+
+<file path=ppt/slides/slide50.xml><?xml version="1.0" encoding="utf-8"?>
+<p:sld xmlns:a="http://schemas.openxmlformats.org/drawingml/2006/main" xmlns:r="http://schemas.openxmlformats.org/officeDocument/2006/relationships" xmlns:p="http://schemas.openxmlformats.org/presentationml/2006/main">
+  <p:cSld>
+    <p:spTree>
+      <p:nvGrpSpPr>
+        <p:cNvPr id="1" name="">
+          <a:extLst>
+            <a:ext uri="{FF2B5EF4-FFF2-40B4-BE49-F238E27FC236}">
+              <a16:creationId xmlns:a16="http://schemas.microsoft.com/office/drawing/2014/main" id="{B357F1B0-0459-CE18-60D8-69F1ED2AEE19}"/>
+            </a:ext>
+          </a:extLst>
+        </p:cNvPr>
+        <p:cNvGrpSpPr/>
+        <p:nvPr/>
+      </p:nvGrpSpPr>
+      <p:grpSpPr>
+        <a:xfrm>
+          <a:off x="0" y="0"/>
+          <a:ext cx="0" cy="0"/>
+          <a:chOff x="0" y="0"/>
+          <a:chExt cx="0" cy="0"/>
+        </a:xfrm>
+      </p:grpSpPr>
+      <p:sp>
+        <p:nvSpPr>
+          <p:cNvPr id="2" name="제목 1">
+            <a:extLst>
+              <a:ext uri="{FF2B5EF4-FFF2-40B4-BE49-F238E27FC236}">
+                <a16:creationId xmlns:a16="http://schemas.microsoft.com/office/drawing/2014/main" id="{163B2D04-6292-43D3-9395-D9B6D2CC01E6}"/>
+              </a:ext>
+            </a:extLst>
+          </p:cNvPr>
+          <p:cNvSpPr>
+            <a:spLocks noGrp="1"/>
+          </p:cNvSpPr>
+          <p:nvPr>
+            <p:ph type="title"/>
+          </p:nvPr>
+        </p:nvSpPr>
+        <p:spPr/>
+        <p:txBody>
+          <a:bodyPr/>
+          <a:lstStyle/>
+          <a:p>
+            <a:r>
+              <a:rPr lang="ko-KR" altLang="en-US" dirty="0"/>
+              <a:t>천연가스 가격의 결정 요인들</a:t>
+            </a:r>
+          </a:p>
+        </p:txBody>
+      </p:sp>
+      <p:sp>
+        <p:nvSpPr>
+          <p:cNvPr id="4" name="슬라이드 번호 개체 틀 3">
+            <a:extLst>
+              <a:ext uri="{FF2B5EF4-FFF2-40B4-BE49-F238E27FC236}">
+                <a16:creationId xmlns:a16="http://schemas.microsoft.com/office/drawing/2014/main" id="{C5538462-C511-4FC5-E443-15D17F80CEB8}"/>
+              </a:ext>
+            </a:extLst>
+          </p:cNvPr>
+          <p:cNvSpPr>
+            <a:spLocks noGrp="1"/>
+          </p:cNvSpPr>
+          <p:nvPr>
+            <p:ph type="sldNum" sz="quarter" idx="12"/>
+          </p:nvPr>
+        </p:nvSpPr>
+        <p:spPr/>
+        <p:txBody>
+          <a:bodyPr/>
+          <a:lstStyle/>
+          <a:p>
+            <a:fld id="{109C872D-39A9-4065-8BF3-6A613116E2A1}" type="slidenum">
+              <a:rPr lang="ko-KR" altLang="en-US" smtClean="0"/>
+              <a:t>50</a:t>
+            </a:fld>
+            <a:endParaRPr lang="ko-KR" altLang="en-US"/>
+          </a:p>
+        </p:txBody>
+      </p:sp>
+      <mc:AlternateContent xmlns:mc="http://schemas.openxmlformats.org/markup-compatibility/2006">
+        <mc:Choice xmlns:a14="http://schemas.microsoft.com/office/drawing/2010/main" Requires="a14">
+          <p:sp>
+            <p:nvSpPr>
+              <p:cNvPr id="3" name="TextBox 2">
+                <a:extLst>
+                  <a:ext uri="{FF2B5EF4-FFF2-40B4-BE49-F238E27FC236}">
+                    <a16:creationId xmlns:a16="http://schemas.microsoft.com/office/drawing/2014/main" id="{D3F6188D-1215-F683-09DD-2CD902F2BDAF}"/>
+                  </a:ext>
+                </a:extLst>
+              </p:cNvPr>
+              <p:cNvSpPr txBox="1"/>
+              <p:nvPr/>
+            </p:nvSpPr>
+            <p:spPr>
+              <a:xfrm>
+                <a:off x="288790" y="958844"/>
+                <a:ext cx="11118453" cy="4880054"/>
+              </a:xfrm>
+              <a:prstGeom prst="rect">
+                <a:avLst/>
+              </a:prstGeom>
+              <a:noFill/>
+            </p:spPr>
+            <p:txBody>
+              <a:bodyPr wrap="square" rtlCol="0" anchor="t">
+                <a:spAutoFit/>
+              </a:bodyPr>
+              <a:lstStyle/>
+              <a:p>
+                <a:pPr marL="377825" indent="-285750">
+                  <a:lnSpc>
+                    <a:spcPct val="150000"/>
+                  </a:lnSpc>
+                  <a:buFont typeface="Arial" panose="020B0604020202020204" pitchFamily="34" charset="0"/>
+                  <a:buChar char="•"/>
+                </a:pPr>
+                <a:r>
+                  <a:rPr lang="ko-KR" altLang="en-US" sz="1600" dirty="0"/>
+                  <a:t>최근에는 유가 연동 방식과 시장 가격 연동 방식을 결합한 혼합가격방식도 등장하고 있다</a:t>
+                </a:r>
+                <a:r>
+                  <a:rPr lang="en-US" altLang="ko-KR" sz="1600" dirty="0"/>
+                  <a:t>. </a:t>
+                </a:r>
+                <a:r>
+                  <a:rPr lang="ko-KR" altLang="en-US" sz="1600" dirty="0"/>
+                  <a:t>이 방식은 다음과 같은 가중 평균 형태로 모델링 되기도 한다</a:t>
+                </a:r>
+                <a:r>
+                  <a:rPr lang="en-US" altLang="ko-KR" sz="1600" dirty="0"/>
+                  <a:t>.</a:t>
+                </a:r>
+              </a:p>
+              <a:p>
+                <a:pPr marL="377825" indent="-285750">
+                  <a:lnSpc>
+                    <a:spcPct val="150000"/>
+                  </a:lnSpc>
+                  <a:buFont typeface="Arial" panose="020B0604020202020204" pitchFamily="34" charset="0"/>
+                  <a:buChar char="•"/>
+                </a:pPr>
+                <a:endParaRPr lang="en-US" altLang="ko-KR" sz="1600" dirty="0"/>
+              </a:p>
+              <a:p>
+                <a:pPr marL="377825" indent="-285750">
+                  <a:lnSpc>
+                    <a:spcPct val="150000"/>
+                  </a:lnSpc>
+                  <a:buFont typeface="Arial" panose="020B0604020202020204" pitchFamily="34" charset="0"/>
+                  <a:buChar char="•"/>
+                </a:pPr>
+                <a:endParaRPr lang="en-US" altLang="ko-KR" sz="1600" dirty="0"/>
+              </a:p>
+              <a:p>
+                <a:pPr marL="377825" indent="-285750">
+                  <a:lnSpc>
+                    <a:spcPct val="150000"/>
+                  </a:lnSpc>
+                  <a:buFont typeface="Arial" panose="020B0604020202020204" pitchFamily="34" charset="0"/>
+                  <a:buChar char="•"/>
+                </a:pPr>
+                <a:endParaRPr lang="en-US" altLang="ko-KR" sz="1600" dirty="0"/>
+              </a:p>
+              <a:p>
+                <a:pPr marL="835025" lvl="1" indent="-285750">
+                  <a:lnSpc>
+                    <a:spcPct val="150000"/>
+                  </a:lnSpc>
+                  <a:buFont typeface="Wingdings" panose="05000000000000000000" pitchFamily="2" charset="2"/>
+                  <a:buChar char="ü"/>
+                </a:pPr>
+                <a:r>
+                  <a:rPr lang="ko-KR" altLang="en-US" sz="1600" dirty="0"/>
+                  <a:t>여기서 </a:t>
+                </a:r>
+                <a14:m>
+                  <m:oMath xmlns:m="http://schemas.openxmlformats.org/officeDocument/2006/math">
+                    <m:sSub>
+                      <m:sSubPr>
+                        <m:ctrlPr>
+                          <a:rPr lang="ko-KR" altLang="en-US" sz="1600" i="1">
+                            <a:latin typeface="Cambria Math" panose="02040503050406030204" pitchFamily="18" charset="0"/>
+                          </a:rPr>
+                        </m:ctrlPr>
+                      </m:sSubPr>
+                      <m:e>
+                        <m:r>
+                          <a:rPr lang="en-US" altLang="ko-KR" sz="1600" i="1">
+                            <a:latin typeface="Cambria Math" panose="02040503050406030204" pitchFamily="18" charset="0"/>
+                          </a:rPr>
+                          <m:t>𝑤</m:t>
+                        </m:r>
+                      </m:e>
+                      <m:sub>
+                        <m:r>
+                          <a:rPr lang="en-US" altLang="ko-KR" sz="1600" i="1">
+                            <a:latin typeface="Cambria Math" panose="02040503050406030204" pitchFamily="18" charset="0"/>
+                          </a:rPr>
+                          <m:t>1</m:t>
+                        </m:r>
+                      </m:sub>
+                    </m:sSub>
+                    <m:r>
+                      <a:rPr lang="en-US" altLang="ko-KR" sz="1600" b="0" i="1" smtClean="0">
+                        <a:latin typeface="Cambria Math" panose="02040503050406030204" pitchFamily="18" charset="0"/>
+                      </a:rPr>
+                      <m:t>+</m:t>
+                    </m:r>
+                    <m:sSub>
+                      <m:sSubPr>
+                        <m:ctrlPr>
+                          <a:rPr lang="ko-KR" altLang="en-US" sz="1600" i="1">
+                            <a:latin typeface="Cambria Math" panose="02040503050406030204" pitchFamily="18" charset="0"/>
+                          </a:rPr>
+                        </m:ctrlPr>
+                      </m:sSubPr>
+                      <m:e>
+                        <m:r>
+                          <a:rPr lang="en-US" altLang="ko-KR" sz="1600" i="1">
+                            <a:latin typeface="Cambria Math" panose="02040503050406030204" pitchFamily="18" charset="0"/>
+                          </a:rPr>
+                          <m:t>𝑤</m:t>
+                        </m:r>
+                      </m:e>
+                      <m:sub>
+                        <m:r>
+                          <a:rPr lang="en-US" altLang="ko-KR" sz="1600" b="0" i="1" smtClean="0">
+                            <a:latin typeface="Cambria Math" panose="02040503050406030204" pitchFamily="18" charset="0"/>
+                          </a:rPr>
+                          <m:t>2</m:t>
+                        </m:r>
+                      </m:sub>
+                    </m:sSub>
+                    <m:r>
+                      <a:rPr lang="en-US" altLang="ko-KR" sz="1600" b="0" i="1" smtClean="0">
+                        <a:latin typeface="Cambria Math" panose="02040503050406030204" pitchFamily="18" charset="0"/>
+                      </a:rPr>
+                      <m:t>=1</m:t>
+                    </m:r>
+                  </m:oMath>
+                </a14:m>
+                <a:r>
+                  <a:rPr lang="en-US" altLang="ko-KR" sz="1600" dirty="0"/>
+                  <a:t> </a:t>
+                </a:r>
+                <a:r>
+                  <a:rPr lang="ko-KR" altLang="en-US" sz="1600" dirty="0"/>
+                  <a:t>이고</a:t>
+                </a:r>
+                <a:r>
+                  <a:rPr lang="en-US" altLang="ko-KR" sz="1600" dirty="0"/>
+                  <a:t>, </a:t>
+                </a:r>
+                <a:r>
+                  <a:rPr lang="ko-KR" altLang="en-US" sz="1600" dirty="0"/>
+                  <a:t>각각 가중치를 의미하고</a:t>
+                </a:r>
+                <a:r>
+                  <a:rPr lang="en-US" altLang="ko-KR" sz="1600" dirty="0"/>
+                  <a:t>, </a:t>
+                </a:r>
+                <a14:m>
+                  <m:oMath xmlns:m="http://schemas.openxmlformats.org/officeDocument/2006/math">
+                    <m:sSub>
+                      <m:sSubPr>
+                        <m:ctrlPr>
+                          <a:rPr lang="en-US" altLang="ko-KR" sz="1600" i="1">
+                            <a:latin typeface="Cambria Math" panose="02040503050406030204" pitchFamily="18" charset="0"/>
+                          </a:rPr>
+                        </m:ctrlPr>
+                      </m:sSubPr>
+                      <m:e>
+                        <m:r>
+                          <a:rPr lang="en-US" altLang="ko-KR" sz="1600" i="1">
+                            <a:latin typeface="Cambria Math" panose="02040503050406030204" pitchFamily="18" charset="0"/>
+                          </a:rPr>
+                          <m:t>𝑃</m:t>
+                        </m:r>
+                      </m:e>
+                      <m:sub>
+                        <m:r>
+                          <a:rPr lang="en-US" altLang="ko-KR" sz="1600" i="1">
+                            <a:latin typeface="Cambria Math" panose="02040503050406030204" pitchFamily="18" charset="0"/>
+                          </a:rPr>
+                          <m:t>h𝑦𝑏𝑟𝑖𝑑</m:t>
+                        </m:r>
+                      </m:sub>
+                    </m:sSub>
+                    <m:r>
+                      <a:rPr lang="ko-KR" altLang="en-US" sz="1600" i="1" smtClean="0">
+                        <a:latin typeface="Cambria Math" panose="02040503050406030204" pitchFamily="18" charset="0"/>
+                      </a:rPr>
+                      <m:t>는</m:t>
+                    </m:r>
+                  </m:oMath>
+                </a14:m>
+                <a:r>
+                  <a:rPr lang="en-US" altLang="ko-KR" sz="1600" dirty="0"/>
+                  <a:t> </a:t>
+                </a:r>
+                <a:r>
+                  <a:rPr lang="ko-KR" altLang="en-US" sz="1600" dirty="0"/>
+                  <a:t>가격의 가중평균</a:t>
+                </a:r>
+                <a:r>
+                  <a:rPr lang="en-US" altLang="ko-KR" sz="1600" dirty="0"/>
+                  <a:t>, </a:t>
+                </a:r>
+                <a14:m>
+                  <m:oMath xmlns:m="http://schemas.openxmlformats.org/officeDocument/2006/math">
+                    <m:sSub>
+                      <m:sSubPr>
+                        <m:ctrlPr>
+                          <a:rPr lang="en-US" altLang="ko-KR" sz="1600" i="1">
+                            <a:latin typeface="Cambria Math" panose="02040503050406030204" pitchFamily="18" charset="0"/>
+                          </a:rPr>
+                        </m:ctrlPr>
+                      </m:sSubPr>
+                      <m:e>
+                        <m:r>
+                          <a:rPr lang="en-US" altLang="ko-KR" sz="1600" i="1">
+                            <a:latin typeface="Cambria Math" panose="02040503050406030204" pitchFamily="18" charset="0"/>
+                          </a:rPr>
+                          <m:t>𝑃</m:t>
+                        </m:r>
+                      </m:e>
+                      <m:sub>
+                        <m:r>
+                          <a:rPr lang="en-US" altLang="ko-KR" sz="1600" i="1">
+                            <a:latin typeface="Cambria Math" panose="02040503050406030204" pitchFamily="18" charset="0"/>
+                          </a:rPr>
+                          <m:t>𝑜𝑖𝑙</m:t>
+                        </m:r>
+                        <m:r>
+                          <a:rPr lang="en-US" altLang="ko-KR" sz="1600" i="1">
+                            <a:latin typeface="Cambria Math" panose="02040503050406030204" pitchFamily="18" charset="0"/>
+                          </a:rPr>
+                          <m:t>−</m:t>
+                        </m:r>
+                        <m:r>
+                          <a:rPr lang="en-US" altLang="ko-KR" sz="1600" i="1">
+                            <a:latin typeface="Cambria Math" panose="02040503050406030204" pitchFamily="18" charset="0"/>
+                          </a:rPr>
+                          <m:t>𝑖𝑛𝑑𝑒𝑥𝑒𝑑</m:t>
+                        </m:r>
+                      </m:sub>
+                    </m:sSub>
+                  </m:oMath>
+                </a14:m>
+                <a:r>
+                  <a:rPr lang="ko-KR" altLang="en-US" sz="1600" dirty="0"/>
+                  <a:t>은 석유연동가격</a:t>
+                </a:r>
+                <a:r>
+                  <a:rPr lang="en-US" altLang="ko-KR" sz="1600" dirty="0"/>
+                  <a:t>, </a:t>
+                </a:r>
+                <a14:m>
+                  <m:oMath xmlns:m="http://schemas.openxmlformats.org/officeDocument/2006/math">
+                    <m:sSub>
+                      <m:sSubPr>
+                        <m:ctrlPr>
+                          <a:rPr lang="en-US" altLang="ko-KR" sz="1600" i="1">
+                            <a:latin typeface="Cambria Math" panose="02040503050406030204" pitchFamily="18" charset="0"/>
+                          </a:rPr>
+                        </m:ctrlPr>
+                      </m:sSubPr>
+                      <m:e>
+                        <m:r>
+                          <a:rPr lang="en-US" altLang="ko-KR" sz="1600" i="1">
+                            <a:latin typeface="Cambria Math" panose="02040503050406030204" pitchFamily="18" charset="0"/>
+                          </a:rPr>
+                          <m:t>𝑃</m:t>
+                        </m:r>
+                      </m:e>
+                      <m:sub>
+                        <m:r>
+                          <a:rPr lang="en-US" altLang="ko-KR" sz="1600" i="1">
+                            <a:latin typeface="Cambria Math" panose="02040503050406030204" pitchFamily="18" charset="0"/>
+                          </a:rPr>
+                          <m:t>h𝑢𝑏</m:t>
+                        </m:r>
+                      </m:sub>
+                    </m:sSub>
+                  </m:oMath>
+                </a14:m>
+                <a:r>
+                  <a:rPr lang="ko-KR" altLang="en-US" sz="1600" dirty="0"/>
+                  <a:t>는 현물시장 기준가격을 나타낸다</a:t>
+                </a:r>
+                <a:r>
+                  <a:rPr lang="en-US" altLang="ko-KR" sz="1600" dirty="0"/>
+                  <a:t>.</a:t>
+                </a:r>
+              </a:p>
+              <a:p>
+                <a:pPr marL="835025" lvl="1" indent="-285750">
+                  <a:lnSpc>
+                    <a:spcPct val="150000"/>
+                  </a:lnSpc>
+                  <a:buFont typeface="Wingdings" panose="05000000000000000000" pitchFamily="2" charset="2"/>
+                  <a:buChar char="ü"/>
+                </a:pPr>
+                <a:r>
+                  <a:rPr lang="ko-KR" altLang="en-US" sz="1600" dirty="0"/>
+                  <a:t>이러한 혼합방식 모델은 장기계약의 안정성과 시장 가격 반영의 유연성을 동시에 확보할 수 있는 방법이다</a:t>
+                </a:r>
+                <a:r>
+                  <a:rPr lang="en-US" altLang="ko-KR" sz="1600" dirty="0"/>
+                  <a:t>.</a:t>
+                </a:r>
+              </a:p>
+              <a:p>
+                <a:pPr marL="835025" lvl="1" indent="-285750">
+                  <a:lnSpc>
+                    <a:spcPct val="150000"/>
+                  </a:lnSpc>
+                  <a:buFont typeface="Wingdings" panose="05000000000000000000" pitchFamily="2" charset="2"/>
+                  <a:buChar char="ü"/>
+                </a:pPr>
+                <a:endParaRPr lang="en-US" altLang="ko-KR" sz="1600" dirty="0"/>
+              </a:p>
+              <a:p>
+                <a:pPr marL="377825" indent="-285750">
+                  <a:lnSpc>
+                    <a:spcPct val="150000"/>
+                  </a:lnSpc>
+                  <a:buFont typeface="Arial" panose="020B0604020202020204" pitchFamily="34" charset="0"/>
+                  <a:buChar char="•"/>
+                </a:pPr>
+                <a:endParaRPr lang="en-US" altLang="ko-KR" sz="1600" dirty="0"/>
+              </a:p>
+              <a:p>
+                <a:pPr marL="377825" indent="-285750">
+                  <a:lnSpc>
+                    <a:spcPct val="150000"/>
+                  </a:lnSpc>
+                  <a:buFont typeface="Arial" panose="020B0604020202020204" pitchFamily="34" charset="0"/>
+                  <a:buChar char="•"/>
+                </a:pPr>
+                <a:r>
+                  <a:rPr lang="ko-KR" altLang="en-US" sz="1600" dirty="0"/>
+                  <a:t>종합해보면</a:t>
+                </a:r>
+                <a:r>
+                  <a:rPr lang="en-US" altLang="ko-KR" sz="1600" dirty="0"/>
+                  <a:t>, </a:t>
+                </a:r>
+                <a:r>
+                  <a:rPr lang="ko-KR" altLang="en-US" sz="1600" dirty="0"/>
+                  <a:t>천연가스 가격 결정 방식은 석유시장과의 연계성</a:t>
+                </a:r>
+                <a:r>
+                  <a:rPr lang="en-US" altLang="ko-KR" sz="1600" dirty="0"/>
+                  <a:t>, </a:t>
+                </a:r>
+                <a:r>
+                  <a:rPr lang="ko-KR" altLang="en-US" sz="1600" dirty="0"/>
+                  <a:t>국제 거래 구조</a:t>
+                </a:r>
+                <a:r>
+                  <a:rPr lang="en-US" altLang="ko-KR" sz="1600" dirty="0"/>
+                  <a:t>, </a:t>
+                </a:r>
+                <a:r>
+                  <a:rPr lang="ko-KR" altLang="en-US" sz="1600" dirty="0"/>
+                  <a:t>시장의 자유화 정도에 따라 상이하며</a:t>
+                </a:r>
+                <a:r>
+                  <a:rPr lang="en-US" altLang="ko-KR" sz="1600" dirty="0"/>
+                  <a:t>, </a:t>
+                </a:r>
+                <a:r>
+                  <a:rPr lang="ko-KR" altLang="en-US" sz="1600" dirty="0"/>
+                  <a:t>최근에는 점차 수요지의 가격 신호를 반영하는 시장 기반 방식으로의 전환이 이루어지고 있다</a:t>
+                </a:r>
+                <a:r>
+                  <a:rPr lang="en-US" altLang="ko-KR" sz="1600" dirty="0"/>
+                  <a:t>.</a:t>
+                </a:r>
+              </a:p>
+              <a:p>
+                <a:pPr marL="835025" lvl="1" indent="-285750">
+                  <a:lnSpc>
+                    <a:spcPct val="150000"/>
+                  </a:lnSpc>
+                  <a:buFont typeface="Wingdings" panose="05000000000000000000" pitchFamily="2" charset="2"/>
+                  <a:buChar char="ü"/>
+                </a:pPr>
+                <a:r>
+                  <a:rPr lang="ko-KR" altLang="en-US" sz="1600" dirty="0"/>
+                  <a:t>이러한 변화는 천연가스의 글로벌 통합과 에너지 전환이라는 거시적 흐름과 밀접한 관련이 있다</a:t>
+                </a:r>
+                <a:r>
+                  <a:rPr lang="en-US" altLang="ko-KR" sz="1600" dirty="0"/>
+                  <a:t>.</a:t>
+                </a:r>
+              </a:p>
+            </p:txBody>
+          </p:sp>
+        </mc:Choice>
+        <mc:Fallback>
+          <p:sp>
+            <p:nvSpPr>
+              <p:cNvPr id="3" name="TextBox 2">
+                <a:extLst>
+                  <a:ext uri="{FF2B5EF4-FFF2-40B4-BE49-F238E27FC236}">
+                    <a16:creationId xmlns:a16="http://schemas.microsoft.com/office/drawing/2014/main" id="{D3F6188D-1215-F683-09DD-2CD902F2BDAF}"/>
+                  </a:ext>
+                </a:extLst>
+              </p:cNvPr>
+              <p:cNvSpPr txBox="1">
+                <a:spLocks noRot="1" noChangeAspect="1" noMove="1" noResize="1" noEditPoints="1" noAdjustHandles="1" noChangeArrowheads="1" noChangeShapeType="1" noTextEdit="1"/>
+              </p:cNvSpPr>
+              <p:nvPr/>
+            </p:nvSpPr>
+            <p:spPr>
+              <a:xfrm>
+                <a:off x="288790" y="958844"/>
+                <a:ext cx="11118453" cy="4880054"/>
+              </a:xfrm>
+              <a:prstGeom prst="rect">
+                <a:avLst/>
+              </a:prstGeom>
+              <a:blipFill>
+                <a:blip r:embed="rId3"/>
+                <a:stretch>
+                  <a:fillRect r="-658" b="-624"/>
+                </a:stretch>
+              </a:blipFill>
+            </p:spPr>
+            <p:txBody>
+              <a:bodyPr/>
+              <a:lstStyle/>
+              <a:p>
+                <a:r>
+                  <a:rPr lang="ko-KR" altLang="en-US">
+                    <a:noFill/>
+                  </a:rPr>
+                  <a:t> </a:t>
+                </a:r>
+              </a:p>
+            </p:txBody>
+          </p:sp>
+        </mc:Fallback>
+      </mc:AlternateContent>
+      <mc:AlternateContent xmlns:mc="http://schemas.openxmlformats.org/markup-compatibility/2006">
+        <mc:Choice xmlns:a14="http://schemas.microsoft.com/office/drawing/2010/main" Requires="a14">
+          <p:sp>
+            <p:nvSpPr>
+              <p:cNvPr id="5" name="TextBox 4">
+                <a:extLst>
+                  <a:ext uri="{FF2B5EF4-FFF2-40B4-BE49-F238E27FC236}">
+                    <a16:creationId xmlns:a16="http://schemas.microsoft.com/office/drawing/2014/main" id="{5100559F-F58A-4553-ECF9-9EEFBA23E963}"/>
+                  </a:ext>
+                </a:extLst>
+              </p:cNvPr>
+              <p:cNvSpPr txBox="1"/>
+              <p:nvPr/>
+            </p:nvSpPr>
+            <p:spPr>
+              <a:xfrm>
+                <a:off x="775251" y="1787252"/>
+                <a:ext cx="6135756" cy="391261"/>
+              </a:xfrm>
+              <a:prstGeom prst="rect">
+                <a:avLst/>
+              </a:prstGeom>
+              <a:noFill/>
+            </p:spPr>
+            <p:txBody>
+              <a:bodyPr wrap="square">
+                <a:spAutoFit/>
+              </a:bodyPr>
+              <a:lstStyle/>
+              <a:p>
+                <a:pPr/>
+                <a14:m>
+                  <m:oMathPara xmlns:m="http://schemas.openxmlformats.org/officeDocument/2006/math">
+                    <m:oMathParaPr>
+                      <m:jc m:val="centerGroup"/>
+                    </m:oMathParaPr>
+                    <m:oMath xmlns:m="http://schemas.openxmlformats.org/officeDocument/2006/math">
+                      <m:sSub>
+                        <m:sSubPr>
+                          <m:ctrlPr>
+                            <a:rPr lang="en-US" altLang="ko-KR" b="0" i="1" smtClean="0">
+                              <a:latin typeface="Cambria Math" panose="02040503050406030204" pitchFamily="18" charset="0"/>
+                            </a:rPr>
+                          </m:ctrlPr>
+                        </m:sSubPr>
+                        <m:e>
+                          <m:r>
+                            <a:rPr lang="en-US" altLang="ko-KR" b="0" i="1" smtClean="0">
+                              <a:latin typeface="Cambria Math" panose="02040503050406030204" pitchFamily="18" charset="0"/>
+                            </a:rPr>
+                            <m:t>𝑃</m:t>
+                          </m:r>
+                        </m:e>
+                        <m:sub>
+                          <m:r>
+                            <a:rPr lang="en-US" altLang="ko-KR" b="0" i="1" smtClean="0">
+                              <a:latin typeface="Cambria Math" panose="02040503050406030204" pitchFamily="18" charset="0"/>
+                            </a:rPr>
+                            <m:t>h𝑦𝑏𝑟𝑖𝑑</m:t>
+                          </m:r>
+                        </m:sub>
+                      </m:sSub>
+                      <m:r>
+                        <a:rPr lang="en-US" altLang="ko-KR" b="0" i="1" smtClean="0">
+                          <a:latin typeface="Cambria Math" panose="02040503050406030204" pitchFamily="18" charset="0"/>
+                        </a:rPr>
+                        <m:t>= </m:t>
+                      </m:r>
+                      <m:sSub>
+                        <m:sSubPr>
+                          <m:ctrlPr>
+                            <a:rPr lang="ko-KR" altLang="en-US" b="0" i="1" smtClean="0">
+                              <a:latin typeface="Cambria Math" panose="02040503050406030204" pitchFamily="18" charset="0"/>
+                            </a:rPr>
+                          </m:ctrlPr>
+                        </m:sSubPr>
+                        <m:e>
+                          <m:r>
+                            <a:rPr lang="en-US" altLang="ko-KR" b="0" i="1" smtClean="0">
+                              <a:latin typeface="Cambria Math" panose="02040503050406030204" pitchFamily="18" charset="0"/>
+                            </a:rPr>
+                            <m:t>𝑤</m:t>
+                          </m:r>
+                        </m:e>
+                        <m:sub>
+                          <m:r>
+                            <a:rPr lang="en-US" altLang="ko-KR" b="0" i="1" smtClean="0">
+                              <a:latin typeface="Cambria Math" panose="02040503050406030204" pitchFamily="18" charset="0"/>
+                            </a:rPr>
+                            <m:t>1</m:t>
+                          </m:r>
+                        </m:sub>
+                      </m:sSub>
+                      <m:r>
+                        <a:rPr lang="en-US" altLang="ko-KR" b="0" i="1" smtClean="0">
+                          <a:latin typeface="Cambria Math" panose="02040503050406030204" pitchFamily="18" charset="0"/>
+                        </a:rPr>
+                        <m:t>·</m:t>
+                      </m:r>
+                      <m:sSub>
+                        <m:sSubPr>
+                          <m:ctrlPr>
+                            <a:rPr lang="en-US" altLang="ko-KR" i="1">
+                              <a:latin typeface="Cambria Math" panose="02040503050406030204" pitchFamily="18" charset="0"/>
+                            </a:rPr>
+                          </m:ctrlPr>
+                        </m:sSubPr>
+                        <m:e>
+                          <m:r>
+                            <a:rPr lang="en-US" altLang="ko-KR" i="1">
+                              <a:latin typeface="Cambria Math" panose="02040503050406030204" pitchFamily="18" charset="0"/>
+                            </a:rPr>
+                            <m:t>𝑃</m:t>
+                          </m:r>
+                        </m:e>
+                        <m:sub>
+                          <m:r>
+                            <a:rPr lang="en-US" altLang="ko-KR" b="0" i="1" smtClean="0">
+                              <a:latin typeface="Cambria Math" panose="02040503050406030204" pitchFamily="18" charset="0"/>
+                            </a:rPr>
+                            <m:t>𝑜𝑖𝑙</m:t>
+                          </m:r>
+                          <m:r>
+                            <a:rPr lang="en-US" altLang="ko-KR" b="0" i="1" smtClean="0">
+                              <a:latin typeface="Cambria Math" panose="02040503050406030204" pitchFamily="18" charset="0"/>
+                            </a:rPr>
+                            <m:t>−</m:t>
+                          </m:r>
+                          <m:r>
+                            <a:rPr lang="en-US" altLang="ko-KR" b="0" i="1" smtClean="0">
+                              <a:latin typeface="Cambria Math" panose="02040503050406030204" pitchFamily="18" charset="0"/>
+                            </a:rPr>
+                            <m:t>𝑖𝑛𝑑𝑒𝑥𝑒𝑑</m:t>
+                          </m:r>
+                        </m:sub>
+                      </m:sSub>
+                      <m:r>
+                        <a:rPr lang="en-US" altLang="ko-KR" b="0" i="1" smtClean="0">
+                          <a:latin typeface="Cambria Math" panose="02040503050406030204" pitchFamily="18" charset="0"/>
+                        </a:rPr>
+                        <m:t>+</m:t>
+                      </m:r>
+                      <m:sSub>
+                        <m:sSubPr>
+                          <m:ctrlPr>
+                            <a:rPr lang="ko-KR" altLang="en-US" i="1">
+                              <a:latin typeface="Cambria Math" panose="02040503050406030204" pitchFamily="18" charset="0"/>
+                            </a:rPr>
+                          </m:ctrlPr>
+                        </m:sSubPr>
+                        <m:e>
+                          <m:r>
+                            <a:rPr lang="en-US" altLang="ko-KR" i="1">
+                              <a:latin typeface="Cambria Math" panose="02040503050406030204" pitchFamily="18" charset="0"/>
+                            </a:rPr>
+                            <m:t>𝑤</m:t>
+                          </m:r>
+                        </m:e>
+                        <m:sub>
+                          <m:r>
+                            <a:rPr lang="en-US" altLang="ko-KR" b="0" i="1" smtClean="0">
+                              <a:latin typeface="Cambria Math" panose="02040503050406030204" pitchFamily="18" charset="0"/>
+                            </a:rPr>
+                            <m:t>2</m:t>
+                          </m:r>
+                        </m:sub>
+                      </m:sSub>
+                      <m:r>
+                        <a:rPr lang="en-US" altLang="ko-KR" i="1">
+                          <a:latin typeface="Cambria Math" panose="02040503050406030204" pitchFamily="18" charset="0"/>
+                        </a:rPr>
+                        <m:t>·</m:t>
+                      </m:r>
+                      <m:sSub>
+                        <m:sSubPr>
+                          <m:ctrlPr>
+                            <a:rPr lang="en-US" altLang="ko-KR" i="1">
+                              <a:latin typeface="Cambria Math" panose="02040503050406030204" pitchFamily="18" charset="0"/>
+                            </a:rPr>
+                          </m:ctrlPr>
+                        </m:sSubPr>
+                        <m:e>
+                          <m:r>
+                            <a:rPr lang="en-US" altLang="ko-KR" i="1">
+                              <a:latin typeface="Cambria Math" panose="02040503050406030204" pitchFamily="18" charset="0"/>
+                            </a:rPr>
+                            <m:t>𝑃</m:t>
+                          </m:r>
+                        </m:e>
+                        <m:sub>
+                          <m:r>
+                            <a:rPr lang="en-US" altLang="ko-KR" b="0" i="1" smtClean="0">
+                              <a:latin typeface="Cambria Math" panose="02040503050406030204" pitchFamily="18" charset="0"/>
+                            </a:rPr>
+                            <m:t>h𝑢𝑏</m:t>
+                          </m:r>
+                        </m:sub>
+                      </m:sSub>
+                    </m:oMath>
+                  </m:oMathPara>
+                </a14:m>
+                <a:endParaRPr lang="ko-KR" altLang="en-US" dirty="0"/>
+              </a:p>
+            </p:txBody>
+          </p:sp>
+        </mc:Choice>
+        <mc:Fallback>
+          <p:sp>
+            <p:nvSpPr>
+              <p:cNvPr id="5" name="TextBox 4">
+                <a:extLst>
+                  <a:ext uri="{FF2B5EF4-FFF2-40B4-BE49-F238E27FC236}">
+                    <a16:creationId xmlns:a16="http://schemas.microsoft.com/office/drawing/2014/main" id="{5100559F-F58A-4553-ECF9-9EEFBA23E963}"/>
+                  </a:ext>
+                </a:extLst>
+              </p:cNvPr>
+              <p:cNvSpPr txBox="1">
+                <a:spLocks noRot="1" noChangeAspect="1" noMove="1" noResize="1" noEditPoints="1" noAdjustHandles="1" noChangeArrowheads="1" noChangeShapeType="1" noTextEdit="1"/>
+              </p:cNvSpPr>
+              <p:nvPr/>
+            </p:nvSpPr>
+            <p:spPr>
+              <a:xfrm>
+                <a:off x="775251" y="1787252"/>
+                <a:ext cx="6135756" cy="391261"/>
+              </a:xfrm>
+              <a:prstGeom prst="rect">
+                <a:avLst/>
+              </a:prstGeom>
+              <a:blipFill>
+                <a:blip r:embed="rId4"/>
+                <a:stretch>
+                  <a:fillRect b="-7813"/>
+                </a:stretch>
+              </a:blipFill>
+            </p:spPr>
+            <p:txBody>
+              <a:bodyPr/>
+              <a:lstStyle/>
+              <a:p>
+                <a:r>
+                  <a:rPr lang="ko-KR" altLang="en-US">
+                    <a:noFill/>
+                  </a:rPr>
+                  <a:t> </a:t>
+                </a:r>
+              </a:p>
+            </p:txBody>
+          </p:sp>
+        </mc:Fallback>
+      </mc:AlternateContent>
+    </p:spTree>
+    <p:extLst>
+      <p:ext uri="{BB962C8B-B14F-4D97-AF65-F5344CB8AC3E}">
+        <p14:creationId xmlns:p14="http://schemas.microsoft.com/office/powerpoint/2010/main" val="899228211"/>
+      </p:ext>
+    </p:extLst>
+  </p:cSld>
+  <p:clrMapOvr>
+    <a:masterClrMapping/>
+  </p:clrMapOvr>
+</p:sld>
+</file>
+
+<file path=ppt/slides/slide51.xml><?xml version="1.0" encoding="utf-8"?>
+<p:sld xmlns:a="http://schemas.openxmlformats.org/drawingml/2006/main" xmlns:r="http://schemas.openxmlformats.org/officeDocument/2006/relationships" xmlns:p="http://schemas.openxmlformats.org/presentationml/2006/main">
+  <p:cSld>
+    <p:spTree>
+      <p:nvGrpSpPr>
+        <p:cNvPr id="1" name="">
+          <a:extLst>
+            <a:ext uri="{FF2B5EF4-FFF2-40B4-BE49-F238E27FC236}">
+              <a16:creationId xmlns:a16="http://schemas.microsoft.com/office/drawing/2014/main" id="{838F2C98-38FB-60B9-3FF5-8E5FEAFDDB00}"/>
+            </a:ext>
+          </a:extLst>
+        </p:cNvPr>
+        <p:cNvGrpSpPr/>
+        <p:nvPr/>
+      </p:nvGrpSpPr>
+      <p:grpSpPr>
+        <a:xfrm>
+          <a:off x="0" y="0"/>
+          <a:ext cx="0" cy="0"/>
+          <a:chOff x="0" y="0"/>
+          <a:chExt cx="0" cy="0"/>
+        </a:xfrm>
+      </p:grpSpPr>
+      <p:sp>
+        <p:nvSpPr>
+          <p:cNvPr id="2" name="제목 1">
+            <a:extLst>
+              <a:ext uri="{FF2B5EF4-FFF2-40B4-BE49-F238E27FC236}">
+                <a16:creationId xmlns:a16="http://schemas.microsoft.com/office/drawing/2014/main" id="{B478DBF2-859A-2EE3-4CA6-7A58063E26A6}"/>
+              </a:ext>
+            </a:extLst>
+          </p:cNvPr>
+          <p:cNvSpPr>
+            <a:spLocks noGrp="1"/>
+          </p:cNvSpPr>
+          <p:nvPr>
+            <p:ph type="title"/>
+          </p:nvPr>
+        </p:nvSpPr>
+        <p:spPr/>
+        <p:txBody>
+          <a:bodyPr/>
+          <a:lstStyle/>
+          <a:p>
+            <a:r>
+              <a:rPr lang="ko-KR" altLang="en-US" dirty="0"/>
+              <a:t>지역적 가격 변동</a:t>
+            </a:r>
+          </a:p>
+        </p:txBody>
+      </p:sp>
+      <p:sp>
+        <p:nvSpPr>
+          <p:cNvPr id="4" name="슬라이드 번호 개체 틀 3">
+            <a:extLst>
+              <a:ext uri="{FF2B5EF4-FFF2-40B4-BE49-F238E27FC236}">
+                <a16:creationId xmlns:a16="http://schemas.microsoft.com/office/drawing/2014/main" id="{0F1839FC-E107-608C-3D36-D27CB7AB4011}"/>
+              </a:ext>
+            </a:extLst>
+          </p:cNvPr>
+          <p:cNvSpPr>
+            <a:spLocks noGrp="1"/>
+          </p:cNvSpPr>
+          <p:nvPr>
+            <p:ph type="sldNum" sz="quarter" idx="12"/>
+          </p:nvPr>
+        </p:nvSpPr>
+        <p:spPr/>
+        <p:txBody>
+          <a:bodyPr/>
+          <a:lstStyle/>
+          <a:p>
+            <a:fld id="{109C872D-39A9-4065-8BF3-6A613116E2A1}" type="slidenum">
+              <a:rPr lang="ko-KR" altLang="en-US" smtClean="0"/>
+              <a:t>51</a:t>
+            </a:fld>
+            <a:endParaRPr lang="ko-KR" altLang="en-US"/>
+          </a:p>
+        </p:txBody>
+      </p:sp>
+      <p:sp>
+        <p:nvSpPr>
+          <p:cNvPr id="3" name="TextBox 2">
+            <a:extLst>
+              <a:ext uri="{FF2B5EF4-FFF2-40B4-BE49-F238E27FC236}">
+                <a16:creationId xmlns:a16="http://schemas.microsoft.com/office/drawing/2014/main" id="{FCA7F7F4-279D-3481-B846-01773C05124F}"/>
+              </a:ext>
+            </a:extLst>
+          </p:cNvPr>
+          <p:cNvSpPr txBox="1"/>
+          <p:nvPr/>
+        </p:nvSpPr>
+        <p:spPr>
+          <a:xfrm>
+            <a:off x="288790" y="958844"/>
+            <a:ext cx="11118453" cy="3368679"/>
+          </a:xfrm>
+          <a:prstGeom prst="rect">
+            <a:avLst/>
+          </a:prstGeom>
+          <a:noFill/>
+        </p:spPr>
+        <p:txBody>
+          <a:bodyPr wrap="square" rtlCol="0" anchor="t">
+            <a:spAutoFit/>
+          </a:bodyPr>
+          <a:lstStyle/>
+          <a:p>
+            <a:pPr marL="377825" indent="-285750">
+              <a:lnSpc>
+                <a:spcPct val="150000"/>
+              </a:lnSpc>
+              <a:buFont typeface="Arial" panose="020B0604020202020204" pitchFamily="34" charset="0"/>
+              <a:buChar char="•"/>
+            </a:pPr>
+            <a:r>
+              <a:rPr lang="ko-KR" altLang="en-US" sz="1600" dirty="0"/>
+              <a:t>천연가스는 전 세계적인 단일 가격 형성이 되지 않고 지역적으로 가격 차이가 발생한다</a:t>
+            </a:r>
+            <a:r>
+              <a:rPr lang="en-US" altLang="ko-KR" sz="1600" dirty="0"/>
+              <a:t>.</a:t>
+            </a:r>
+          </a:p>
+          <a:p>
+            <a:pPr marL="835025" lvl="1" indent="-285750">
+              <a:lnSpc>
+                <a:spcPct val="150000"/>
+              </a:lnSpc>
+              <a:buFont typeface="Wingdings" panose="05000000000000000000" pitchFamily="2" charset="2"/>
+              <a:buChar char="ü"/>
+            </a:pPr>
+            <a:r>
+              <a:rPr lang="ko-KR" altLang="en-US" sz="1600" dirty="0"/>
+              <a:t>북미의 경우</a:t>
+            </a:r>
+            <a:r>
+              <a:rPr lang="en-US" altLang="ko-KR" sz="1600" dirty="0"/>
+              <a:t>, </a:t>
+            </a:r>
+            <a:r>
+              <a:rPr lang="ko-KR" altLang="en-US" sz="1600" dirty="0"/>
+              <a:t>천연가스 가격은 </a:t>
+            </a:r>
+            <a:r>
+              <a:rPr lang="ko-KR" altLang="en-US" sz="1600" dirty="0" err="1"/>
+              <a:t>헨리허브</a:t>
+            </a:r>
+            <a:r>
+              <a:rPr lang="ko-KR" altLang="en-US" sz="1600" dirty="0"/>
+              <a:t> 가격이 벤치마크 역할을 한다</a:t>
+            </a:r>
+            <a:r>
+              <a:rPr lang="en-US" altLang="ko-KR" sz="1600" dirty="0"/>
+              <a:t>.</a:t>
+            </a:r>
+          </a:p>
+          <a:p>
+            <a:pPr marL="1292225" lvl="2" indent="-285750">
+              <a:lnSpc>
+                <a:spcPct val="150000"/>
+              </a:lnSpc>
+              <a:buFont typeface="Wingdings" panose="05000000000000000000" pitchFamily="2" charset="2"/>
+              <a:buChar char="Ø"/>
+            </a:pPr>
+            <a:r>
+              <a:rPr lang="ko-KR" altLang="en-US" sz="1600" dirty="0"/>
+              <a:t>미국은 </a:t>
+            </a:r>
+            <a:r>
+              <a:rPr lang="ko-KR" altLang="en-US" sz="1600" dirty="0" err="1"/>
+              <a:t>셰일가스붐으로</a:t>
+            </a:r>
+            <a:r>
+              <a:rPr lang="ko-KR" altLang="en-US" sz="1600" dirty="0"/>
+              <a:t> 다른 지역에 비하여 낮은 가격을 유지하고 있다</a:t>
+            </a:r>
+            <a:r>
+              <a:rPr lang="en-US" altLang="ko-KR" sz="1600" dirty="0"/>
+              <a:t>.</a:t>
+            </a:r>
+          </a:p>
+          <a:p>
+            <a:pPr marL="835025" lvl="1" indent="-285750">
+              <a:lnSpc>
+                <a:spcPct val="150000"/>
+              </a:lnSpc>
+              <a:buFont typeface="Wingdings" panose="05000000000000000000" pitchFamily="2" charset="2"/>
+              <a:buChar char="ü"/>
+            </a:pPr>
+            <a:r>
+              <a:rPr lang="ko-KR" altLang="en-US" sz="1600" dirty="0"/>
+              <a:t>유럽은 영국의 </a:t>
+            </a:r>
+            <a:r>
+              <a:rPr lang="en-US" altLang="ko-KR" sz="1600" dirty="0"/>
+              <a:t>NBP(National Balancing Point)</a:t>
+            </a:r>
+            <a:r>
+              <a:rPr lang="ko-KR" altLang="en-US" sz="1600" dirty="0"/>
+              <a:t>와 네덜란드의 </a:t>
+            </a:r>
+            <a:r>
+              <a:rPr lang="en-US" altLang="ko-KR" sz="1600" dirty="0"/>
+              <a:t>TTF(Title Transfer Facility)</a:t>
+            </a:r>
+            <a:r>
+              <a:rPr lang="ko-KR" altLang="en-US" sz="1600" dirty="0"/>
+              <a:t>의 중심으로 가격이 형성된다</a:t>
+            </a:r>
+            <a:r>
+              <a:rPr lang="en-US" altLang="ko-KR" sz="1600" dirty="0"/>
+              <a:t>.</a:t>
+            </a:r>
+          </a:p>
+          <a:p>
+            <a:pPr marL="1292225" lvl="2" indent="-285750">
+              <a:lnSpc>
+                <a:spcPct val="150000"/>
+              </a:lnSpc>
+              <a:buFont typeface="Wingdings" panose="05000000000000000000" pitchFamily="2" charset="2"/>
+              <a:buChar char="Ø"/>
+            </a:pPr>
+            <a:r>
+              <a:rPr lang="ko-KR" altLang="en-US" sz="1600" dirty="0"/>
+              <a:t>유럽의 천연가스 가격은 수입비용과 시장구조를 반영하여 미국에 비하여 높게 형성된다</a:t>
+            </a:r>
+            <a:r>
+              <a:rPr lang="en-US" altLang="ko-KR" sz="1600" dirty="0"/>
+              <a:t>.</a:t>
+            </a:r>
+          </a:p>
+          <a:p>
+            <a:pPr marL="835025" lvl="1" indent="-285750">
+              <a:lnSpc>
+                <a:spcPct val="150000"/>
+              </a:lnSpc>
+              <a:buFont typeface="Wingdings" panose="05000000000000000000" pitchFamily="2" charset="2"/>
+              <a:buChar char="ü"/>
+            </a:pPr>
+            <a:r>
+              <a:rPr lang="ko-KR" altLang="en-US" sz="1600" dirty="0"/>
+              <a:t>아시아 천연가스 가격은 주로 전통적으로 원유가격에 연동된 장기계약에 의하여 결정되는 경우가 많다</a:t>
+            </a:r>
+            <a:r>
+              <a:rPr lang="en-US" altLang="ko-KR" sz="1600" dirty="0"/>
+              <a:t>.</a:t>
+            </a:r>
+          </a:p>
+          <a:p>
+            <a:pPr marL="1292225" lvl="2" indent="-285750">
+              <a:lnSpc>
+                <a:spcPct val="150000"/>
+              </a:lnSpc>
+              <a:buFont typeface="Wingdings" panose="05000000000000000000" pitchFamily="2" charset="2"/>
+              <a:buChar char="Ø"/>
+            </a:pPr>
+            <a:r>
+              <a:rPr lang="ko-KR" altLang="en-US" sz="1600" dirty="0"/>
+              <a:t>주로 </a:t>
+            </a:r>
+            <a:r>
+              <a:rPr lang="en-US" altLang="ko-KR" sz="1600" dirty="0"/>
+              <a:t>LNG </a:t>
+            </a:r>
+            <a:r>
+              <a:rPr lang="ko-KR" altLang="en-US" sz="1600" dirty="0"/>
+              <a:t>수입에 대한 의존과 장거리 운송으로 지역적으로 시장가격이 가장 높게 형성된다</a:t>
+            </a:r>
+            <a:r>
+              <a:rPr lang="en-US" altLang="ko-KR" sz="1600" dirty="0"/>
+              <a:t>.</a:t>
+            </a:r>
+          </a:p>
+          <a:p>
+            <a:pPr marL="1292225" lvl="2" indent="-285750">
+              <a:lnSpc>
+                <a:spcPct val="150000"/>
+              </a:lnSpc>
+              <a:buFont typeface="Wingdings" panose="05000000000000000000" pitchFamily="2" charset="2"/>
+              <a:buChar char="Ø"/>
+            </a:pPr>
+            <a:endParaRPr lang="en-US" altLang="ko-KR" sz="1600" dirty="0"/>
+          </a:p>
+        </p:txBody>
+      </p:sp>
+    </p:spTree>
+    <p:extLst>
+      <p:ext uri="{BB962C8B-B14F-4D97-AF65-F5344CB8AC3E}">
+        <p14:creationId xmlns:p14="http://schemas.microsoft.com/office/powerpoint/2010/main" val="2425834206"/>
+      </p:ext>
+    </p:extLst>
+  </p:cSld>
+  <p:clrMapOvr>
+    <a:masterClrMapping/>
+  </p:clrMapOvr>
+</p:sld>
+</file>
+
+<file path=ppt/slides/slide52.xml><?xml version="1.0" encoding="utf-8"?>
+<p:sld xmlns:a="http://schemas.openxmlformats.org/drawingml/2006/main" xmlns:r="http://schemas.openxmlformats.org/officeDocument/2006/relationships" xmlns:p="http://schemas.openxmlformats.org/presentationml/2006/main">
+  <p:cSld>
+    <p:spTree>
+      <p:nvGrpSpPr>
+        <p:cNvPr id="1" name="">
+          <a:extLst>
+            <a:ext uri="{FF2B5EF4-FFF2-40B4-BE49-F238E27FC236}">
+              <a16:creationId xmlns:a16="http://schemas.microsoft.com/office/drawing/2014/main" id="{923F2038-09BD-B05E-0D62-AD68C0BBB001}"/>
+            </a:ext>
+          </a:extLst>
+        </p:cNvPr>
+        <p:cNvGrpSpPr/>
+        <p:nvPr/>
+      </p:nvGrpSpPr>
+      <p:grpSpPr>
+        <a:xfrm>
+          <a:off x="0" y="0"/>
+          <a:ext cx="0" cy="0"/>
+          <a:chOff x="0" y="0"/>
+          <a:chExt cx="0" cy="0"/>
+        </a:xfrm>
+      </p:grpSpPr>
+      <p:sp>
+        <p:nvSpPr>
+          <p:cNvPr id="2" name="제목 1">
+            <a:extLst>
+              <a:ext uri="{FF2B5EF4-FFF2-40B4-BE49-F238E27FC236}">
+                <a16:creationId xmlns:a16="http://schemas.microsoft.com/office/drawing/2014/main" id="{470436FE-C2B0-911D-9807-C826BC742B77}"/>
+              </a:ext>
+            </a:extLst>
+          </p:cNvPr>
+          <p:cNvSpPr>
+            <a:spLocks noGrp="1"/>
+          </p:cNvSpPr>
+          <p:nvPr>
+            <p:ph type="title"/>
+          </p:nvPr>
+        </p:nvSpPr>
+        <p:spPr/>
+        <p:txBody>
+          <a:bodyPr/>
+          <a:lstStyle/>
+          <a:p>
+            <a:r>
+              <a:rPr lang="ko-KR" altLang="en-US" dirty="0"/>
+              <a:t>지역적 가격 변동</a:t>
+            </a:r>
+          </a:p>
+        </p:txBody>
+      </p:sp>
+      <p:sp>
+        <p:nvSpPr>
+          <p:cNvPr id="4" name="슬라이드 번호 개체 틀 3">
+            <a:extLst>
+              <a:ext uri="{FF2B5EF4-FFF2-40B4-BE49-F238E27FC236}">
+                <a16:creationId xmlns:a16="http://schemas.microsoft.com/office/drawing/2014/main" id="{B8E212D8-3D9B-1CB6-F4FE-5821282C070E}"/>
+              </a:ext>
+            </a:extLst>
+          </p:cNvPr>
+          <p:cNvSpPr>
+            <a:spLocks noGrp="1"/>
+          </p:cNvSpPr>
+          <p:nvPr>
+            <p:ph type="sldNum" sz="quarter" idx="12"/>
+          </p:nvPr>
+        </p:nvSpPr>
+        <p:spPr/>
+        <p:txBody>
+          <a:bodyPr/>
+          <a:lstStyle/>
+          <a:p>
+            <a:fld id="{109C872D-39A9-4065-8BF3-6A613116E2A1}" type="slidenum">
+              <a:rPr lang="ko-KR" altLang="en-US" smtClean="0"/>
+              <a:t>52</a:t>
+            </a:fld>
+            <a:endParaRPr lang="ko-KR" altLang="en-US"/>
+          </a:p>
+        </p:txBody>
+      </p:sp>
+      <p:sp>
+        <p:nvSpPr>
+          <p:cNvPr id="3" name="TextBox 2">
+            <a:extLst>
+              <a:ext uri="{FF2B5EF4-FFF2-40B4-BE49-F238E27FC236}">
+                <a16:creationId xmlns:a16="http://schemas.microsoft.com/office/drawing/2014/main" id="{D013C94F-8717-1A44-89A3-B0DEA5A3AAEE}"/>
+              </a:ext>
+            </a:extLst>
+          </p:cNvPr>
+          <p:cNvSpPr txBox="1"/>
+          <p:nvPr/>
+        </p:nvSpPr>
+        <p:spPr>
+          <a:xfrm>
+            <a:off x="288790" y="958844"/>
+            <a:ext cx="11118453" cy="2260683"/>
+          </a:xfrm>
+          <a:prstGeom prst="rect">
+            <a:avLst/>
+          </a:prstGeom>
+          <a:noFill/>
+        </p:spPr>
+        <p:txBody>
+          <a:bodyPr wrap="square" rtlCol="0" anchor="t">
+            <a:spAutoFit/>
+          </a:bodyPr>
+          <a:lstStyle/>
+          <a:p>
+            <a:pPr marL="377825" indent="-285750">
+              <a:lnSpc>
+                <a:spcPct val="150000"/>
+              </a:lnSpc>
+              <a:buFont typeface="Arial" panose="020B0604020202020204" pitchFamily="34" charset="0"/>
+              <a:buChar char="•"/>
+            </a:pPr>
+            <a:r>
+              <a:rPr lang="ko-KR" altLang="en-US" sz="1600" dirty="0"/>
+              <a:t>유럽과 미국의 천연가스 허브의 가격은 한국</a:t>
+            </a:r>
+            <a:r>
+              <a:rPr lang="en-US" altLang="ko-KR" sz="1600" dirty="0"/>
+              <a:t>, </a:t>
+            </a:r>
+            <a:r>
+              <a:rPr lang="ko-KR" altLang="en-US" sz="1600" dirty="0"/>
+              <a:t>중국</a:t>
+            </a:r>
+            <a:r>
+              <a:rPr lang="en-US" altLang="ko-KR" sz="1600" dirty="0"/>
+              <a:t>, </a:t>
+            </a:r>
+            <a:r>
+              <a:rPr lang="ko-KR" altLang="en-US" sz="1600" dirty="0"/>
+              <a:t>일본 아시아 지역의 가격보다 낮게 유지되었으나 </a:t>
+            </a:r>
+            <a:r>
+              <a:rPr lang="en-US" altLang="ko-KR" sz="1600" dirty="0"/>
+              <a:t>2021</a:t>
+            </a:r>
+            <a:r>
+              <a:rPr lang="ko-KR" altLang="en-US" sz="1600" dirty="0"/>
+              <a:t>년 기점으로 </a:t>
+            </a:r>
+            <a:r>
+              <a:rPr lang="en-US" altLang="ko-KR" sz="1600" dirty="0"/>
+              <a:t>NBP</a:t>
+            </a:r>
+            <a:r>
+              <a:rPr lang="ko-KR" altLang="en-US" sz="1600" dirty="0"/>
+              <a:t>와</a:t>
+            </a:r>
+            <a:r>
+              <a:rPr lang="en-US" altLang="ko-KR" sz="1600" dirty="0"/>
+              <a:t> TTF</a:t>
+            </a:r>
+            <a:r>
+              <a:rPr lang="ko-KR" altLang="en-US" sz="1600" dirty="0"/>
+              <a:t>허브의 가격이 급격하게 상승하였다</a:t>
+            </a:r>
+            <a:r>
+              <a:rPr lang="en-US" altLang="ko-KR" sz="1600" dirty="0"/>
+              <a:t>.</a:t>
+            </a:r>
+          </a:p>
+          <a:p>
+            <a:pPr marL="835025" lvl="1" indent="-285750">
+              <a:lnSpc>
+                <a:spcPct val="150000"/>
+              </a:lnSpc>
+              <a:buFont typeface="Wingdings" panose="05000000000000000000" pitchFamily="2" charset="2"/>
+              <a:buChar char="ü"/>
+            </a:pPr>
+            <a:r>
+              <a:rPr lang="ko-KR" altLang="en-US" sz="1600" dirty="0"/>
+              <a:t>이는 </a:t>
+            </a:r>
+            <a:r>
+              <a:rPr lang="en-US" altLang="ko-KR" sz="1600" dirty="0"/>
+              <a:t>2022</a:t>
+            </a:r>
+            <a:r>
+              <a:rPr lang="ko-KR" altLang="en-US" sz="1600" dirty="0"/>
+              <a:t>년 </a:t>
+            </a:r>
+            <a:r>
+              <a:rPr lang="en-US" altLang="ko-KR" sz="1600" dirty="0"/>
+              <a:t>2</a:t>
+            </a:r>
+            <a:r>
+              <a:rPr lang="ko-KR" altLang="en-US" sz="1600" dirty="0"/>
+              <a:t>월에 시작된 러시아</a:t>
+            </a:r>
+            <a:r>
+              <a:rPr lang="en-US" altLang="ko-KR" sz="1600" dirty="0"/>
+              <a:t>-</a:t>
+            </a:r>
+            <a:r>
+              <a:rPr lang="ko-KR" altLang="en-US" sz="1600" dirty="0"/>
+              <a:t>우크라이나 전쟁으로 인해 </a:t>
+            </a:r>
+            <a:r>
+              <a:rPr lang="ko-KR" altLang="en-US" sz="1600" dirty="0" err="1"/>
+              <a:t>러시아로부터</a:t>
+            </a:r>
+            <a:r>
+              <a:rPr lang="ko-KR" altLang="en-US" sz="1600" dirty="0"/>
+              <a:t> 천연가스 공급이 줄었기 때문이다</a:t>
+            </a:r>
+            <a:r>
+              <a:rPr lang="en-US" altLang="ko-KR" sz="1600" dirty="0"/>
+              <a:t>.</a:t>
+            </a:r>
+          </a:p>
+          <a:p>
+            <a:pPr marL="1292225" lvl="2" indent="-285750">
+              <a:lnSpc>
+                <a:spcPct val="150000"/>
+              </a:lnSpc>
+              <a:buFont typeface="Wingdings" panose="05000000000000000000" pitchFamily="2" charset="2"/>
+              <a:buChar char="Ø"/>
+            </a:pPr>
+            <a:r>
+              <a:rPr lang="ko-KR" altLang="en-US" sz="1600" dirty="0"/>
+              <a:t>유럽은 오랫동안 러시아 천연가스에 크게 의존해왔으나</a:t>
+            </a:r>
+            <a:r>
+              <a:rPr lang="en-US" altLang="ko-KR" sz="1600" dirty="0"/>
+              <a:t>, </a:t>
+            </a:r>
+            <a:r>
+              <a:rPr lang="ko-KR" altLang="en-US" sz="1600" dirty="0"/>
+              <a:t>러시아의 공급 부족이 유럽 전역에서 에너지 가격을 </a:t>
+            </a:r>
+            <a:r>
+              <a:rPr lang="ko-KR" altLang="en-US" sz="1600" dirty="0" err="1"/>
+              <a:t>급등시키는</a:t>
+            </a:r>
+            <a:r>
+              <a:rPr lang="ko-KR" altLang="en-US" sz="1600" dirty="0"/>
+              <a:t> 결과를 초래했다</a:t>
+            </a:r>
+            <a:r>
+              <a:rPr lang="en-US" altLang="ko-KR" sz="1600" dirty="0"/>
+              <a:t>.</a:t>
+            </a:r>
+          </a:p>
+          <a:p>
+            <a:pPr marL="1292225" lvl="2" indent="-285750">
+              <a:lnSpc>
+                <a:spcPct val="150000"/>
+              </a:lnSpc>
+              <a:buFont typeface="Wingdings" panose="05000000000000000000" pitchFamily="2" charset="2"/>
+              <a:buChar char="Ø"/>
+            </a:pPr>
+            <a:r>
+              <a:rPr lang="ko-KR" altLang="en-US" sz="1600" dirty="0"/>
+              <a:t>러시아산 천연가스를 대신해 </a:t>
+            </a:r>
+            <a:r>
+              <a:rPr lang="en-US" altLang="ko-KR" sz="1600" dirty="0"/>
+              <a:t>LNG </a:t>
+            </a:r>
+            <a:r>
+              <a:rPr lang="ko-KR" altLang="en-US" sz="1600" dirty="0"/>
+              <a:t>수입을 통해 이를 보완하려 했지만</a:t>
+            </a:r>
+            <a:r>
+              <a:rPr lang="en-US" altLang="ko-KR" sz="1600" dirty="0"/>
+              <a:t>, </a:t>
+            </a:r>
+            <a:r>
+              <a:rPr lang="ko-KR" altLang="en-US" sz="1600" dirty="0"/>
+              <a:t>상당한 시간과 비용이 소요되었다</a:t>
+            </a:r>
+            <a:r>
+              <a:rPr lang="en-US" altLang="ko-KR" sz="1600" dirty="0"/>
+              <a:t>.</a:t>
+            </a:r>
+          </a:p>
+        </p:txBody>
+      </p:sp>
+      <p:pic>
+        <p:nvPicPr>
+          <p:cNvPr id="5" name="그림 4">
+            <a:extLst>
+              <a:ext uri="{FF2B5EF4-FFF2-40B4-BE49-F238E27FC236}">
+                <a16:creationId xmlns:a16="http://schemas.microsoft.com/office/drawing/2014/main" id="{688C52B8-BD9B-54A7-60B0-02F78777DBD0}"/>
+              </a:ext>
+            </a:extLst>
+          </p:cNvPr>
+          <p:cNvPicPr>
+            <a:picLocks noChangeAspect="1"/>
+          </p:cNvPicPr>
+          <p:nvPr/>
+        </p:nvPicPr>
+        <p:blipFill rotWithShape="1">
+          <a:blip r:embed="rId3"/>
+          <a:srcRect t="5308" b="9492"/>
+          <a:stretch>
+            <a:fillRect/>
+          </a:stretch>
+        </p:blipFill>
+        <p:spPr>
+          <a:xfrm>
+            <a:off x="7218016" y="3619858"/>
+            <a:ext cx="4700105" cy="2754438"/>
+          </a:xfrm>
+          <a:prstGeom prst="rect">
+            <a:avLst/>
+          </a:prstGeom>
+        </p:spPr>
+      </p:pic>
+      <p:sp>
+        <p:nvSpPr>
+          <p:cNvPr id="6" name="TextBox 5">
+            <a:extLst>
+              <a:ext uri="{FF2B5EF4-FFF2-40B4-BE49-F238E27FC236}">
+                <a16:creationId xmlns:a16="http://schemas.microsoft.com/office/drawing/2014/main" id="{486E4FF3-AC20-B078-0257-5F5ED3B170AF}"/>
+              </a:ext>
+            </a:extLst>
+          </p:cNvPr>
+          <p:cNvSpPr txBox="1"/>
+          <p:nvPr/>
+        </p:nvSpPr>
+        <p:spPr>
+          <a:xfrm>
+            <a:off x="288791" y="3382254"/>
+            <a:ext cx="6929226" cy="2630015"/>
+          </a:xfrm>
+          <a:prstGeom prst="rect">
+            <a:avLst/>
+          </a:prstGeom>
+          <a:noFill/>
+        </p:spPr>
+        <p:txBody>
+          <a:bodyPr wrap="square" rtlCol="0" anchor="t">
+            <a:spAutoFit/>
+          </a:bodyPr>
+          <a:lstStyle/>
+          <a:p>
+            <a:pPr marL="377825" indent="-285750">
+              <a:lnSpc>
+                <a:spcPct val="150000"/>
+              </a:lnSpc>
+              <a:buFont typeface="Arial" panose="020B0604020202020204" pitchFamily="34" charset="0"/>
+              <a:buChar char="•"/>
+            </a:pPr>
+            <a:r>
+              <a:rPr lang="ko-KR" altLang="en-US" sz="1600" dirty="0"/>
+              <a:t>미국은 자체적인 천연가스 생산량이 많아 헨리 허브 가격이 상대적으로 안정적인 반면</a:t>
+            </a:r>
+            <a:r>
+              <a:rPr lang="en-US" altLang="ko-KR" sz="1600" dirty="0"/>
+              <a:t>, </a:t>
+            </a:r>
+            <a:r>
+              <a:rPr lang="ko-KR" altLang="en-US" sz="1600" dirty="0"/>
+              <a:t>유럽은 자국 내 생산이 적고</a:t>
+            </a:r>
+            <a:r>
+              <a:rPr lang="en-US" altLang="ko-KR" sz="1600" dirty="0"/>
+              <a:t>, </a:t>
+            </a:r>
+            <a:r>
+              <a:rPr lang="ko-KR" altLang="en-US" sz="1600" dirty="0"/>
+              <a:t>주로 수입에 의존하고 있기 때문에 외부 충격에 취약했다</a:t>
+            </a:r>
+            <a:r>
+              <a:rPr lang="en-US" altLang="ko-KR" sz="1600" dirty="0"/>
+              <a:t>.</a:t>
+            </a:r>
+          </a:p>
+          <a:p>
+            <a:pPr marL="835025" lvl="1" indent="-285750">
+              <a:lnSpc>
+                <a:spcPct val="150000"/>
+              </a:lnSpc>
+              <a:buFont typeface="Wingdings" panose="05000000000000000000" pitchFamily="2" charset="2"/>
+              <a:buChar char="ü"/>
+            </a:pPr>
+            <a:r>
+              <a:rPr lang="ko-KR" altLang="en-US" sz="1600" dirty="0"/>
+              <a:t>미국의 천연가스 시장은 유럽에 비해 덜 분산되어 있어 수요와 공급이 비교적 안정적인 경향이 있으나</a:t>
+            </a:r>
+            <a:r>
+              <a:rPr lang="en-US" altLang="ko-KR" sz="1600" dirty="0"/>
+              <a:t>, </a:t>
+            </a:r>
+            <a:r>
+              <a:rPr lang="ko-KR" altLang="en-US" sz="1600" dirty="0"/>
+              <a:t>유럽은 여러 국가들이 서로 다른 방식으로 에너지를 수급하고 있어</a:t>
+            </a:r>
+            <a:r>
+              <a:rPr lang="en-US" altLang="ko-KR" sz="1600" dirty="0"/>
+              <a:t>, </a:t>
+            </a:r>
+            <a:r>
+              <a:rPr lang="ko-KR" altLang="en-US" sz="1600" dirty="0"/>
+              <a:t>불안정성이 더 크게 나타났다</a:t>
+            </a:r>
+            <a:r>
+              <a:rPr lang="en-US" altLang="ko-KR" sz="1600" dirty="0"/>
+              <a:t>.</a:t>
+            </a:r>
+          </a:p>
+        </p:txBody>
+      </p:sp>
+    </p:spTree>
+    <p:extLst>
+      <p:ext uri="{BB962C8B-B14F-4D97-AF65-F5344CB8AC3E}">
+        <p14:creationId xmlns:p14="http://schemas.microsoft.com/office/powerpoint/2010/main" val="2505323784"/>
+      </p:ext>
+    </p:extLst>
+  </p:cSld>
+  <p:clrMapOvr>
+    <a:masterClrMapping/>
+  </p:clrMapOvr>
+</p:sld>
+</file>
+
+<file path=ppt/slides/slide53.xml><?xml version="1.0" encoding="utf-8"?>
 <p:sld xmlns:a="http://schemas.openxmlformats.org/drawingml/2006/main" xmlns:r="http://schemas.openxmlformats.org/officeDocument/2006/relationships" xmlns:p="http://schemas.openxmlformats.org/presentationml/2006/main">
   <p:cSld>
     <p:spTree>
@@ -34857,7 +42139,7 @@
           <a:p>
             <a:fld id="{109C872D-39A9-4065-8BF3-6A613116E2A1}" type="slidenum">
               <a:rPr lang="ko-KR" altLang="en-US" smtClean="0"/>
-              <a:t>38</a:t>
+              <a:t>53</a:t>
             </a:fld>
             <a:endParaRPr lang="ko-KR" altLang="en-US"/>
           </a:p>
@@ -34867,906 +42149,6 @@
     <p:extLst>
       <p:ext uri="{BB962C8B-B14F-4D97-AF65-F5344CB8AC3E}">
         <p14:creationId xmlns:p14="http://schemas.microsoft.com/office/powerpoint/2010/main" val="103939182"/>
-      </p:ext>
-    </p:extLst>
-  </p:cSld>
-  <p:clrMapOvr>
-    <a:masterClrMapping/>
-  </p:clrMapOvr>
-</p:sld>
-</file>
-
-<file path=ppt/slides/slide4.xml><?xml version="1.0" encoding="utf-8"?>
-<p:sld xmlns:a="http://schemas.openxmlformats.org/drawingml/2006/main" xmlns:r="http://schemas.openxmlformats.org/officeDocument/2006/relationships" xmlns:p="http://schemas.openxmlformats.org/presentationml/2006/main">
-  <p:cSld>
-    <p:spTree>
-      <p:nvGrpSpPr>
-        <p:cNvPr id="1" name=""/>
-        <p:cNvGrpSpPr/>
-        <p:nvPr/>
-      </p:nvGrpSpPr>
-      <p:grpSpPr>
-        <a:xfrm>
-          <a:off x="0" y="0"/>
-          <a:ext cx="0" cy="0"/>
-          <a:chOff x="0" y="0"/>
-          <a:chExt cx="0" cy="0"/>
-        </a:xfrm>
-      </p:grpSpPr>
-      <p:sp>
-        <p:nvSpPr>
-          <p:cNvPr id="2" name="제목 1">
-            <a:extLst>
-              <a:ext uri="{FF2B5EF4-FFF2-40B4-BE49-F238E27FC236}">
-                <a16:creationId xmlns:a16="http://schemas.microsoft.com/office/drawing/2014/main" id="{708E53AA-7D50-5F4A-320F-293F315471D7}"/>
-              </a:ext>
-            </a:extLst>
-          </p:cNvPr>
-          <p:cNvSpPr>
-            <a:spLocks noGrp="1"/>
-          </p:cNvSpPr>
-          <p:nvPr>
-            <p:ph type="title"/>
-          </p:nvPr>
-        </p:nvSpPr>
-        <p:spPr/>
-        <p:txBody>
-          <a:bodyPr/>
-          <a:lstStyle/>
-          <a:p>
-            <a:r>
-              <a:rPr lang="ko-KR" altLang="en-US" dirty="0"/>
-              <a:t>서론</a:t>
-            </a:r>
-          </a:p>
-        </p:txBody>
-      </p:sp>
-      <p:sp>
-        <p:nvSpPr>
-          <p:cNvPr id="4" name="슬라이드 번호 개체 틀 3">
-            <a:extLst>
-              <a:ext uri="{FF2B5EF4-FFF2-40B4-BE49-F238E27FC236}">
-                <a16:creationId xmlns:a16="http://schemas.microsoft.com/office/drawing/2014/main" id="{0E66E9B2-B0DB-FDCD-AA50-636EA4E5B253}"/>
-              </a:ext>
-            </a:extLst>
-          </p:cNvPr>
-          <p:cNvSpPr>
-            <a:spLocks noGrp="1"/>
-          </p:cNvSpPr>
-          <p:nvPr>
-            <p:ph type="sldNum" sz="quarter" idx="12"/>
-          </p:nvPr>
-        </p:nvSpPr>
-        <p:spPr/>
-        <p:txBody>
-          <a:bodyPr/>
-          <a:lstStyle/>
-          <a:p>
-            <a:fld id="{109C872D-39A9-4065-8BF3-6A613116E2A1}" type="slidenum">
-              <a:rPr lang="ko-KR" altLang="en-US" smtClean="0"/>
-              <a:t>4</a:t>
-            </a:fld>
-            <a:endParaRPr lang="ko-KR" altLang="en-US"/>
-          </a:p>
-        </p:txBody>
-      </p:sp>
-      <p:sp>
-        <p:nvSpPr>
-          <p:cNvPr id="3" name="TextBox 2">
-            <a:extLst>
-              <a:ext uri="{FF2B5EF4-FFF2-40B4-BE49-F238E27FC236}">
-                <a16:creationId xmlns:a16="http://schemas.microsoft.com/office/drawing/2014/main" id="{6C27E35B-63AE-3D62-3078-BE10F308BEDD}"/>
-              </a:ext>
-            </a:extLst>
-          </p:cNvPr>
-          <p:cNvSpPr txBox="1"/>
-          <p:nvPr/>
-        </p:nvSpPr>
-        <p:spPr>
-          <a:xfrm>
-            <a:off x="288790" y="958844"/>
-            <a:ext cx="11118453" cy="5584670"/>
-          </a:xfrm>
-          <a:prstGeom prst="rect">
-            <a:avLst/>
-          </a:prstGeom>
-          <a:noFill/>
-        </p:spPr>
-        <p:txBody>
-          <a:bodyPr wrap="square" rtlCol="0" anchor="t">
-            <a:spAutoFit/>
-          </a:bodyPr>
-          <a:lstStyle/>
-          <a:p>
-            <a:pPr marL="377825" indent="-285750">
-              <a:lnSpc>
-                <a:spcPct val="150000"/>
-              </a:lnSpc>
-              <a:buFont typeface="Arial" panose="020B0604020202020204" pitchFamily="34" charset="0"/>
-              <a:buChar char="•"/>
-            </a:pPr>
-            <a:r>
-              <a:rPr lang="ko-KR" altLang="en-US" sz="1600" dirty="0"/>
-              <a:t>천연가스는 주로 메탄</a:t>
-            </a:r>
-            <a:r>
-              <a:rPr lang="en-US" altLang="ko-KR" sz="1600" dirty="0"/>
-              <a:t>(CH</a:t>
-            </a:r>
-            <a:r>
-              <a:rPr lang="en-US" altLang="ko-KR" sz="1600" baseline="-25000" dirty="0"/>
-              <a:t>4</a:t>
-            </a:r>
-            <a:r>
-              <a:rPr lang="en-US" altLang="ko-KR" sz="1600" dirty="0"/>
-              <a:t>)</a:t>
-            </a:r>
-            <a:r>
-              <a:rPr lang="ko-KR" altLang="en-US" sz="1600" dirty="0"/>
-              <a:t>으로 구성되어 있으며</a:t>
-            </a:r>
-            <a:r>
-              <a:rPr lang="en-US" altLang="ko-KR" sz="1600" dirty="0"/>
-              <a:t>, </a:t>
-            </a:r>
-            <a:r>
-              <a:rPr lang="ko-KR" altLang="en-US" sz="1600" dirty="0"/>
-              <a:t>다른 연료</a:t>
-            </a:r>
-            <a:r>
-              <a:rPr lang="en-US" altLang="ko-KR" sz="1600" dirty="0"/>
-              <a:t>(</a:t>
-            </a:r>
-            <a:r>
-              <a:rPr lang="ko-KR" altLang="en-US" sz="1600" dirty="0"/>
-              <a:t>석탄 및 석유</a:t>
-            </a:r>
-            <a:r>
-              <a:rPr lang="en-US" altLang="ko-KR" sz="1600" dirty="0"/>
-              <a:t>)</a:t>
-            </a:r>
-            <a:r>
-              <a:rPr lang="ko-KR" altLang="en-US" sz="1600" dirty="0"/>
-              <a:t>에 비해 연소할 때 배출되는 오염물질이 적어</a:t>
-            </a:r>
-            <a:r>
-              <a:rPr lang="en-US" altLang="ko-KR" sz="1600" dirty="0"/>
-              <a:t>, </a:t>
-            </a:r>
-            <a:r>
-              <a:rPr lang="ko-KR" altLang="en-US" sz="1600" dirty="0"/>
-              <a:t>화석연료 중에서는 가장 청정한 연료로 평가된다</a:t>
-            </a:r>
-            <a:r>
-              <a:rPr lang="en-US" altLang="ko-KR" sz="1600" dirty="0"/>
-              <a:t>.</a:t>
-            </a:r>
-          </a:p>
-          <a:p>
-            <a:pPr marL="835025" lvl="1" indent="-285750">
-              <a:lnSpc>
-                <a:spcPct val="150000"/>
-              </a:lnSpc>
-              <a:buFont typeface="Wingdings" panose="05000000000000000000" pitchFamily="2" charset="2"/>
-              <a:buChar char="ü"/>
-            </a:pPr>
-            <a:r>
-              <a:rPr lang="ko-KR" altLang="en-US" sz="1600" dirty="0"/>
-              <a:t>이러한 특성으로</a:t>
-            </a:r>
-            <a:r>
-              <a:rPr lang="en-US" altLang="ko-KR" sz="1600" dirty="0"/>
-              <a:t> </a:t>
-            </a:r>
-            <a:r>
-              <a:rPr lang="ko-KR" altLang="en-US" sz="1600" dirty="0"/>
-              <a:t>기후변화 대응과 에너지 전환 과정에서 </a:t>
-            </a:r>
-            <a:r>
-              <a:rPr lang="en-US" altLang="ko-KR" sz="1600" dirty="0"/>
-              <a:t>‘</a:t>
-            </a:r>
-            <a:r>
-              <a:rPr lang="ko-KR" altLang="en-US" sz="1600" dirty="0"/>
-              <a:t>교량 연료</a:t>
-            </a:r>
-            <a:r>
-              <a:rPr lang="en-US" altLang="ko-KR" sz="1600" dirty="0"/>
-              <a:t>‘</a:t>
-            </a:r>
-            <a:r>
-              <a:rPr lang="ko-KR" altLang="en-US" sz="1600" dirty="0"/>
-              <a:t>로 주목받고 있으며</a:t>
-            </a:r>
-            <a:r>
-              <a:rPr lang="en-US" altLang="ko-KR" sz="1600" dirty="0"/>
-              <a:t>, </a:t>
-            </a:r>
-            <a:r>
-              <a:rPr lang="ko-KR" altLang="en-US" sz="1600" dirty="0"/>
-              <a:t>재생에너지의 간헐성을 보완하는 유연한 발전원으로 활용 가능하다</a:t>
-            </a:r>
-            <a:r>
-              <a:rPr lang="en-US" altLang="ko-KR" sz="1600" dirty="0"/>
-              <a:t>.</a:t>
-            </a:r>
-          </a:p>
-          <a:p>
-            <a:pPr marL="377825" indent="-285750">
-              <a:lnSpc>
-                <a:spcPct val="150000"/>
-              </a:lnSpc>
-              <a:buFont typeface="Arial" panose="020B0604020202020204" pitchFamily="34" charset="0"/>
-              <a:buChar char="•"/>
-            </a:pPr>
-            <a:endParaRPr lang="en-US" altLang="ko-KR" sz="1600" dirty="0"/>
-          </a:p>
-          <a:p>
-            <a:pPr marL="377825" indent="-285750">
-              <a:lnSpc>
-                <a:spcPct val="150000"/>
-              </a:lnSpc>
-              <a:buFont typeface="Arial" panose="020B0604020202020204" pitchFamily="34" charset="0"/>
-              <a:buChar char="•"/>
-            </a:pPr>
-            <a:r>
-              <a:rPr lang="ko-KR" altLang="en-US" sz="1600" dirty="0"/>
-              <a:t>인류의 천연가스 이용은 고대까지 거슬러 올라가며</a:t>
-            </a:r>
-            <a:r>
-              <a:rPr lang="en-US" altLang="ko-KR" sz="1600" dirty="0"/>
-              <a:t>, </a:t>
-            </a:r>
-            <a:r>
-              <a:rPr lang="ko-KR" altLang="en-US" sz="1600" dirty="0"/>
-              <a:t>상징적</a:t>
-            </a:r>
-            <a:r>
-              <a:rPr lang="en-US" altLang="ko-KR" sz="1600" dirty="0"/>
-              <a:t>·</a:t>
-            </a:r>
-            <a:r>
-              <a:rPr lang="ko-KR" altLang="en-US" sz="1600" dirty="0"/>
-              <a:t>제의적 의미에 머무르고</a:t>
-            </a:r>
-            <a:r>
-              <a:rPr lang="en-US" altLang="ko-KR" sz="1600" dirty="0"/>
-              <a:t>, </a:t>
-            </a:r>
-            <a:r>
-              <a:rPr lang="ko-KR" altLang="en-US" sz="1600" dirty="0"/>
-              <a:t>본격적으로 활용되지는 않았다</a:t>
-            </a:r>
-            <a:r>
-              <a:rPr lang="en-US" altLang="ko-KR" sz="1600" dirty="0"/>
-              <a:t>.</a:t>
-            </a:r>
-          </a:p>
-          <a:p>
-            <a:pPr marL="835025" lvl="1" indent="-285750">
-              <a:lnSpc>
-                <a:spcPct val="150000"/>
-              </a:lnSpc>
-              <a:buFont typeface="Wingdings" panose="05000000000000000000" pitchFamily="2" charset="2"/>
-              <a:buChar char="ü"/>
-            </a:pPr>
-            <a:r>
-              <a:rPr lang="ko-KR" altLang="en-US" sz="1600" dirty="0"/>
-              <a:t>기원전 </a:t>
-            </a:r>
-            <a:r>
-              <a:rPr lang="en-US" altLang="ko-KR" sz="1600" dirty="0"/>
-              <a:t>1,000</a:t>
-            </a:r>
-            <a:r>
-              <a:rPr lang="ko-KR" altLang="en-US" sz="1600" dirty="0" err="1"/>
-              <a:t>년경</a:t>
-            </a:r>
-            <a:r>
-              <a:rPr lang="ko-KR" altLang="en-US" sz="1600" dirty="0"/>
-              <a:t> 중국에서는 대나무 파이프를 사용하여 천연가스를 지표로부터 추출하였다</a:t>
-            </a:r>
-            <a:r>
-              <a:rPr lang="en-US" altLang="ko-KR" sz="1600" dirty="0"/>
-              <a:t>.</a:t>
-            </a:r>
-          </a:p>
-          <a:p>
-            <a:pPr marL="835025" lvl="1" indent="-285750">
-              <a:lnSpc>
-                <a:spcPct val="150000"/>
-              </a:lnSpc>
-              <a:buFont typeface="Wingdings" panose="05000000000000000000" pitchFamily="2" charset="2"/>
-              <a:buChar char="ü"/>
-            </a:pPr>
-            <a:r>
-              <a:rPr lang="ko-KR" altLang="en-US" sz="1600" dirty="0"/>
-              <a:t>고대 그리스 및 페르시아에서도 천연가스의 자연 누출로 발생하는 </a:t>
-            </a:r>
-            <a:r>
-              <a:rPr lang="en-US" altLang="ko-KR" sz="1600" dirty="0"/>
-              <a:t>‘</a:t>
-            </a:r>
-            <a:r>
-              <a:rPr lang="ko-KR" altLang="en-US" sz="1600" dirty="0"/>
-              <a:t>영원한 불</a:t>
-            </a:r>
-            <a:r>
-              <a:rPr lang="en-US" altLang="ko-KR" sz="1600" dirty="0"/>
-              <a:t>‘</a:t>
-            </a:r>
-            <a:r>
-              <a:rPr lang="ko-KR" altLang="en-US" sz="1600" dirty="0"/>
-              <a:t>은 신성한 존재로 인식되며 종교적 의례에 사용되었다</a:t>
-            </a:r>
-            <a:r>
-              <a:rPr lang="en-US" altLang="ko-KR" sz="1600" dirty="0"/>
-              <a:t>.</a:t>
-            </a:r>
-          </a:p>
-          <a:p>
-            <a:pPr marL="835025" lvl="1" indent="-285750">
-              <a:lnSpc>
-                <a:spcPct val="150000"/>
-              </a:lnSpc>
-              <a:buFont typeface="Wingdings" panose="05000000000000000000" pitchFamily="2" charset="2"/>
-              <a:buChar char="ü"/>
-            </a:pPr>
-            <a:endParaRPr lang="en-US" altLang="ko-KR" sz="1600" dirty="0"/>
-          </a:p>
-          <a:p>
-            <a:pPr marL="377825" indent="-285750">
-              <a:lnSpc>
-                <a:spcPct val="150000"/>
-              </a:lnSpc>
-              <a:buFont typeface="Arial" panose="020B0604020202020204" pitchFamily="34" charset="0"/>
-              <a:buChar char="•"/>
-            </a:pPr>
-            <a:r>
-              <a:rPr lang="en-US" altLang="ko-KR" sz="1600" dirty="0"/>
-              <a:t>19</a:t>
-            </a:r>
-            <a:r>
-              <a:rPr lang="ko-KR" altLang="en-US" sz="1600" dirty="0"/>
-              <a:t>세기 들어 산업화에 따라 천연가스의 상업적 활용이 시작되었다</a:t>
-            </a:r>
-            <a:r>
-              <a:rPr lang="en-US" altLang="ko-KR" sz="1600" dirty="0"/>
-              <a:t>.</a:t>
-            </a:r>
-          </a:p>
-          <a:p>
-            <a:pPr marL="835025" lvl="1" indent="-285750">
-              <a:lnSpc>
-                <a:spcPct val="150000"/>
-              </a:lnSpc>
-              <a:buFont typeface="Wingdings" panose="05000000000000000000" pitchFamily="2" charset="2"/>
-              <a:buChar char="ü"/>
-            </a:pPr>
-            <a:r>
-              <a:rPr lang="en-US" altLang="ko-KR" sz="1600" dirty="0"/>
-              <a:t>1821</a:t>
-            </a:r>
-            <a:r>
-              <a:rPr lang="ko-KR" altLang="en-US" sz="1600" dirty="0"/>
-              <a:t>년 미국 뉴욕주에서 세계 최초의 천연가스 우물이 </a:t>
-            </a:r>
-            <a:r>
-              <a:rPr lang="ko-KR" altLang="en-US" sz="1600" dirty="0" err="1"/>
-              <a:t>시추되었다</a:t>
-            </a:r>
-            <a:r>
-              <a:rPr lang="en-US" altLang="ko-KR" sz="1600" dirty="0"/>
-              <a:t>.</a:t>
-            </a:r>
-          </a:p>
-          <a:p>
-            <a:pPr marL="835025" lvl="1" indent="-285750">
-              <a:lnSpc>
-                <a:spcPct val="150000"/>
-              </a:lnSpc>
-              <a:buFont typeface="Wingdings" panose="05000000000000000000" pitchFamily="2" charset="2"/>
-              <a:buChar char="ü"/>
-            </a:pPr>
-            <a:r>
-              <a:rPr lang="en-US" altLang="ko-KR" sz="1600" dirty="0"/>
-              <a:t>1850</a:t>
-            </a:r>
-            <a:r>
-              <a:rPr lang="ko-KR" altLang="en-US" sz="1600" dirty="0"/>
-              <a:t>년대 중반부터는 도시의 가로등</a:t>
-            </a:r>
-            <a:r>
-              <a:rPr lang="en-US" altLang="ko-KR" sz="1600" dirty="0"/>
-              <a:t>, </a:t>
-            </a:r>
-            <a:r>
-              <a:rPr lang="ko-KR" altLang="en-US" sz="1600" dirty="0"/>
-              <a:t>가정 난방용으로 천연가스가 사용되기 시작하였다</a:t>
-            </a:r>
-            <a:r>
-              <a:rPr lang="en-US" altLang="ko-KR" sz="1600" dirty="0"/>
-              <a:t>.</a:t>
-            </a:r>
-          </a:p>
-          <a:p>
-            <a:pPr marL="835025" lvl="1" indent="-285750">
-              <a:lnSpc>
-                <a:spcPct val="150000"/>
-              </a:lnSpc>
-              <a:buFont typeface="Wingdings" panose="05000000000000000000" pitchFamily="2" charset="2"/>
-              <a:buChar char="ü"/>
-            </a:pPr>
-            <a:r>
-              <a:rPr lang="en-US" altLang="ko-KR" sz="1600" dirty="0"/>
-              <a:t>1859</a:t>
-            </a:r>
-            <a:r>
-              <a:rPr lang="ko-KR" altLang="en-US" sz="1600" dirty="0"/>
-              <a:t>년 펜실베니아 드레이크 성공은 </a:t>
-            </a:r>
-            <a:r>
-              <a:rPr lang="en-US" altLang="ko-KR" sz="1600" dirty="0"/>
-              <a:t>(</a:t>
-            </a:r>
-            <a:r>
-              <a:rPr lang="ko-KR" altLang="en-US" sz="1600" dirty="0" err="1"/>
-              <a:t>석유챕터</a:t>
-            </a:r>
-            <a:r>
-              <a:rPr lang="en-US" altLang="ko-KR" sz="1600" dirty="0"/>
-              <a:t> </a:t>
-            </a:r>
-            <a:r>
-              <a:rPr lang="ko-KR" altLang="en-US" sz="1600" dirty="0"/>
-              <a:t>참고</a:t>
-            </a:r>
-            <a:r>
-              <a:rPr lang="en-US" altLang="ko-KR" sz="1600" dirty="0"/>
-              <a:t>)</a:t>
-            </a:r>
-            <a:r>
-              <a:rPr lang="ko-KR" altLang="en-US" sz="1600" dirty="0"/>
-              <a:t> 석유 뿐만 아니라 천연가스 산업에도 기폭제 역할을 하였다</a:t>
-            </a:r>
-            <a:r>
-              <a:rPr lang="en-US" altLang="ko-KR" sz="1600" dirty="0"/>
-              <a:t>.</a:t>
-            </a:r>
-          </a:p>
-        </p:txBody>
-      </p:sp>
-    </p:spTree>
-    <p:extLst>
-      <p:ext uri="{BB962C8B-B14F-4D97-AF65-F5344CB8AC3E}">
-        <p14:creationId xmlns:p14="http://schemas.microsoft.com/office/powerpoint/2010/main" val="152177136"/>
-      </p:ext>
-    </p:extLst>
-  </p:cSld>
-  <p:clrMapOvr>
-    <a:masterClrMapping/>
-  </p:clrMapOvr>
-</p:sld>
-</file>
-
-<file path=ppt/slides/slide5.xml><?xml version="1.0" encoding="utf-8"?>
-<p:sld xmlns:a="http://schemas.openxmlformats.org/drawingml/2006/main" xmlns:r="http://schemas.openxmlformats.org/officeDocument/2006/relationships" xmlns:p="http://schemas.openxmlformats.org/presentationml/2006/main">
-  <p:cSld>
-    <p:spTree>
-      <p:nvGrpSpPr>
-        <p:cNvPr id="1" name="">
-          <a:extLst>
-            <a:ext uri="{FF2B5EF4-FFF2-40B4-BE49-F238E27FC236}">
-              <a16:creationId xmlns:a16="http://schemas.microsoft.com/office/drawing/2014/main" id="{AA58849E-C3EC-66C2-D5C9-C59E5D5BC968}"/>
-            </a:ext>
-          </a:extLst>
-        </p:cNvPr>
-        <p:cNvGrpSpPr/>
-        <p:nvPr/>
-      </p:nvGrpSpPr>
-      <p:grpSpPr>
-        <a:xfrm>
-          <a:off x="0" y="0"/>
-          <a:ext cx="0" cy="0"/>
-          <a:chOff x="0" y="0"/>
-          <a:chExt cx="0" cy="0"/>
-        </a:xfrm>
-      </p:grpSpPr>
-      <p:sp>
-        <p:nvSpPr>
-          <p:cNvPr id="2" name="제목 1">
-            <a:extLst>
-              <a:ext uri="{FF2B5EF4-FFF2-40B4-BE49-F238E27FC236}">
-                <a16:creationId xmlns:a16="http://schemas.microsoft.com/office/drawing/2014/main" id="{B4FAA21E-A0E0-EB01-8A47-F492A782CE9A}"/>
-              </a:ext>
-            </a:extLst>
-          </p:cNvPr>
-          <p:cNvSpPr>
-            <a:spLocks noGrp="1"/>
-          </p:cNvSpPr>
-          <p:nvPr>
-            <p:ph type="title"/>
-          </p:nvPr>
-        </p:nvSpPr>
-        <p:spPr/>
-        <p:txBody>
-          <a:bodyPr/>
-          <a:lstStyle/>
-          <a:p>
-            <a:r>
-              <a:rPr lang="ko-KR" altLang="en-US" dirty="0"/>
-              <a:t>서론</a:t>
-            </a:r>
-          </a:p>
-        </p:txBody>
-      </p:sp>
-      <p:sp>
-        <p:nvSpPr>
-          <p:cNvPr id="4" name="슬라이드 번호 개체 틀 3">
-            <a:extLst>
-              <a:ext uri="{FF2B5EF4-FFF2-40B4-BE49-F238E27FC236}">
-                <a16:creationId xmlns:a16="http://schemas.microsoft.com/office/drawing/2014/main" id="{3055CFF5-1045-A861-0C88-5A1DFAB93430}"/>
-              </a:ext>
-            </a:extLst>
-          </p:cNvPr>
-          <p:cNvSpPr>
-            <a:spLocks noGrp="1"/>
-          </p:cNvSpPr>
-          <p:nvPr>
-            <p:ph type="sldNum" sz="quarter" idx="12"/>
-          </p:nvPr>
-        </p:nvSpPr>
-        <p:spPr/>
-        <p:txBody>
-          <a:bodyPr/>
-          <a:lstStyle/>
-          <a:p>
-            <a:fld id="{109C872D-39A9-4065-8BF3-6A613116E2A1}" type="slidenum">
-              <a:rPr lang="ko-KR" altLang="en-US" smtClean="0"/>
-              <a:t>5</a:t>
-            </a:fld>
-            <a:endParaRPr lang="ko-KR" altLang="en-US"/>
-          </a:p>
-        </p:txBody>
-      </p:sp>
-      <p:sp>
-        <p:nvSpPr>
-          <p:cNvPr id="3" name="TextBox 2">
-            <a:extLst>
-              <a:ext uri="{FF2B5EF4-FFF2-40B4-BE49-F238E27FC236}">
-                <a16:creationId xmlns:a16="http://schemas.microsoft.com/office/drawing/2014/main" id="{F68FFC37-4353-1DB7-17B9-97C4402833EA}"/>
-              </a:ext>
-            </a:extLst>
-          </p:cNvPr>
-          <p:cNvSpPr txBox="1"/>
-          <p:nvPr/>
-        </p:nvSpPr>
-        <p:spPr>
-          <a:xfrm>
-            <a:off x="288790" y="958844"/>
-            <a:ext cx="11118453" cy="5584670"/>
-          </a:xfrm>
-          <a:prstGeom prst="rect">
-            <a:avLst/>
-          </a:prstGeom>
-          <a:noFill/>
-        </p:spPr>
-        <p:txBody>
-          <a:bodyPr wrap="square" rtlCol="0" anchor="t">
-            <a:spAutoFit/>
-          </a:bodyPr>
-          <a:lstStyle/>
-          <a:p>
-            <a:pPr marL="377825" indent="-285750">
-              <a:lnSpc>
-                <a:spcPct val="150000"/>
-              </a:lnSpc>
-              <a:buFont typeface="Arial" panose="020B0604020202020204" pitchFamily="34" charset="0"/>
-              <a:buChar char="•"/>
-            </a:pPr>
-            <a:r>
-              <a:rPr lang="en-US" altLang="ko-KR" sz="1600" dirty="0"/>
-              <a:t>20</a:t>
-            </a:r>
-            <a:r>
-              <a:rPr lang="ko-KR" altLang="en-US" sz="1600" dirty="0"/>
-              <a:t>세기 초반에는 파이프라인 기술의 발전으로</a:t>
-            </a:r>
-            <a:r>
-              <a:rPr lang="en-US" altLang="ko-KR" sz="1600" dirty="0"/>
-              <a:t> </a:t>
-            </a:r>
-            <a:r>
-              <a:rPr lang="ko-KR" altLang="en-US" sz="1600" dirty="0"/>
-              <a:t>천연가스의 대규모 수송이 가능해지며 산업적 활용이 크게 확대 </a:t>
-            </a:r>
-            <a:r>
-              <a:rPr lang="ko-KR" altLang="en-US" sz="1600" dirty="0" err="1"/>
-              <a:t>됬다</a:t>
-            </a:r>
-            <a:r>
-              <a:rPr lang="en-US" altLang="ko-KR" sz="1600" dirty="0"/>
-              <a:t>.</a:t>
-            </a:r>
-          </a:p>
-          <a:p>
-            <a:pPr marL="835025" lvl="1" indent="-285750">
-              <a:lnSpc>
-                <a:spcPct val="150000"/>
-              </a:lnSpc>
-              <a:buFont typeface="Wingdings" panose="05000000000000000000" pitchFamily="2" charset="2"/>
-              <a:buChar char="ü"/>
-            </a:pPr>
-            <a:r>
-              <a:rPr lang="en-US" altLang="ko-KR" sz="1600" dirty="0"/>
-              <a:t>1920</a:t>
-            </a:r>
-            <a:r>
-              <a:rPr lang="ko-KR" altLang="en-US" sz="1600" dirty="0"/>
-              <a:t>년대에는 장거리 천연가스 파이프라인이 건설되기 시작하였다</a:t>
-            </a:r>
-            <a:r>
-              <a:rPr lang="en-US" altLang="ko-KR" sz="1600" dirty="0"/>
-              <a:t>.</a:t>
-            </a:r>
-          </a:p>
-          <a:p>
-            <a:pPr marL="835025" lvl="1" indent="-285750">
-              <a:lnSpc>
-                <a:spcPct val="150000"/>
-              </a:lnSpc>
-              <a:buFont typeface="Wingdings" panose="05000000000000000000" pitchFamily="2" charset="2"/>
-              <a:buChar char="ü"/>
-            </a:pPr>
-            <a:r>
-              <a:rPr lang="en-US" altLang="ko-KR" sz="1600" dirty="0"/>
-              <a:t>1927</a:t>
-            </a:r>
-            <a:r>
-              <a:rPr lang="ko-KR" altLang="en-US" sz="1600" dirty="0"/>
-              <a:t>년에는 인디애나주와 시카고를 잇는 미국 최초의 장거리 파이프라인이 가동되었다</a:t>
-            </a:r>
-            <a:r>
-              <a:rPr lang="en-US" altLang="ko-KR" sz="1600" dirty="0"/>
-              <a:t>.</a:t>
-            </a:r>
-          </a:p>
-          <a:p>
-            <a:pPr marL="835025" lvl="1" indent="-285750">
-              <a:lnSpc>
-                <a:spcPct val="150000"/>
-              </a:lnSpc>
-              <a:buFont typeface="Wingdings" panose="05000000000000000000" pitchFamily="2" charset="2"/>
-              <a:buChar char="ü"/>
-            </a:pPr>
-            <a:endParaRPr lang="en-US" altLang="ko-KR" sz="1600" dirty="0"/>
-          </a:p>
-          <a:p>
-            <a:pPr marL="377825" indent="-285750">
-              <a:lnSpc>
-                <a:spcPct val="150000"/>
-              </a:lnSpc>
-              <a:buFont typeface="Arial" panose="020B0604020202020204" pitchFamily="34" charset="0"/>
-              <a:buChar char="•"/>
-            </a:pPr>
-            <a:r>
-              <a:rPr lang="en-US" altLang="ko-KR" sz="1600" dirty="0"/>
-              <a:t>1950~1960</a:t>
-            </a:r>
-            <a:r>
-              <a:rPr lang="ko-KR" altLang="en-US" sz="1600" dirty="0"/>
-              <a:t>년대는 천연가스 산업의 황금기이며</a:t>
-            </a:r>
-            <a:r>
-              <a:rPr lang="en-US" altLang="ko-KR" sz="1600" dirty="0"/>
-              <a:t>, </a:t>
-            </a:r>
-            <a:r>
-              <a:rPr lang="ko-KR" altLang="en-US" sz="1600" dirty="0"/>
-              <a:t>가정용과 산업용 에너지원으로서 수요가 폭발적인 증가를 보였다</a:t>
-            </a:r>
-            <a:r>
-              <a:rPr lang="en-US" altLang="ko-KR" sz="1600" dirty="0"/>
-              <a:t>.</a:t>
-            </a:r>
-          </a:p>
-          <a:p>
-            <a:pPr marL="835025" lvl="1" indent="-285750">
-              <a:lnSpc>
-                <a:spcPct val="150000"/>
-              </a:lnSpc>
-              <a:buFont typeface="Wingdings" panose="05000000000000000000" pitchFamily="2" charset="2"/>
-              <a:buChar char="ü"/>
-            </a:pPr>
-            <a:r>
-              <a:rPr lang="ko-KR" altLang="en-US" sz="1600" dirty="0"/>
-              <a:t>전력 생산부문에서는 석탄과 함께 주요 기저발전원으로 자리 잡았고</a:t>
-            </a:r>
-            <a:r>
-              <a:rPr lang="en-US" altLang="ko-KR" sz="1600" dirty="0"/>
-              <a:t>, </a:t>
-            </a:r>
-            <a:r>
-              <a:rPr lang="ko-KR" altLang="en-US" sz="1600" dirty="0"/>
-              <a:t>천연가스의 청정성과 연소 효율성으로 도시지역의 </a:t>
-            </a:r>
-            <a:r>
-              <a:rPr lang="ko-KR" altLang="en-US" sz="1600" dirty="0" err="1"/>
-              <a:t>대기질</a:t>
-            </a:r>
-            <a:r>
-              <a:rPr lang="ko-KR" altLang="en-US" sz="1600" dirty="0"/>
-              <a:t> 개선에도 기여하였다</a:t>
-            </a:r>
-            <a:r>
-              <a:rPr lang="en-US" altLang="ko-KR" sz="1600" dirty="0"/>
-              <a:t>.</a:t>
-            </a:r>
-          </a:p>
-          <a:p>
-            <a:pPr marL="835025" lvl="1" indent="-285750">
-              <a:lnSpc>
-                <a:spcPct val="150000"/>
-              </a:lnSpc>
-              <a:buFont typeface="Wingdings" panose="05000000000000000000" pitchFamily="2" charset="2"/>
-              <a:buChar char="ü"/>
-            </a:pPr>
-            <a:r>
-              <a:rPr lang="ko-KR" altLang="en-US" sz="1600" dirty="0"/>
-              <a:t>이 시기에 미국과 구소련</a:t>
-            </a:r>
-            <a:r>
-              <a:rPr lang="en-US" altLang="ko-KR" sz="1600" dirty="0"/>
-              <a:t>, </a:t>
-            </a:r>
-            <a:r>
-              <a:rPr lang="ko-KR" altLang="en-US" sz="1600" dirty="0"/>
-              <a:t>중동 지역에서는 대규모 가스전이 연이어 발견되었고</a:t>
-            </a:r>
-            <a:r>
-              <a:rPr lang="en-US" altLang="ko-KR" sz="1600" dirty="0"/>
-              <a:t>, </a:t>
-            </a:r>
-            <a:r>
-              <a:rPr lang="ko-KR" altLang="en-US" sz="1600" dirty="0"/>
-              <a:t>향후 글로벌 천연가스 공급의 기반이 되었다</a:t>
-            </a:r>
-            <a:r>
-              <a:rPr lang="en-US" altLang="ko-KR" sz="1600" dirty="0"/>
-              <a:t>.</a:t>
-            </a:r>
-          </a:p>
-          <a:p>
-            <a:pPr marL="835025" lvl="1" indent="-285750">
-              <a:lnSpc>
-                <a:spcPct val="150000"/>
-              </a:lnSpc>
-              <a:buFont typeface="Wingdings" panose="05000000000000000000" pitchFamily="2" charset="2"/>
-              <a:buChar char="ü"/>
-            </a:pPr>
-            <a:endParaRPr lang="en-US" altLang="ko-KR" sz="1600" dirty="0"/>
-          </a:p>
-          <a:p>
-            <a:pPr marL="377825" indent="-285750">
-              <a:lnSpc>
-                <a:spcPct val="150000"/>
-              </a:lnSpc>
-              <a:buFont typeface="Arial" panose="020B0604020202020204" pitchFamily="34" charset="0"/>
-              <a:buChar char="•"/>
-            </a:pPr>
-            <a:r>
-              <a:rPr lang="en-US" altLang="ko-KR" sz="1600" dirty="0"/>
-              <a:t>1980</a:t>
-            </a:r>
-            <a:r>
-              <a:rPr lang="ko-KR" altLang="en-US" sz="1600" dirty="0"/>
-              <a:t>년</a:t>
-            </a:r>
-            <a:r>
-              <a:rPr lang="en-US" altLang="ko-KR" sz="1600" dirty="0"/>
-              <a:t>~1990</a:t>
-            </a:r>
-            <a:r>
-              <a:rPr lang="ko-KR" altLang="en-US" sz="1600" dirty="0"/>
-              <a:t>년대는 천연가스의 국제무역이 본격화된 시기로 액화천연가스 기술의 발달이 중요한 전환점이 되었다</a:t>
-            </a:r>
-            <a:r>
-              <a:rPr lang="en-US" altLang="ko-KR" sz="1600" dirty="0"/>
-              <a:t>.</a:t>
-            </a:r>
-          </a:p>
-          <a:p>
-            <a:pPr marL="835025" lvl="1" indent="-285750">
-              <a:lnSpc>
-                <a:spcPct val="150000"/>
-              </a:lnSpc>
-              <a:buFont typeface="Wingdings" panose="05000000000000000000" pitchFamily="2" charset="2"/>
-              <a:buChar char="ü"/>
-            </a:pPr>
-            <a:r>
-              <a:rPr lang="ko-KR" altLang="en-US" sz="1600" dirty="0"/>
-              <a:t>액화천연가스</a:t>
-            </a:r>
-            <a:r>
-              <a:rPr lang="en-US" altLang="ko-KR" sz="1600" dirty="0"/>
-              <a:t>(LNG; Liquified Natural Gas) </a:t>
-            </a:r>
-            <a:r>
-              <a:rPr lang="ko-KR" altLang="en-US" sz="1600" dirty="0"/>
-              <a:t>기술은 가스를 영하</a:t>
-            </a:r>
-            <a:r>
-              <a:rPr lang="en-US" altLang="ko-KR" sz="1600" dirty="0"/>
-              <a:t>162</a:t>
-            </a:r>
-            <a:r>
-              <a:rPr lang="ko-KR" altLang="en-US" sz="1600" dirty="0"/>
-              <a:t>도까지 냉각하여 </a:t>
-            </a:r>
-            <a:r>
-              <a:rPr lang="ko-KR" altLang="en-US" sz="1600" dirty="0" err="1"/>
-              <a:t>액화한</a:t>
-            </a:r>
-            <a:r>
-              <a:rPr lang="ko-KR" altLang="en-US" sz="1600" dirty="0"/>
-              <a:t> 뒤 해상으로 수송하는 방식을 가능케 하여</a:t>
-            </a:r>
-            <a:r>
-              <a:rPr lang="en-US" altLang="ko-KR" sz="1600" dirty="0"/>
-              <a:t>, </a:t>
-            </a:r>
-            <a:r>
-              <a:rPr lang="ko-KR" altLang="en-US" sz="1600" dirty="0"/>
-              <a:t>파이프라인으로 공급하지 못하는 지역에도 천연가스를 공급할 수 있게 되었다</a:t>
-            </a:r>
-            <a:r>
-              <a:rPr lang="en-US" altLang="ko-KR" sz="1600" dirty="0"/>
-              <a:t>.</a:t>
-            </a:r>
-          </a:p>
-          <a:p>
-            <a:pPr marL="835025" lvl="1" indent="-285750">
-              <a:lnSpc>
-                <a:spcPct val="150000"/>
-              </a:lnSpc>
-              <a:buFont typeface="Wingdings" panose="05000000000000000000" pitchFamily="2" charset="2"/>
-              <a:buChar char="ü"/>
-            </a:pPr>
-            <a:r>
-              <a:rPr lang="en-US" altLang="ko-KR" sz="1600" dirty="0"/>
-              <a:t>1964</a:t>
-            </a:r>
-            <a:r>
-              <a:rPr lang="ko-KR" altLang="en-US" sz="1600" dirty="0"/>
-              <a:t>년 알제리에서 영국으로 </a:t>
-            </a:r>
-            <a:r>
-              <a:rPr lang="en-US" altLang="ko-KR" sz="1600" dirty="0"/>
-              <a:t>LNG </a:t>
-            </a:r>
-            <a:r>
-              <a:rPr lang="ko-KR" altLang="en-US" sz="1600" dirty="0"/>
-              <a:t>수출이 최초로 이루어지고</a:t>
-            </a:r>
-            <a:r>
-              <a:rPr lang="en-US" altLang="ko-KR" sz="1600" dirty="0"/>
-              <a:t>, </a:t>
-            </a:r>
-            <a:r>
-              <a:rPr lang="ko-KR" altLang="en-US" sz="1600" dirty="0"/>
-              <a:t>해상수송은 세계 천연가스시장에서 중요한 운송수단으로 자리잡았다</a:t>
-            </a:r>
-            <a:r>
-              <a:rPr lang="en-US" altLang="ko-KR" sz="1600" dirty="0"/>
-              <a:t>.</a:t>
-            </a:r>
-          </a:p>
-        </p:txBody>
-      </p:sp>
-    </p:spTree>
-    <p:extLst>
-      <p:ext uri="{BB962C8B-B14F-4D97-AF65-F5344CB8AC3E}">
-        <p14:creationId xmlns:p14="http://schemas.microsoft.com/office/powerpoint/2010/main" val="2296139293"/>
       </p:ext>
     </p:extLst>
   </p:cSld>

--- a/에너지경제학/자원에너지경제학_Chapter_3 (가스).pptx
+++ b/에너지경제학/자원에너지경제학_Chapter_3 (가스).pptx
@@ -5,7 +5,7 @@
     <p:sldMasterId id="2147483648" r:id="rId1"/>
   </p:sldMasterIdLst>
   <p:notesMasterIdLst>
-    <p:notesMasterId r:id="rId55"/>
+    <p:notesMasterId r:id="rId59"/>
   </p:notesMasterIdLst>
   <p:sldIdLst>
     <p:sldId id="375" r:id="rId2"/>
@@ -60,7 +60,11 @@
     <p:sldId id="682" r:id="rId51"/>
     <p:sldId id="683" r:id="rId52"/>
     <p:sldId id="684" r:id="rId53"/>
-    <p:sldId id="598" r:id="rId54"/>
+    <p:sldId id="685" r:id="rId54"/>
+    <p:sldId id="686" r:id="rId55"/>
+    <p:sldId id="687" r:id="rId56"/>
+    <p:sldId id="688" r:id="rId57"/>
+    <p:sldId id="598" r:id="rId58"/>
   </p:sldIdLst>
   <p:sldSz cx="12192000" cy="6858000"/>
   <p:notesSz cx="6858000" cy="9144000"/>
@@ -271,7 +275,7 @@
           <a:p>
             <a:fld id="{4A5E00EF-AEA4-43E2-9451-8F9C59A39471}" type="datetimeFigureOut">
               <a:rPr lang="ko-KR" altLang="en-US" smtClean="0"/>
-              <a:t>2026-06-02</a:t>
+              <a:t>2026-06-11</a:t>
             </a:fld>
             <a:endParaRPr lang="ko-KR" altLang="en-US"/>
           </a:p>
@@ -1077,7 +1081,7 @@
           <a:p>
             <a:fld id="{CD32C56F-BD27-4999-9E6D-D4EACE3DA9F4}" type="datetime1">
               <a:rPr lang="ko-KR" altLang="en-US" smtClean="0"/>
-              <a:t>2026-06-02</a:t>
+              <a:t>2026-06-11</a:t>
             </a:fld>
             <a:endParaRPr lang="ko-KR" altLang="en-US"/>
           </a:p>
@@ -1291,7 +1295,7 @@
           <a:p>
             <a:fld id="{8EF4A19C-72C8-45CA-8E3F-68A7FA345D6C}" type="datetime1">
               <a:rPr lang="ko-KR" altLang="en-US" smtClean="0"/>
-              <a:t>2026-06-02</a:t>
+              <a:t>2026-06-11</a:t>
             </a:fld>
             <a:endParaRPr lang="ko-KR" altLang="en-US"/>
           </a:p>
@@ -1515,7 +1519,7 @@
           <a:p>
             <a:fld id="{56A175B2-010B-4341-954C-5F8F5C70B124}" type="datetime1">
               <a:rPr lang="ko-KR" altLang="en-US" smtClean="0"/>
-              <a:t>2026-06-02</a:t>
+              <a:t>2026-06-11</a:t>
             </a:fld>
             <a:endParaRPr lang="ko-KR" altLang="en-US"/>
           </a:p>
@@ -1729,7 +1733,7 @@
           <a:p>
             <a:fld id="{16B83F9E-22C9-45CA-9E85-070F1D3EF530}" type="datetime1">
               <a:rPr lang="ko-KR" altLang="en-US" smtClean="0"/>
-              <a:t>2026-06-02</a:t>
+              <a:t>2026-06-11</a:t>
             </a:fld>
             <a:endParaRPr lang="ko-KR" altLang="en-US"/>
           </a:p>
@@ -2020,7 +2024,7 @@
           <a:p>
             <a:fld id="{03278F45-FB3C-4C4D-B89A-7BC3F5F229F6}" type="datetime1">
               <a:rPr lang="ko-KR" altLang="en-US" smtClean="0"/>
-              <a:t>2026-06-02</a:t>
+              <a:t>2026-06-11</a:t>
             </a:fld>
             <a:endParaRPr lang="ko-KR" altLang="en-US"/>
           </a:p>
@@ -2413,7 +2417,7 @@
           <a:p>
             <a:fld id="{38FDAC3C-35A6-415C-9F03-738A6AC328B1}" type="datetime1">
               <a:rPr lang="ko-KR" altLang="en-US" smtClean="0"/>
-              <a:t>2026-06-02</a:t>
+              <a:t>2026-06-11</a:t>
             </a:fld>
             <a:endParaRPr lang="ko-KR" altLang="en-US"/>
           </a:p>
@@ -4007,7 +4011,7 @@
           <a:p>
             <a:fld id="{507A0DF1-AEE6-4B0D-89D2-351E7B3EF65C}" type="datetime1">
               <a:rPr lang="ko-KR" altLang="en-US" smtClean="0"/>
-              <a:t>2026-06-02</a:t>
+              <a:t>2026-06-11</a:t>
             </a:fld>
             <a:endParaRPr lang="ko-KR" altLang="en-US"/>
           </a:p>
@@ -4435,7 +4439,7 @@
           <a:p>
             <a:fld id="{CA93B8C9-630F-4D57-944D-04FD37CECCD3}" type="datetime1">
               <a:rPr lang="ko-KR" altLang="en-US" smtClean="0"/>
-              <a:t>2026-06-02</a:t>
+              <a:t>2026-06-11</a:t>
             </a:fld>
             <a:endParaRPr lang="ko-KR" altLang="en-US"/>
           </a:p>
@@ -4592,7 +4596,7 @@
           <a:p>
             <a:fld id="{E986165A-AC43-4902-9541-874ECD310BA3}" type="datetime1">
               <a:rPr lang="ko-KR" altLang="en-US" smtClean="0"/>
-              <a:t>2026-06-02</a:t>
+              <a:t>2026-06-11</a:t>
             </a:fld>
             <a:endParaRPr lang="ko-KR" altLang="en-US"/>
           </a:p>
@@ -4919,7 +4923,7 @@
           <a:p>
             <a:fld id="{47E6EE6D-2B0E-43A9-87A2-7354CDB998F4}" type="datetime1">
               <a:rPr lang="ko-KR" altLang="en-US" smtClean="0"/>
-              <a:t>2026-06-02</a:t>
+              <a:t>2026-06-11</a:t>
             </a:fld>
             <a:endParaRPr lang="ko-KR" altLang="en-US"/>
           </a:p>
@@ -5223,7 +5227,7 @@
           <a:p>
             <a:fld id="{5CC5944E-0BC8-4FAA-9F94-6B4B05834E10}" type="datetime1">
               <a:rPr lang="ko-KR" altLang="en-US" smtClean="0"/>
-              <a:t>2026-06-02</a:t>
+              <a:t>2026-06-11</a:t>
             </a:fld>
             <a:endParaRPr lang="ko-KR" altLang="en-US"/>
           </a:p>
@@ -7557,7 +7561,7 @@
                 <a:latin typeface="HY헤드라인M" panose="02030600000101010101" pitchFamily="18" charset="-127"/>
                 <a:ea typeface="HY헤드라인M" panose="02030600000101010101" pitchFamily="18" charset="-127"/>
               </a:rPr>
-              <a:t>Lecture - 2</a:t>
+              <a:t>Lecture - 3</a:t>
             </a:r>
             <a:endParaRPr lang="ko-KR" altLang="en-US" sz="1700" dirty="0">
               <a:latin typeface="+mn-ea"/>
@@ -38804,8 +38808,8 @@
           </a:p>
         </p:txBody>
       </p:sp>
-      <mc:AlternateContent xmlns:mc="http://schemas.openxmlformats.org/markup-compatibility/2006">
-        <mc:Choice xmlns:a14="http://schemas.microsoft.com/office/drawing/2010/main" Requires="a14">
+      <mc:AlternateContent xmlns:mc="http://schemas.openxmlformats.org/markup-compatibility/2006" xmlns:a14="http://schemas.microsoft.com/office/drawing/2010/main">
+        <mc:Choice Requires="a14">
           <p:sp>
             <p:nvSpPr>
               <p:cNvPr id="3" name="TextBox 2">
@@ -39041,7 +39045,7 @@
             </p:txBody>
           </p:sp>
         </mc:Choice>
-        <mc:Fallback>
+        <mc:Fallback xmlns="">
           <p:sp>
             <p:nvSpPr>
               <p:cNvPr id="3" name="TextBox 2">
@@ -39086,8 +39090,8 @@
           </p:sp>
         </mc:Fallback>
       </mc:AlternateContent>
-      <mc:AlternateContent xmlns:mc="http://schemas.openxmlformats.org/markup-compatibility/2006">
-        <mc:Choice xmlns:a14="http://schemas.microsoft.com/office/drawing/2010/main" Requires="a14">
+      <mc:AlternateContent xmlns:mc="http://schemas.openxmlformats.org/markup-compatibility/2006" xmlns:a14="http://schemas.microsoft.com/office/drawing/2010/main">
+        <mc:Choice Requires="a14">
           <p:sp>
             <p:nvSpPr>
               <p:cNvPr id="6" name="TextBox 5">
@@ -39211,7 +39215,7 @@
             </p:txBody>
           </p:sp>
         </mc:Choice>
-        <mc:Fallback>
+        <mc:Fallback xmlns="">
           <p:sp>
             <p:nvSpPr>
               <p:cNvPr id="6" name="TextBox 5">
@@ -39349,8 +39353,8 @@
           </a:p>
         </p:txBody>
       </p:sp>
-      <mc:AlternateContent xmlns:mc="http://schemas.openxmlformats.org/markup-compatibility/2006">
-        <mc:Choice xmlns:a14="http://schemas.microsoft.com/office/drawing/2010/main" Requires="a14">
+      <mc:AlternateContent xmlns:mc="http://schemas.openxmlformats.org/markup-compatibility/2006" xmlns:a14="http://schemas.microsoft.com/office/drawing/2010/main">
+        <mc:Choice Requires="a14">
           <p:sp>
             <p:nvSpPr>
               <p:cNvPr id="3" name="TextBox 2">
@@ -39758,7 +39762,7 @@
             </p:txBody>
           </p:sp>
         </mc:Choice>
-        <mc:Fallback>
+        <mc:Fallback xmlns="">
           <p:sp>
             <p:nvSpPr>
               <p:cNvPr id="3" name="TextBox 2">
@@ -39803,8 +39807,8 @@
           </p:sp>
         </mc:Fallback>
       </mc:AlternateContent>
-      <mc:AlternateContent xmlns:mc="http://schemas.openxmlformats.org/markup-compatibility/2006">
-        <mc:Choice xmlns:a14="http://schemas.microsoft.com/office/drawing/2010/main" Requires="a14">
+      <mc:AlternateContent xmlns:mc="http://schemas.openxmlformats.org/markup-compatibility/2006" xmlns:a14="http://schemas.microsoft.com/office/drawing/2010/main">
+        <mc:Choice Requires="a14">
           <p:sp>
             <p:nvSpPr>
               <p:cNvPr id="7" name="TextBox 6">
@@ -39833,6 +39837,7 @@
               </a:bodyPr>
               <a:lstStyle/>
               <a:p>
+                <a:pPr/>
                 <a14:m>
                   <m:oMathPara xmlns:m="http://schemas.openxmlformats.org/officeDocument/2006/math">
                     <m:oMathParaPr>
@@ -39996,7 +40001,7 @@
             </p:txBody>
           </p:sp>
         </mc:Choice>
-        <mc:Fallback>
+        <mc:Fallback xmlns="">
           <p:sp>
             <p:nvSpPr>
               <p:cNvPr id="7" name="TextBox 6">
@@ -40561,8 +40566,8 @@
           </a:p>
         </p:txBody>
       </p:sp>
-      <mc:AlternateContent xmlns:mc="http://schemas.openxmlformats.org/markup-compatibility/2006">
-        <mc:Choice xmlns:a14="http://schemas.microsoft.com/office/drawing/2010/main" Requires="a14">
+      <mc:AlternateContent xmlns:mc="http://schemas.openxmlformats.org/markup-compatibility/2006" xmlns:a14="http://schemas.microsoft.com/office/drawing/2010/main">
+        <mc:Choice Requires="a14">
           <p:sp>
             <p:nvSpPr>
               <p:cNvPr id="3" name="TextBox 2">
@@ -40983,7 +40988,7 @@
             </p:txBody>
           </p:sp>
         </mc:Choice>
-        <mc:Fallback>
+        <mc:Fallback xmlns="">
           <p:sp>
             <p:nvSpPr>
               <p:cNvPr id="3" name="TextBox 2">
@@ -41028,8 +41033,8 @@
           </p:sp>
         </mc:Fallback>
       </mc:AlternateContent>
-      <mc:AlternateContent xmlns:mc="http://schemas.openxmlformats.org/markup-compatibility/2006">
-        <mc:Choice xmlns:a14="http://schemas.microsoft.com/office/drawing/2010/main" Requires="a14">
+      <mc:AlternateContent xmlns:mc="http://schemas.openxmlformats.org/markup-compatibility/2006" xmlns:a14="http://schemas.microsoft.com/office/drawing/2010/main">
+        <mc:Choice Requires="a14">
           <p:sp>
             <p:nvSpPr>
               <p:cNvPr id="5" name="TextBox 4">
@@ -41234,7 +41239,7 @@
             </p:txBody>
           </p:sp>
         </mc:Choice>
-        <mc:Fallback>
+        <mc:Fallback xmlns="">
           <p:sp>
             <p:nvSpPr>
               <p:cNvPr id="5" name="TextBox 4">
@@ -42019,6 +42024,1537 @@
         <p:cNvPr id="1" name="">
           <a:extLst>
             <a:ext uri="{FF2B5EF4-FFF2-40B4-BE49-F238E27FC236}">
+              <a16:creationId xmlns:a16="http://schemas.microsoft.com/office/drawing/2014/main" id="{44A4CD6A-F1CD-ABCD-E2D0-F05E7DA823B0}"/>
+            </a:ext>
+          </a:extLst>
+        </p:cNvPr>
+        <p:cNvGrpSpPr/>
+        <p:nvPr/>
+      </p:nvGrpSpPr>
+      <p:grpSpPr>
+        <a:xfrm>
+          <a:off x="0" y="0"/>
+          <a:ext cx="0" cy="0"/>
+          <a:chOff x="0" y="0"/>
+          <a:chExt cx="0" cy="0"/>
+        </a:xfrm>
+      </p:grpSpPr>
+      <p:sp>
+        <p:nvSpPr>
+          <p:cNvPr id="2" name="제목 1">
+            <a:extLst>
+              <a:ext uri="{FF2B5EF4-FFF2-40B4-BE49-F238E27FC236}">
+                <a16:creationId xmlns:a16="http://schemas.microsoft.com/office/drawing/2014/main" id="{395721C8-728F-F228-A24F-98A4B296DD9E}"/>
+              </a:ext>
+            </a:extLst>
+          </p:cNvPr>
+          <p:cNvSpPr>
+            <a:spLocks noGrp="1"/>
+          </p:cNvSpPr>
+          <p:nvPr>
+            <p:ph type="title"/>
+          </p:nvPr>
+        </p:nvSpPr>
+        <p:spPr/>
+        <p:txBody>
+          <a:bodyPr/>
+          <a:lstStyle/>
+          <a:p>
+            <a:r>
+              <a:rPr lang="ko-KR" altLang="en-US" dirty="0"/>
+              <a:t>장기계약과 현물시장</a:t>
+            </a:r>
+          </a:p>
+        </p:txBody>
+      </p:sp>
+      <p:sp>
+        <p:nvSpPr>
+          <p:cNvPr id="4" name="슬라이드 번호 개체 틀 3">
+            <a:extLst>
+              <a:ext uri="{FF2B5EF4-FFF2-40B4-BE49-F238E27FC236}">
+                <a16:creationId xmlns:a16="http://schemas.microsoft.com/office/drawing/2014/main" id="{16CE386E-F8F3-BE8E-0D6E-6E4B2424993E}"/>
+              </a:ext>
+            </a:extLst>
+          </p:cNvPr>
+          <p:cNvSpPr>
+            <a:spLocks noGrp="1"/>
+          </p:cNvSpPr>
+          <p:nvPr>
+            <p:ph type="sldNum" sz="quarter" idx="12"/>
+          </p:nvPr>
+        </p:nvSpPr>
+        <p:spPr/>
+        <p:txBody>
+          <a:bodyPr/>
+          <a:lstStyle/>
+          <a:p>
+            <a:fld id="{109C872D-39A9-4065-8BF3-6A613116E2A1}" type="slidenum">
+              <a:rPr lang="ko-KR" altLang="en-US" smtClean="0"/>
+              <a:t>53</a:t>
+            </a:fld>
+            <a:endParaRPr lang="ko-KR" altLang="en-US"/>
+          </a:p>
+        </p:txBody>
+      </p:sp>
+      <p:sp>
+        <p:nvSpPr>
+          <p:cNvPr id="3" name="TextBox 2">
+            <a:extLst>
+              <a:ext uri="{FF2B5EF4-FFF2-40B4-BE49-F238E27FC236}">
+                <a16:creationId xmlns:a16="http://schemas.microsoft.com/office/drawing/2014/main" id="{46C15E28-C395-F3C4-E71D-48ECBDE010EC}"/>
+              </a:ext>
+            </a:extLst>
+          </p:cNvPr>
+          <p:cNvSpPr txBox="1"/>
+          <p:nvPr/>
+        </p:nvSpPr>
+        <p:spPr>
+          <a:xfrm>
+            <a:off x="288790" y="958844"/>
+            <a:ext cx="11118453" cy="4476675"/>
+          </a:xfrm>
+          <a:prstGeom prst="rect">
+            <a:avLst/>
+          </a:prstGeom>
+          <a:noFill/>
+        </p:spPr>
+        <p:txBody>
+          <a:bodyPr wrap="square" rtlCol="0" anchor="t">
+            <a:spAutoFit/>
+          </a:bodyPr>
+          <a:lstStyle/>
+          <a:p>
+            <a:pPr marL="377825" indent="-285750">
+              <a:lnSpc>
+                <a:spcPct val="150000"/>
+              </a:lnSpc>
+              <a:buFont typeface="Arial" panose="020B0604020202020204" pitchFamily="34" charset="0"/>
+              <a:buChar char="•"/>
+            </a:pPr>
+            <a:r>
+              <a:rPr lang="ko-KR" altLang="en-US" sz="1600" dirty="0"/>
+              <a:t>천연가스 시장에서 거래 계약은 전통적으로 장기계약에 기반하여 발전해왔다</a:t>
+            </a:r>
+            <a:r>
+              <a:rPr lang="en-US" altLang="ko-KR" sz="1600" dirty="0"/>
+              <a:t>.</a:t>
+            </a:r>
+          </a:p>
+          <a:p>
+            <a:pPr marL="835025" lvl="1" indent="-285750">
+              <a:lnSpc>
+                <a:spcPct val="150000"/>
+              </a:lnSpc>
+              <a:buFont typeface="Wingdings" panose="05000000000000000000" pitchFamily="2" charset="2"/>
+              <a:buChar char="ü"/>
+            </a:pPr>
+            <a:r>
+              <a:rPr lang="ko-KR" altLang="en-US" sz="1600" dirty="0"/>
+              <a:t>장기계약은 공급의 안정성과 투자회수의 핵심 수단으로 작용한다</a:t>
+            </a:r>
+            <a:r>
+              <a:rPr lang="en-US" altLang="ko-KR" sz="1600" dirty="0"/>
+              <a:t>.</a:t>
+            </a:r>
+          </a:p>
+          <a:p>
+            <a:pPr marL="835025" lvl="1" indent="-285750">
+              <a:lnSpc>
+                <a:spcPct val="150000"/>
+              </a:lnSpc>
+              <a:buFont typeface="Wingdings" panose="05000000000000000000" pitchFamily="2" charset="2"/>
+              <a:buChar char="ü"/>
+            </a:pPr>
+            <a:r>
+              <a:rPr lang="ko-KR" altLang="en-US" sz="1600" dirty="0"/>
+              <a:t>일반적으로 </a:t>
+            </a:r>
+            <a:r>
+              <a:rPr lang="en-US" altLang="ko-KR" sz="1600" dirty="0"/>
+              <a:t>10</a:t>
+            </a:r>
+            <a:r>
+              <a:rPr lang="ko-KR" altLang="en-US" sz="1600" dirty="0" err="1"/>
+              <a:t>년에서</a:t>
+            </a:r>
+            <a:r>
+              <a:rPr lang="ko-KR" altLang="en-US" sz="1600" dirty="0"/>
+              <a:t> </a:t>
+            </a:r>
+            <a:r>
+              <a:rPr lang="en-US" altLang="ko-KR" sz="1600" dirty="0"/>
+              <a:t>25</a:t>
+            </a:r>
+            <a:r>
+              <a:rPr lang="ko-KR" altLang="en-US" sz="1600" dirty="0"/>
+              <a:t>년 이상의 기간 동안 천연가스를 공급하는 구조로</a:t>
+            </a:r>
+            <a:r>
+              <a:rPr lang="en-US" altLang="ko-KR" sz="1600" dirty="0"/>
+              <a:t>, </a:t>
+            </a:r>
+            <a:r>
+              <a:rPr lang="ko-KR" altLang="en-US" sz="1600" dirty="0"/>
+              <a:t>대규모 인프라 투자에 대한 금융 조달을 가능하게 한다</a:t>
+            </a:r>
+            <a:r>
+              <a:rPr lang="en-US" altLang="ko-KR" sz="1600" dirty="0"/>
+              <a:t>.</a:t>
+            </a:r>
+          </a:p>
+          <a:p>
+            <a:pPr marL="835025" lvl="1" indent="-285750">
+              <a:lnSpc>
+                <a:spcPct val="150000"/>
+              </a:lnSpc>
+              <a:buFont typeface="Wingdings" panose="05000000000000000000" pitchFamily="2" charset="2"/>
+              <a:buChar char="ü"/>
+            </a:pPr>
+            <a:r>
+              <a:rPr lang="ko-KR" altLang="en-US" sz="1600" dirty="0"/>
+              <a:t>보통 유가 연동 방식을 통해 가격이 결정되고</a:t>
+            </a:r>
+            <a:r>
+              <a:rPr lang="en-US" altLang="ko-KR" sz="1600" dirty="0"/>
+              <a:t>, </a:t>
+            </a:r>
+            <a:r>
+              <a:rPr lang="ko-KR" altLang="en-US" sz="1600" dirty="0"/>
+              <a:t>수요자는 정해진 물량을 구매하거나 인수하지 않더라도 대금을 지불해야 하는 </a:t>
+            </a:r>
+            <a:r>
+              <a:rPr lang="en-US" altLang="ko-KR" sz="1600" dirty="0"/>
+              <a:t>‘</a:t>
+            </a:r>
+            <a:r>
+              <a:rPr lang="ko-KR" altLang="en-US" sz="1600" dirty="0"/>
+              <a:t>수령 또는 지불</a:t>
+            </a:r>
+            <a:r>
+              <a:rPr lang="en-US" altLang="ko-KR" sz="1600" dirty="0"/>
+              <a:t>‘ (take or pay)</a:t>
+            </a:r>
+            <a:r>
+              <a:rPr lang="ko-KR" altLang="en-US" sz="1600" dirty="0"/>
+              <a:t>를 수용해야 한다</a:t>
+            </a:r>
+            <a:r>
+              <a:rPr lang="en-US" altLang="ko-KR" sz="1600" dirty="0"/>
+              <a:t>.</a:t>
+            </a:r>
+          </a:p>
+          <a:p>
+            <a:pPr marL="1292225" lvl="2" indent="-285750">
+              <a:lnSpc>
+                <a:spcPct val="150000"/>
+              </a:lnSpc>
+              <a:buFont typeface="Wingdings" panose="05000000000000000000" pitchFamily="2" charset="2"/>
+              <a:buChar char="Ø"/>
+            </a:pPr>
+            <a:r>
+              <a:rPr lang="ko-KR" altLang="en-US" sz="1600" dirty="0"/>
+              <a:t>프로젝트 개발자의 안정적인 수익을 보장하는 동시에</a:t>
+            </a:r>
+            <a:r>
+              <a:rPr lang="en-US" altLang="ko-KR" sz="1600" dirty="0"/>
+              <a:t>, </a:t>
+            </a:r>
+            <a:r>
+              <a:rPr lang="ko-KR" altLang="en-US" sz="1600" dirty="0"/>
+              <a:t>수입국에는 에너지 안보를 제공한다</a:t>
+            </a:r>
+            <a:r>
+              <a:rPr lang="en-US" altLang="ko-KR" sz="1600" dirty="0"/>
+              <a:t>.</a:t>
+            </a:r>
+          </a:p>
+          <a:p>
+            <a:pPr marL="377825" indent="-285750">
+              <a:lnSpc>
+                <a:spcPct val="150000"/>
+              </a:lnSpc>
+              <a:buFont typeface="Arial" panose="020B0604020202020204" pitchFamily="34" charset="0"/>
+              <a:buChar char="•"/>
+            </a:pPr>
+            <a:r>
+              <a:rPr lang="en-US" altLang="ko-KR" sz="1600" dirty="0"/>
+              <a:t>2000</a:t>
+            </a:r>
+            <a:r>
+              <a:rPr lang="ko-KR" altLang="en-US" sz="1600" dirty="0"/>
+              <a:t>년대 이후 </a:t>
+            </a:r>
+            <a:r>
+              <a:rPr lang="en-US" altLang="ko-KR" sz="1600" dirty="0"/>
+              <a:t>LNG </a:t>
+            </a:r>
+            <a:r>
+              <a:rPr lang="ko-KR" altLang="en-US" sz="1600" dirty="0"/>
+              <a:t>시장의 유연화와 글로벌화가 진전되면서 단기계약과 현물거래의 비중이 점차 증가하고 있다</a:t>
+            </a:r>
+            <a:r>
+              <a:rPr lang="en-US" altLang="ko-KR" sz="1600" dirty="0"/>
+              <a:t>.</a:t>
+            </a:r>
+          </a:p>
+          <a:p>
+            <a:pPr marL="835025" lvl="1" indent="-285750">
+              <a:lnSpc>
+                <a:spcPct val="150000"/>
+              </a:lnSpc>
+              <a:buFont typeface="Wingdings" panose="05000000000000000000" pitchFamily="2" charset="2"/>
+              <a:buChar char="ü"/>
+            </a:pPr>
+            <a:r>
+              <a:rPr lang="ko-KR" altLang="en-US" sz="1600" dirty="0"/>
+              <a:t>단기계약은 대개 </a:t>
+            </a:r>
+            <a:r>
+              <a:rPr lang="en-US" altLang="ko-KR" sz="1600" dirty="0"/>
+              <a:t>1</a:t>
+            </a:r>
+            <a:r>
+              <a:rPr lang="ko-KR" altLang="en-US" sz="1600" dirty="0"/>
+              <a:t>개월에서 수년 이내의 기간으로 이루어지며</a:t>
+            </a:r>
+            <a:r>
+              <a:rPr lang="en-US" altLang="ko-KR" sz="1600" dirty="0"/>
+              <a:t>, </a:t>
+            </a:r>
+            <a:r>
+              <a:rPr lang="ko-KR" altLang="en-US" sz="1600" dirty="0"/>
+              <a:t>현물가격 또는 허브 가격에 연동되어 거래된다</a:t>
+            </a:r>
+            <a:r>
+              <a:rPr lang="en-US" altLang="ko-KR" sz="1600" dirty="0"/>
+              <a:t>.</a:t>
+            </a:r>
+          </a:p>
+          <a:p>
+            <a:pPr marL="1292225" lvl="2" indent="-285750">
+              <a:lnSpc>
+                <a:spcPct val="150000"/>
+              </a:lnSpc>
+              <a:buFont typeface="Wingdings" panose="05000000000000000000" pitchFamily="2" charset="2"/>
+              <a:buChar char="Ø"/>
+            </a:pPr>
+            <a:r>
+              <a:rPr lang="ko-KR" altLang="en-US" sz="1600" dirty="0"/>
+              <a:t>단기 수급 조정 수단으로 유용하며</a:t>
+            </a:r>
+            <a:r>
+              <a:rPr lang="en-US" altLang="ko-KR" sz="1600" dirty="0"/>
+              <a:t>, </a:t>
+            </a:r>
+            <a:r>
+              <a:rPr lang="ko-KR" altLang="en-US" sz="1600" dirty="0"/>
+              <a:t>수요 변동이나 긴급상황에 신속한 대응을 가능하게 한다</a:t>
+            </a:r>
+            <a:r>
+              <a:rPr lang="en-US" altLang="ko-KR" sz="1600" dirty="0"/>
+              <a:t>.</a:t>
+            </a:r>
+          </a:p>
+          <a:p>
+            <a:pPr marL="835025" lvl="1" indent="-285750">
+              <a:lnSpc>
+                <a:spcPct val="150000"/>
+              </a:lnSpc>
+              <a:buFont typeface="Wingdings" panose="05000000000000000000" pitchFamily="2" charset="2"/>
+              <a:buChar char="ü"/>
+            </a:pPr>
+            <a:r>
+              <a:rPr lang="ko-KR" altLang="en-US" sz="1600" dirty="0"/>
+              <a:t>가격 조항이 비교적 단순하고 </a:t>
+            </a:r>
+            <a:r>
+              <a:rPr lang="en-US" altLang="ko-KR" sz="1600" dirty="0"/>
+              <a:t>‘</a:t>
+            </a:r>
+            <a:r>
+              <a:rPr lang="ko-KR" altLang="en-US" sz="1600" dirty="0"/>
+              <a:t>수령 또는 지불</a:t>
+            </a:r>
+            <a:r>
+              <a:rPr lang="en-US" altLang="ko-KR" sz="1600" dirty="0"/>
+              <a:t>’ </a:t>
+            </a:r>
+            <a:r>
+              <a:rPr lang="ko-KR" altLang="en-US" sz="1600" dirty="0"/>
+              <a:t>조건이 약하거나 없는 경우가 많아</a:t>
+            </a:r>
+            <a:r>
+              <a:rPr lang="en-US" altLang="ko-KR" sz="1600" dirty="0"/>
+              <a:t>, </a:t>
+            </a:r>
+            <a:r>
+              <a:rPr lang="ko-KR" altLang="en-US" sz="1600" dirty="0"/>
+              <a:t>수요자에게는 비용 측면의 유리함을</a:t>
+            </a:r>
+            <a:r>
+              <a:rPr lang="en-US" altLang="ko-KR" sz="1600" dirty="0"/>
+              <a:t>, </a:t>
+            </a:r>
+            <a:r>
+              <a:rPr lang="ko-KR" altLang="en-US" sz="1600" dirty="0"/>
+              <a:t>공급자에게는 시장가격을 반영한 수익 기회를 제공할 수 있다</a:t>
+            </a:r>
+            <a:r>
+              <a:rPr lang="en-US" altLang="ko-KR" sz="1600" dirty="0"/>
+              <a:t>.</a:t>
+            </a:r>
+          </a:p>
+        </p:txBody>
+      </p:sp>
+    </p:spTree>
+    <p:extLst>
+      <p:ext uri="{BB962C8B-B14F-4D97-AF65-F5344CB8AC3E}">
+        <p14:creationId xmlns:p14="http://schemas.microsoft.com/office/powerpoint/2010/main" val="799419511"/>
+      </p:ext>
+    </p:extLst>
+  </p:cSld>
+  <p:clrMapOvr>
+    <a:masterClrMapping/>
+  </p:clrMapOvr>
+</p:sld>
+</file>
+
+<file path=ppt/slides/slide54.xml><?xml version="1.0" encoding="utf-8"?>
+<p:sld xmlns:a="http://schemas.openxmlformats.org/drawingml/2006/main" xmlns:r="http://schemas.openxmlformats.org/officeDocument/2006/relationships" xmlns:p="http://schemas.openxmlformats.org/presentationml/2006/main">
+  <p:cSld>
+    <p:spTree>
+      <p:nvGrpSpPr>
+        <p:cNvPr id="1" name="">
+          <a:extLst>
+            <a:ext uri="{FF2B5EF4-FFF2-40B4-BE49-F238E27FC236}">
+              <a16:creationId xmlns:a16="http://schemas.microsoft.com/office/drawing/2014/main" id="{2271B52E-9D79-F0C1-94C8-54108FCECB5B}"/>
+            </a:ext>
+          </a:extLst>
+        </p:cNvPr>
+        <p:cNvGrpSpPr/>
+        <p:nvPr/>
+      </p:nvGrpSpPr>
+      <p:grpSpPr>
+        <a:xfrm>
+          <a:off x="0" y="0"/>
+          <a:ext cx="0" cy="0"/>
+          <a:chOff x="0" y="0"/>
+          <a:chExt cx="0" cy="0"/>
+        </a:xfrm>
+      </p:grpSpPr>
+      <p:sp>
+        <p:nvSpPr>
+          <p:cNvPr id="2" name="제목 1">
+            <a:extLst>
+              <a:ext uri="{FF2B5EF4-FFF2-40B4-BE49-F238E27FC236}">
+                <a16:creationId xmlns:a16="http://schemas.microsoft.com/office/drawing/2014/main" id="{772FCDE2-68B9-6983-056B-01429965989E}"/>
+              </a:ext>
+            </a:extLst>
+          </p:cNvPr>
+          <p:cNvSpPr>
+            <a:spLocks noGrp="1"/>
+          </p:cNvSpPr>
+          <p:nvPr>
+            <p:ph type="title"/>
+          </p:nvPr>
+        </p:nvSpPr>
+        <p:spPr/>
+        <p:txBody>
+          <a:bodyPr/>
+          <a:lstStyle/>
+          <a:p>
+            <a:r>
+              <a:rPr lang="ko-KR" altLang="en-US" dirty="0"/>
+              <a:t>장기계약과 현물시장</a:t>
+            </a:r>
+          </a:p>
+        </p:txBody>
+      </p:sp>
+      <p:sp>
+        <p:nvSpPr>
+          <p:cNvPr id="4" name="슬라이드 번호 개체 틀 3">
+            <a:extLst>
+              <a:ext uri="{FF2B5EF4-FFF2-40B4-BE49-F238E27FC236}">
+                <a16:creationId xmlns:a16="http://schemas.microsoft.com/office/drawing/2014/main" id="{C21BF22B-F6ED-2BC8-1814-356F7B93563C}"/>
+              </a:ext>
+            </a:extLst>
+          </p:cNvPr>
+          <p:cNvSpPr>
+            <a:spLocks noGrp="1"/>
+          </p:cNvSpPr>
+          <p:nvPr>
+            <p:ph type="sldNum" sz="quarter" idx="12"/>
+          </p:nvPr>
+        </p:nvSpPr>
+        <p:spPr/>
+        <p:txBody>
+          <a:bodyPr/>
+          <a:lstStyle/>
+          <a:p>
+            <a:fld id="{109C872D-39A9-4065-8BF3-6A613116E2A1}" type="slidenum">
+              <a:rPr lang="ko-KR" altLang="en-US" smtClean="0"/>
+              <a:t>54</a:t>
+            </a:fld>
+            <a:endParaRPr lang="ko-KR" altLang="en-US"/>
+          </a:p>
+        </p:txBody>
+      </p:sp>
+      <p:sp>
+        <p:nvSpPr>
+          <p:cNvPr id="3" name="TextBox 2">
+            <a:extLst>
+              <a:ext uri="{FF2B5EF4-FFF2-40B4-BE49-F238E27FC236}">
+                <a16:creationId xmlns:a16="http://schemas.microsoft.com/office/drawing/2014/main" id="{8C582634-259E-B856-21FF-28A667432EC1}"/>
+              </a:ext>
+            </a:extLst>
+          </p:cNvPr>
+          <p:cNvSpPr txBox="1"/>
+          <p:nvPr/>
+        </p:nvSpPr>
+        <p:spPr>
+          <a:xfrm>
+            <a:off x="288790" y="958844"/>
+            <a:ext cx="11118453" cy="4846007"/>
+          </a:xfrm>
+          <a:prstGeom prst="rect">
+            <a:avLst/>
+          </a:prstGeom>
+          <a:noFill/>
+        </p:spPr>
+        <p:txBody>
+          <a:bodyPr wrap="square" rtlCol="0" anchor="t">
+            <a:spAutoFit/>
+          </a:bodyPr>
+          <a:lstStyle/>
+          <a:p>
+            <a:pPr marL="377825" indent="-285750">
+              <a:lnSpc>
+                <a:spcPct val="150000"/>
+              </a:lnSpc>
+              <a:buFont typeface="Arial" panose="020B0604020202020204" pitchFamily="34" charset="0"/>
+              <a:buChar char="•"/>
+            </a:pPr>
+            <a:r>
+              <a:rPr lang="ko-KR" altLang="en-US" sz="1600" dirty="0"/>
+              <a:t>최근 국제 천연가스 시장에서는 장기계약과 단기계약이 서로 보완적으로 작용하는 구조가 일반화되고 있다</a:t>
+            </a:r>
+            <a:r>
+              <a:rPr lang="en-US" altLang="ko-KR" sz="1600" dirty="0"/>
+              <a:t>.</a:t>
+            </a:r>
+          </a:p>
+          <a:p>
+            <a:pPr marL="835025" lvl="1" indent="-285750">
+              <a:lnSpc>
+                <a:spcPct val="150000"/>
+              </a:lnSpc>
+              <a:buFont typeface="Wingdings" panose="05000000000000000000" pitchFamily="2" charset="2"/>
+              <a:buChar char="ü"/>
+            </a:pPr>
+            <a:r>
+              <a:rPr lang="ko-KR" altLang="en-US" sz="1600" dirty="0"/>
+              <a:t>장기계약은 기저 수요를 충당하고</a:t>
+            </a:r>
+            <a:r>
+              <a:rPr lang="en-US" altLang="ko-KR" sz="1600" dirty="0"/>
+              <a:t>, </a:t>
+            </a:r>
+            <a:r>
+              <a:rPr lang="ko-KR" altLang="en-US" sz="1600" dirty="0"/>
+              <a:t>인프라 투자를 가능케 하는 역할을 지속적으로 수행한다</a:t>
+            </a:r>
+            <a:r>
+              <a:rPr lang="en-US" altLang="ko-KR" sz="1600" dirty="0"/>
+              <a:t>.</a:t>
+            </a:r>
+          </a:p>
+          <a:p>
+            <a:pPr marL="835025" lvl="1" indent="-285750">
+              <a:lnSpc>
+                <a:spcPct val="150000"/>
+              </a:lnSpc>
+              <a:buFont typeface="Wingdings" panose="05000000000000000000" pitchFamily="2" charset="2"/>
+              <a:buChar char="ü"/>
+            </a:pPr>
+            <a:r>
+              <a:rPr lang="ko-KR" altLang="en-US" sz="1600" dirty="0"/>
+              <a:t>단기계약은 예외적 수요나 시장 기회에 대응하는 기능을 수행한다</a:t>
+            </a:r>
+            <a:r>
+              <a:rPr lang="en-US" altLang="ko-KR" sz="1600" dirty="0"/>
+              <a:t>.</a:t>
+            </a:r>
+          </a:p>
+          <a:p>
+            <a:pPr marL="835025" lvl="1" indent="-285750">
+              <a:lnSpc>
+                <a:spcPct val="150000"/>
+              </a:lnSpc>
+              <a:buFont typeface="Wingdings" panose="05000000000000000000" pitchFamily="2" charset="2"/>
+              <a:buChar char="ü"/>
+            </a:pPr>
+            <a:r>
+              <a:rPr lang="ko-KR" altLang="en-US" sz="1600" dirty="0"/>
+              <a:t>이에 따라 많은 수입국들은 장기계약을 중심으로 기본 물량을 확보하고</a:t>
+            </a:r>
+            <a:r>
+              <a:rPr lang="en-US" altLang="ko-KR" sz="1600" dirty="0"/>
+              <a:t>, </a:t>
+            </a:r>
+            <a:r>
+              <a:rPr lang="ko-KR" altLang="en-US" sz="1600" dirty="0"/>
+              <a:t>나머지 수요를 단기계약이나 현물시장을 통해 보완하는 포트폴리오 전략을 채택하고 있다</a:t>
+            </a:r>
+            <a:r>
+              <a:rPr lang="en-US" altLang="ko-KR" sz="1600" dirty="0"/>
+              <a:t>.</a:t>
+            </a:r>
+          </a:p>
+          <a:p>
+            <a:pPr marL="1292225" lvl="2" indent="-285750">
+              <a:lnSpc>
+                <a:spcPct val="150000"/>
+              </a:lnSpc>
+              <a:buFont typeface="Wingdings" panose="05000000000000000000" pitchFamily="2" charset="2"/>
+              <a:buChar char="Ø"/>
+            </a:pPr>
+            <a:r>
+              <a:rPr lang="ko-KR" altLang="en-US" sz="1600" dirty="0"/>
+              <a:t>한국</a:t>
+            </a:r>
+            <a:r>
+              <a:rPr lang="en-US" altLang="ko-KR" sz="1600" dirty="0"/>
+              <a:t>, </a:t>
+            </a:r>
+            <a:r>
+              <a:rPr lang="ko-KR" altLang="en-US" sz="1600" dirty="0"/>
+              <a:t>일본과 같은 주요 </a:t>
+            </a:r>
+            <a:r>
+              <a:rPr lang="en-US" altLang="ko-KR" sz="1600" dirty="0"/>
+              <a:t>LNG </a:t>
+            </a:r>
+            <a:r>
+              <a:rPr lang="ko-KR" altLang="en-US" sz="1600" dirty="0"/>
+              <a:t>수입국은 혼합 전략을 통해 가격 안정성과 수급 유연성을 동시에 추구하고 있으며</a:t>
+            </a:r>
+            <a:r>
+              <a:rPr lang="en-US" altLang="ko-KR" sz="1600" dirty="0"/>
+              <a:t>, </a:t>
+            </a:r>
+            <a:r>
+              <a:rPr lang="ko-KR" altLang="en-US" sz="1600" dirty="0"/>
+              <a:t>일부 장기계약에서는 유가 연동과 허브 연동을 혼합한 복합 가격구조를 도입하는 사례도 늘고 있다</a:t>
+            </a:r>
+            <a:r>
+              <a:rPr lang="en-US" altLang="ko-KR" sz="1600" dirty="0"/>
+              <a:t>.</a:t>
+            </a:r>
+          </a:p>
+          <a:p>
+            <a:pPr marL="377825" indent="-285750">
+              <a:lnSpc>
+                <a:spcPct val="150000"/>
+              </a:lnSpc>
+              <a:buFont typeface="Arial" panose="020B0604020202020204" pitchFamily="34" charset="0"/>
+              <a:buChar char="•"/>
+            </a:pPr>
+            <a:endParaRPr lang="en-US" altLang="ko-KR" sz="1600" dirty="0"/>
+          </a:p>
+          <a:p>
+            <a:pPr marL="377825" indent="-285750">
+              <a:lnSpc>
+                <a:spcPct val="150000"/>
+              </a:lnSpc>
+              <a:buFont typeface="Arial" panose="020B0604020202020204" pitchFamily="34" charset="0"/>
+              <a:buChar char="•"/>
+            </a:pPr>
+            <a:r>
+              <a:rPr lang="ko-KR" altLang="en-US" sz="1600" dirty="0"/>
+              <a:t>종합해보면</a:t>
+            </a:r>
+            <a:r>
+              <a:rPr lang="en-US" altLang="ko-KR" sz="1600" dirty="0"/>
+              <a:t>, </a:t>
+            </a:r>
+            <a:r>
+              <a:rPr lang="ko-KR" altLang="en-US" sz="1600" dirty="0"/>
+              <a:t>천연가스 시장에서 장기계약과 단기계약은 각기 다른 기능과 목적을 갖고 있다</a:t>
+            </a:r>
+            <a:r>
+              <a:rPr lang="en-US" altLang="ko-KR" sz="1600" dirty="0"/>
+              <a:t>.</a:t>
+            </a:r>
+          </a:p>
+          <a:p>
+            <a:pPr marL="835025" lvl="1" indent="-285750">
+              <a:lnSpc>
+                <a:spcPct val="150000"/>
+              </a:lnSpc>
+              <a:buFont typeface="Wingdings" panose="05000000000000000000" pitchFamily="2" charset="2"/>
+              <a:buChar char="ü"/>
+            </a:pPr>
+            <a:r>
+              <a:rPr lang="ko-KR" altLang="en-US" sz="1600" dirty="0"/>
+              <a:t>장기계약은 여전히 에너지 인프라의 경제성을 담보하는 필수적인 제도 장치이다</a:t>
+            </a:r>
+            <a:r>
+              <a:rPr lang="en-US" altLang="ko-KR" sz="1600" dirty="0"/>
+              <a:t>.</a:t>
+            </a:r>
+          </a:p>
+          <a:p>
+            <a:pPr marL="835025" lvl="1" indent="-285750">
+              <a:lnSpc>
+                <a:spcPct val="150000"/>
+              </a:lnSpc>
+              <a:buFont typeface="Wingdings" panose="05000000000000000000" pitchFamily="2" charset="2"/>
+              <a:buChar char="ü"/>
+            </a:pPr>
+            <a:r>
+              <a:rPr lang="ko-KR" altLang="en-US" sz="1600" dirty="0"/>
+              <a:t>단기계약은 시장 기반 거래 확대와 가격 경쟁력 확보를 위한 유연성 도구이다</a:t>
+            </a:r>
+            <a:r>
+              <a:rPr lang="en-US" altLang="ko-KR" sz="1600" dirty="0"/>
+              <a:t>.</a:t>
+            </a:r>
+          </a:p>
+          <a:p>
+            <a:pPr marL="835025" lvl="1" indent="-285750">
+              <a:lnSpc>
+                <a:spcPct val="150000"/>
+              </a:lnSpc>
+              <a:buFont typeface="Wingdings" panose="05000000000000000000" pitchFamily="2" charset="2"/>
+              <a:buChar char="ü"/>
+            </a:pPr>
+            <a:r>
+              <a:rPr lang="ko-KR" altLang="en-US" sz="1600" dirty="0"/>
+              <a:t>계약 구조의 이중성은 앞으로도 지속될 것으로 보이며</a:t>
+            </a:r>
+            <a:r>
+              <a:rPr lang="en-US" altLang="ko-KR" sz="1600" dirty="0"/>
+              <a:t>, </a:t>
+            </a:r>
+            <a:r>
+              <a:rPr lang="ko-KR" altLang="en-US" sz="1600" dirty="0"/>
+              <a:t>국제 </a:t>
+            </a:r>
+            <a:r>
+              <a:rPr lang="en-US" altLang="ko-KR" sz="1600" dirty="0"/>
+              <a:t>LNG </a:t>
+            </a:r>
+            <a:r>
+              <a:rPr lang="ko-KR" altLang="en-US" sz="1600" dirty="0"/>
+              <a:t>시장이 통합될 수록 단기계약의 비중은 더욱 확대될 가능성이 크다</a:t>
+            </a:r>
+            <a:r>
+              <a:rPr lang="en-US" altLang="ko-KR" sz="1600" dirty="0"/>
+              <a:t>.</a:t>
+            </a:r>
+          </a:p>
+        </p:txBody>
+      </p:sp>
+    </p:spTree>
+    <p:extLst>
+      <p:ext uri="{BB962C8B-B14F-4D97-AF65-F5344CB8AC3E}">
+        <p14:creationId xmlns:p14="http://schemas.microsoft.com/office/powerpoint/2010/main" val="1380928484"/>
+      </p:ext>
+    </p:extLst>
+  </p:cSld>
+  <p:clrMapOvr>
+    <a:masterClrMapping/>
+  </p:clrMapOvr>
+</p:sld>
+</file>
+
+<file path=ppt/slides/slide55.xml><?xml version="1.0" encoding="utf-8"?>
+<p:sld xmlns:a="http://schemas.openxmlformats.org/drawingml/2006/main" xmlns:r="http://schemas.openxmlformats.org/officeDocument/2006/relationships" xmlns:p="http://schemas.openxmlformats.org/presentationml/2006/main">
+  <p:cSld>
+    <p:spTree>
+      <p:nvGrpSpPr>
+        <p:cNvPr id="1" name="">
+          <a:extLst>
+            <a:ext uri="{FF2B5EF4-FFF2-40B4-BE49-F238E27FC236}">
+              <a16:creationId xmlns:a16="http://schemas.microsoft.com/office/drawing/2014/main" id="{E3DF1ACB-022F-00DB-E4E0-A85F933A53B4}"/>
+            </a:ext>
+          </a:extLst>
+        </p:cNvPr>
+        <p:cNvGrpSpPr/>
+        <p:nvPr/>
+      </p:nvGrpSpPr>
+      <p:grpSpPr>
+        <a:xfrm>
+          <a:off x="0" y="0"/>
+          <a:ext cx="0" cy="0"/>
+          <a:chOff x="0" y="0"/>
+          <a:chExt cx="0" cy="0"/>
+        </a:xfrm>
+      </p:grpSpPr>
+      <p:sp>
+        <p:nvSpPr>
+          <p:cNvPr id="2" name="제목 1">
+            <a:extLst>
+              <a:ext uri="{FF2B5EF4-FFF2-40B4-BE49-F238E27FC236}">
+                <a16:creationId xmlns:a16="http://schemas.microsoft.com/office/drawing/2014/main" id="{FBDF6A68-6BC0-CC54-5A36-33D47A194038}"/>
+              </a:ext>
+            </a:extLst>
+          </p:cNvPr>
+          <p:cNvSpPr>
+            <a:spLocks noGrp="1"/>
+          </p:cNvSpPr>
+          <p:nvPr>
+            <p:ph type="title"/>
+          </p:nvPr>
+        </p:nvSpPr>
+        <p:spPr/>
+        <p:txBody>
+          <a:bodyPr/>
+          <a:lstStyle/>
+          <a:p>
+            <a:r>
+              <a:rPr lang="ko-KR" altLang="en-US" dirty="0"/>
+              <a:t>에너지 전환과 천연가스의 미래</a:t>
+            </a:r>
+          </a:p>
+        </p:txBody>
+      </p:sp>
+      <p:sp>
+        <p:nvSpPr>
+          <p:cNvPr id="4" name="슬라이드 번호 개체 틀 3">
+            <a:extLst>
+              <a:ext uri="{FF2B5EF4-FFF2-40B4-BE49-F238E27FC236}">
+                <a16:creationId xmlns:a16="http://schemas.microsoft.com/office/drawing/2014/main" id="{FCFB2D80-E08D-9EB6-5867-1C06F585CA26}"/>
+              </a:ext>
+            </a:extLst>
+          </p:cNvPr>
+          <p:cNvSpPr>
+            <a:spLocks noGrp="1"/>
+          </p:cNvSpPr>
+          <p:nvPr>
+            <p:ph type="sldNum" sz="quarter" idx="12"/>
+          </p:nvPr>
+        </p:nvSpPr>
+        <p:spPr/>
+        <p:txBody>
+          <a:bodyPr/>
+          <a:lstStyle/>
+          <a:p>
+            <a:fld id="{109C872D-39A9-4065-8BF3-6A613116E2A1}" type="slidenum">
+              <a:rPr lang="ko-KR" altLang="en-US" smtClean="0"/>
+              <a:t>55</a:t>
+            </a:fld>
+            <a:endParaRPr lang="ko-KR" altLang="en-US"/>
+          </a:p>
+        </p:txBody>
+      </p:sp>
+      <p:sp>
+        <p:nvSpPr>
+          <p:cNvPr id="3" name="TextBox 2">
+            <a:extLst>
+              <a:ext uri="{FF2B5EF4-FFF2-40B4-BE49-F238E27FC236}">
+                <a16:creationId xmlns:a16="http://schemas.microsoft.com/office/drawing/2014/main" id="{9A4A577B-A2F0-EEDD-B23A-E7F9339D7B20}"/>
+              </a:ext>
+            </a:extLst>
+          </p:cNvPr>
+          <p:cNvSpPr txBox="1"/>
+          <p:nvPr/>
+        </p:nvSpPr>
+        <p:spPr>
+          <a:xfrm>
+            <a:off x="288790" y="958844"/>
+            <a:ext cx="11118453" cy="4846007"/>
+          </a:xfrm>
+          <a:prstGeom prst="rect">
+            <a:avLst/>
+          </a:prstGeom>
+          <a:noFill/>
+        </p:spPr>
+        <p:txBody>
+          <a:bodyPr wrap="square" rtlCol="0" anchor="t">
+            <a:spAutoFit/>
+          </a:bodyPr>
+          <a:lstStyle/>
+          <a:p>
+            <a:pPr marL="377825" indent="-285750">
+              <a:lnSpc>
+                <a:spcPct val="150000"/>
+              </a:lnSpc>
+              <a:buFont typeface="Arial" panose="020B0604020202020204" pitchFamily="34" charset="0"/>
+              <a:buChar char="•"/>
+            </a:pPr>
+            <a:r>
+              <a:rPr lang="en-US" altLang="ko-KR" sz="1600" dirty="0"/>
+              <a:t>21</a:t>
+            </a:r>
+            <a:r>
+              <a:rPr lang="ko-KR" altLang="en-US" sz="1600" dirty="0"/>
+              <a:t>세기 들어 에너지 전환은 글로벌 에너지 체계의 핵심 </a:t>
+            </a:r>
+            <a:r>
+              <a:rPr lang="ko-KR" altLang="en-US" sz="1600" dirty="0" err="1"/>
+              <a:t>아젠다로</a:t>
+            </a:r>
+            <a:r>
+              <a:rPr lang="ko-KR" altLang="en-US" sz="1600" dirty="0"/>
+              <a:t> 자리 잡았다</a:t>
+            </a:r>
+            <a:r>
+              <a:rPr lang="en-US" altLang="ko-KR" sz="1600" dirty="0"/>
+              <a:t>.</a:t>
+            </a:r>
+          </a:p>
+          <a:p>
+            <a:pPr marL="835025" lvl="1" indent="-285750">
+              <a:lnSpc>
+                <a:spcPct val="150000"/>
+              </a:lnSpc>
+              <a:buFont typeface="Wingdings" panose="05000000000000000000" pitchFamily="2" charset="2"/>
+              <a:buChar char="ü"/>
+            </a:pPr>
+            <a:r>
+              <a:rPr lang="ko-KR" altLang="en-US" sz="1600" dirty="0"/>
+              <a:t>단순한 연료 대체가 아닌</a:t>
+            </a:r>
+            <a:r>
+              <a:rPr lang="en-US" altLang="ko-KR" sz="1600" dirty="0"/>
+              <a:t>, </a:t>
+            </a:r>
+            <a:r>
+              <a:rPr lang="ko-KR" altLang="en-US" sz="1600" dirty="0"/>
+              <a:t>탄소중립이라는 궁극적 목표 하에 에너지 시스템의 구조적 전환을 요구하고 있다</a:t>
+            </a:r>
+            <a:r>
+              <a:rPr lang="en-US" altLang="ko-KR" sz="1600" dirty="0"/>
+              <a:t>.</a:t>
+            </a:r>
+          </a:p>
+          <a:p>
+            <a:pPr marL="1349375" lvl="2" indent="-342900">
+              <a:lnSpc>
+                <a:spcPct val="150000"/>
+              </a:lnSpc>
+              <a:buFont typeface="Wingdings" panose="05000000000000000000" pitchFamily="2" charset="2"/>
+              <a:buChar char="Ø"/>
+            </a:pPr>
+            <a:r>
+              <a:rPr lang="ko-KR" altLang="en-US" sz="1600" dirty="0"/>
+              <a:t>기존 화석연료 중심의 시스템에서 재생에너지와 저탄소 기술 중심의 체제로의 이행을 요구한다</a:t>
+            </a:r>
+            <a:r>
+              <a:rPr lang="en-US" altLang="ko-KR" sz="1600" dirty="0"/>
+              <a:t>.</a:t>
+            </a:r>
+          </a:p>
+          <a:p>
+            <a:pPr marL="892175" lvl="1" indent="-342900">
+              <a:lnSpc>
+                <a:spcPct val="150000"/>
+              </a:lnSpc>
+              <a:buFont typeface="Wingdings" panose="05000000000000000000" pitchFamily="2" charset="2"/>
+              <a:buChar char="ü"/>
+            </a:pPr>
+            <a:r>
+              <a:rPr lang="ko-KR" altLang="en-US" sz="1600" dirty="0"/>
+              <a:t>이러한 전환 과정에서 천연가스는 석탄 및 석유에 비해 상대적으로 배출이 적고</a:t>
+            </a:r>
+            <a:r>
+              <a:rPr lang="en-US" altLang="ko-KR" sz="1600" dirty="0"/>
+              <a:t>, </a:t>
+            </a:r>
+            <a:r>
+              <a:rPr lang="ko-KR" altLang="en-US" sz="1600" dirty="0"/>
+              <a:t>발전효율이 높은 연료라는 점에서 </a:t>
+            </a:r>
+            <a:r>
+              <a:rPr lang="en-US" altLang="ko-KR" sz="1600" dirty="0"/>
+              <a:t>‘</a:t>
+            </a:r>
+            <a:r>
+              <a:rPr lang="ko-KR" altLang="en-US" sz="1600" dirty="0"/>
+              <a:t>전환 연료</a:t>
+            </a:r>
+            <a:r>
+              <a:rPr lang="en-US" altLang="ko-KR" sz="1600" dirty="0"/>
+              <a:t>‘ </a:t>
+            </a:r>
+            <a:r>
+              <a:rPr lang="ko-KR" altLang="en-US" sz="1600" dirty="0"/>
+              <a:t>로서의 전략적 위상을 점유하고 있다</a:t>
+            </a:r>
+            <a:r>
+              <a:rPr lang="en-US" altLang="ko-KR" sz="1600" dirty="0"/>
+              <a:t>.</a:t>
+            </a:r>
+          </a:p>
+          <a:p>
+            <a:pPr marL="892175" lvl="1" indent="-342900">
+              <a:lnSpc>
+                <a:spcPct val="150000"/>
+              </a:lnSpc>
+              <a:buFont typeface="Wingdings" panose="05000000000000000000" pitchFamily="2" charset="2"/>
+              <a:buChar char="ü"/>
+            </a:pPr>
+            <a:endParaRPr lang="en-US" altLang="ko-KR" sz="1600" dirty="0"/>
+          </a:p>
+          <a:p>
+            <a:pPr marL="434975" indent="-342900">
+              <a:lnSpc>
+                <a:spcPct val="150000"/>
+              </a:lnSpc>
+              <a:buFont typeface="Arial" panose="020B0604020202020204" pitchFamily="34" charset="0"/>
+              <a:buChar char="•"/>
+            </a:pPr>
+            <a:r>
+              <a:rPr lang="ko-KR" altLang="en-US" sz="1600" dirty="0"/>
+              <a:t>천연가스는 특히 전력 부문에서 중요한 역할을 수행해 왔다</a:t>
+            </a:r>
+            <a:r>
+              <a:rPr lang="en-US" altLang="ko-KR" sz="1600" dirty="0"/>
+              <a:t>.</a:t>
+            </a:r>
+          </a:p>
+          <a:p>
+            <a:pPr marL="892175" lvl="1" indent="-342900">
+              <a:lnSpc>
+                <a:spcPct val="150000"/>
+              </a:lnSpc>
+              <a:buFont typeface="Wingdings" panose="05000000000000000000" pitchFamily="2" charset="2"/>
+              <a:buChar char="ü"/>
+            </a:pPr>
+            <a:r>
+              <a:rPr lang="ko-KR" altLang="en-US" sz="1600" dirty="0"/>
+              <a:t>복합화력발전소의 높은 열효율과 짧은 시운전 시간</a:t>
+            </a:r>
+            <a:r>
+              <a:rPr lang="en-US" altLang="ko-KR" sz="1600" dirty="0"/>
+              <a:t>, </a:t>
+            </a:r>
+            <a:r>
+              <a:rPr lang="ko-KR" altLang="en-US" sz="1600" dirty="0"/>
+              <a:t>그리고 부분 부하에서도 신속한 대응이 가능하다는 점은 재생에너지의 </a:t>
+            </a:r>
+            <a:r>
+              <a:rPr lang="ko-KR" altLang="en-US" sz="1600" dirty="0" err="1"/>
+              <a:t>간헐성</a:t>
+            </a:r>
+            <a:r>
+              <a:rPr lang="ko-KR" altLang="en-US" sz="1600" dirty="0"/>
+              <a:t> 및 불확실성을 보완하는 조절 </a:t>
+            </a:r>
+            <a:r>
+              <a:rPr lang="ko-KR" altLang="en-US" sz="1600" dirty="0" err="1"/>
+              <a:t>전원으로서의</a:t>
+            </a:r>
+            <a:r>
+              <a:rPr lang="ko-KR" altLang="en-US" sz="1600" dirty="0"/>
+              <a:t> 기능을 부여한다</a:t>
+            </a:r>
+            <a:r>
+              <a:rPr lang="en-US" altLang="ko-KR" sz="1600" dirty="0"/>
+              <a:t>.</a:t>
+            </a:r>
+          </a:p>
+          <a:p>
+            <a:pPr marL="1349375" lvl="2" indent="-342900">
+              <a:lnSpc>
+                <a:spcPct val="150000"/>
+              </a:lnSpc>
+              <a:buFont typeface="Wingdings" panose="05000000000000000000" pitchFamily="2" charset="2"/>
+              <a:buChar char="Ø"/>
+            </a:pPr>
+            <a:r>
+              <a:rPr lang="ko-KR" altLang="en-US" sz="1600" dirty="0"/>
+              <a:t>이러한 기술적 특성은 풍력</a:t>
+            </a:r>
+            <a:r>
+              <a:rPr lang="en-US" altLang="ko-KR" sz="1600" dirty="0"/>
+              <a:t>·</a:t>
+            </a:r>
+            <a:r>
+              <a:rPr lang="ko-KR" altLang="en-US" sz="1600" dirty="0"/>
+              <a:t>태양광 중심의 전력계통에 안전성을 부여하고</a:t>
+            </a:r>
+            <a:r>
+              <a:rPr lang="en-US" altLang="ko-KR" sz="1600" dirty="0"/>
+              <a:t>, </a:t>
+            </a:r>
+            <a:r>
+              <a:rPr lang="ko-KR" altLang="en-US" sz="1600" dirty="0"/>
+              <a:t>초기 재생에너지 확대 시기의 필수적 보완 수단으로 천연가스를 활용하도록 만든 배경이 되었다</a:t>
+            </a:r>
+            <a:r>
+              <a:rPr lang="en-US" altLang="ko-KR" sz="1600" dirty="0"/>
+              <a:t>.</a:t>
+            </a:r>
+          </a:p>
+          <a:p>
+            <a:pPr marL="892175" lvl="1" indent="-342900">
+              <a:lnSpc>
+                <a:spcPct val="150000"/>
+              </a:lnSpc>
+              <a:buFont typeface="Wingdings" panose="05000000000000000000" pitchFamily="2" charset="2"/>
+              <a:buChar char="ü"/>
+            </a:pPr>
+            <a:r>
+              <a:rPr lang="ko-KR" altLang="en-US" sz="1600" dirty="0"/>
+              <a:t>실제로 유럽연합</a:t>
+            </a:r>
+            <a:r>
+              <a:rPr lang="en-US" altLang="ko-KR" sz="1600" dirty="0"/>
+              <a:t>, </a:t>
+            </a:r>
+            <a:r>
+              <a:rPr lang="ko-KR" altLang="en-US" sz="1600" dirty="0"/>
+              <a:t>일본</a:t>
+            </a:r>
+            <a:r>
+              <a:rPr lang="en-US" altLang="ko-KR" sz="1600" dirty="0"/>
+              <a:t>, </a:t>
+            </a:r>
+            <a:r>
+              <a:rPr lang="ko-KR" altLang="en-US" sz="1600" dirty="0"/>
+              <a:t>한국 등 주요 국가들은 석탄화력발전의 점진적 퇴출을 천연가스 발전으로 대체하는 전략을 채택해왔다</a:t>
+            </a:r>
+            <a:r>
+              <a:rPr lang="en-US" altLang="ko-KR" sz="1600" dirty="0"/>
+              <a:t>. </a:t>
+            </a:r>
+          </a:p>
+        </p:txBody>
+      </p:sp>
+    </p:spTree>
+    <p:extLst>
+      <p:ext uri="{BB962C8B-B14F-4D97-AF65-F5344CB8AC3E}">
+        <p14:creationId xmlns:p14="http://schemas.microsoft.com/office/powerpoint/2010/main" val="3221671974"/>
+      </p:ext>
+    </p:extLst>
+  </p:cSld>
+  <p:clrMapOvr>
+    <a:masterClrMapping/>
+  </p:clrMapOvr>
+</p:sld>
+</file>
+
+<file path=ppt/slides/slide56.xml><?xml version="1.0" encoding="utf-8"?>
+<p:sld xmlns:a="http://schemas.openxmlformats.org/drawingml/2006/main" xmlns:r="http://schemas.openxmlformats.org/officeDocument/2006/relationships" xmlns:p="http://schemas.openxmlformats.org/presentationml/2006/main">
+  <p:cSld>
+    <p:spTree>
+      <p:nvGrpSpPr>
+        <p:cNvPr id="1" name="">
+          <a:extLst>
+            <a:ext uri="{FF2B5EF4-FFF2-40B4-BE49-F238E27FC236}">
+              <a16:creationId xmlns:a16="http://schemas.microsoft.com/office/drawing/2014/main" id="{2D5FA1F0-9EF6-01AF-DC2A-24865C105F7D}"/>
+            </a:ext>
+          </a:extLst>
+        </p:cNvPr>
+        <p:cNvGrpSpPr/>
+        <p:nvPr/>
+      </p:nvGrpSpPr>
+      <p:grpSpPr>
+        <a:xfrm>
+          <a:off x="0" y="0"/>
+          <a:ext cx="0" cy="0"/>
+          <a:chOff x="0" y="0"/>
+          <a:chExt cx="0" cy="0"/>
+        </a:xfrm>
+      </p:grpSpPr>
+      <p:sp>
+        <p:nvSpPr>
+          <p:cNvPr id="2" name="제목 1">
+            <a:extLst>
+              <a:ext uri="{FF2B5EF4-FFF2-40B4-BE49-F238E27FC236}">
+                <a16:creationId xmlns:a16="http://schemas.microsoft.com/office/drawing/2014/main" id="{80B96217-BFD4-1D92-890D-FB90235700A6}"/>
+              </a:ext>
+            </a:extLst>
+          </p:cNvPr>
+          <p:cNvSpPr>
+            <a:spLocks noGrp="1"/>
+          </p:cNvSpPr>
+          <p:nvPr>
+            <p:ph type="title"/>
+          </p:nvPr>
+        </p:nvSpPr>
+        <p:spPr/>
+        <p:txBody>
+          <a:bodyPr/>
+          <a:lstStyle/>
+          <a:p>
+            <a:r>
+              <a:rPr lang="ko-KR" altLang="en-US" dirty="0"/>
+              <a:t>에너지 전환과 천연가스의 미래</a:t>
+            </a:r>
+          </a:p>
+        </p:txBody>
+      </p:sp>
+      <p:sp>
+        <p:nvSpPr>
+          <p:cNvPr id="4" name="슬라이드 번호 개체 틀 3">
+            <a:extLst>
+              <a:ext uri="{FF2B5EF4-FFF2-40B4-BE49-F238E27FC236}">
+                <a16:creationId xmlns:a16="http://schemas.microsoft.com/office/drawing/2014/main" id="{DEE9FDE8-E2D8-5EC1-D2D4-48006ED45355}"/>
+              </a:ext>
+            </a:extLst>
+          </p:cNvPr>
+          <p:cNvSpPr>
+            <a:spLocks noGrp="1"/>
+          </p:cNvSpPr>
+          <p:nvPr>
+            <p:ph type="sldNum" sz="quarter" idx="12"/>
+          </p:nvPr>
+        </p:nvSpPr>
+        <p:spPr/>
+        <p:txBody>
+          <a:bodyPr/>
+          <a:lstStyle/>
+          <a:p>
+            <a:fld id="{109C872D-39A9-4065-8BF3-6A613116E2A1}" type="slidenum">
+              <a:rPr lang="ko-KR" altLang="en-US" smtClean="0"/>
+              <a:t>56</a:t>
+            </a:fld>
+            <a:endParaRPr lang="ko-KR" altLang="en-US"/>
+          </a:p>
+        </p:txBody>
+      </p:sp>
+      <p:sp>
+        <p:nvSpPr>
+          <p:cNvPr id="3" name="TextBox 2">
+            <a:extLst>
+              <a:ext uri="{FF2B5EF4-FFF2-40B4-BE49-F238E27FC236}">
+                <a16:creationId xmlns:a16="http://schemas.microsoft.com/office/drawing/2014/main" id="{88A72219-B72B-B337-F90D-6C364180DF21}"/>
+              </a:ext>
+            </a:extLst>
+          </p:cNvPr>
+          <p:cNvSpPr txBox="1"/>
+          <p:nvPr/>
+        </p:nvSpPr>
+        <p:spPr>
+          <a:xfrm>
+            <a:off x="288790" y="958844"/>
+            <a:ext cx="11118453" cy="5584670"/>
+          </a:xfrm>
+          <a:prstGeom prst="rect">
+            <a:avLst/>
+          </a:prstGeom>
+          <a:noFill/>
+        </p:spPr>
+        <p:txBody>
+          <a:bodyPr wrap="square" rtlCol="0" anchor="t">
+            <a:spAutoFit/>
+          </a:bodyPr>
+          <a:lstStyle/>
+          <a:p>
+            <a:pPr marL="377825" indent="-285750">
+              <a:lnSpc>
+                <a:spcPct val="150000"/>
+              </a:lnSpc>
+              <a:buFont typeface="Arial" panose="020B0604020202020204" pitchFamily="34" charset="0"/>
+              <a:buChar char="•"/>
+            </a:pPr>
+            <a:r>
+              <a:rPr lang="ko-KR" altLang="en-US" sz="1600" dirty="0"/>
+              <a:t>과도기적 대응의 일환으로서</a:t>
+            </a:r>
+            <a:r>
+              <a:rPr lang="en-US" altLang="ko-KR" sz="1600" dirty="0"/>
+              <a:t>, </a:t>
+            </a:r>
+            <a:r>
+              <a:rPr lang="ko-KR" altLang="en-US" sz="1600" dirty="0"/>
+              <a:t>천연가스의 역할은 영구적인 것은 아니다</a:t>
+            </a:r>
+            <a:r>
+              <a:rPr lang="en-US" altLang="ko-KR" sz="1600" dirty="0"/>
+              <a:t>.</a:t>
+            </a:r>
+          </a:p>
+          <a:p>
+            <a:pPr marL="835025" lvl="1" indent="-285750">
+              <a:lnSpc>
+                <a:spcPct val="150000"/>
+              </a:lnSpc>
+              <a:buFont typeface="Wingdings" panose="05000000000000000000" pitchFamily="2" charset="2"/>
+              <a:buChar char="ü"/>
+            </a:pPr>
+            <a:r>
+              <a:rPr lang="ko-KR" altLang="en-US" sz="1600" dirty="0"/>
+              <a:t>국제에너지기구</a:t>
+            </a:r>
+            <a:r>
+              <a:rPr lang="en-US" altLang="ko-KR" sz="1600" dirty="0"/>
+              <a:t>(IEA, International Energy Agency)</a:t>
+            </a:r>
+            <a:r>
+              <a:rPr lang="ko-KR" altLang="en-US" sz="1600" dirty="0"/>
+              <a:t>가 제시한 </a:t>
+            </a:r>
+            <a:r>
+              <a:rPr lang="en-US" altLang="ko-KR" sz="1600" dirty="0"/>
+              <a:t>‘2050 </a:t>
+            </a:r>
+            <a:r>
+              <a:rPr lang="ko-KR" altLang="en-US" sz="1600" dirty="0"/>
+              <a:t>탄소중립 시나리오</a:t>
+            </a:r>
+            <a:r>
+              <a:rPr lang="en-US" altLang="ko-KR" sz="1600" dirty="0"/>
+              <a:t>‘</a:t>
+            </a:r>
+            <a:r>
+              <a:rPr lang="ko-KR" altLang="en-US" sz="1600" dirty="0"/>
+              <a:t>에 따르면</a:t>
+            </a:r>
+            <a:r>
+              <a:rPr lang="en-US" altLang="ko-KR" sz="1600" dirty="0"/>
+              <a:t>, </a:t>
+            </a:r>
+            <a:r>
+              <a:rPr lang="ko-KR" altLang="en-US" sz="1600" dirty="0"/>
+              <a:t>세계 천연가스 수요는 </a:t>
+            </a:r>
+            <a:r>
+              <a:rPr lang="en-US" altLang="ko-KR" sz="1600" dirty="0"/>
+              <a:t>2020</a:t>
+            </a:r>
+            <a:r>
+              <a:rPr lang="ko-KR" altLang="en-US" sz="1600" dirty="0"/>
+              <a:t>년대 중반 이후 정점을 찍고 하강할 것으로 예상된다</a:t>
+            </a:r>
+            <a:r>
+              <a:rPr lang="en-US" altLang="ko-KR" sz="1600" dirty="0"/>
+              <a:t>.</a:t>
+            </a:r>
+          </a:p>
+          <a:p>
+            <a:pPr marL="835025" lvl="1" indent="-285750">
+              <a:lnSpc>
+                <a:spcPct val="150000"/>
+              </a:lnSpc>
+              <a:buFont typeface="Wingdings" panose="05000000000000000000" pitchFamily="2" charset="2"/>
+              <a:buChar char="ü"/>
+            </a:pPr>
+            <a:r>
+              <a:rPr lang="ko-KR" altLang="en-US" sz="1600" dirty="0"/>
+              <a:t>이는 단순한 수요의 감소를 넘어</a:t>
+            </a:r>
+            <a:r>
+              <a:rPr lang="en-US" altLang="ko-KR" sz="1600" dirty="0"/>
+              <a:t>, </a:t>
+            </a:r>
+            <a:r>
+              <a:rPr lang="ko-KR" altLang="en-US" sz="1600" dirty="0"/>
+              <a:t>천연가스의 지속가능성은 </a:t>
+            </a:r>
+            <a:r>
+              <a:rPr lang="en-US" altLang="ko-KR" sz="1600" dirty="0"/>
+              <a:t>‘</a:t>
+            </a:r>
+            <a:r>
+              <a:rPr lang="ko-KR" altLang="en-US" sz="1600" dirty="0"/>
+              <a:t>탄소 관리 기술</a:t>
+            </a:r>
+            <a:r>
+              <a:rPr lang="en-US" altLang="ko-KR" sz="1600" dirty="0"/>
+              <a:t>‘</a:t>
+            </a:r>
+            <a:r>
+              <a:rPr lang="ko-KR" altLang="en-US" sz="1600" dirty="0"/>
+              <a:t>과의 결합 여부에 따라 달라질 수 밖에 없음을 의미한다</a:t>
+            </a:r>
+            <a:r>
+              <a:rPr lang="en-US" altLang="ko-KR" sz="1600" dirty="0"/>
+              <a:t>.</a:t>
+            </a:r>
+          </a:p>
+          <a:p>
+            <a:pPr marL="1292225" lvl="2" indent="-285750">
+              <a:lnSpc>
+                <a:spcPct val="150000"/>
+              </a:lnSpc>
+              <a:buFont typeface="Wingdings" panose="05000000000000000000" pitchFamily="2" charset="2"/>
+              <a:buChar char="Ø"/>
+            </a:pPr>
+            <a:r>
+              <a:rPr lang="ko-KR" altLang="en-US" sz="1600" dirty="0"/>
+              <a:t>즉</a:t>
+            </a:r>
+            <a:r>
+              <a:rPr lang="en-US" altLang="ko-KR" sz="1600" dirty="0"/>
+              <a:t>, CCS, CCUS </a:t>
+            </a:r>
+            <a:r>
+              <a:rPr lang="ko-KR" altLang="en-US" sz="1600" dirty="0"/>
+              <a:t>등과의 기술적 연계 없이는 장기적으로 천연가스 기반 발전 및 산업공정이 존속하기 어려운 구조로 진입하게 된다</a:t>
+            </a:r>
+            <a:r>
+              <a:rPr lang="en-US" altLang="ko-KR" sz="1600" dirty="0"/>
+              <a:t>.</a:t>
+            </a:r>
+          </a:p>
+          <a:p>
+            <a:pPr marL="377825" indent="-285750">
+              <a:lnSpc>
+                <a:spcPct val="150000"/>
+              </a:lnSpc>
+              <a:buFont typeface="Arial" panose="020B0604020202020204" pitchFamily="34" charset="0"/>
+              <a:buChar char="•"/>
+            </a:pPr>
+            <a:endParaRPr lang="en-US" altLang="ko-KR" sz="1600" dirty="0"/>
+          </a:p>
+          <a:p>
+            <a:pPr marL="377825" indent="-285750">
+              <a:lnSpc>
+                <a:spcPct val="150000"/>
+              </a:lnSpc>
+              <a:buFont typeface="Arial" panose="020B0604020202020204" pitchFamily="34" charset="0"/>
+              <a:buChar char="•"/>
+            </a:pPr>
+            <a:r>
+              <a:rPr lang="ko-KR" altLang="en-US" sz="1600" dirty="0"/>
+              <a:t>최근 주목받고 있는 대응 전략 중 하나는 천연가스를 </a:t>
+            </a:r>
+            <a:r>
+              <a:rPr lang="en-US" altLang="ko-KR" sz="1600" dirty="0"/>
+              <a:t>‘</a:t>
+            </a:r>
+            <a:r>
+              <a:rPr lang="ko-KR" altLang="en-US" sz="1600" dirty="0"/>
+              <a:t>저탄소 가스</a:t>
+            </a:r>
+            <a:r>
+              <a:rPr lang="en-US" altLang="ko-KR" sz="1600" dirty="0"/>
+              <a:t>‘</a:t>
+            </a:r>
+            <a:r>
+              <a:rPr lang="ko-KR" altLang="en-US" sz="1600" dirty="0"/>
+              <a:t>로 전환하거나 수소 생산의 </a:t>
+            </a:r>
+            <a:r>
+              <a:rPr lang="ko-KR" altLang="en-US" sz="1600" dirty="0" err="1"/>
+              <a:t>전구체</a:t>
+            </a:r>
+            <a:r>
+              <a:rPr lang="en-US" altLang="ko-KR" sz="1600" dirty="0"/>
+              <a:t>(feedstock)</a:t>
+            </a:r>
+            <a:r>
+              <a:rPr lang="ko-KR" altLang="en-US" sz="1600" dirty="0"/>
+              <a:t>로 활용하는 방식이다</a:t>
+            </a:r>
+            <a:r>
+              <a:rPr lang="en-US" altLang="ko-KR" sz="1600" dirty="0"/>
+              <a:t>.</a:t>
+            </a:r>
+          </a:p>
+          <a:p>
+            <a:pPr marL="835025" lvl="1" indent="-285750">
+              <a:lnSpc>
+                <a:spcPct val="150000"/>
+              </a:lnSpc>
+              <a:buFont typeface="Wingdings" panose="05000000000000000000" pitchFamily="2" charset="2"/>
+              <a:buChar char="ü"/>
+            </a:pPr>
+            <a:r>
+              <a:rPr lang="ko-KR" altLang="en-US" sz="1600" dirty="0"/>
+              <a:t>예컨대</a:t>
+            </a:r>
+            <a:r>
+              <a:rPr lang="en-US" altLang="ko-KR" sz="1600" dirty="0"/>
+              <a:t>, </a:t>
+            </a:r>
+            <a:r>
+              <a:rPr lang="ko-KR" altLang="en-US" sz="1600" dirty="0"/>
+              <a:t>천연가스에서 이산화탄소를 </a:t>
+            </a:r>
+            <a:r>
+              <a:rPr lang="ko-KR" altLang="en-US" sz="1600" dirty="0" err="1"/>
+              <a:t>포집해</a:t>
+            </a:r>
+            <a:r>
+              <a:rPr lang="ko-KR" altLang="en-US" sz="1600" dirty="0"/>
+              <a:t> 블루 수소를 생산하거나</a:t>
+            </a:r>
+            <a:r>
+              <a:rPr lang="en-US" altLang="ko-KR" sz="1600" dirty="0"/>
+              <a:t>, </a:t>
+            </a:r>
+            <a:r>
+              <a:rPr lang="ko-KR" altLang="en-US" sz="1600" dirty="0"/>
+              <a:t>바이오가스 및 </a:t>
+            </a:r>
+            <a:r>
+              <a:rPr lang="ko-KR" altLang="en-US" sz="1600" dirty="0" err="1"/>
+              <a:t>합성메탄을</a:t>
+            </a:r>
+            <a:r>
+              <a:rPr lang="ko-KR" altLang="en-US" sz="1600" dirty="0"/>
+              <a:t> 기존 천연가스와 혼합하여 활용하는 방식은 전통적 가스 시스템을 유지하면서도 탄소중립에 부합하는 새로운 방향으로 평가 된다</a:t>
+            </a:r>
+            <a:r>
+              <a:rPr lang="en-US" altLang="ko-KR" sz="1600" dirty="0"/>
+              <a:t>.</a:t>
+            </a:r>
+          </a:p>
+          <a:p>
+            <a:pPr marL="835025" lvl="1" indent="-285750">
+              <a:lnSpc>
+                <a:spcPct val="150000"/>
+              </a:lnSpc>
+              <a:buFont typeface="Wingdings" panose="05000000000000000000" pitchFamily="2" charset="2"/>
+              <a:buChar char="ü"/>
+            </a:pPr>
+            <a:r>
+              <a:rPr lang="ko-KR" altLang="en-US" sz="1600" dirty="0"/>
+              <a:t>일부 국가는 이러한 전략을 염두에 두고 기존 천연가스 네트워크를 향후 수소 인프라로 전환할 수 있도록 설계하고 있으며</a:t>
+            </a:r>
+            <a:r>
+              <a:rPr lang="en-US" altLang="ko-KR" sz="1600" dirty="0"/>
+              <a:t>, </a:t>
+            </a:r>
+            <a:r>
+              <a:rPr lang="ko-KR" altLang="en-US" sz="1600" dirty="0"/>
+              <a:t>이는 기존 자산의 활용도를 높이고</a:t>
+            </a:r>
+            <a:r>
+              <a:rPr lang="en-US" altLang="ko-KR" sz="1600" dirty="0"/>
+              <a:t>, </a:t>
+            </a:r>
+            <a:r>
+              <a:rPr lang="ko-KR" altLang="en-US" sz="1600" dirty="0" err="1"/>
+              <a:t>투자리스클</a:t>
+            </a:r>
+            <a:r>
+              <a:rPr lang="ko-KR" altLang="en-US" sz="1600" dirty="0"/>
+              <a:t> 완화할 수 있는 수단이다</a:t>
+            </a:r>
+            <a:r>
+              <a:rPr lang="en-US" altLang="ko-KR" sz="1600" dirty="0"/>
+              <a:t>.</a:t>
+            </a:r>
+          </a:p>
+        </p:txBody>
+      </p:sp>
+    </p:spTree>
+    <p:extLst>
+      <p:ext uri="{BB962C8B-B14F-4D97-AF65-F5344CB8AC3E}">
+        <p14:creationId xmlns:p14="http://schemas.microsoft.com/office/powerpoint/2010/main" val="2578442976"/>
+      </p:ext>
+    </p:extLst>
+  </p:cSld>
+  <p:clrMapOvr>
+    <a:masterClrMapping/>
+  </p:clrMapOvr>
+</p:sld>
+</file>
+
+<file path=ppt/slides/slide57.xml><?xml version="1.0" encoding="utf-8"?>
+<p:sld xmlns:a="http://schemas.openxmlformats.org/drawingml/2006/main" xmlns:r="http://schemas.openxmlformats.org/officeDocument/2006/relationships" xmlns:p="http://schemas.openxmlformats.org/presentationml/2006/main">
+  <p:cSld>
+    <p:spTree>
+      <p:nvGrpSpPr>
+        <p:cNvPr id="1" name="">
+          <a:extLst>
+            <a:ext uri="{FF2B5EF4-FFF2-40B4-BE49-F238E27FC236}">
               <a16:creationId xmlns:a16="http://schemas.microsoft.com/office/drawing/2014/main" id="{2221EDDE-B308-8FA7-8116-DAD482D863C8}"/>
             </a:ext>
           </a:extLst>
@@ -42139,7 +43675,7 @@
           <a:p>
             <a:fld id="{109C872D-39A9-4065-8BF3-6A613116E2A1}" type="slidenum">
               <a:rPr lang="ko-KR" altLang="en-US" smtClean="0"/>
-              <a:t>53</a:t>
+              <a:t>57</a:t>
             </a:fld>
             <a:endParaRPr lang="ko-KR" altLang="en-US"/>
           </a:p>
